--- a/Fase 1/Evidencias Grupales/Presentación Proyecto.pptx
+++ b/Fase 1/Evidencias Grupales/Presentación Proyecto.pptx
@@ -1322,7 +1322,7 @@
           <a:lstStyle/>
           <a:p>
             <a:r>
-              <a:t>2:00 · Liân. Leer el cronograma por hitos, no por filas: H1 hoy; H2 en la S9 el recorrido completo funciona; H3 evaluación de avance en S10; H4 entrega v1.0.0 en S15; H5 defensa en S18. Señalar que el frontend corre en paralelo desde la S6 gracias al contrato congelado, y que el etiquetado (S5-S8) es la tarea que hacen los tres.</a:t>
+              <a:t>2:00 · Liân. Leer el cronograma por hitos, no por filas: H1 hoy; H2 en la S9 el recorrido completo funciona; H3 evaluación de avance en S10; H4 entrega v1.0.0 en S15; H5 defensa en S18. Señalar que el frontend corre en paralelo desde la S4 gracias al contrato congelado, y que el etiquetado (S5-S8) es la tarea que hacen los tres.</a:t>
             </a:r>
           </a:p>
         </p:txBody>
@@ -11955,7 +11955,7 @@
                 </a:solidFill>
                 <a:latin typeface="Calibri"/>
               </a:rPr>
-              <a:t>Capstone (PTY4614)  ·  Ingeniería en Informática  ·  Duoc UC  ·  septiembre de 2026</a:t>
+              <a:t>Portafolio de Título APT122 (Capstone)  ·  Ingeniería en Informática  ·  Duoc UC  ·  septiembre de 2026</a:t>
             </a:r>
           </a:p>
         </p:txBody>
@@ -19227,7 +19227,7 @@
                   </a:txBody>
                   <a:tcPr marL="27432" marR="27432" marT="9144" marB="9144" anchor="ctr">
                     <a:solidFill>
-                      <a:srgbClr val="FFFFFF"/>
+                      <a:srgbClr val="8C8C8C"/>
                     </a:solidFill>
                   </a:tcPr>
                 </a:tc>

--- a/Fase 1/Evidencias Grupales/Presentación Proyecto.pptx
+++ b/Fase 1/Evidencias Grupales/Presentación Proyecto.pptx
@@ -249,8 +249,11 @@
     </a:lvl9pPr>
   </p:defaultTextStyle>
   <p:extLst>
+    <p:ext uri="{EFAFB233-063F-42B5-8137-9DF3F51BA10A}">
+      <p15:sldGuideLst xmlns:p15="http://schemas.microsoft.com/office/powerpoint/2012/main"/>
+    </p:ext>
     <p:ext uri="GoogleSlidesCustomDataVersion2">
-      <go:slidesCustomData xmlns:go="http://customooxmlschemas.google.com/" xmlns:ahyp="http://schemas.microsoft.com/office/drawing/2018/hyperlinkcolor" xmlns:p15="http://schemas.microsoft.com/office/powerpoint/2012/main" xmlns:p14="http://schemas.microsoft.com/office/powerpoint/2010/main" xmlns:com="http://schemas.openxmlformats.org/drawingml/2006/compatibility" xmlns:pvml="urn:schemas-microsoft-com:office:powerpoint" xmlns:v="urn:schemas-microsoft-com:vml" xmlns:o="urn:schemas-microsoft-com:office:office" xmlns:dgm="http://schemas.openxmlformats.org/drawingml/2006/diagram" xmlns:c="http://schemas.openxmlformats.org/drawingml/2006/chart" xmlns:mv="urn:schemas-microsoft-com:mac:vml" xmlns:mc="http://schemas.openxmlformats.org/markup-compatibility/2006" xmlns="" r:id="rId19" roundtripDataSignature="AMtx7mjJcngd7sXPErL8GQoYOiWWZ/u7uQ=="/>
+      <go:slidesCustomData xmlns="" xmlns:mc="http://schemas.openxmlformats.org/markup-compatibility/2006" xmlns:mv="urn:schemas-microsoft-com:mac:vml" xmlns:c="http://schemas.openxmlformats.org/drawingml/2006/chart" xmlns:dgm="http://schemas.openxmlformats.org/drawingml/2006/diagram" xmlns:o="urn:schemas-microsoft-com:office:office" xmlns:v="urn:schemas-microsoft-com:vml" xmlns:pvml="urn:schemas-microsoft-com:office:powerpoint" xmlns:com="http://schemas.openxmlformats.org/drawingml/2006/compatibility" xmlns:p14="http://schemas.microsoft.com/office/powerpoint/2010/main" xmlns:p15="http://schemas.microsoft.com/office/powerpoint/2012/main" xmlns:ahyp="http://schemas.microsoft.com/office/drawing/2018/hyperlinkcolor" xmlns:go="http://customooxmlschemas.google.com/" r:id="rId19" roundtripDataSignature="AMtx7mjJcngd7sXPErL8GQoYOiWWZ/u7uQ=="/>
     </p:ext>
   </p:extLst>
 </p:presentation>
@@ -757,8 +760,8 @@
         </p:nvSpPr>
         <p:spPr>
           <a:xfrm>
-            <a:off x="1143225" y="685800"/>
-            <a:ext cx="4572225" cy="3429000"/>
+            <a:off x="381000" y="685800"/>
+            <a:ext cx="6096000" cy="3429000"/>
           </a:xfrm>
           <a:custGeom>
             <a:avLst/>
@@ -854,8 +857,8 @@
         </p:nvSpPr>
         <p:spPr>
           <a:xfrm>
-            <a:off x="1143225" y="685800"/>
-            <a:ext cx="4572225" cy="3429000"/>
+            <a:off x="381000" y="685800"/>
+            <a:ext cx="6096000" cy="3429000"/>
           </a:xfrm>
           <a:custGeom>
             <a:avLst/>
@@ -11889,7 +11892,7 @@
         <p:spPr>
           <a:xfrm>
             <a:off x="457200" y="4297680"/>
-            <a:ext cx="11247120" cy="2103120"/>
+            <a:ext cx="11247120" cy="930511"/>
           </a:xfrm>
           <a:prstGeom prst="rect">
             <a:avLst/>
@@ -11897,7 +11900,7 @@
           <a:noFill/>
         </p:spPr>
         <p:txBody>
-          <a:bodyPr wrap="square" anchor="t" lIns="73152" rIns="73152" tIns="36576" bIns="36576">
+          <a:bodyPr wrap="square" lIns="73152" tIns="36576" rIns="73152" bIns="36576" anchor="t">
             <a:spAutoFit/>
           </a:bodyPr>
           <a:lstStyle/>
@@ -11911,14 +11914,128 @@
               </a:spcAft>
             </a:pPr>
             <a:r>
-              <a:rPr sz="1800" b="0" i="0">
+              <a:rPr sz="1800" b="0" i="0" dirty="0" err="1">
                 <a:solidFill>
                   <a:srgbClr val="1C1C1C"/>
                 </a:solidFill>
                 <a:latin typeface="Calibri"/>
               </a:rPr>
-              <a:t>Detección automática del uso de elementos de protección personal sobre video de obra</a:t>
+              <a:t>Detección</a:t>
             </a:r>
+            <a:r>
+              <a:rPr sz="1800" b="0" i="0" dirty="0">
+                <a:solidFill>
+                  <a:srgbClr val="1C1C1C"/>
+                </a:solidFill>
+                <a:latin typeface="Calibri"/>
+              </a:rPr>
+              <a:t> </a:t>
+            </a:r>
+            <a:r>
+              <a:rPr sz="1800" b="0" i="0" dirty="0" err="1">
+                <a:solidFill>
+                  <a:srgbClr val="1C1C1C"/>
+                </a:solidFill>
+                <a:latin typeface="Calibri"/>
+              </a:rPr>
+              <a:t>automática</a:t>
+            </a:r>
+            <a:r>
+              <a:rPr sz="1800" b="0" i="0" dirty="0">
+                <a:solidFill>
+                  <a:srgbClr val="1C1C1C"/>
+                </a:solidFill>
+                <a:latin typeface="Calibri"/>
+              </a:rPr>
+              <a:t> del </a:t>
+            </a:r>
+            <a:r>
+              <a:rPr sz="1800" b="0" i="0" dirty="0" err="1">
+                <a:solidFill>
+                  <a:srgbClr val="1C1C1C"/>
+                </a:solidFill>
+                <a:latin typeface="Calibri"/>
+              </a:rPr>
+              <a:t>uso</a:t>
+            </a:r>
+            <a:r>
+              <a:rPr sz="1800" b="0" i="0" dirty="0">
+                <a:solidFill>
+                  <a:srgbClr val="1C1C1C"/>
+                </a:solidFill>
+                <a:latin typeface="Calibri"/>
+              </a:rPr>
+              <a:t> de </a:t>
+            </a:r>
+            <a:r>
+              <a:rPr sz="1800" b="0" i="0" dirty="0" err="1">
+                <a:solidFill>
+                  <a:srgbClr val="1C1C1C"/>
+                </a:solidFill>
+                <a:latin typeface="Calibri"/>
+              </a:rPr>
+              <a:t>elementos</a:t>
+            </a:r>
+            <a:r>
+              <a:rPr sz="1800" b="0" i="0" dirty="0">
+                <a:solidFill>
+                  <a:srgbClr val="1C1C1C"/>
+                </a:solidFill>
+                <a:latin typeface="Calibri"/>
+              </a:rPr>
+              <a:t> de </a:t>
+            </a:r>
+            <a:r>
+              <a:rPr sz="1800" b="0" i="0" dirty="0" err="1">
+                <a:solidFill>
+                  <a:srgbClr val="1C1C1C"/>
+                </a:solidFill>
+                <a:latin typeface="Calibri"/>
+              </a:rPr>
+              <a:t>protección</a:t>
+            </a:r>
+            <a:r>
+              <a:rPr sz="1800" b="0" i="0" dirty="0">
+                <a:solidFill>
+                  <a:srgbClr val="1C1C1C"/>
+                </a:solidFill>
+                <a:latin typeface="Calibri"/>
+              </a:rPr>
+              <a:t> personal </a:t>
+            </a:r>
+            <a:r>
+              <a:rPr sz="1800" b="0" i="0" dirty="0" err="1">
+                <a:solidFill>
+                  <a:srgbClr val="1C1C1C"/>
+                </a:solidFill>
+                <a:latin typeface="Calibri"/>
+              </a:rPr>
+              <a:t>sobre</a:t>
+            </a:r>
+            <a:r>
+              <a:rPr sz="1800" b="0" i="0" dirty="0">
+                <a:solidFill>
+                  <a:srgbClr val="1C1C1C"/>
+                </a:solidFill>
+                <a:latin typeface="Calibri"/>
+              </a:rPr>
+              <a:t> video de </a:t>
+            </a:r>
+            <a:r>
+              <a:rPr sz="1800" b="0" i="0" dirty="0" err="1">
+                <a:solidFill>
+                  <a:srgbClr val="1C1C1C"/>
+                </a:solidFill>
+                <a:latin typeface="Calibri"/>
+              </a:rPr>
+              <a:t>obra</a:t>
+            </a:r>
+            <a:endParaRPr sz="1800" b="0" i="0" dirty="0">
+              <a:solidFill>
+                <a:srgbClr val="1C1C1C"/>
+              </a:solidFill>
+              <a:latin typeface="Calibri"/>
+            </a:endParaRPr>
           </a:p>
           <a:p>
             <a:pPr algn="ctr">
@@ -11930,32 +12047,128 @@
               </a:spcAft>
             </a:pPr>
             <a:r>
-              <a:rPr sz="1400" b="1" i="0">
+              <a:rPr sz="1400" b="1" i="0" dirty="0">
                 <a:solidFill>
                   <a:srgbClr val="757070"/>
                 </a:solidFill>
                 <a:latin typeface="Calibri"/>
               </a:rPr>
-              <a:t>Edgar Tolentino  ·  Miguel Ortega  ·  Liân</a:t>
+              <a:t>Edgar Tolentino  ·  Miguel Ortega  ·  </a:t>
             </a:r>
-          </a:p>
-          <a:p>
-            <a:pPr algn="ctr">
-              <a:spcBef>
-                <a:spcPts val="0"/>
-              </a:spcBef>
-              <a:spcAft>
-                <a:spcPts val="400"/>
-              </a:spcAft>
-            </a:pPr>
             <a:r>
-              <a:rPr sz="1200" b="0" i="0">
+              <a:rPr lang="es-ES" sz="1400" b="1" i="0" u="sng" dirty="0">
                 <a:solidFill>
                   <a:srgbClr val="757070"/>
                 </a:solidFill>
                 <a:latin typeface="Calibri"/>
               </a:rPr>
-              <a:t>Portafolio de Título APT122 (Capstone)  ·  Ingeniería en Informática  ·  Duoc UC  ·  septiembre de 2026</a:t>
+              <a:t>Lian Grandón</a:t>
+            </a:r>
+            <a:endParaRPr sz="1400" b="1" i="0" u="sng" dirty="0">
+              <a:solidFill>
+                <a:srgbClr val="757070"/>
+              </a:solidFill>
+              <a:latin typeface="Calibri"/>
+            </a:endParaRPr>
+          </a:p>
+          <a:p>
+            <a:pPr algn="ctr">
+              <a:spcBef>
+                <a:spcPts val="0"/>
+              </a:spcBef>
+              <a:spcAft>
+                <a:spcPts val="400"/>
+              </a:spcAft>
+            </a:pPr>
+            <a:r>
+              <a:rPr sz="1200" b="0" i="0" dirty="0" err="1">
+                <a:solidFill>
+                  <a:srgbClr val="757070"/>
+                </a:solidFill>
+                <a:latin typeface="Calibri"/>
+              </a:rPr>
+              <a:t>Portafolio</a:t>
+            </a:r>
+            <a:r>
+              <a:rPr sz="1200" b="0" i="0" dirty="0">
+                <a:solidFill>
+                  <a:srgbClr val="757070"/>
+                </a:solidFill>
+                <a:latin typeface="Calibri"/>
+              </a:rPr>
+              <a:t> de </a:t>
+            </a:r>
+            <a:r>
+              <a:rPr sz="1200" b="0" i="0" dirty="0" err="1">
+                <a:solidFill>
+                  <a:srgbClr val="757070"/>
+                </a:solidFill>
+                <a:latin typeface="Calibri"/>
+              </a:rPr>
+              <a:t>Título</a:t>
+            </a:r>
+            <a:r>
+              <a:rPr sz="1200" b="0" i="0" dirty="0">
+                <a:solidFill>
+                  <a:srgbClr val="757070"/>
+                </a:solidFill>
+                <a:latin typeface="Calibri"/>
+              </a:rPr>
+              <a:t> APT122 (Capstone)  ·  Ingeniería </a:t>
+            </a:r>
+            <a:r>
+              <a:rPr sz="1200" b="0" i="0" dirty="0" err="1">
+                <a:solidFill>
+                  <a:srgbClr val="757070"/>
+                </a:solidFill>
+                <a:latin typeface="Calibri"/>
+              </a:rPr>
+              <a:t>en</a:t>
+            </a:r>
+            <a:r>
+              <a:rPr sz="1200" b="0" i="0" dirty="0">
+                <a:solidFill>
+                  <a:srgbClr val="757070"/>
+                </a:solidFill>
+                <a:latin typeface="Calibri"/>
+              </a:rPr>
+              <a:t> </a:t>
+            </a:r>
+            <a:r>
+              <a:rPr sz="1200" b="0" i="0" dirty="0" err="1">
+                <a:solidFill>
+                  <a:srgbClr val="757070"/>
+                </a:solidFill>
+                <a:latin typeface="Calibri"/>
+              </a:rPr>
+              <a:t>Informática</a:t>
+            </a:r>
+            <a:r>
+              <a:rPr sz="1200" b="0" i="0" dirty="0">
+                <a:solidFill>
+                  <a:srgbClr val="757070"/>
+                </a:solidFill>
+                <a:latin typeface="Calibri"/>
+              </a:rPr>
+              <a:t>  ·  Duoc UC  ·  </a:t>
+            </a:r>
+            <a:r>
+              <a:rPr sz="1200" b="0" i="0" dirty="0" err="1">
+                <a:solidFill>
+                  <a:srgbClr val="757070"/>
+                </a:solidFill>
+                <a:latin typeface="Calibri"/>
+              </a:rPr>
+              <a:t>septiembre</a:t>
+            </a:r>
+            <a:r>
+              <a:rPr sz="1200" b="0" i="0" dirty="0">
+                <a:solidFill>
+                  <a:srgbClr val="757070"/>
+                </a:solidFill>
+                <a:latin typeface="Calibri"/>
+              </a:rPr>
+              <a:t> de 2026</a:t>
             </a:r>
           </a:p>
         </p:txBody>
@@ -12651,9 +12864,9 @@
                   <a:cs typeface="Calibri"/>
                   <a:sym typeface="Calibri"/>
                 </a:rPr>
-                <a:t>Liân</a:t>
+                <a:t>Lian Grandón</a:t>
               </a:r>
-              <a:endParaRPr sz="2600" b="0" i="0" u="none" strike="noStrike" cap="none">
+              <a:endParaRPr sz="2600" b="0" i="0" u="none" strike="noStrike" cap="none" dirty="0">
                 <a:solidFill>
                   <a:schemeClr val="lt1"/>
                 </a:solidFill>
@@ -12682,7 +12895,7 @@
                 <a:buChar char="•"/>
               </a:pPr>
               <a:r>
-                <a:rPr lang="es-CL" sz="1800" b="0" i="0" u="none" strike="noStrike" cap="none">
+                <a:rPr lang="es-CL" sz="1800" b="0" i="0" u="none" strike="noStrike" cap="none" dirty="0">
                   <a:solidFill>
                     <a:schemeClr val="lt1"/>
                   </a:solidFill>
@@ -12691,9 +12904,21 @@
                   <a:cs typeface="Calibri"/>
                   <a:sym typeface="Calibri"/>
                 </a:rPr>
-                <a:t>Desarrollador frontend</a:t>
+                <a:t>Desarrollador </a:t>
               </a:r>
-              <a:endParaRPr sz="2000" b="0" i="0" u="none" strike="noStrike" cap="none">
+              <a:r>
+                <a:rPr lang="es-CL" sz="1800" b="0" i="0" u="none" strike="noStrike" cap="none" dirty="0" err="1">
+                  <a:solidFill>
+                    <a:schemeClr val="lt1"/>
+                  </a:solidFill>
+                  <a:latin typeface="Calibri"/>
+                  <a:ea typeface="Calibri"/>
+                  <a:cs typeface="Calibri"/>
+                  <a:sym typeface="Calibri"/>
+                </a:rPr>
+                <a:t>frontend</a:t>
+              </a:r>
+              <a:endParaRPr sz="2000" b="0" i="0" u="none" strike="noStrike" cap="none" dirty="0">
                 <a:solidFill>
                   <a:schemeClr val="lt1"/>
                 </a:solidFill>
@@ -12722,7 +12947,7 @@
                 <a:buChar char="•"/>
               </a:pPr>
               <a:r>
-                <a:rPr lang="es-CL" sz="1400" b="0" i="0" u="none" strike="noStrike" cap="none">
+                <a:rPr lang="es-CL" sz="1400" b="0" i="0" u="none" strike="noStrike" cap="none" dirty="0">
                   <a:solidFill>
                     <a:srgbClr val="EAF0F8"/>
                   </a:solidFill>
@@ -12733,7 +12958,7 @@
                 </a:rPr>
                 <a:t>Tablero de analítica, reportes y administración</a:t>
               </a:r>
-              <a:endParaRPr sz="2000" b="0" i="0" u="none" strike="noStrike" cap="none">
+              <a:endParaRPr sz="2000" b="0" i="0" u="none" strike="noStrike" cap="none" dirty="0">
                 <a:solidFill>
                   <a:schemeClr val="lt1"/>
                 </a:solidFill>
@@ -14092,7 +14317,7 @@
           <a:noFill/>
         </p:spPr>
         <p:txBody>
-          <a:bodyPr wrap="square" anchor="t" lIns="73152" rIns="73152" tIns="36576" bIns="36576">
+          <a:bodyPr wrap="square" lIns="73152" tIns="36576" rIns="73152" bIns="36576" anchor="t">
             <a:spAutoFit/>
           </a:bodyPr>
           <a:lstStyle/>
@@ -14514,7 +14739,7 @@
           </a:fontRef>
         </p:style>
         <p:txBody>
-          <a:bodyPr rtlCol="0" anchor="t" wrap="square" tIns="54864" bIns="54864"/>
+          <a:bodyPr wrap="square" tIns="54864" bIns="54864" rtlCol="0" anchor="t"/>
           <a:lstStyle/>
           <a:p>
             <a:pPr algn="l">
@@ -14692,7 +14917,7 @@
           </a:fontRef>
         </p:style>
         <p:txBody>
-          <a:bodyPr rtlCol="0" anchor="t" wrap="square" tIns="54864" bIns="54864"/>
+          <a:bodyPr wrap="square" tIns="54864" bIns="54864" rtlCol="0" anchor="t"/>
           <a:lstStyle/>
           <a:p>
             <a:pPr algn="l">
@@ -15035,7 +15260,7 @@
           <a:noFill/>
         </p:spPr>
         <p:txBody>
-          <a:bodyPr wrap="square" anchor="t" lIns="73152" rIns="73152" tIns="36576" bIns="36576">
+          <a:bodyPr wrap="square" lIns="73152" tIns="36576" rIns="73152" bIns="36576" anchor="t">
             <a:spAutoFit/>
           </a:bodyPr>
           <a:lstStyle/>
@@ -15101,7 +15326,7 @@
           </a:fontRef>
         </p:style>
         <p:txBody>
-          <a:bodyPr rtlCol="0" anchor="t" wrap="square" tIns="54864" bIns="54864"/>
+          <a:bodyPr wrap="square" tIns="54864" bIns="54864" rtlCol="0" anchor="t"/>
           <a:lstStyle/>
           <a:p>
             <a:pPr algn="l">
@@ -15222,7 +15447,7 @@
           </a:fontRef>
         </p:style>
         <p:txBody>
-          <a:bodyPr rtlCol="0" anchor="t" wrap="square" tIns="54864" bIns="54864"/>
+          <a:bodyPr wrap="square" tIns="54864" bIns="54864" rtlCol="0" anchor="t"/>
           <a:lstStyle/>
           <a:p>
             <a:pPr algn="l">
@@ -15324,7 +15549,7 @@
           </a:fontRef>
         </p:style>
         <p:txBody>
-          <a:bodyPr rtlCol="0" anchor="t" wrap="square" tIns="54864" bIns="54864"/>
+          <a:bodyPr wrap="square" tIns="54864" bIns="54864" rtlCol="0" anchor="t"/>
           <a:lstStyle/>
           <a:p>
             <a:pPr algn="l">
@@ -15445,7 +15670,7 @@
           </a:fontRef>
         </p:style>
         <p:txBody>
-          <a:bodyPr rtlCol="0" anchor="t" wrap="square" tIns="54864" bIns="54864"/>
+          <a:bodyPr wrap="square" tIns="54864" bIns="54864" rtlCol="0" anchor="t"/>
           <a:lstStyle/>
           <a:p>
             <a:pPr algn="l">
@@ -15566,7 +15791,7 @@
           </a:fontRef>
         </p:style>
         <p:txBody>
-          <a:bodyPr rtlCol="0" anchor="t" wrap="square" tIns="54864" bIns="54864"/>
+          <a:bodyPr wrap="square" tIns="54864" bIns="54864" rtlCol="0" anchor="t"/>
           <a:lstStyle/>
           <a:p>
             <a:pPr algn="l">
@@ -15687,7 +15912,7 @@
           </a:fontRef>
         </p:style>
         <p:txBody>
-          <a:bodyPr rtlCol="0" anchor="t" wrap="square" tIns="54864" bIns="54864"/>
+          <a:bodyPr wrap="square" tIns="54864" bIns="54864" rtlCol="0" anchor="t"/>
           <a:lstStyle/>
           <a:p>
             <a:pPr algn="l">
@@ -15999,25 +16224,139 @@
                 <a:tableStyleId>{5C22544A-7EE6-4342-B048-85BDC9FD1C3A}</a:tableStyleId>
               </a:tblPr>
               <a:tblGrid>
-                <a:gridCol w="2834640"/>
-                <a:gridCol w="477520"/>
-                <a:gridCol w="477520"/>
-                <a:gridCol w="477520"/>
-                <a:gridCol w="477520"/>
-                <a:gridCol w="477520"/>
-                <a:gridCol w="477520"/>
-                <a:gridCol w="477520"/>
-                <a:gridCol w="477520"/>
-                <a:gridCol w="477520"/>
-                <a:gridCol w="477520"/>
-                <a:gridCol w="477520"/>
-                <a:gridCol w="477520"/>
-                <a:gridCol w="477520"/>
-                <a:gridCol w="477520"/>
-                <a:gridCol w="477520"/>
-                <a:gridCol w="477520"/>
-                <a:gridCol w="477520"/>
-                <a:gridCol w="477520"/>
+                <a:gridCol w="2834640">
+                  <a:extLst>
+                    <a:ext uri="{9D8B030D-6E8A-4147-A177-3AD203B41FA5}">
+                      <a16:colId xmlns:a16="http://schemas.microsoft.com/office/drawing/2014/main" val="20000"/>
+                    </a:ext>
+                  </a:extLst>
+                </a:gridCol>
+                <a:gridCol w="477520">
+                  <a:extLst>
+                    <a:ext uri="{9D8B030D-6E8A-4147-A177-3AD203B41FA5}">
+                      <a16:colId xmlns:a16="http://schemas.microsoft.com/office/drawing/2014/main" val="20001"/>
+                    </a:ext>
+                  </a:extLst>
+                </a:gridCol>
+                <a:gridCol w="477520">
+                  <a:extLst>
+                    <a:ext uri="{9D8B030D-6E8A-4147-A177-3AD203B41FA5}">
+                      <a16:colId xmlns:a16="http://schemas.microsoft.com/office/drawing/2014/main" val="20002"/>
+                    </a:ext>
+                  </a:extLst>
+                </a:gridCol>
+                <a:gridCol w="477520">
+                  <a:extLst>
+                    <a:ext uri="{9D8B030D-6E8A-4147-A177-3AD203B41FA5}">
+                      <a16:colId xmlns:a16="http://schemas.microsoft.com/office/drawing/2014/main" val="20003"/>
+                    </a:ext>
+                  </a:extLst>
+                </a:gridCol>
+                <a:gridCol w="477520">
+                  <a:extLst>
+                    <a:ext uri="{9D8B030D-6E8A-4147-A177-3AD203B41FA5}">
+                      <a16:colId xmlns:a16="http://schemas.microsoft.com/office/drawing/2014/main" val="20004"/>
+                    </a:ext>
+                  </a:extLst>
+                </a:gridCol>
+                <a:gridCol w="477520">
+                  <a:extLst>
+                    <a:ext uri="{9D8B030D-6E8A-4147-A177-3AD203B41FA5}">
+                      <a16:colId xmlns:a16="http://schemas.microsoft.com/office/drawing/2014/main" val="20005"/>
+                    </a:ext>
+                  </a:extLst>
+                </a:gridCol>
+                <a:gridCol w="477520">
+                  <a:extLst>
+                    <a:ext uri="{9D8B030D-6E8A-4147-A177-3AD203B41FA5}">
+                      <a16:colId xmlns:a16="http://schemas.microsoft.com/office/drawing/2014/main" val="20006"/>
+                    </a:ext>
+                  </a:extLst>
+                </a:gridCol>
+                <a:gridCol w="477520">
+                  <a:extLst>
+                    <a:ext uri="{9D8B030D-6E8A-4147-A177-3AD203B41FA5}">
+                      <a16:colId xmlns:a16="http://schemas.microsoft.com/office/drawing/2014/main" val="20007"/>
+                    </a:ext>
+                  </a:extLst>
+                </a:gridCol>
+                <a:gridCol w="477520">
+                  <a:extLst>
+                    <a:ext uri="{9D8B030D-6E8A-4147-A177-3AD203B41FA5}">
+                      <a16:colId xmlns:a16="http://schemas.microsoft.com/office/drawing/2014/main" val="20008"/>
+                    </a:ext>
+                  </a:extLst>
+                </a:gridCol>
+                <a:gridCol w="477520">
+                  <a:extLst>
+                    <a:ext uri="{9D8B030D-6E8A-4147-A177-3AD203B41FA5}">
+                      <a16:colId xmlns:a16="http://schemas.microsoft.com/office/drawing/2014/main" val="20009"/>
+                    </a:ext>
+                  </a:extLst>
+                </a:gridCol>
+                <a:gridCol w="477520">
+                  <a:extLst>
+                    <a:ext uri="{9D8B030D-6E8A-4147-A177-3AD203B41FA5}">
+                      <a16:colId xmlns:a16="http://schemas.microsoft.com/office/drawing/2014/main" val="20010"/>
+                    </a:ext>
+                  </a:extLst>
+                </a:gridCol>
+                <a:gridCol w="477520">
+                  <a:extLst>
+                    <a:ext uri="{9D8B030D-6E8A-4147-A177-3AD203B41FA5}">
+                      <a16:colId xmlns:a16="http://schemas.microsoft.com/office/drawing/2014/main" val="20011"/>
+                    </a:ext>
+                  </a:extLst>
+                </a:gridCol>
+                <a:gridCol w="477520">
+                  <a:extLst>
+                    <a:ext uri="{9D8B030D-6E8A-4147-A177-3AD203B41FA5}">
+                      <a16:colId xmlns:a16="http://schemas.microsoft.com/office/drawing/2014/main" val="20012"/>
+                    </a:ext>
+                  </a:extLst>
+                </a:gridCol>
+                <a:gridCol w="477520">
+                  <a:extLst>
+                    <a:ext uri="{9D8B030D-6E8A-4147-A177-3AD203B41FA5}">
+                      <a16:colId xmlns:a16="http://schemas.microsoft.com/office/drawing/2014/main" val="20013"/>
+                    </a:ext>
+                  </a:extLst>
+                </a:gridCol>
+                <a:gridCol w="477520">
+                  <a:extLst>
+                    <a:ext uri="{9D8B030D-6E8A-4147-A177-3AD203B41FA5}">
+                      <a16:colId xmlns:a16="http://schemas.microsoft.com/office/drawing/2014/main" val="20014"/>
+                    </a:ext>
+                  </a:extLst>
+                </a:gridCol>
+                <a:gridCol w="477520">
+                  <a:extLst>
+                    <a:ext uri="{9D8B030D-6E8A-4147-A177-3AD203B41FA5}">
+                      <a16:colId xmlns:a16="http://schemas.microsoft.com/office/drawing/2014/main" val="20015"/>
+                    </a:ext>
+                  </a:extLst>
+                </a:gridCol>
+                <a:gridCol w="477520">
+                  <a:extLst>
+                    <a:ext uri="{9D8B030D-6E8A-4147-A177-3AD203B41FA5}">
+                      <a16:colId xmlns:a16="http://schemas.microsoft.com/office/drawing/2014/main" val="20016"/>
+                    </a:ext>
+                  </a:extLst>
+                </a:gridCol>
+                <a:gridCol w="477520">
+                  <a:extLst>
+                    <a:ext uri="{9D8B030D-6E8A-4147-A177-3AD203B41FA5}">
+                      <a16:colId xmlns:a16="http://schemas.microsoft.com/office/drawing/2014/main" val="20017"/>
+                    </a:ext>
+                  </a:extLst>
+                </a:gridCol>
+                <a:gridCol w="477520">
+                  <a:extLst>
+                    <a:ext uri="{9D8B030D-6E8A-4147-A177-3AD203B41FA5}">
+                      <a16:colId xmlns:a16="http://schemas.microsoft.com/office/drawing/2014/main" val="20018"/>
+                    </a:ext>
+                  </a:extLst>
+                </a:gridCol>
               </a:tblGrid>
               <a:tr h="274320">
                 <a:tc>
@@ -16457,6 +16796,11 @@
                     </a:solidFill>
                   </a:tcPr>
                 </a:tc>
+                <a:extLst>
+                  <a:ext uri="{0D108BD9-81ED-4DB2-BD59-A6C34878D82A}">
+                    <a16:rowId xmlns:a16="http://schemas.microsoft.com/office/drawing/2014/main" val="10000"/>
+                  </a:ext>
+                </a:extLst>
               </a:tr>
               <a:tr h="274320">
                 <a:tc>
@@ -16488,15 +16832,7 @@
                     <a:lstStyle/>
                     <a:p>
                       <a:pPr algn="ctr"/>
-                      <a:r>
-                        <a:rPr sz="900" b="0">
-                          <a:solidFill>
-                            <a:srgbClr val="1C1C1C"/>
-                          </a:solidFill>
-                          <a:latin typeface="Calibri"/>
-                        </a:rPr>
-                        <a:t/>
-                      </a:r>
+                      <a:endParaRPr/>
                     </a:p>
                   </a:txBody>
                   <a:tcPr marL="27432" marR="27432" marT="9144" marB="9144" anchor="ctr">
@@ -16511,15 +16847,7 @@
                     <a:lstStyle/>
                     <a:p>
                       <a:pPr algn="ctr"/>
-                      <a:r>
-                        <a:rPr sz="900" b="0">
-                          <a:solidFill>
-                            <a:srgbClr val="1C1C1C"/>
-                          </a:solidFill>
-                          <a:latin typeface="Calibri"/>
-                        </a:rPr>
-                        <a:t/>
-                      </a:r>
+                      <a:endParaRPr/>
                     </a:p>
                   </a:txBody>
                   <a:tcPr marL="27432" marR="27432" marT="9144" marB="9144" anchor="ctr">
@@ -16534,15 +16862,7 @@
                     <a:lstStyle/>
                     <a:p>
                       <a:pPr algn="ctr"/>
-                      <a:r>
-                        <a:rPr sz="900" b="0">
-                          <a:solidFill>
-                            <a:srgbClr val="1C1C1C"/>
-                          </a:solidFill>
-                          <a:latin typeface="Calibri"/>
-                        </a:rPr>
-                        <a:t/>
-                      </a:r>
+                      <a:endParaRPr/>
                     </a:p>
                   </a:txBody>
                   <a:tcPr marL="27432" marR="27432" marT="9144" marB="9144" anchor="ctr">
@@ -16557,15 +16877,7 @@
                     <a:lstStyle/>
                     <a:p>
                       <a:pPr algn="ctr"/>
-                      <a:r>
-                        <a:rPr sz="900" b="0">
-                          <a:solidFill>
-                            <a:srgbClr val="1C1C1C"/>
-                          </a:solidFill>
-                          <a:latin typeface="Calibri"/>
-                        </a:rPr>
-                        <a:t/>
-                      </a:r>
+                      <a:endParaRPr/>
                     </a:p>
                   </a:txBody>
                   <a:tcPr marL="27432" marR="27432" marT="9144" marB="9144" anchor="ctr">
@@ -16580,15 +16892,7 @@
                     <a:lstStyle/>
                     <a:p>
                       <a:pPr algn="ctr"/>
-                      <a:r>
-                        <a:rPr sz="900" b="0">
-                          <a:solidFill>
-                            <a:srgbClr val="1C1C1C"/>
-                          </a:solidFill>
-                          <a:latin typeface="Calibri"/>
-                        </a:rPr>
-                        <a:t/>
-                      </a:r>
+                      <a:endParaRPr/>
                     </a:p>
                   </a:txBody>
                   <a:tcPr marL="27432" marR="27432" marT="9144" marB="9144" anchor="ctr">
@@ -16603,15 +16907,7 @@
                     <a:lstStyle/>
                     <a:p>
                       <a:pPr algn="ctr"/>
-                      <a:r>
-                        <a:rPr sz="900" b="0">
-                          <a:solidFill>
-                            <a:srgbClr val="1C1C1C"/>
-                          </a:solidFill>
-                          <a:latin typeface="Calibri"/>
-                        </a:rPr>
-                        <a:t/>
-                      </a:r>
+                      <a:endParaRPr/>
                     </a:p>
                   </a:txBody>
                   <a:tcPr marL="27432" marR="27432" marT="9144" marB="9144" anchor="ctr">
@@ -16626,15 +16922,7 @@
                     <a:lstStyle/>
                     <a:p>
                       <a:pPr algn="ctr"/>
-                      <a:r>
-                        <a:rPr sz="900" b="0">
-                          <a:solidFill>
-                            <a:srgbClr val="1C1C1C"/>
-                          </a:solidFill>
-                          <a:latin typeface="Calibri"/>
-                        </a:rPr>
-                        <a:t/>
-                      </a:r>
+                      <a:endParaRPr/>
                     </a:p>
                   </a:txBody>
                   <a:tcPr marL="27432" marR="27432" marT="9144" marB="9144" anchor="ctr">
@@ -16649,15 +16937,7 @@
                     <a:lstStyle/>
                     <a:p>
                       <a:pPr algn="ctr"/>
-                      <a:r>
-                        <a:rPr sz="900" b="0">
-                          <a:solidFill>
-                            <a:srgbClr val="1C1C1C"/>
-                          </a:solidFill>
-                          <a:latin typeface="Calibri"/>
-                        </a:rPr>
-                        <a:t/>
-                      </a:r>
+                      <a:endParaRPr/>
                     </a:p>
                   </a:txBody>
                   <a:tcPr marL="27432" marR="27432" marT="9144" marB="9144" anchor="ctr">
@@ -16672,15 +16952,7 @@
                     <a:lstStyle/>
                     <a:p>
                       <a:pPr algn="ctr"/>
-                      <a:r>
-                        <a:rPr sz="900" b="0">
-                          <a:solidFill>
-                            <a:srgbClr val="1C1C1C"/>
-                          </a:solidFill>
-                          <a:latin typeface="Calibri"/>
-                        </a:rPr>
-                        <a:t/>
-                      </a:r>
+                      <a:endParaRPr/>
                     </a:p>
                   </a:txBody>
                   <a:tcPr marL="27432" marR="27432" marT="9144" marB="9144" anchor="ctr">
@@ -16695,15 +16967,7 @@
                     <a:lstStyle/>
                     <a:p>
                       <a:pPr algn="ctr"/>
-                      <a:r>
-                        <a:rPr sz="900" b="0">
-                          <a:solidFill>
-                            <a:srgbClr val="1C1C1C"/>
-                          </a:solidFill>
-                          <a:latin typeface="Calibri"/>
-                        </a:rPr>
-                        <a:t/>
-                      </a:r>
+                      <a:endParaRPr/>
                     </a:p>
                   </a:txBody>
                   <a:tcPr marL="27432" marR="27432" marT="9144" marB="9144" anchor="ctr">
@@ -16718,15 +16982,7 @@
                     <a:lstStyle/>
                     <a:p>
                       <a:pPr algn="ctr"/>
-                      <a:r>
-                        <a:rPr sz="900" b="0">
-                          <a:solidFill>
-                            <a:srgbClr val="1C1C1C"/>
-                          </a:solidFill>
-                          <a:latin typeface="Calibri"/>
-                        </a:rPr>
-                        <a:t/>
-                      </a:r>
+                      <a:endParaRPr/>
                     </a:p>
                   </a:txBody>
                   <a:tcPr marL="27432" marR="27432" marT="9144" marB="9144" anchor="ctr">
@@ -16741,15 +16997,7 @@
                     <a:lstStyle/>
                     <a:p>
                       <a:pPr algn="ctr"/>
-                      <a:r>
-                        <a:rPr sz="900" b="0">
-                          <a:solidFill>
-                            <a:srgbClr val="1C1C1C"/>
-                          </a:solidFill>
-                          <a:latin typeface="Calibri"/>
-                        </a:rPr>
-                        <a:t/>
-                      </a:r>
+                      <a:endParaRPr/>
                     </a:p>
                   </a:txBody>
                   <a:tcPr marL="27432" marR="27432" marT="9144" marB="9144" anchor="ctr">
@@ -16764,15 +17012,7 @@
                     <a:lstStyle/>
                     <a:p>
                       <a:pPr algn="ctr"/>
-                      <a:r>
-                        <a:rPr sz="900" b="0">
-                          <a:solidFill>
-                            <a:srgbClr val="1C1C1C"/>
-                          </a:solidFill>
-                          <a:latin typeface="Calibri"/>
-                        </a:rPr>
-                        <a:t/>
-                      </a:r>
+                      <a:endParaRPr/>
                     </a:p>
                   </a:txBody>
                   <a:tcPr marL="27432" marR="27432" marT="9144" marB="9144" anchor="ctr">
@@ -16787,15 +17027,7 @@
                     <a:lstStyle/>
                     <a:p>
                       <a:pPr algn="ctr"/>
-                      <a:r>
-                        <a:rPr sz="900" b="0">
-                          <a:solidFill>
-                            <a:srgbClr val="1C1C1C"/>
-                          </a:solidFill>
-                          <a:latin typeface="Calibri"/>
-                        </a:rPr>
-                        <a:t/>
-                      </a:r>
+                      <a:endParaRPr/>
                     </a:p>
                   </a:txBody>
                   <a:tcPr marL="27432" marR="27432" marT="9144" marB="9144" anchor="ctr">
@@ -16810,15 +17042,7 @@
                     <a:lstStyle/>
                     <a:p>
                       <a:pPr algn="ctr"/>
-                      <a:r>
-                        <a:rPr sz="900" b="0">
-                          <a:solidFill>
-                            <a:srgbClr val="1C1C1C"/>
-                          </a:solidFill>
-                          <a:latin typeface="Calibri"/>
-                        </a:rPr>
-                        <a:t/>
-                      </a:r>
+                      <a:endParaRPr/>
                     </a:p>
                   </a:txBody>
                   <a:tcPr marL="27432" marR="27432" marT="9144" marB="9144" anchor="ctr">
@@ -16833,15 +17057,7 @@
                     <a:lstStyle/>
                     <a:p>
                       <a:pPr algn="ctr"/>
-                      <a:r>
-                        <a:rPr sz="900" b="0">
-                          <a:solidFill>
-                            <a:srgbClr val="1C1C1C"/>
-                          </a:solidFill>
-                          <a:latin typeface="Calibri"/>
-                        </a:rPr>
-                        <a:t/>
-                      </a:r>
+                      <a:endParaRPr/>
                     </a:p>
                   </a:txBody>
                   <a:tcPr marL="27432" marR="27432" marT="9144" marB="9144" anchor="ctr">
@@ -16856,15 +17072,7 @@
                     <a:lstStyle/>
                     <a:p>
                       <a:pPr algn="ctr"/>
-                      <a:r>
-                        <a:rPr sz="900" b="0">
-                          <a:solidFill>
-                            <a:srgbClr val="1C1C1C"/>
-                          </a:solidFill>
-                          <a:latin typeface="Calibri"/>
-                        </a:rPr>
-                        <a:t/>
-                      </a:r>
+                      <a:endParaRPr/>
                     </a:p>
                   </a:txBody>
                   <a:tcPr marL="27432" marR="27432" marT="9144" marB="9144" anchor="ctr">
@@ -16879,15 +17087,7 @@
                     <a:lstStyle/>
                     <a:p>
                       <a:pPr algn="ctr"/>
-                      <a:r>
-                        <a:rPr sz="900" b="0">
-                          <a:solidFill>
-                            <a:srgbClr val="1C1C1C"/>
-                          </a:solidFill>
-                          <a:latin typeface="Calibri"/>
-                        </a:rPr>
-                        <a:t/>
-                      </a:r>
+                      <a:endParaRPr/>
                     </a:p>
                   </a:txBody>
                   <a:tcPr marL="27432" marR="27432" marT="9144" marB="9144" anchor="ctr">
@@ -16896,6 +17096,11 @@
                     </a:solidFill>
                   </a:tcPr>
                 </a:tc>
+                <a:extLst>
+                  <a:ext uri="{0D108BD9-81ED-4DB2-BD59-A6C34878D82A}">
+                    <a16:rowId xmlns:a16="http://schemas.microsoft.com/office/drawing/2014/main" val="10001"/>
+                  </a:ext>
+                </a:extLst>
               </a:tr>
               <a:tr h="274320">
                 <a:tc>
@@ -16927,15 +17132,7 @@
                     <a:lstStyle/>
                     <a:p>
                       <a:pPr algn="ctr"/>
-                      <a:r>
-                        <a:rPr sz="900" b="0">
-                          <a:solidFill>
-                            <a:srgbClr val="1C1C1C"/>
-                          </a:solidFill>
-                          <a:latin typeface="Calibri"/>
-                        </a:rPr>
-                        <a:t/>
-                      </a:r>
+                      <a:endParaRPr/>
                     </a:p>
                   </a:txBody>
                   <a:tcPr marL="27432" marR="27432" marT="9144" marB="9144" anchor="ctr">
@@ -16950,15 +17147,7 @@
                     <a:lstStyle/>
                     <a:p>
                       <a:pPr algn="ctr"/>
-                      <a:r>
-                        <a:rPr sz="900" b="0">
-                          <a:solidFill>
-                            <a:srgbClr val="1C1C1C"/>
-                          </a:solidFill>
-                          <a:latin typeface="Calibri"/>
-                        </a:rPr>
-                        <a:t/>
-                      </a:r>
+                      <a:endParaRPr/>
                     </a:p>
                   </a:txBody>
                   <a:tcPr marL="27432" marR="27432" marT="9144" marB="9144" anchor="ctr">
@@ -16973,15 +17162,7 @@
                     <a:lstStyle/>
                     <a:p>
                       <a:pPr algn="ctr"/>
-                      <a:r>
-                        <a:rPr sz="900" b="0">
-                          <a:solidFill>
-                            <a:srgbClr val="1C1C1C"/>
-                          </a:solidFill>
-                          <a:latin typeface="Calibri"/>
-                        </a:rPr>
-                        <a:t/>
-                      </a:r>
+                      <a:endParaRPr/>
                     </a:p>
                   </a:txBody>
                   <a:tcPr marL="27432" marR="27432" marT="9144" marB="9144" anchor="ctr">
@@ -16996,15 +17177,7 @@
                     <a:lstStyle/>
                     <a:p>
                       <a:pPr algn="ctr"/>
-                      <a:r>
-                        <a:rPr sz="900" b="0">
-                          <a:solidFill>
-                            <a:srgbClr val="1C1C1C"/>
-                          </a:solidFill>
-                          <a:latin typeface="Calibri"/>
-                        </a:rPr>
-                        <a:t/>
-                      </a:r>
+                      <a:endParaRPr/>
                     </a:p>
                   </a:txBody>
                   <a:tcPr marL="27432" marR="27432" marT="9144" marB="9144" anchor="ctr">
@@ -17019,15 +17192,7 @@
                     <a:lstStyle/>
                     <a:p>
                       <a:pPr algn="ctr"/>
-                      <a:r>
-                        <a:rPr sz="900" b="0">
-                          <a:solidFill>
-                            <a:srgbClr val="1C1C1C"/>
-                          </a:solidFill>
-                          <a:latin typeface="Calibri"/>
-                        </a:rPr>
-                        <a:t/>
-                      </a:r>
+                      <a:endParaRPr/>
                     </a:p>
                   </a:txBody>
                   <a:tcPr marL="27432" marR="27432" marT="9144" marB="9144" anchor="ctr">
@@ -17042,15 +17207,7 @@
                     <a:lstStyle/>
                     <a:p>
                       <a:pPr algn="ctr"/>
-                      <a:r>
-                        <a:rPr sz="900" b="0">
-                          <a:solidFill>
-                            <a:srgbClr val="1C1C1C"/>
-                          </a:solidFill>
-                          <a:latin typeface="Calibri"/>
-                        </a:rPr>
-                        <a:t/>
-                      </a:r>
+                      <a:endParaRPr/>
                     </a:p>
                   </a:txBody>
                   <a:tcPr marL="27432" marR="27432" marT="9144" marB="9144" anchor="ctr">
@@ -17065,15 +17222,7 @@
                     <a:lstStyle/>
                     <a:p>
                       <a:pPr algn="ctr"/>
-                      <a:r>
-                        <a:rPr sz="900" b="0">
-                          <a:solidFill>
-                            <a:srgbClr val="1C1C1C"/>
-                          </a:solidFill>
-                          <a:latin typeface="Calibri"/>
-                        </a:rPr>
-                        <a:t/>
-                      </a:r>
+                      <a:endParaRPr/>
                     </a:p>
                   </a:txBody>
                   <a:tcPr marL="27432" marR="27432" marT="9144" marB="9144" anchor="ctr">
@@ -17088,15 +17237,7 @@
                     <a:lstStyle/>
                     <a:p>
                       <a:pPr algn="ctr"/>
-                      <a:r>
-                        <a:rPr sz="900" b="0">
-                          <a:solidFill>
-                            <a:srgbClr val="1C1C1C"/>
-                          </a:solidFill>
-                          <a:latin typeface="Calibri"/>
-                        </a:rPr>
-                        <a:t/>
-                      </a:r>
+                      <a:endParaRPr/>
                     </a:p>
                   </a:txBody>
                   <a:tcPr marL="27432" marR="27432" marT="9144" marB="9144" anchor="ctr">
@@ -17111,15 +17252,7 @@
                     <a:lstStyle/>
                     <a:p>
                       <a:pPr algn="ctr"/>
-                      <a:r>
-                        <a:rPr sz="900" b="0">
-                          <a:solidFill>
-                            <a:srgbClr val="1C1C1C"/>
-                          </a:solidFill>
-                          <a:latin typeface="Calibri"/>
-                        </a:rPr>
-                        <a:t/>
-                      </a:r>
+                      <a:endParaRPr/>
                     </a:p>
                   </a:txBody>
                   <a:tcPr marL="27432" marR="27432" marT="9144" marB="9144" anchor="ctr">
@@ -17134,15 +17267,7 @@
                     <a:lstStyle/>
                     <a:p>
                       <a:pPr algn="ctr"/>
-                      <a:r>
-                        <a:rPr sz="900" b="0">
-                          <a:solidFill>
-                            <a:srgbClr val="1C1C1C"/>
-                          </a:solidFill>
-                          <a:latin typeface="Calibri"/>
-                        </a:rPr>
-                        <a:t/>
-                      </a:r>
+                      <a:endParaRPr/>
                     </a:p>
                   </a:txBody>
                   <a:tcPr marL="27432" marR="27432" marT="9144" marB="9144" anchor="ctr">
@@ -17157,15 +17282,7 @@
                     <a:lstStyle/>
                     <a:p>
                       <a:pPr algn="ctr"/>
-                      <a:r>
-                        <a:rPr sz="900" b="0">
-                          <a:solidFill>
-                            <a:srgbClr val="1C1C1C"/>
-                          </a:solidFill>
-                          <a:latin typeface="Calibri"/>
-                        </a:rPr>
-                        <a:t/>
-                      </a:r>
+                      <a:endParaRPr/>
                     </a:p>
                   </a:txBody>
                   <a:tcPr marL="27432" marR="27432" marT="9144" marB="9144" anchor="ctr">
@@ -17180,15 +17297,7 @@
                     <a:lstStyle/>
                     <a:p>
                       <a:pPr algn="ctr"/>
-                      <a:r>
-                        <a:rPr sz="900" b="0">
-                          <a:solidFill>
-                            <a:srgbClr val="1C1C1C"/>
-                          </a:solidFill>
-                          <a:latin typeface="Calibri"/>
-                        </a:rPr>
-                        <a:t/>
-                      </a:r>
+                      <a:endParaRPr/>
                     </a:p>
                   </a:txBody>
                   <a:tcPr marL="27432" marR="27432" marT="9144" marB="9144" anchor="ctr">
@@ -17203,15 +17312,7 @@
                     <a:lstStyle/>
                     <a:p>
                       <a:pPr algn="ctr"/>
-                      <a:r>
-                        <a:rPr sz="900" b="0">
-                          <a:solidFill>
-                            <a:srgbClr val="1C1C1C"/>
-                          </a:solidFill>
-                          <a:latin typeface="Calibri"/>
-                        </a:rPr>
-                        <a:t/>
-                      </a:r>
+                      <a:endParaRPr/>
                     </a:p>
                   </a:txBody>
                   <a:tcPr marL="27432" marR="27432" marT="9144" marB="9144" anchor="ctr">
@@ -17226,15 +17327,7 @@
                     <a:lstStyle/>
                     <a:p>
                       <a:pPr algn="ctr"/>
-                      <a:r>
-                        <a:rPr sz="900" b="0">
-                          <a:solidFill>
-                            <a:srgbClr val="1C1C1C"/>
-                          </a:solidFill>
-                          <a:latin typeface="Calibri"/>
-                        </a:rPr>
-                        <a:t/>
-                      </a:r>
+                      <a:endParaRPr/>
                     </a:p>
                   </a:txBody>
                   <a:tcPr marL="27432" marR="27432" marT="9144" marB="9144" anchor="ctr">
@@ -17249,15 +17342,7 @@
                     <a:lstStyle/>
                     <a:p>
                       <a:pPr algn="ctr"/>
-                      <a:r>
-                        <a:rPr sz="900" b="0">
-                          <a:solidFill>
-                            <a:srgbClr val="1C1C1C"/>
-                          </a:solidFill>
-                          <a:latin typeface="Calibri"/>
-                        </a:rPr>
-                        <a:t/>
-                      </a:r>
+                      <a:endParaRPr/>
                     </a:p>
                   </a:txBody>
                   <a:tcPr marL="27432" marR="27432" marT="9144" marB="9144" anchor="ctr">
@@ -17272,15 +17357,7 @@
                     <a:lstStyle/>
                     <a:p>
                       <a:pPr algn="ctr"/>
-                      <a:r>
-                        <a:rPr sz="900" b="0">
-                          <a:solidFill>
-                            <a:srgbClr val="1C1C1C"/>
-                          </a:solidFill>
-                          <a:latin typeface="Calibri"/>
-                        </a:rPr>
-                        <a:t/>
-                      </a:r>
+                      <a:endParaRPr/>
                     </a:p>
                   </a:txBody>
                   <a:tcPr marL="27432" marR="27432" marT="9144" marB="9144" anchor="ctr">
@@ -17295,15 +17372,7 @@
                     <a:lstStyle/>
                     <a:p>
                       <a:pPr algn="ctr"/>
-                      <a:r>
-                        <a:rPr sz="900" b="0">
-                          <a:solidFill>
-                            <a:srgbClr val="1C1C1C"/>
-                          </a:solidFill>
-                          <a:latin typeface="Calibri"/>
-                        </a:rPr>
-                        <a:t/>
-                      </a:r>
+                      <a:endParaRPr/>
                     </a:p>
                   </a:txBody>
                   <a:tcPr marL="27432" marR="27432" marT="9144" marB="9144" anchor="ctr">
@@ -17318,15 +17387,7 @@
                     <a:lstStyle/>
                     <a:p>
                       <a:pPr algn="ctr"/>
-                      <a:r>
-                        <a:rPr sz="900" b="0">
-                          <a:solidFill>
-                            <a:srgbClr val="1C1C1C"/>
-                          </a:solidFill>
-                          <a:latin typeface="Calibri"/>
-                        </a:rPr>
-                        <a:t/>
-                      </a:r>
+                      <a:endParaRPr/>
                     </a:p>
                   </a:txBody>
                   <a:tcPr marL="27432" marR="27432" marT="9144" marB="9144" anchor="ctr">
@@ -17335,6 +17396,11 @@
                     </a:solidFill>
                   </a:tcPr>
                 </a:tc>
+                <a:extLst>
+                  <a:ext uri="{0D108BD9-81ED-4DB2-BD59-A6C34878D82A}">
+                    <a16:rowId xmlns:a16="http://schemas.microsoft.com/office/drawing/2014/main" val="10002"/>
+                  </a:ext>
+                </a:extLst>
               </a:tr>
               <a:tr h="274320">
                 <a:tc>
@@ -17366,15 +17432,7 @@
                     <a:lstStyle/>
                     <a:p>
                       <a:pPr algn="ctr"/>
-                      <a:r>
-                        <a:rPr sz="900" b="0">
-                          <a:solidFill>
-                            <a:srgbClr val="1C1C1C"/>
-                          </a:solidFill>
-                          <a:latin typeface="Calibri"/>
-                        </a:rPr>
-                        <a:t/>
-                      </a:r>
+                      <a:endParaRPr/>
                     </a:p>
                   </a:txBody>
                   <a:tcPr marL="27432" marR="27432" marT="9144" marB="9144" anchor="ctr">
@@ -17389,15 +17447,7 @@
                     <a:lstStyle/>
                     <a:p>
                       <a:pPr algn="ctr"/>
-                      <a:r>
-                        <a:rPr sz="900" b="0">
-                          <a:solidFill>
-                            <a:srgbClr val="1C1C1C"/>
-                          </a:solidFill>
-                          <a:latin typeface="Calibri"/>
-                        </a:rPr>
-                        <a:t/>
-                      </a:r>
+                      <a:endParaRPr/>
                     </a:p>
                   </a:txBody>
                   <a:tcPr marL="27432" marR="27432" marT="9144" marB="9144" anchor="ctr">
@@ -17412,15 +17462,7 @@
                     <a:lstStyle/>
                     <a:p>
                       <a:pPr algn="ctr"/>
-                      <a:r>
-                        <a:rPr sz="900" b="0">
-                          <a:solidFill>
-                            <a:srgbClr val="1C1C1C"/>
-                          </a:solidFill>
-                          <a:latin typeface="Calibri"/>
-                        </a:rPr>
-                        <a:t/>
-                      </a:r>
+                      <a:endParaRPr/>
                     </a:p>
                   </a:txBody>
                   <a:tcPr marL="27432" marR="27432" marT="9144" marB="9144" anchor="ctr">
@@ -17435,15 +17477,7 @@
                     <a:lstStyle/>
                     <a:p>
                       <a:pPr algn="ctr"/>
-                      <a:r>
-                        <a:rPr sz="900" b="0">
-                          <a:solidFill>
-                            <a:srgbClr val="1C1C1C"/>
-                          </a:solidFill>
-                          <a:latin typeface="Calibri"/>
-                        </a:rPr>
-                        <a:t/>
-                      </a:r>
+                      <a:endParaRPr/>
                     </a:p>
                   </a:txBody>
                   <a:tcPr marL="27432" marR="27432" marT="9144" marB="9144" anchor="ctr">
@@ -17458,15 +17492,7 @@
                     <a:lstStyle/>
                     <a:p>
                       <a:pPr algn="ctr"/>
-                      <a:r>
-                        <a:rPr sz="900" b="0">
-                          <a:solidFill>
-                            <a:srgbClr val="1C1C1C"/>
-                          </a:solidFill>
-                          <a:latin typeface="Calibri"/>
-                        </a:rPr>
-                        <a:t/>
-                      </a:r>
+                      <a:endParaRPr/>
                     </a:p>
                   </a:txBody>
                   <a:tcPr marL="27432" marR="27432" marT="9144" marB="9144" anchor="ctr">
@@ -17481,15 +17507,7 @@
                     <a:lstStyle/>
                     <a:p>
                       <a:pPr algn="ctr"/>
-                      <a:r>
-                        <a:rPr sz="900" b="0">
-                          <a:solidFill>
-                            <a:srgbClr val="1C1C1C"/>
-                          </a:solidFill>
-                          <a:latin typeface="Calibri"/>
-                        </a:rPr>
-                        <a:t/>
-                      </a:r>
+                      <a:endParaRPr/>
                     </a:p>
                   </a:txBody>
                   <a:tcPr marL="27432" marR="27432" marT="9144" marB="9144" anchor="ctr">
@@ -17504,15 +17522,7 @@
                     <a:lstStyle/>
                     <a:p>
                       <a:pPr algn="ctr"/>
-                      <a:r>
-                        <a:rPr sz="900" b="0">
-                          <a:solidFill>
-                            <a:srgbClr val="1C1C1C"/>
-                          </a:solidFill>
-                          <a:latin typeface="Calibri"/>
-                        </a:rPr>
-                        <a:t/>
-                      </a:r>
+                      <a:endParaRPr/>
                     </a:p>
                   </a:txBody>
                   <a:tcPr marL="27432" marR="27432" marT="9144" marB="9144" anchor="ctr">
@@ -17527,15 +17537,7 @@
                     <a:lstStyle/>
                     <a:p>
                       <a:pPr algn="ctr"/>
-                      <a:r>
-                        <a:rPr sz="900" b="0">
-                          <a:solidFill>
-                            <a:srgbClr val="1C1C1C"/>
-                          </a:solidFill>
-                          <a:latin typeface="Calibri"/>
-                        </a:rPr>
-                        <a:t/>
-                      </a:r>
+                      <a:endParaRPr/>
                     </a:p>
                   </a:txBody>
                   <a:tcPr marL="27432" marR="27432" marT="9144" marB="9144" anchor="ctr">
@@ -17550,15 +17552,7 @@
                     <a:lstStyle/>
                     <a:p>
                       <a:pPr algn="ctr"/>
-                      <a:r>
-                        <a:rPr sz="900" b="0">
-                          <a:solidFill>
-                            <a:srgbClr val="1C1C1C"/>
-                          </a:solidFill>
-                          <a:latin typeface="Calibri"/>
-                        </a:rPr>
-                        <a:t/>
-                      </a:r>
+                      <a:endParaRPr/>
                     </a:p>
                   </a:txBody>
                   <a:tcPr marL="27432" marR="27432" marT="9144" marB="9144" anchor="ctr">
@@ -17573,15 +17567,7 @@
                     <a:lstStyle/>
                     <a:p>
                       <a:pPr algn="ctr"/>
-                      <a:r>
-                        <a:rPr sz="900" b="0">
-                          <a:solidFill>
-                            <a:srgbClr val="1C1C1C"/>
-                          </a:solidFill>
-                          <a:latin typeface="Calibri"/>
-                        </a:rPr>
-                        <a:t/>
-                      </a:r>
+                      <a:endParaRPr/>
                     </a:p>
                   </a:txBody>
                   <a:tcPr marL="27432" marR="27432" marT="9144" marB="9144" anchor="ctr">
@@ -17596,15 +17582,7 @@
                     <a:lstStyle/>
                     <a:p>
                       <a:pPr algn="ctr"/>
-                      <a:r>
-                        <a:rPr sz="900" b="0">
-                          <a:solidFill>
-                            <a:srgbClr val="1C1C1C"/>
-                          </a:solidFill>
-                          <a:latin typeface="Calibri"/>
-                        </a:rPr>
-                        <a:t/>
-                      </a:r>
+                      <a:endParaRPr/>
                     </a:p>
                   </a:txBody>
                   <a:tcPr marL="27432" marR="27432" marT="9144" marB="9144" anchor="ctr">
@@ -17619,15 +17597,7 @@
                     <a:lstStyle/>
                     <a:p>
                       <a:pPr algn="ctr"/>
-                      <a:r>
-                        <a:rPr sz="900" b="0">
-                          <a:solidFill>
-                            <a:srgbClr val="1C1C1C"/>
-                          </a:solidFill>
-                          <a:latin typeface="Calibri"/>
-                        </a:rPr>
-                        <a:t/>
-                      </a:r>
+                      <a:endParaRPr/>
                     </a:p>
                   </a:txBody>
                   <a:tcPr marL="27432" marR="27432" marT="9144" marB="9144" anchor="ctr">
@@ -17642,15 +17612,7 @@
                     <a:lstStyle/>
                     <a:p>
                       <a:pPr algn="ctr"/>
-                      <a:r>
-                        <a:rPr sz="900" b="0">
-                          <a:solidFill>
-                            <a:srgbClr val="1C1C1C"/>
-                          </a:solidFill>
-                          <a:latin typeface="Calibri"/>
-                        </a:rPr>
-                        <a:t/>
-                      </a:r>
+                      <a:endParaRPr/>
                     </a:p>
                   </a:txBody>
                   <a:tcPr marL="27432" marR="27432" marT="9144" marB="9144" anchor="ctr">
@@ -17665,15 +17627,7 @@
                     <a:lstStyle/>
                     <a:p>
                       <a:pPr algn="ctr"/>
-                      <a:r>
-                        <a:rPr sz="900" b="0">
-                          <a:solidFill>
-                            <a:srgbClr val="1C1C1C"/>
-                          </a:solidFill>
-                          <a:latin typeface="Calibri"/>
-                        </a:rPr>
-                        <a:t/>
-                      </a:r>
+                      <a:endParaRPr/>
                     </a:p>
                   </a:txBody>
                   <a:tcPr marL="27432" marR="27432" marT="9144" marB="9144" anchor="ctr">
@@ -17688,15 +17642,7 @@
                     <a:lstStyle/>
                     <a:p>
                       <a:pPr algn="ctr"/>
-                      <a:r>
-                        <a:rPr sz="900" b="0">
-                          <a:solidFill>
-                            <a:srgbClr val="1C1C1C"/>
-                          </a:solidFill>
-                          <a:latin typeface="Calibri"/>
-                        </a:rPr>
-                        <a:t/>
-                      </a:r>
+                      <a:endParaRPr/>
                     </a:p>
                   </a:txBody>
                   <a:tcPr marL="27432" marR="27432" marT="9144" marB="9144" anchor="ctr">
@@ -17711,15 +17657,7 @@
                     <a:lstStyle/>
                     <a:p>
                       <a:pPr algn="ctr"/>
-                      <a:r>
-                        <a:rPr sz="900" b="0">
-                          <a:solidFill>
-                            <a:srgbClr val="1C1C1C"/>
-                          </a:solidFill>
-                          <a:latin typeface="Calibri"/>
-                        </a:rPr>
-                        <a:t/>
-                      </a:r>
+                      <a:endParaRPr/>
                     </a:p>
                   </a:txBody>
                   <a:tcPr marL="27432" marR="27432" marT="9144" marB="9144" anchor="ctr">
@@ -17734,15 +17672,7 @@
                     <a:lstStyle/>
                     <a:p>
                       <a:pPr algn="ctr"/>
-                      <a:r>
-                        <a:rPr sz="900" b="0">
-                          <a:solidFill>
-                            <a:srgbClr val="1C1C1C"/>
-                          </a:solidFill>
-                          <a:latin typeface="Calibri"/>
-                        </a:rPr>
-                        <a:t/>
-                      </a:r>
+                      <a:endParaRPr/>
                     </a:p>
                   </a:txBody>
                   <a:tcPr marL="27432" marR="27432" marT="9144" marB="9144" anchor="ctr">
@@ -17757,15 +17687,7 @@
                     <a:lstStyle/>
                     <a:p>
                       <a:pPr algn="ctr"/>
-                      <a:r>
-                        <a:rPr sz="900" b="0">
-                          <a:solidFill>
-                            <a:srgbClr val="1C1C1C"/>
-                          </a:solidFill>
-                          <a:latin typeface="Calibri"/>
-                        </a:rPr>
-                        <a:t/>
-                      </a:r>
+                      <a:endParaRPr/>
                     </a:p>
                   </a:txBody>
                   <a:tcPr marL="27432" marR="27432" marT="9144" marB="9144" anchor="ctr">
@@ -17774,6 +17696,11 @@
                     </a:solidFill>
                   </a:tcPr>
                 </a:tc>
+                <a:extLst>
+                  <a:ext uri="{0D108BD9-81ED-4DB2-BD59-A6C34878D82A}">
+                    <a16:rowId xmlns:a16="http://schemas.microsoft.com/office/drawing/2014/main" val="10003"/>
+                  </a:ext>
+                </a:extLst>
               </a:tr>
               <a:tr h="274320">
                 <a:tc>
@@ -17805,15 +17732,7 @@
                     <a:lstStyle/>
                     <a:p>
                       <a:pPr algn="ctr"/>
-                      <a:r>
-                        <a:rPr sz="900" b="0">
-                          <a:solidFill>
-                            <a:srgbClr val="1C1C1C"/>
-                          </a:solidFill>
-                          <a:latin typeface="Calibri"/>
-                        </a:rPr>
-                        <a:t/>
-                      </a:r>
+                      <a:endParaRPr/>
                     </a:p>
                   </a:txBody>
                   <a:tcPr marL="27432" marR="27432" marT="9144" marB="9144" anchor="ctr">
@@ -17828,15 +17747,7 @@
                     <a:lstStyle/>
                     <a:p>
                       <a:pPr algn="ctr"/>
-                      <a:r>
-                        <a:rPr sz="900" b="0">
-                          <a:solidFill>
-                            <a:srgbClr val="1C1C1C"/>
-                          </a:solidFill>
-                          <a:latin typeface="Calibri"/>
-                        </a:rPr>
-                        <a:t/>
-                      </a:r>
+                      <a:endParaRPr/>
                     </a:p>
                   </a:txBody>
                   <a:tcPr marL="27432" marR="27432" marT="9144" marB="9144" anchor="ctr">
@@ -17851,15 +17762,7 @@
                     <a:lstStyle/>
                     <a:p>
                       <a:pPr algn="ctr"/>
-                      <a:r>
-                        <a:rPr sz="900" b="0">
-                          <a:solidFill>
-                            <a:srgbClr val="1C1C1C"/>
-                          </a:solidFill>
-                          <a:latin typeface="Calibri"/>
-                        </a:rPr>
-                        <a:t/>
-                      </a:r>
+                      <a:endParaRPr/>
                     </a:p>
                   </a:txBody>
                   <a:tcPr marL="27432" marR="27432" marT="9144" marB="9144" anchor="ctr">
@@ -17874,15 +17777,7 @@
                     <a:lstStyle/>
                     <a:p>
                       <a:pPr algn="ctr"/>
-                      <a:r>
-                        <a:rPr sz="900" b="0">
-                          <a:solidFill>
-                            <a:srgbClr val="1C1C1C"/>
-                          </a:solidFill>
-                          <a:latin typeface="Calibri"/>
-                        </a:rPr>
-                        <a:t/>
-                      </a:r>
+                      <a:endParaRPr/>
                     </a:p>
                   </a:txBody>
                   <a:tcPr marL="27432" marR="27432" marT="9144" marB="9144" anchor="ctr">
@@ -17897,15 +17792,7 @@
                     <a:lstStyle/>
                     <a:p>
                       <a:pPr algn="ctr"/>
-                      <a:r>
-                        <a:rPr sz="900" b="0">
-                          <a:solidFill>
-                            <a:srgbClr val="1C1C1C"/>
-                          </a:solidFill>
-                          <a:latin typeface="Calibri"/>
-                        </a:rPr>
-                        <a:t/>
-                      </a:r>
+                      <a:endParaRPr/>
                     </a:p>
                   </a:txBody>
                   <a:tcPr marL="27432" marR="27432" marT="9144" marB="9144" anchor="ctr">
@@ -17920,15 +17807,7 @@
                     <a:lstStyle/>
                     <a:p>
                       <a:pPr algn="ctr"/>
-                      <a:r>
-                        <a:rPr sz="900" b="0">
-                          <a:solidFill>
-                            <a:srgbClr val="1C1C1C"/>
-                          </a:solidFill>
-                          <a:latin typeface="Calibri"/>
-                        </a:rPr>
-                        <a:t/>
-                      </a:r>
+                      <a:endParaRPr/>
                     </a:p>
                   </a:txBody>
                   <a:tcPr marL="27432" marR="27432" marT="9144" marB="9144" anchor="ctr">
@@ -17943,15 +17822,7 @@
                     <a:lstStyle/>
                     <a:p>
                       <a:pPr algn="ctr"/>
-                      <a:r>
-                        <a:rPr sz="900" b="0">
-                          <a:solidFill>
-                            <a:srgbClr val="1C1C1C"/>
-                          </a:solidFill>
-                          <a:latin typeface="Calibri"/>
-                        </a:rPr>
-                        <a:t/>
-                      </a:r>
+                      <a:endParaRPr/>
                     </a:p>
                   </a:txBody>
                   <a:tcPr marL="27432" marR="27432" marT="9144" marB="9144" anchor="ctr">
@@ -17966,15 +17837,7 @@
                     <a:lstStyle/>
                     <a:p>
                       <a:pPr algn="ctr"/>
-                      <a:r>
-                        <a:rPr sz="900" b="0">
-                          <a:solidFill>
-                            <a:srgbClr val="1C1C1C"/>
-                          </a:solidFill>
-                          <a:latin typeface="Calibri"/>
-                        </a:rPr>
-                        <a:t/>
-                      </a:r>
+                      <a:endParaRPr/>
                     </a:p>
                   </a:txBody>
                   <a:tcPr marL="27432" marR="27432" marT="9144" marB="9144" anchor="ctr">
@@ -17989,15 +17852,7 @@
                     <a:lstStyle/>
                     <a:p>
                       <a:pPr algn="ctr"/>
-                      <a:r>
-                        <a:rPr sz="900" b="0">
-                          <a:solidFill>
-                            <a:srgbClr val="1C1C1C"/>
-                          </a:solidFill>
-                          <a:latin typeface="Calibri"/>
-                        </a:rPr>
-                        <a:t/>
-                      </a:r>
+                      <a:endParaRPr/>
                     </a:p>
                   </a:txBody>
                   <a:tcPr marL="27432" marR="27432" marT="9144" marB="9144" anchor="ctr">
@@ -18012,15 +17867,7 @@
                     <a:lstStyle/>
                     <a:p>
                       <a:pPr algn="ctr"/>
-                      <a:r>
-                        <a:rPr sz="900" b="0">
-                          <a:solidFill>
-                            <a:srgbClr val="1C1C1C"/>
-                          </a:solidFill>
-                          <a:latin typeface="Calibri"/>
-                        </a:rPr>
-                        <a:t/>
-                      </a:r>
+                      <a:endParaRPr/>
                     </a:p>
                   </a:txBody>
                   <a:tcPr marL="27432" marR="27432" marT="9144" marB="9144" anchor="ctr">
@@ -18035,15 +17882,7 @@
                     <a:lstStyle/>
                     <a:p>
                       <a:pPr algn="ctr"/>
-                      <a:r>
-                        <a:rPr sz="900" b="0">
-                          <a:solidFill>
-                            <a:srgbClr val="1C1C1C"/>
-                          </a:solidFill>
-                          <a:latin typeface="Calibri"/>
-                        </a:rPr>
-                        <a:t/>
-                      </a:r>
+                      <a:endParaRPr/>
                     </a:p>
                   </a:txBody>
                   <a:tcPr marL="27432" marR="27432" marT="9144" marB="9144" anchor="ctr">
@@ -18058,15 +17897,7 @@
                     <a:lstStyle/>
                     <a:p>
                       <a:pPr algn="ctr"/>
-                      <a:r>
-                        <a:rPr sz="900" b="0">
-                          <a:solidFill>
-                            <a:srgbClr val="1C1C1C"/>
-                          </a:solidFill>
-                          <a:latin typeface="Calibri"/>
-                        </a:rPr>
-                        <a:t/>
-                      </a:r>
+                      <a:endParaRPr/>
                     </a:p>
                   </a:txBody>
                   <a:tcPr marL="27432" marR="27432" marT="9144" marB="9144" anchor="ctr">
@@ -18081,15 +17912,7 @@
                     <a:lstStyle/>
                     <a:p>
                       <a:pPr algn="ctr"/>
-                      <a:r>
-                        <a:rPr sz="900" b="0">
-                          <a:solidFill>
-                            <a:srgbClr val="1C1C1C"/>
-                          </a:solidFill>
-                          <a:latin typeface="Calibri"/>
-                        </a:rPr>
-                        <a:t/>
-                      </a:r>
+                      <a:endParaRPr/>
                     </a:p>
                   </a:txBody>
                   <a:tcPr marL="27432" marR="27432" marT="9144" marB="9144" anchor="ctr">
@@ -18104,15 +17927,7 @@
                     <a:lstStyle/>
                     <a:p>
                       <a:pPr algn="ctr"/>
-                      <a:r>
-                        <a:rPr sz="900" b="0">
-                          <a:solidFill>
-                            <a:srgbClr val="1C1C1C"/>
-                          </a:solidFill>
-                          <a:latin typeface="Calibri"/>
-                        </a:rPr>
-                        <a:t/>
-                      </a:r>
+                      <a:endParaRPr/>
                     </a:p>
                   </a:txBody>
                   <a:tcPr marL="27432" marR="27432" marT="9144" marB="9144" anchor="ctr">
@@ -18127,15 +17942,7 @@
                     <a:lstStyle/>
                     <a:p>
                       <a:pPr algn="ctr"/>
-                      <a:r>
-                        <a:rPr sz="900" b="0">
-                          <a:solidFill>
-                            <a:srgbClr val="1C1C1C"/>
-                          </a:solidFill>
-                          <a:latin typeface="Calibri"/>
-                        </a:rPr>
-                        <a:t/>
-                      </a:r>
+                      <a:endParaRPr/>
                     </a:p>
                   </a:txBody>
                   <a:tcPr marL="27432" marR="27432" marT="9144" marB="9144" anchor="ctr">
@@ -18150,15 +17957,7 @@
                     <a:lstStyle/>
                     <a:p>
                       <a:pPr algn="ctr"/>
-                      <a:r>
-                        <a:rPr sz="900" b="0">
-                          <a:solidFill>
-                            <a:srgbClr val="1C1C1C"/>
-                          </a:solidFill>
-                          <a:latin typeface="Calibri"/>
-                        </a:rPr>
-                        <a:t/>
-                      </a:r>
+                      <a:endParaRPr/>
                     </a:p>
                   </a:txBody>
                   <a:tcPr marL="27432" marR="27432" marT="9144" marB="9144" anchor="ctr">
@@ -18173,15 +17972,7 @@
                     <a:lstStyle/>
                     <a:p>
                       <a:pPr algn="ctr"/>
-                      <a:r>
-                        <a:rPr sz="900" b="0">
-                          <a:solidFill>
-                            <a:srgbClr val="1C1C1C"/>
-                          </a:solidFill>
-                          <a:latin typeface="Calibri"/>
-                        </a:rPr>
-                        <a:t/>
-                      </a:r>
+                      <a:endParaRPr/>
                     </a:p>
                   </a:txBody>
                   <a:tcPr marL="27432" marR="27432" marT="9144" marB="9144" anchor="ctr">
@@ -18196,15 +17987,7 @@
                     <a:lstStyle/>
                     <a:p>
                       <a:pPr algn="ctr"/>
-                      <a:r>
-                        <a:rPr sz="900" b="0">
-                          <a:solidFill>
-                            <a:srgbClr val="1C1C1C"/>
-                          </a:solidFill>
-                          <a:latin typeface="Calibri"/>
-                        </a:rPr>
-                        <a:t/>
-                      </a:r>
+                      <a:endParaRPr/>
                     </a:p>
                   </a:txBody>
                   <a:tcPr marL="27432" marR="27432" marT="9144" marB="9144" anchor="ctr">
@@ -18213,6 +17996,11 @@
                     </a:solidFill>
                   </a:tcPr>
                 </a:tc>
+                <a:extLst>
+                  <a:ext uri="{0D108BD9-81ED-4DB2-BD59-A6C34878D82A}">
+                    <a16:rowId xmlns:a16="http://schemas.microsoft.com/office/drawing/2014/main" val="10004"/>
+                  </a:ext>
+                </a:extLst>
               </a:tr>
               <a:tr h="274320">
                 <a:tc>
@@ -18244,15 +18032,7 @@
                     <a:lstStyle/>
                     <a:p>
                       <a:pPr algn="ctr"/>
-                      <a:r>
-                        <a:rPr sz="900" b="0">
-                          <a:solidFill>
-                            <a:srgbClr val="1C1C1C"/>
-                          </a:solidFill>
-                          <a:latin typeface="Calibri"/>
-                        </a:rPr>
-                        <a:t/>
-                      </a:r>
+                      <a:endParaRPr/>
                     </a:p>
                   </a:txBody>
                   <a:tcPr marL="27432" marR="27432" marT="9144" marB="9144" anchor="ctr">
@@ -18267,15 +18047,7 @@
                     <a:lstStyle/>
                     <a:p>
                       <a:pPr algn="ctr"/>
-                      <a:r>
-                        <a:rPr sz="900" b="0">
-                          <a:solidFill>
-                            <a:srgbClr val="1C1C1C"/>
-                          </a:solidFill>
-                          <a:latin typeface="Calibri"/>
-                        </a:rPr>
-                        <a:t/>
-                      </a:r>
+                      <a:endParaRPr/>
                     </a:p>
                   </a:txBody>
                   <a:tcPr marL="27432" marR="27432" marT="9144" marB="9144" anchor="ctr">
@@ -18290,15 +18062,7 @@
                     <a:lstStyle/>
                     <a:p>
                       <a:pPr algn="ctr"/>
-                      <a:r>
-                        <a:rPr sz="900" b="0">
-                          <a:solidFill>
-                            <a:srgbClr val="1C1C1C"/>
-                          </a:solidFill>
-                          <a:latin typeface="Calibri"/>
-                        </a:rPr>
-                        <a:t/>
-                      </a:r>
+                      <a:endParaRPr/>
                     </a:p>
                   </a:txBody>
                   <a:tcPr marL="27432" marR="27432" marT="9144" marB="9144" anchor="ctr">
@@ -18313,15 +18077,7 @@
                     <a:lstStyle/>
                     <a:p>
                       <a:pPr algn="ctr"/>
-                      <a:r>
-                        <a:rPr sz="900" b="0">
-                          <a:solidFill>
-                            <a:srgbClr val="1C1C1C"/>
-                          </a:solidFill>
-                          <a:latin typeface="Calibri"/>
-                        </a:rPr>
-                        <a:t/>
-                      </a:r>
+                      <a:endParaRPr/>
                     </a:p>
                   </a:txBody>
                   <a:tcPr marL="27432" marR="27432" marT="9144" marB="9144" anchor="ctr">
@@ -18336,15 +18092,7 @@
                     <a:lstStyle/>
                     <a:p>
                       <a:pPr algn="ctr"/>
-                      <a:r>
-                        <a:rPr sz="900" b="0">
-                          <a:solidFill>
-                            <a:srgbClr val="1C1C1C"/>
-                          </a:solidFill>
-                          <a:latin typeface="Calibri"/>
-                        </a:rPr>
-                        <a:t/>
-                      </a:r>
+                      <a:endParaRPr/>
                     </a:p>
                   </a:txBody>
                   <a:tcPr marL="27432" marR="27432" marT="9144" marB="9144" anchor="ctr">
@@ -18359,15 +18107,7 @@
                     <a:lstStyle/>
                     <a:p>
                       <a:pPr algn="ctr"/>
-                      <a:r>
-                        <a:rPr sz="900" b="0">
-                          <a:solidFill>
-                            <a:srgbClr val="1C1C1C"/>
-                          </a:solidFill>
-                          <a:latin typeface="Calibri"/>
-                        </a:rPr>
-                        <a:t/>
-                      </a:r>
+                      <a:endParaRPr/>
                     </a:p>
                   </a:txBody>
                   <a:tcPr marL="27432" marR="27432" marT="9144" marB="9144" anchor="ctr">
@@ -18382,15 +18122,7 @@
                     <a:lstStyle/>
                     <a:p>
                       <a:pPr algn="ctr"/>
-                      <a:r>
-                        <a:rPr sz="900" b="0">
-                          <a:solidFill>
-                            <a:srgbClr val="1C1C1C"/>
-                          </a:solidFill>
-                          <a:latin typeface="Calibri"/>
-                        </a:rPr>
-                        <a:t/>
-                      </a:r>
+                      <a:endParaRPr/>
                     </a:p>
                   </a:txBody>
                   <a:tcPr marL="27432" marR="27432" marT="9144" marB="9144" anchor="ctr">
@@ -18405,15 +18137,7 @@
                     <a:lstStyle/>
                     <a:p>
                       <a:pPr algn="ctr"/>
-                      <a:r>
-                        <a:rPr sz="900" b="0">
-                          <a:solidFill>
-                            <a:srgbClr val="1C1C1C"/>
-                          </a:solidFill>
-                          <a:latin typeface="Calibri"/>
-                        </a:rPr>
-                        <a:t/>
-                      </a:r>
+                      <a:endParaRPr/>
                     </a:p>
                   </a:txBody>
                   <a:tcPr marL="27432" marR="27432" marT="9144" marB="9144" anchor="ctr">
@@ -18428,15 +18152,7 @@
                     <a:lstStyle/>
                     <a:p>
                       <a:pPr algn="ctr"/>
-                      <a:r>
-                        <a:rPr sz="900" b="0">
-                          <a:solidFill>
-                            <a:srgbClr val="1C1C1C"/>
-                          </a:solidFill>
-                          <a:latin typeface="Calibri"/>
-                        </a:rPr>
-                        <a:t/>
-                      </a:r>
+                      <a:endParaRPr/>
                     </a:p>
                   </a:txBody>
                   <a:tcPr marL="27432" marR="27432" marT="9144" marB="9144" anchor="ctr">
@@ -18451,15 +18167,7 @@
                     <a:lstStyle/>
                     <a:p>
                       <a:pPr algn="ctr"/>
-                      <a:r>
-                        <a:rPr sz="900" b="0">
-                          <a:solidFill>
-                            <a:srgbClr val="1C1C1C"/>
-                          </a:solidFill>
-                          <a:latin typeface="Calibri"/>
-                        </a:rPr>
-                        <a:t/>
-                      </a:r>
+                      <a:endParaRPr/>
                     </a:p>
                   </a:txBody>
                   <a:tcPr marL="27432" marR="27432" marT="9144" marB="9144" anchor="ctr">
@@ -18474,15 +18182,7 @@
                     <a:lstStyle/>
                     <a:p>
                       <a:pPr algn="ctr"/>
-                      <a:r>
-                        <a:rPr sz="900" b="0">
-                          <a:solidFill>
-                            <a:srgbClr val="1C1C1C"/>
-                          </a:solidFill>
-                          <a:latin typeface="Calibri"/>
-                        </a:rPr>
-                        <a:t/>
-                      </a:r>
+                      <a:endParaRPr/>
                     </a:p>
                   </a:txBody>
                   <a:tcPr marL="27432" marR="27432" marT="9144" marB="9144" anchor="ctr">
@@ -18497,15 +18197,7 @@
                     <a:lstStyle/>
                     <a:p>
                       <a:pPr algn="ctr"/>
-                      <a:r>
-                        <a:rPr sz="900" b="0">
-                          <a:solidFill>
-                            <a:srgbClr val="1C1C1C"/>
-                          </a:solidFill>
-                          <a:latin typeface="Calibri"/>
-                        </a:rPr>
-                        <a:t/>
-                      </a:r>
+                      <a:endParaRPr/>
                     </a:p>
                   </a:txBody>
                   <a:tcPr marL="27432" marR="27432" marT="9144" marB="9144" anchor="ctr">
@@ -18520,15 +18212,7 @@
                     <a:lstStyle/>
                     <a:p>
                       <a:pPr algn="ctr"/>
-                      <a:r>
-                        <a:rPr sz="900" b="0">
-                          <a:solidFill>
-                            <a:srgbClr val="1C1C1C"/>
-                          </a:solidFill>
-                          <a:latin typeface="Calibri"/>
-                        </a:rPr>
-                        <a:t/>
-                      </a:r>
+                      <a:endParaRPr/>
                     </a:p>
                   </a:txBody>
                   <a:tcPr marL="27432" marR="27432" marT="9144" marB="9144" anchor="ctr">
@@ -18543,15 +18227,7 @@
                     <a:lstStyle/>
                     <a:p>
                       <a:pPr algn="ctr"/>
-                      <a:r>
-                        <a:rPr sz="900" b="0">
-                          <a:solidFill>
-                            <a:srgbClr val="1C1C1C"/>
-                          </a:solidFill>
-                          <a:latin typeface="Calibri"/>
-                        </a:rPr>
-                        <a:t/>
-                      </a:r>
+                      <a:endParaRPr/>
                     </a:p>
                   </a:txBody>
                   <a:tcPr marL="27432" marR="27432" marT="9144" marB="9144" anchor="ctr">
@@ -18566,15 +18242,7 @@
                     <a:lstStyle/>
                     <a:p>
                       <a:pPr algn="ctr"/>
-                      <a:r>
-                        <a:rPr sz="900" b="0">
-                          <a:solidFill>
-                            <a:srgbClr val="1C1C1C"/>
-                          </a:solidFill>
-                          <a:latin typeface="Calibri"/>
-                        </a:rPr>
-                        <a:t/>
-                      </a:r>
+                      <a:endParaRPr/>
                     </a:p>
                   </a:txBody>
                   <a:tcPr marL="27432" marR="27432" marT="9144" marB="9144" anchor="ctr">
@@ -18589,15 +18257,7 @@
                     <a:lstStyle/>
                     <a:p>
                       <a:pPr algn="ctr"/>
-                      <a:r>
-                        <a:rPr sz="900" b="0">
-                          <a:solidFill>
-                            <a:srgbClr val="1C1C1C"/>
-                          </a:solidFill>
-                          <a:latin typeface="Calibri"/>
-                        </a:rPr>
-                        <a:t/>
-                      </a:r>
+                      <a:endParaRPr/>
                     </a:p>
                   </a:txBody>
                   <a:tcPr marL="27432" marR="27432" marT="9144" marB="9144" anchor="ctr">
@@ -18612,15 +18272,7 @@
                     <a:lstStyle/>
                     <a:p>
                       <a:pPr algn="ctr"/>
-                      <a:r>
-                        <a:rPr sz="900" b="0">
-                          <a:solidFill>
-                            <a:srgbClr val="1C1C1C"/>
-                          </a:solidFill>
-                          <a:latin typeface="Calibri"/>
-                        </a:rPr>
-                        <a:t/>
-                      </a:r>
+                      <a:endParaRPr/>
                     </a:p>
                   </a:txBody>
                   <a:tcPr marL="27432" marR="27432" marT="9144" marB="9144" anchor="ctr">
@@ -18635,15 +18287,7 @@
                     <a:lstStyle/>
                     <a:p>
                       <a:pPr algn="ctr"/>
-                      <a:r>
-                        <a:rPr sz="900" b="0">
-                          <a:solidFill>
-                            <a:srgbClr val="1C1C1C"/>
-                          </a:solidFill>
-                          <a:latin typeface="Calibri"/>
-                        </a:rPr>
-                        <a:t/>
-                      </a:r>
+                      <a:endParaRPr/>
                     </a:p>
                   </a:txBody>
                   <a:tcPr marL="27432" marR="27432" marT="9144" marB="9144" anchor="ctr">
@@ -18652,6 +18296,11 @@
                     </a:solidFill>
                   </a:tcPr>
                 </a:tc>
+                <a:extLst>
+                  <a:ext uri="{0D108BD9-81ED-4DB2-BD59-A6C34878D82A}">
+                    <a16:rowId xmlns:a16="http://schemas.microsoft.com/office/drawing/2014/main" val="10005"/>
+                  </a:ext>
+                </a:extLst>
               </a:tr>
               <a:tr h="274320">
                 <a:tc>
@@ -18683,15 +18332,7 @@
                     <a:lstStyle/>
                     <a:p>
                       <a:pPr algn="ctr"/>
-                      <a:r>
-                        <a:rPr sz="900" b="0">
-                          <a:solidFill>
-                            <a:srgbClr val="1C1C1C"/>
-                          </a:solidFill>
-                          <a:latin typeface="Calibri"/>
-                        </a:rPr>
-                        <a:t/>
-                      </a:r>
+                      <a:endParaRPr/>
                     </a:p>
                   </a:txBody>
                   <a:tcPr marL="27432" marR="27432" marT="9144" marB="9144" anchor="ctr">
@@ -18706,15 +18347,7 @@
                     <a:lstStyle/>
                     <a:p>
                       <a:pPr algn="ctr"/>
-                      <a:r>
-                        <a:rPr sz="900" b="0">
-                          <a:solidFill>
-                            <a:srgbClr val="1C1C1C"/>
-                          </a:solidFill>
-                          <a:latin typeface="Calibri"/>
-                        </a:rPr>
-                        <a:t/>
-                      </a:r>
+                      <a:endParaRPr/>
                     </a:p>
                   </a:txBody>
                   <a:tcPr marL="27432" marR="27432" marT="9144" marB="9144" anchor="ctr">
@@ -18729,15 +18362,7 @@
                     <a:lstStyle/>
                     <a:p>
                       <a:pPr algn="ctr"/>
-                      <a:r>
-                        <a:rPr sz="900" b="0">
-                          <a:solidFill>
-                            <a:srgbClr val="1C1C1C"/>
-                          </a:solidFill>
-                          <a:latin typeface="Calibri"/>
-                        </a:rPr>
-                        <a:t/>
-                      </a:r>
+                      <a:endParaRPr/>
                     </a:p>
                   </a:txBody>
                   <a:tcPr marL="27432" marR="27432" marT="9144" marB="9144" anchor="ctr">
@@ -18752,15 +18377,7 @@
                     <a:lstStyle/>
                     <a:p>
                       <a:pPr algn="ctr"/>
-                      <a:r>
-                        <a:rPr sz="900" b="0">
-                          <a:solidFill>
-                            <a:srgbClr val="1C1C1C"/>
-                          </a:solidFill>
-                          <a:latin typeface="Calibri"/>
-                        </a:rPr>
-                        <a:t/>
-                      </a:r>
+                      <a:endParaRPr/>
                     </a:p>
                   </a:txBody>
                   <a:tcPr marL="27432" marR="27432" marT="9144" marB="9144" anchor="ctr">
@@ -18775,15 +18392,7 @@
                     <a:lstStyle/>
                     <a:p>
                       <a:pPr algn="ctr"/>
-                      <a:r>
-                        <a:rPr sz="900" b="0">
-                          <a:solidFill>
-                            <a:srgbClr val="1C1C1C"/>
-                          </a:solidFill>
-                          <a:latin typeface="Calibri"/>
-                        </a:rPr>
-                        <a:t/>
-                      </a:r>
+                      <a:endParaRPr/>
                     </a:p>
                   </a:txBody>
                   <a:tcPr marL="27432" marR="27432" marT="9144" marB="9144" anchor="ctr">
@@ -18798,15 +18407,7 @@
                     <a:lstStyle/>
                     <a:p>
                       <a:pPr algn="ctr"/>
-                      <a:r>
-                        <a:rPr sz="900" b="0">
-                          <a:solidFill>
-                            <a:srgbClr val="1C1C1C"/>
-                          </a:solidFill>
-                          <a:latin typeface="Calibri"/>
-                        </a:rPr>
-                        <a:t/>
-                      </a:r>
+                      <a:endParaRPr/>
                     </a:p>
                   </a:txBody>
                   <a:tcPr marL="27432" marR="27432" marT="9144" marB="9144" anchor="ctr">
@@ -18821,15 +18422,7 @@
                     <a:lstStyle/>
                     <a:p>
                       <a:pPr algn="ctr"/>
-                      <a:r>
-                        <a:rPr sz="900" b="0">
-                          <a:solidFill>
-                            <a:srgbClr val="1C1C1C"/>
-                          </a:solidFill>
-                          <a:latin typeface="Calibri"/>
-                        </a:rPr>
-                        <a:t/>
-                      </a:r>
+                      <a:endParaRPr/>
                     </a:p>
                   </a:txBody>
                   <a:tcPr marL="27432" marR="27432" marT="9144" marB="9144" anchor="ctr">
@@ -18844,15 +18437,7 @@
                     <a:lstStyle/>
                     <a:p>
                       <a:pPr algn="ctr"/>
-                      <a:r>
-                        <a:rPr sz="900" b="0">
-                          <a:solidFill>
-                            <a:srgbClr val="1C1C1C"/>
-                          </a:solidFill>
-                          <a:latin typeface="Calibri"/>
-                        </a:rPr>
-                        <a:t/>
-                      </a:r>
+                      <a:endParaRPr/>
                     </a:p>
                   </a:txBody>
                   <a:tcPr marL="27432" marR="27432" marT="9144" marB="9144" anchor="ctr">
@@ -18867,15 +18452,7 @@
                     <a:lstStyle/>
                     <a:p>
                       <a:pPr algn="ctr"/>
-                      <a:r>
-                        <a:rPr sz="900" b="0">
-                          <a:solidFill>
-                            <a:srgbClr val="1C1C1C"/>
-                          </a:solidFill>
-                          <a:latin typeface="Calibri"/>
-                        </a:rPr>
-                        <a:t/>
-                      </a:r>
+                      <a:endParaRPr/>
                     </a:p>
                   </a:txBody>
                   <a:tcPr marL="27432" marR="27432" marT="9144" marB="9144" anchor="ctr">
@@ -18890,15 +18467,7 @@
                     <a:lstStyle/>
                     <a:p>
                       <a:pPr algn="ctr"/>
-                      <a:r>
-                        <a:rPr sz="900" b="0">
-                          <a:solidFill>
-                            <a:srgbClr val="1C1C1C"/>
-                          </a:solidFill>
-                          <a:latin typeface="Calibri"/>
-                        </a:rPr>
-                        <a:t/>
-                      </a:r>
+                      <a:endParaRPr/>
                     </a:p>
                   </a:txBody>
                   <a:tcPr marL="27432" marR="27432" marT="9144" marB="9144" anchor="ctr">
@@ -18913,15 +18482,7 @@
                     <a:lstStyle/>
                     <a:p>
                       <a:pPr algn="ctr"/>
-                      <a:r>
-                        <a:rPr sz="900" b="0">
-                          <a:solidFill>
-                            <a:srgbClr val="1C1C1C"/>
-                          </a:solidFill>
-                          <a:latin typeface="Calibri"/>
-                        </a:rPr>
-                        <a:t/>
-                      </a:r>
+                      <a:endParaRPr/>
                     </a:p>
                   </a:txBody>
                   <a:tcPr marL="27432" marR="27432" marT="9144" marB="9144" anchor="ctr">
@@ -18936,15 +18497,7 @@
                     <a:lstStyle/>
                     <a:p>
                       <a:pPr algn="ctr"/>
-                      <a:r>
-                        <a:rPr sz="900" b="0">
-                          <a:solidFill>
-                            <a:srgbClr val="1C1C1C"/>
-                          </a:solidFill>
-                          <a:latin typeface="Calibri"/>
-                        </a:rPr>
-                        <a:t/>
-                      </a:r>
+                      <a:endParaRPr/>
                     </a:p>
                   </a:txBody>
                   <a:tcPr marL="27432" marR="27432" marT="9144" marB="9144" anchor="ctr">
@@ -18959,15 +18512,7 @@
                     <a:lstStyle/>
                     <a:p>
                       <a:pPr algn="ctr"/>
-                      <a:r>
-                        <a:rPr sz="900" b="0">
-                          <a:solidFill>
-                            <a:srgbClr val="1C1C1C"/>
-                          </a:solidFill>
-                          <a:latin typeface="Calibri"/>
-                        </a:rPr>
-                        <a:t/>
-                      </a:r>
+                      <a:endParaRPr/>
                     </a:p>
                   </a:txBody>
                   <a:tcPr marL="27432" marR="27432" marT="9144" marB="9144" anchor="ctr">
@@ -18982,15 +18527,7 @@
                     <a:lstStyle/>
                     <a:p>
                       <a:pPr algn="ctr"/>
-                      <a:r>
-                        <a:rPr sz="900" b="0">
-                          <a:solidFill>
-                            <a:srgbClr val="1C1C1C"/>
-                          </a:solidFill>
-                          <a:latin typeface="Calibri"/>
-                        </a:rPr>
-                        <a:t/>
-                      </a:r>
+                      <a:endParaRPr/>
                     </a:p>
                   </a:txBody>
                   <a:tcPr marL="27432" marR="27432" marT="9144" marB="9144" anchor="ctr">
@@ -19005,15 +18542,7 @@
                     <a:lstStyle/>
                     <a:p>
                       <a:pPr algn="ctr"/>
-                      <a:r>
-                        <a:rPr sz="900" b="0">
-                          <a:solidFill>
-                            <a:srgbClr val="1C1C1C"/>
-                          </a:solidFill>
-                          <a:latin typeface="Calibri"/>
-                        </a:rPr>
-                        <a:t/>
-                      </a:r>
+                      <a:endParaRPr/>
                     </a:p>
                   </a:txBody>
                   <a:tcPr marL="27432" marR="27432" marT="9144" marB="9144" anchor="ctr">
@@ -19028,15 +18557,7 @@
                     <a:lstStyle/>
                     <a:p>
                       <a:pPr algn="ctr"/>
-                      <a:r>
-                        <a:rPr sz="900" b="0">
-                          <a:solidFill>
-                            <a:srgbClr val="1C1C1C"/>
-                          </a:solidFill>
-                          <a:latin typeface="Calibri"/>
-                        </a:rPr>
-                        <a:t/>
-                      </a:r>
+                      <a:endParaRPr/>
                     </a:p>
                   </a:txBody>
                   <a:tcPr marL="27432" marR="27432" marT="9144" marB="9144" anchor="ctr">
@@ -19051,15 +18572,7 @@
                     <a:lstStyle/>
                     <a:p>
                       <a:pPr algn="ctr"/>
-                      <a:r>
-                        <a:rPr sz="900" b="0">
-                          <a:solidFill>
-                            <a:srgbClr val="1C1C1C"/>
-                          </a:solidFill>
-                          <a:latin typeface="Calibri"/>
-                        </a:rPr>
-                        <a:t/>
-                      </a:r>
+                      <a:endParaRPr/>
                     </a:p>
                   </a:txBody>
                   <a:tcPr marL="27432" marR="27432" marT="9144" marB="9144" anchor="ctr">
@@ -19074,15 +18587,7 @@
                     <a:lstStyle/>
                     <a:p>
                       <a:pPr algn="ctr"/>
-                      <a:r>
-                        <a:rPr sz="900" b="0">
-                          <a:solidFill>
-                            <a:srgbClr val="1C1C1C"/>
-                          </a:solidFill>
-                          <a:latin typeface="Calibri"/>
-                        </a:rPr>
-                        <a:t/>
-                      </a:r>
+                      <a:endParaRPr/>
                     </a:p>
                   </a:txBody>
                   <a:tcPr marL="27432" marR="27432" marT="9144" marB="9144" anchor="ctr">
@@ -19091,6 +18596,11 @@
                     </a:solidFill>
                   </a:tcPr>
                 </a:tc>
+                <a:extLst>
+                  <a:ext uri="{0D108BD9-81ED-4DB2-BD59-A6C34878D82A}">
+                    <a16:rowId xmlns:a16="http://schemas.microsoft.com/office/drawing/2014/main" val="10006"/>
+                  </a:ext>
+                </a:extLst>
               </a:tr>
               <a:tr h="274320">
                 <a:tc>
@@ -19122,15 +18632,7 @@
                     <a:lstStyle/>
                     <a:p>
                       <a:pPr algn="ctr"/>
-                      <a:r>
-                        <a:rPr sz="900" b="0">
-                          <a:solidFill>
-                            <a:srgbClr val="1C1C1C"/>
-                          </a:solidFill>
-                          <a:latin typeface="Calibri"/>
-                        </a:rPr>
-                        <a:t/>
-                      </a:r>
+                      <a:endParaRPr/>
                     </a:p>
                   </a:txBody>
                   <a:tcPr marL="27432" marR="27432" marT="9144" marB="9144" anchor="ctr">
@@ -19145,15 +18647,7 @@
                     <a:lstStyle/>
                     <a:p>
                       <a:pPr algn="ctr"/>
-                      <a:r>
-                        <a:rPr sz="900" b="0">
-                          <a:solidFill>
-                            <a:srgbClr val="1C1C1C"/>
-                          </a:solidFill>
-                          <a:latin typeface="Calibri"/>
-                        </a:rPr>
-                        <a:t/>
-                      </a:r>
+                      <a:endParaRPr/>
                     </a:p>
                   </a:txBody>
                   <a:tcPr marL="27432" marR="27432" marT="9144" marB="9144" anchor="ctr">
@@ -19168,15 +18662,7 @@
                     <a:lstStyle/>
                     <a:p>
                       <a:pPr algn="ctr"/>
-                      <a:r>
-                        <a:rPr sz="900" b="0">
-                          <a:solidFill>
-                            <a:srgbClr val="1C1C1C"/>
-                          </a:solidFill>
-                          <a:latin typeface="Calibri"/>
-                        </a:rPr>
-                        <a:t/>
-                      </a:r>
+                      <a:endParaRPr/>
                     </a:p>
                   </a:txBody>
                   <a:tcPr marL="27432" marR="27432" marT="9144" marB="9144" anchor="ctr">
@@ -19191,15 +18677,7 @@
                     <a:lstStyle/>
                     <a:p>
                       <a:pPr algn="ctr"/>
-                      <a:r>
-                        <a:rPr sz="900" b="0">
-                          <a:solidFill>
-                            <a:srgbClr val="1C1C1C"/>
-                          </a:solidFill>
-                          <a:latin typeface="Calibri"/>
-                        </a:rPr>
-                        <a:t/>
-                      </a:r>
+                      <a:endParaRPr/>
                     </a:p>
                   </a:txBody>
                   <a:tcPr marL="27432" marR="27432" marT="9144" marB="9144" anchor="ctr">
@@ -19214,15 +18692,7 @@
                     <a:lstStyle/>
                     <a:p>
                       <a:pPr algn="ctr"/>
-                      <a:r>
-                        <a:rPr sz="900" b="0">
-                          <a:solidFill>
-                            <a:srgbClr val="1C1C1C"/>
-                          </a:solidFill>
-                          <a:latin typeface="Calibri"/>
-                        </a:rPr>
-                        <a:t/>
-                      </a:r>
+                      <a:endParaRPr/>
                     </a:p>
                   </a:txBody>
                   <a:tcPr marL="27432" marR="27432" marT="9144" marB="9144" anchor="ctr">
@@ -19237,15 +18707,7 @@
                     <a:lstStyle/>
                     <a:p>
                       <a:pPr algn="ctr"/>
-                      <a:r>
-                        <a:rPr sz="900" b="0">
-                          <a:solidFill>
-                            <a:srgbClr val="1C1C1C"/>
-                          </a:solidFill>
-                          <a:latin typeface="Calibri"/>
-                        </a:rPr>
-                        <a:t/>
-                      </a:r>
+                      <a:endParaRPr/>
                     </a:p>
                   </a:txBody>
                   <a:tcPr marL="27432" marR="27432" marT="9144" marB="9144" anchor="ctr">
@@ -19260,15 +18722,7 @@
                     <a:lstStyle/>
                     <a:p>
                       <a:pPr algn="ctr"/>
-                      <a:r>
-                        <a:rPr sz="900" b="0">
-                          <a:solidFill>
-                            <a:srgbClr val="1C1C1C"/>
-                          </a:solidFill>
-                          <a:latin typeface="Calibri"/>
-                        </a:rPr>
-                        <a:t/>
-                      </a:r>
+                      <a:endParaRPr/>
                     </a:p>
                   </a:txBody>
                   <a:tcPr marL="27432" marR="27432" marT="9144" marB="9144" anchor="ctr">
@@ -19283,15 +18737,7 @@
                     <a:lstStyle/>
                     <a:p>
                       <a:pPr algn="ctr"/>
-                      <a:r>
-                        <a:rPr sz="900" b="0">
-                          <a:solidFill>
-                            <a:srgbClr val="1C1C1C"/>
-                          </a:solidFill>
-                          <a:latin typeface="Calibri"/>
-                        </a:rPr>
-                        <a:t/>
-                      </a:r>
+                      <a:endParaRPr/>
                     </a:p>
                   </a:txBody>
                   <a:tcPr marL="27432" marR="27432" marT="9144" marB="9144" anchor="ctr">
@@ -19306,15 +18752,7 @@
                     <a:lstStyle/>
                     <a:p>
                       <a:pPr algn="ctr"/>
-                      <a:r>
-                        <a:rPr sz="900" b="0">
-                          <a:solidFill>
-                            <a:srgbClr val="1C1C1C"/>
-                          </a:solidFill>
-                          <a:latin typeface="Calibri"/>
-                        </a:rPr>
-                        <a:t/>
-                      </a:r>
+                      <a:endParaRPr/>
                     </a:p>
                   </a:txBody>
                   <a:tcPr marL="27432" marR="27432" marT="9144" marB="9144" anchor="ctr">
@@ -19329,15 +18767,7 @@
                     <a:lstStyle/>
                     <a:p>
                       <a:pPr algn="ctr"/>
-                      <a:r>
-                        <a:rPr sz="900" b="0">
-                          <a:solidFill>
-                            <a:srgbClr val="1C1C1C"/>
-                          </a:solidFill>
-                          <a:latin typeface="Calibri"/>
-                        </a:rPr>
-                        <a:t/>
-                      </a:r>
+                      <a:endParaRPr/>
                     </a:p>
                   </a:txBody>
                   <a:tcPr marL="27432" marR="27432" marT="9144" marB="9144" anchor="ctr">
@@ -19352,15 +18782,7 @@
                     <a:lstStyle/>
                     <a:p>
                       <a:pPr algn="ctr"/>
-                      <a:r>
-                        <a:rPr sz="900" b="0">
-                          <a:solidFill>
-                            <a:srgbClr val="1C1C1C"/>
-                          </a:solidFill>
-                          <a:latin typeface="Calibri"/>
-                        </a:rPr>
-                        <a:t/>
-                      </a:r>
+                      <a:endParaRPr/>
                     </a:p>
                   </a:txBody>
                   <a:tcPr marL="27432" marR="27432" marT="9144" marB="9144" anchor="ctr">
@@ -19375,15 +18797,7 @@
                     <a:lstStyle/>
                     <a:p>
                       <a:pPr algn="ctr"/>
-                      <a:r>
-                        <a:rPr sz="900" b="0">
-                          <a:solidFill>
-                            <a:srgbClr val="1C1C1C"/>
-                          </a:solidFill>
-                          <a:latin typeface="Calibri"/>
-                        </a:rPr>
-                        <a:t/>
-                      </a:r>
+                      <a:endParaRPr/>
                     </a:p>
                   </a:txBody>
                   <a:tcPr marL="27432" marR="27432" marT="9144" marB="9144" anchor="ctr">
@@ -19398,15 +18812,7 @@
                     <a:lstStyle/>
                     <a:p>
                       <a:pPr algn="ctr"/>
-                      <a:r>
-                        <a:rPr sz="900" b="0">
-                          <a:solidFill>
-                            <a:srgbClr val="1C1C1C"/>
-                          </a:solidFill>
-                          <a:latin typeface="Calibri"/>
-                        </a:rPr>
-                        <a:t/>
-                      </a:r>
+                      <a:endParaRPr/>
                     </a:p>
                   </a:txBody>
                   <a:tcPr marL="27432" marR="27432" marT="9144" marB="9144" anchor="ctr">
@@ -19421,15 +18827,7 @@
                     <a:lstStyle/>
                     <a:p>
                       <a:pPr algn="ctr"/>
-                      <a:r>
-                        <a:rPr sz="900" b="0">
-                          <a:solidFill>
-                            <a:srgbClr val="1C1C1C"/>
-                          </a:solidFill>
-                          <a:latin typeface="Calibri"/>
-                        </a:rPr>
-                        <a:t/>
-                      </a:r>
+                      <a:endParaRPr/>
                     </a:p>
                   </a:txBody>
                   <a:tcPr marL="27432" marR="27432" marT="9144" marB="9144" anchor="ctr">
@@ -19444,15 +18842,7 @@
                     <a:lstStyle/>
                     <a:p>
                       <a:pPr algn="ctr"/>
-                      <a:r>
-                        <a:rPr sz="900" b="0">
-                          <a:solidFill>
-                            <a:srgbClr val="1C1C1C"/>
-                          </a:solidFill>
-                          <a:latin typeface="Calibri"/>
-                        </a:rPr>
-                        <a:t/>
-                      </a:r>
+                      <a:endParaRPr/>
                     </a:p>
                   </a:txBody>
                   <a:tcPr marL="27432" marR="27432" marT="9144" marB="9144" anchor="ctr">
@@ -19467,15 +18857,7 @@
                     <a:lstStyle/>
                     <a:p>
                       <a:pPr algn="ctr"/>
-                      <a:r>
-                        <a:rPr sz="900" b="0">
-                          <a:solidFill>
-                            <a:srgbClr val="1C1C1C"/>
-                          </a:solidFill>
-                          <a:latin typeface="Calibri"/>
-                        </a:rPr>
-                        <a:t/>
-                      </a:r>
+                      <a:endParaRPr/>
                     </a:p>
                   </a:txBody>
                   <a:tcPr marL="27432" marR="27432" marT="9144" marB="9144" anchor="ctr">
@@ -19490,15 +18872,7 @@
                     <a:lstStyle/>
                     <a:p>
                       <a:pPr algn="ctr"/>
-                      <a:r>
-                        <a:rPr sz="900" b="0">
-                          <a:solidFill>
-                            <a:srgbClr val="1C1C1C"/>
-                          </a:solidFill>
-                          <a:latin typeface="Calibri"/>
-                        </a:rPr>
-                        <a:t/>
-                      </a:r>
+                      <a:endParaRPr/>
                     </a:p>
                   </a:txBody>
                   <a:tcPr marL="27432" marR="27432" marT="9144" marB="9144" anchor="ctr">
@@ -19513,15 +18887,7 @@
                     <a:lstStyle/>
                     <a:p>
                       <a:pPr algn="ctr"/>
-                      <a:r>
-                        <a:rPr sz="900" b="0">
-                          <a:solidFill>
-                            <a:srgbClr val="1C1C1C"/>
-                          </a:solidFill>
-                          <a:latin typeface="Calibri"/>
-                        </a:rPr>
-                        <a:t/>
-                      </a:r>
+                      <a:endParaRPr/>
                     </a:p>
                   </a:txBody>
                   <a:tcPr marL="27432" marR="27432" marT="9144" marB="9144" anchor="ctr">
@@ -19530,6 +18896,11 @@
                     </a:solidFill>
                   </a:tcPr>
                 </a:tc>
+                <a:extLst>
+                  <a:ext uri="{0D108BD9-81ED-4DB2-BD59-A6C34878D82A}">
+                    <a16:rowId xmlns:a16="http://schemas.microsoft.com/office/drawing/2014/main" val="10007"/>
+                  </a:ext>
+                </a:extLst>
               </a:tr>
               <a:tr h="274320">
                 <a:tc>
@@ -19561,15 +18932,7 @@
                     <a:lstStyle/>
                     <a:p>
                       <a:pPr algn="ctr"/>
-                      <a:r>
-                        <a:rPr sz="900" b="0">
-                          <a:solidFill>
-                            <a:srgbClr val="1C1C1C"/>
-                          </a:solidFill>
-                          <a:latin typeface="Calibri"/>
-                        </a:rPr>
-                        <a:t/>
-                      </a:r>
+                      <a:endParaRPr/>
                     </a:p>
                   </a:txBody>
                   <a:tcPr marL="27432" marR="27432" marT="9144" marB="9144" anchor="ctr">
@@ -19584,15 +18947,7 @@
                     <a:lstStyle/>
                     <a:p>
                       <a:pPr algn="ctr"/>
-                      <a:r>
-                        <a:rPr sz="900" b="0">
-                          <a:solidFill>
-                            <a:srgbClr val="1C1C1C"/>
-                          </a:solidFill>
-                          <a:latin typeface="Calibri"/>
-                        </a:rPr>
-                        <a:t/>
-                      </a:r>
+                      <a:endParaRPr/>
                     </a:p>
                   </a:txBody>
                   <a:tcPr marL="27432" marR="27432" marT="9144" marB="9144" anchor="ctr">
@@ -19607,15 +18962,7 @@
                     <a:lstStyle/>
                     <a:p>
                       <a:pPr algn="ctr"/>
-                      <a:r>
-                        <a:rPr sz="900" b="0">
-                          <a:solidFill>
-                            <a:srgbClr val="1C1C1C"/>
-                          </a:solidFill>
-                          <a:latin typeface="Calibri"/>
-                        </a:rPr>
-                        <a:t/>
-                      </a:r>
+                      <a:endParaRPr/>
                     </a:p>
                   </a:txBody>
                   <a:tcPr marL="27432" marR="27432" marT="9144" marB="9144" anchor="ctr">
@@ -19630,15 +18977,7 @@
                     <a:lstStyle/>
                     <a:p>
                       <a:pPr algn="ctr"/>
-                      <a:r>
-                        <a:rPr sz="900" b="0">
-                          <a:solidFill>
-                            <a:srgbClr val="1C1C1C"/>
-                          </a:solidFill>
-                          <a:latin typeface="Calibri"/>
-                        </a:rPr>
-                        <a:t/>
-                      </a:r>
+                      <a:endParaRPr/>
                     </a:p>
                   </a:txBody>
                   <a:tcPr marL="27432" marR="27432" marT="9144" marB="9144" anchor="ctr">
@@ -19653,15 +18992,7 @@
                     <a:lstStyle/>
                     <a:p>
                       <a:pPr algn="ctr"/>
-                      <a:r>
-                        <a:rPr sz="900" b="0">
-                          <a:solidFill>
-                            <a:srgbClr val="1C1C1C"/>
-                          </a:solidFill>
-                          <a:latin typeface="Calibri"/>
-                        </a:rPr>
-                        <a:t/>
-                      </a:r>
+                      <a:endParaRPr/>
                     </a:p>
                   </a:txBody>
                   <a:tcPr marL="27432" marR="27432" marT="9144" marB="9144" anchor="ctr">
@@ -19676,15 +19007,7 @@
                     <a:lstStyle/>
                     <a:p>
                       <a:pPr algn="ctr"/>
-                      <a:r>
-                        <a:rPr sz="900" b="0">
-                          <a:solidFill>
-                            <a:srgbClr val="1C1C1C"/>
-                          </a:solidFill>
-                          <a:latin typeface="Calibri"/>
-                        </a:rPr>
-                        <a:t/>
-                      </a:r>
+                      <a:endParaRPr/>
                     </a:p>
                   </a:txBody>
                   <a:tcPr marL="27432" marR="27432" marT="9144" marB="9144" anchor="ctr">
@@ -19699,15 +19022,7 @@
                     <a:lstStyle/>
                     <a:p>
                       <a:pPr algn="ctr"/>
-                      <a:r>
-                        <a:rPr sz="900" b="0">
-                          <a:solidFill>
-                            <a:srgbClr val="1C1C1C"/>
-                          </a:solidFill>
-                          <a:latin typeface="Calibri"/>
-                        </a:rPr>
-                        <a:t/>
-                      </a:r>
+                      <a:endParaRPr/>
                     </a:p>
                   </a:txBody>
                   <a:tcPr marL="27432" marR="27432" marT="9144" marB="9144" anchor="ctr">
@@ -19722,15 +19037,7 @@
                     <a:lstStyle/>
                     <a:p>
                       <a:pPr algn="ctr"/>
-                      <a:r>
-                        <a:rPr sz="900" b="0">
-                          <a:solidFill>
-                            <a:srgbClr val="1C1C1C"/>
-                          </a:solidFill>
-                          <a:latin typeface="Calibri"/>
-                        </a:rPr>
-                        <a:t/>
-                      </a:r>
+                      <a:endParaRPr/>
                     </a:p>
                   </a:txBody>
                   <a:tcPr marL="27432" marR="27432" marT="9144" marB="9144" anchor="ctr">
@@ -19745,15 +19052,7 @@
                     <a:lstStyle/>
                     <a:p>
                       <a:pPr algn="ctr"/>
-                      <a:r>
-                        <a:rPr sz="900" b="0">
-                          <a:solidFill>
-                            <a:srgbClr val="1C1C1C"/>
-                          </a:solidFill>
-                          <a:latin typeface="Calibri"/>
-                        </a:rPr>
-                        <a:t/>
-                      </a:r>
+                      <a:endParaRPr/>
                     </a:p>
                   </a:txBody>
                   <a:tcPr marL="27432" marR="27432" marT="9144" marB="9144" anchor="ctr">
@@ -19768,15 +19067,7 @@
                     <a:lstStyle/>
                     <a:p>
                       <a:pPr algn="ctr"/>
-                      <a:r>
-                        <a:rPr sz="900" b="0">
-                          <a:solidFill>
-                            <a:srgbClr val="1C1C1C"/>
-                          </a:solidFill>
-                          <a:latin typeface="Calibri"/>
-                        </a:rPr>
-                        <a:t/>
-                      </a:r>
+                      <a:endParaRPr/>
                     </a:p>
                   </a:txBody>
                   <a:tcPr marL="27432" marR="27432" marT="9144" marB="9144" anchor="ctr">
@@ -19791,15 +19082,7 @@
                     <a:lstStyle/>
                     <a:p>
                       <a:pPr algn="ctr"/>
-                      <a:r>
-                        <a:rPr sz="900" b="0">
-                          <a:solidFill>
-                            <a:srgbClr val="1C1C1C"/>
-                          </a:solidFill>
-                          <a:latin typeface="Calibri"/>
-                        </a:rPr>
-                        <a:t/>
-                      </a:r>
+                      <a:endParaRPr/>
                     </a:p>
                   </a:txBody>
                   <a:tcPr marL="27432" marR="27432" marT="9144" marB="9144" anchor="ctr">
@@ -19814,15 +19097,7 @@
                     <a:lstStyle/>
                     <a:p>
                       <a:pPr algn="ctr"/>
-                      <a:r>
-                        <a:rPr sz="900" b="0">
-                          <a:solidFill>
-                            <a:srgbClr val="1C1C1C"/>
-                          </a:solidFill>
-                          <a:latin typeface="Calibri"/>
-                        </a:rPr>
-                        <a:t/>
-                      </a:r>
+                      <a:endParaRPr/>
                     </a:p>
                   </a:txBody>
                   <a:tcPr marL="27432" marR="27432" marT="9144" marB="9144" anchor="ctr">
@@ -19837,15 +19112,7 @@
                     <a:lstStyle/>
                     <a:p>
                       <a:pPr algn="ctr"/>
-                      <a:r>
-                        <a:rPr sz="900" b="0">
-                          <a:solidFill>
-                            <a:srgbClr val="1C1C1C"/>
-                          </a:solidFill>
-                          <a:latin typeface="Calibri"/>
-                        </a:rPr>
-                        <a:t/>
-                      </a:r>
+                      <a:endParaRPr/>
                     </a:p>
                   </a:txBody>
                   <a:tcPr marL="27432" marR="27432" marT="9144" marB="9144" anchor="ctr">
@@ -19860,15 +19127,7 @@
                     <a:lstStyle/>
                     <a:p>
                       <a:pPr algn="ctr"/>
-                      <a:r>
-                        <a:rPr sz="900" b="0">
-                          <a:solidFill>
-                            <a:srgbClr val="1C1C1C"/>
-                          </a:solidFill>
-                          <a:latin typeface="Calibri"/>
-                        </a:rPr>
-                        <a:t/>
-                      </a:r>
+                      <a:endParaRPr/>
                     </a:p>
                   </a:txBody>
                   <a:tcPr marL="27432" marR="27432" marT="9144" marB="9144" anchor="ctr">
@@ -19883,15 +19142,7 @@
                     <a:lstStyle/>
                     <a:p>
                       <a:pPr algn="ctr"/>
-                      <a:r>
-                        <a:rPr sz="900" b="0">
-                          <a:solidFill>
-                            <a:srgbClr val="1C1C1C"/>
-                          </a:solidFill>
-                          <a:latin typeface="Calibri"/>
-                        </a:rPr>
-                        <a:t/>
-                      </a:r>
+                      <a:endParaRPr/>
                     </a:p>
                   </a:txBody>
                   <a:tcPr marL="27432" marR="27432" marT="9144" marB="9144" anchor="ctr">
@@ -19906,15 +19157,7 @@
                     <a:lstStyle/>
                     <a:p>
                       <a:pPr algn="ctr"/>
-                      <a:r>
-                        <a:rPr sz="900" b="0">
-                          <a:solidFill>
-                            <a:srgbClr val="1C1C1C"/>
-                          </a:solidFill>
-                          <a:latin typeface="Calibri"/>
-                        </a:rPr>
-                        <a:t/>
-                      </a:r>
+                      <a:endParaRPr/>
                     </a:p>
                   </a:txBody>
                   <a:tcPr marL="27432" marR="27432" marT="9144" marB="9144" anchor="ctr">
@@ -19929,15 +19172,7 @@
                     <a:lstStyle/>
                     <a:p>
                       <a:pPr algn="ctr"/>
-                      <a:r>
-                        <a:rPr sz="900" b="0">
-                          <a:solidFill>
-                            <a:srgbClr val="1C1C1C"/>
-                          </a:solidFill>
-                          <a:latin typeface="Calibri"/>
-                        </a:rPr>
-                        <a:t/>
-                      </a:r>
+                      <a:endParaRPr/>
                     </a:p>
                   </a:txBody>
                   <a:tcPr marL="27432" marR="27432" marT="9144" marB="9144" anchor="ctr">
@@ -19952,15 +19187,7 @@
                     <a:lstStyle/>
                     <a:p>
                       <a:pPr algn="ctr"/>
-                      <a:r>
-                        <a:rPr sz="900" b="0">
-                          <a:solidFill>
-                            <a:srgbClr val="1C1C1C"/>
-                          </a:solidFill>
-                          <a:latin typeface="Calibri"/>
-                        </a:rPr>
-                        <a:t/>
-                      </a:r>
+                      <a:endParaRPr/>
                     </a:p>
                   </a:txBody>
                   <a:tcPr marL="27432" marR="27432" marT="9144" marB="9144" anchor="ctr">
@@ -19969,6 +19196,11 @@
                     </a:solidFill>
                   </a:tcPr>
                 </a:tc>
+                <a:extLst>
+                  <a:ext uri="{0D108BD9-81ED-4DB2-BD59-A6C34878D82A}">
+                    <a16:rowId xmlns:a16="http://schemas.microsoft.com/office/drawing/2014/main" val="10008"/>
+                  </a:ext>
+                </a:extLst>
               </a:tr>
               <a:tr h="274320">
                 <a:tc>
@@ -20000,15 +19232,7 @@
                     <a:lstStyle/>
                     <a:p>
                       <a:pPr algn="ctr"/>
-                      <a:r>
-                        <a:rPr sz="900" b="0">
-                          <a:solidFill>
-                            <a:srgbClr val="1C1C1C"/>
-                          </a:solidFill>
-                          <a:latin typeface="Calibri"/>
-                        </a:rPr>
-                        <a:t/>
-                      </a:r>
+                      <a:endParaRPr/>
                     </a:p>
                   </a:txBody>
                   <a:tcPr marL="27432" marR="27432" marT="9144" marB="9144" anchor="ctr">
@@ -20023,15 +19247,7 @@
                     <a:lstStyle/>
                     <a:p>
                       <a:pPr algn="ctr"/>
-                      <a:r>
-                        <a:rPr sz="900" b="0">
-                          <a:solidFill>
-                            <a:srgbClr val="1C1C1C"/>
-                          </a:solidFill>
-                          <a:latin typeface="Calibri"/>
-                        </a:rPr>
-                        <a:t/>
-                      </a:r>
+                      <a:endParaRPr/>
                     </a:p>
                   </a:txBody>
                   <a:tcPr marL="27432" marR="27432" marT="9144" marB="9144" anchor="ctr">
@@ -20046,15 +19262,7 @@
                     <a:lstStyle/>
                     <a:p>
                       <a:pPr algn="ctr"/>
-                      <a:r>
-                        <a:rPr sz="900" b="0">
-                          <a:solidFill>
-                            <a:srgbClr val="1C1C1C"/>
-                          </a:solidFill>
-                          <a:latin typeface="Calibri"/>
-                        </a:rPr>
-                        <a:t/>
-                      </a:r>
+                      <a:endParaRPr/>
                     </a:p>
                   </a:txBody>
                   <a:tcPr marL="27432" marR="27432" marT="9144" marB="9144" anchor="ctr">
@@ -20069,15 +19277,7 @@
                     <a:lstStyle/>
                     <a:p>
                       <a:pPr algn="ctr"/>
-                      <a:r>
-                        <a:rPr sz="900" b="0">
-                          <a:solidFill>
-                            <a:srgbClr val="1C1C1C"/>
-                          </a:solidFill>
-                          <a:latin typeface="Calibri"/>
-                        </a:rPr>
-                        <a:t/>
-                      </a:r>
+                      <a:endParaRPr/>
                     </a:p>
                   </a:txBody>
                   <a:tcPr marL="27432" marR="27432" marT="9144" marB="9144" anchor="ctr">
@@ -20092,15 +19292,7 @@
                     <a:lstStyle/>
                     <a:p>
                       <a:pPr algn="ctr"/>
-                      <a:r>
-                        <a:rPr sz="900" b="0">
-                          <a:solidFill>
-                            <a:srgbClr val="1C1C1C"/>
-                          </a:solidFill>
-                          <a:latin typeface="Calibri"/>
-                        </a:rPr>
-                        <a:t/>
-                      </a:r>
+                      <a:endParaRPr/>
                     </a:p>
                   </a:txBody>
                   <a:tcPr marL="27432" marR="27432" marT="9144" marB="9144" anchor="ctr">
@@ -20115,15 +19307,7 @@
                     <a:lstStyle/>
                     <a:p>
                       <a:pPr algn="ctr"/>
-                      <a:r>
-                        <a:rPr sz="900" b="0">
-                          <a:solidFill>
-                            <a:srgbClr val="1C1C1C"/>
-                          </a:solidFill>
-                          <a:latin typeface="Calibri"/>
-                        </a:rPr>
-                        <a:t/>
-                      </a:r>
+                      <a:endParaRPr/>
                     </a:p>
                   </a:txBody>
                   <a:tcPr marL="27432" marR="27432" marT="9144" marB="9144" anchor="ctr">
@@ -20138,15 +19322,7 @@
                     <a:lstStyle/>
                     <a:p>
                       <a:pPr algn="ctr"/>
-                      <a:r>
-                        <a:rPr sz="900" b="0">
-                          <a:solidFill>
-                            <a:srgbClr val="1C1C1C"/>
-                          </a:solidFill>
-                          <a:latin typeface="Calibri"/>
-                        </a:rPr>
-                        <a:t/>
-                      </a:r>
+                      <a:endParaRPr/>
                     </a:p>
                   </a:txBody>
                   <a:tcPr marL="27432" marR="27432" marT="9144" marB="9144" anchor="ctr">
@@ -20161,15 +19337,7 @@
                     <a:lstStyle/>
                     <a:p>
                       <a:pPr algn="ctr"/>
-                      <a:r>
-                        <a:rPr sz="900" b="0">
-                          <a:solidFill>
-                            <a:srgbClr val="1C1C1C"/>
-                          </a:solidFill>
-                          <a:latin typeface="Calibri"/>
-                        </a:rPr>
-                        <a:t/>
-                      </a:r>
+                      <a:endParaRPr/>
                     </a:p>
                   </a:txBody>
                   <a:tcPr marL="27432" marR="27432" marT="9144" marB="9144" anchor="ctr">
@@ -20184,15 +19352,7 @@
                     <a:lstStyle/>
                     <a:p>
                       <a:pPr algn="ctr"/>
-                      <a:r>
-                        <a:rPr sz="900" b="0">
-                          <a:solidFill>
-                            <a:srgbClr val="1C1C1C"/>
-                          </a:solidFill>
-                          <a:latin typeface="Calibri"/>
-                        </a:rPr>
-                        <a:t/>
-                      </a:r>
+                      <a:endParaRPr/>
                     </a:p>
                   </a:txBody>
                   <a:tcPr marL="27432" marR="27432" marT="9144" marB="9144" anchor="ctr">
@@ -20207,15 +19367,7 @@
                     <a:lstStyle/>
                     <a:p>
                       <a:pPr algn="ctr"/>
-                      <a:r>
-                        <a:rPr sz="900" b="0">
-                          <a:solidFill>
-                            <a:srgbClr val="1C1C1C"/>
-                          </a:solidFill>
-                          <a:latin typeface="Calibri"/>
-                        </a:rPr>
-                        <a:t/>
-                      </a:r>
+                      <a:endParaRPr/>
                     </a:p>
                   </a:txBody>
                   <a:tcPr marL="27432" marR="27432" marT="9144" marB="9144" anchor="ctr">
@@ -20230,15 +19382,7 @@
                     <a:lstStyle/>
                     <a:p>
                       <a:pPr algn="ctr"/>
-                      <a:r>
-                        <a:rPr sz="900" b="0">
-                          <a:solidFill>
-                            <a:srgbClr val="1C1C1C"/>
-                          </a:solidFill>
-                          <a:latin typeface="Calibri"/>
-                        </a:rPr>
-                        <a:t/>
-                      </a:r>
+                      <a:endParaRPr/>
                     </a:p>
                   </a:txBody>
                   <a:tcPr marL="27432" marR="27432" marT="9144" marB="9144" anchor="ctr">
@@ -20253,15 +19397,7 @@
                     <a:lstStyle/>
                     <a:p>
                       <a:pPr algn="ctr"/>
-                      <a:r>
-                        <a:rPr sz="900" b="0">
-                          <a:solidFill>
-                            <a:srgbClr val="1C1C1C"/>
-                          </a:solidFill>
-                          <a:latin typeface="Calibri"/>
-                        </a:rPr>
-                        <a:t/>
-                      </a:r>
+                      <a:endParaRPr/>
                     </a:p>
                   </a:txBody>
                   <a:tcPr marL="27432" marR="27432" marT="9144" marB="9144" anchor="ctr">
@@ -20276,15 +19412,7 @@
                     <a:lstStyle/>
                     <a:p>
                       <a:pPr algn="ctr"/>
-                      <a:r>
-                        <a:rPr sz="900" b="0">
-                          <a:solidFill>
-                            <a:srgbClr val="1C1C1C"/>
-                          </a:solidFill>
-                          <a:latin typeface="Calibri"/>
-                        </a:rPr>
-                        <a:t/>
-                      </a:r>
+                      <a:endParaRPr/>
                     </a:p>
                   </a:txBody>
                   <a:tcPr marL="27432" marR="27432" marT="9144" marB="9144" anchor="ctr">
@@ -20299,15 +19427,7 @@
                     <a:lstStyle/>
                     <a:p>
                       <a:pPr algn="ctr"/>
-                      <a:r>
-                        <a:rPr sz="900" b="0">
-                          <a:solidFill>
-                            <a:srgbClr val="1C1C1C"/>
-                          </a:solidFill>
-                          <a:latin typeface="Calibri"/>
-                        </a:rPr>
-                        <a:t/>
-                      </a:r>
+                      <a:endParaRPr/>
                     </a:p>
                   </a:txBody>
                   <a:tcPr marL="27432" marR="27432" marT="9144" marB="9144" anchor="ctr">
@@ -20322,15 +19442,7 @@
                     <a:lstStyle/>
                     <a:p>
                       <a:pPr algn="ctr"/>
-                      <a:r>
-                        <a:rPr sz="900" b="0">
-                          <a:solidFill>
-                            <a:srgbClr val="1C1C1C"/>
-                          </a:solidFill>
-                          <a:latin typeface="Calibri"/>
-                        </a:rPr>
-                        <a:t/>
-                      </a:r>
+                      <a:endParaRPr/>
                     </a:p>
                   </a:txBody>
                   <a:tcPr marL="27432" marR="27432" marT="9144" marB="9144" anchor="ctr">
@@ -20345,15 +19457,7 @@
                     <a:lstStyle/>
                     <a:p>
                       <a:pPr algn="ctr"/>
-                      <a:r>
-                        <a:rPr sz="900" b="0">
-                          <a:solidFill>
-                            <a:srgbClr val="1C1C1C"/>
-                          </a:solidFill>
-                          <a:latin typeface="Calibri"/>
-                        </a:rPr>
-                        <a:t/>
-                      </a:r>
+                      <a:endParaRPr/>
                     </a:p>
                   </a:txBody>
                   <a:tcPr marL="27432" marR="27432" marT="9144" marB="9144" anchor="ctr">
@@ -20368,15 +19472,7 @@
                     <a:lstStyle/>
                     <a:p>
                       <a:pPr algn="ctr"/>
-                      <a:r>
-                        <a:rPr sz="900" b="0">
-                          <a:solidFill>
-                            <a:srgbClr val="1C1C1C"/>
-                          </a:solidFill>
-                          <a:latin typeface="Calibri"/>
-                        </a:rPr>
-                        <a:t/>
-                      </a:r>
+                      <a:endParaRPr/>
                     </a:p>
                   </a:txBody>
                   <a:tcPr marL="27432" marR="27432" marT="9144" marB="9144" anchor="ctr">
@@ -20391,15 +19487,7 @@
                     <a:lstStyle/>
                     <a:p>
                       <a:pPr algn="ctr"/>
-                      <a:r>
-                        <a:rPr sz="900" b="0">
-                          <a:solidFill>
-                            <a:srgbClr val="1C1C1C"/>
-                          </a:solidFill>
-                          <a:latin typeface="Calibri"/>
-                        </a:rPr>
-                        <a:t/>
-                      </a:r>
+                      <a:endParaRPr/>
                     </a:p>
                   </a:txBody>
                   <a:tcPr marL="27432" marR="27432" marT="9144" marB="9144" anchor="ctr">
@@ -20408,6 +19496,11 @@
                     </a:solidFill>
                   </a:tcPr>
                 </a:tc>
+                <a:extLst>
+                  <a:ext uri="{0D108BD9-81ED-4DB2-BD59-A6C34878D82A}">
+                    <a16:rowId xmlns:a16="http://schemas.microsoft.com/office/drawing/2014/main" val="10009"/>
+                  </a:ext>
+                </a:extLst>
               </a:tr>
               <a:tr h="274320">
                 <a:tc>
@@ -20439,15 +19532,7 @@
                     <a:lstStyle/>
                     <a:p>
                       <a:pPr algn="ctr"/>
-                      <a:r>
-                        <a:rPr sz="900" b="0">
-                          <a:solidFill>
-                            <a:srgbClr val="1C1C1C"/>
-                          </a:solidFill>
-                          <a:latin typeface="Calibri"/>
-                        </a:rPr>
-                        <a:t/>
-                      </a:r>
+                      <a:endParaRPr/>
                     </a:p>
                   </a:txBody>
                   <a:tcPr marL="27432" marR="27432" marT="9144" marB="9144" anchor="ctr">
@@ -20462,15 +19547,7 @@
                     <a:lstStyle/>
                     <a:p>
                       <a:pPr algn="ctr"/>
-                      <a:r>
-                        <a:rPr sz="900" b="0">
-                          <a:solidFill>
-                            <a:srgbClr val="1C1C1C"/>
-                          </a:solidFill>
-                          <a:latin typeface="Calibri"/>
-                        </a:rPr>
-                        <a:t/>
-                      </a:r>
+                      <a:endParaRPr/>
                     </a:p>
                   </a:txBody>
                   <a:tcPr marL="27432" marR="27432" marT="9144" marB="9144" anchor="ctr">
@@ -20485,15 +19562,7 @@
                     <a:lstStyle/>
                     <a:p>
                       <a:pPr algn="ctr"/>
-                      <a:r>
-                        <a:rPr sz="900" b="0">
-                          <a:solidFill>
-                            <a:srgbClr val="1C1C1C"/>
-                          </a:solidFill>
-                          <a:latin typeface="Calibri"/>
-                        </a:rPr>
-                        <a:t/>
-                      </a:r>
+                      <a:endParaRPr/>
                     </a:p>
                   </a:txBody>
                   <a:tcPr marL="27432" marR="27432" marT="9144" marB="9144" anchor="ctr">
@@ -20508,15 +19577,7 @@
                     <a:lstStyle/>
                     <a:p>
                       <a:pPr algn="ctr"/>
-                      <a:r>
-                        <a:rPr sz="900" b="0">
-                          <a:solidFill>
-                            <a:srgbClr val="1C1C1C"/>
-                          </a:solidFill>
-                          <a:latin typeface="Calibri"/>
-                        </a:rPr>
-                        <a:t/>
-                      </a:r>
+                      <a:endParaRPr/>
                     </a:p>
                   </a:txBody>
                   <a:tcPr marL="27432" marR="27432" marT="9144" marB="9144" anchor="ctr">
@@ -20531,15 +19592,7 @@
                     <a:lstStyle/>
                     <a:p>
                       <a:pPr algn="ctr"/>
-                      <a:r>
-                        <a:rPr sz="900" b="0">
-                          <a:solidFill>
-                            <a:srgbClr val="1C1C1C"/>
-                          </a:solidFill>
-                          <a:latin typeface="Calibri"/>
-                        </a:rPr>
-                        <a:t/>
-                      </a:r>
+                      <a:endParaRPr/>
                     </a:p>
                   </a:txBody>
                   <a:tcPr marL="27432" marR="27432" marT="9144" marB="9144" anchor="ctr">
@@ -20554,15 +19607,7 @@
                     <a:lstStyle/>
                     <a:p>
                       <a:pPr algn="ctr"/>
-                      <a:r>
-                        <a:rPr sz="900" b="0">
-                          <a:solidFill>
-                            <a:srgbClr val="1C1C1C"/>
-                          </a:solidFill>
-                          <a:latin typeface="Calibri"/>
-                        </a:rPr>
-                        <a:t/>
-                      </a:r>
+                      <a:endParaRPr/>
                     </a:p>
                   </a:txBody>
                   <a:tcPr marL="27432" marR="27432" marT="9144" marB="9144" anchor="ctr">
@@ -20577,15 +19622,7 @@
                     <a:lstStyle/>
                     <a:p>
                       <a:pPr algn="ctr"/>
-                      <a:r>
-                        <a:rPr sz="900" b="0">
-                          <a:solidFill>
-                            <a:srgbClr val="1C1C1C"/>
-                          </a:solidFill>
-                          <a:latin typeface="Calibri"/>
-                        </a:rPr>
-                        <a:t/>
-                      </a:r>
+                      <a:endParaRPr/>
                     </a:p>
                   </a:txBody>
                   <a:tcPr marL="27432" marR="27432" marT="9144" marB="9144" anchor="ctr">
@@ -20600,15 +19637,7 @@
                     <a:lstStyle/>
                     <a:p>
                       <a:pPr algn="ctr"/>
-                      <a:r>
-                        <a:rPr sz="900" b="0">
-                          <a:solidFill>
-                            <a:srgbClr val="1C1C1C"/>
-                          </a:solidFill>
-                          <a:latin typeface="Calibri"/>
-                        </a:rPr>
-                        <a:t/>
-                      </a:r>
+                      <a:endParaRPr/>
                     </a:p>
                   </a:txBody>
                   <a:tcPr marL="27432" marR="27432" marT="9144" marB="9144" anchor="ctr">
@@ -20623,15 +19652,7 @@
                     <a:lstStyle/>
                     <a:p>
                       <a:pPr algn="ctr"/>
-                      <a:r>
-                        <a:rPr sz="900" b="0">
-                          <a:solidFill>
-                            <a:srgbClr val="1C1C1C"/>
-                          </a:solidFill>
-                          <a:latin typeface="Calibri"/>
-                        </a:rPr>
-                        <a:t/>
-                      </a:r>
+                      <a:endParaRPr/>
                     </a:p>
                   </a:txBody>
                   <a:tcPr marL="27432" marR="27432" marT="9144" marB="9144" anchor="ctr">
@@ -20646,15 +19667,7 @@
                     <a:lstStyle/>
                     <a:p>
                       <a:pPr algn="ctr"/>
-                      <a:r>
-                        <a:rPr sz="900" b="0">
-                          <a:solidFill>
-                            <a:srgbClr val="1C1C1C"/>
-                          </a:solidFill>
-                          <a:latin typeface="Calibri"/>
-                        </a:rPr>
-                        <a:t/>
-                      </a:r>
+                      <a:endParaRPr/>
                     </a:p>
                   </a:txBody>
                   <a:tcPr marL="27432" marR="27432" marT="9144" marB="9144" anchor="ctr">
@@ -20669,15 +19682,7 @@
                     <a:lstStyle/>
                     <a:p>
                       <a:pPr algn="ctr"/>
-                      <a:r>
-                        <a:rPr sz="900" b="0">
-                          <a:solidFill>
-                            <a:srgbClr val="1C1C1C"/>
-                          </a:solidFill>
-                          <a:latin typeface="Calibri"/>
-                        </a:rPr>
-                        <a:t/>
-                      </a:r>
+                      <a:endParaRPr/>
                     </a:p>
                   </a:txBody>
                   <a:tcPr marL="27432" marR="27432" marT="9144" marB="9144" anchor="ctr">
@@ -20692,15 +19697,7 @@
                     <a:lstStyle/>
                     <a:p>
                       <a:pPr algn="ctr"/>
-                      <a:r>
-                        <a:rPr sz="900" b="0">
-                          <a:solidFill>
-                            <a:srgbClr val="1C1C1C"/>
-                          </a:solidFill>
-                          <a:latin typeface="Calibri"/>
-                        </a:rPr>
-                        <a:t/>
-                      </a:r>
+                      <a:endParaRPr/>
                     </a:p>
                   </a:txBody>
                   <a:tcPr marL="27432" marR="27432" marT="9144" marB="9144" anchor="ctr">
@@ -20715,15 +19712,7 @@
                     <a:lstStyle/>
                     <a:p>
                       <a:pPr algn="ctr"/>
-                      <a:r>
-                        <a:rPr sz="900" b="0">
-                          <a:solidFill>
-                            <a:srgbClr val="1C1C1C"/>
-                          </a:solidFill>
-                          <a:latin typeface="Calibri"/>
-                        </a:rPr>
-                        <a:t/>
-                      </a:r>
+                      <a:endParaRPr/>
                     </a:p>
                   </a:txBody>
                   <a:tcPr marL="27432" marR="27432" marT="9144" marB="9144" anchor="ctr">
@@ -20738,15 +19727,7 @@
                     <a:lstStyle/>
                     <a:p>
                       <a:pPr algn="ctr"/>
-                      <a:r>
-                        <a:rPr sz="900" b="0">
-                          <a:solidFill>
-                            <a:srgbClr val="1C1C1C"/>
-                          </a:solidFill>
-                          <a:latin typeface="Calibri"/>
-                        </a:rPr>
-                        <a:t/>
-                      </a:r>
+                      <a:endParaRPr/>
                     </a:p>
                   </a:txBody>
                   <a:tcPr marL="27432" marR="27432" marT="9144" marB="9144" anchor="ctr">
@@ -20761,15 +19742,7 @@
                     <a:lstStyle/>
                     <a:p>
                       <a:pPr algn="ctr"/>
-                      <a:r>
-                        <a:rPr sz="900" b="0">
-                          <a:solidFill>
-                            <a:srgbClr val="1C1C1C"/>
-                          </a:solidFill>
-                          <a:latin typeface="Calibri"/>
-                        </a:rPr>
-                        <a:t/>
-                      </a:r>
+                      <a:endParaRPr/>
                     </a:p>
                   </a:txBody>
                   <a:tcPr marL="27432" marR="27432" marT="9144" marB="9144" anchor="ctr">
@@ -20784,15 +19757,7 @@
                     <a:lstStyle/>
                     <a:p>
                       <a:pPr algn="ctr"/>
-                      <a:r>
-                        <a:rPr sz="900" b="0">
-                          <a:solidFill>
-                            <a:srgbClr val="1C1C1C"/>
-                          </a:solidFill>
-                          <a:latin typeface="Calibri"/>
-                        </a:rPr>
-                        <a:t/>
-                      </a:r>
+                      <a:endParaRPr/>
                     </a:p>
                   </a:txBody>
                   <a:tcPr marL="27432" marR="27432" marT="9144" marB="9144" anchor="ctr">
@@ -20807,15 +19772,7 @@
                     <a:lstStyle/>
                     <a:p>
                       <a:pPr algn="ctr"/>
-                      <a:r>
-                        <a:rPr sz="900" b="0">
-                          <a:solidFill>
-                            <a:srgbClr val="1C1C1C"/>
-                          </a:solidFill>
-                          <a:latin typeface="Calibri"/>
-                        </a:rPr>
-                        <a:t/>
-                      </a:r>
+                      <a:endParaRPr/>
                     </a:p>
                   </a:txBody>
                   <a:tcPr marL="27432" marR="27432" marT="9144" marB="9144" anchor="ctr">
@@ -20830,15 +19787,7 @@
                     <a:lstStyle/>
                     <a:p>
                       <a:pPr algn="ctr"/>
-                      <a:r>
-                        <a:rPr sz="900" b="0">
-                          <a:solidFill>
-                            <a:srgbClr val="1C1C1C"/>
-                          </a:solidFill>
-                          <a:latin typeface="Calibri"/>
-                        </a:rPr>
-                        <a:t/>
-                      </a:r>
+                      <a:endParaRPr/>
                     </a:p>
                   </a:txBody>
                   <a:tcPr marL="27432" marR="27432" marT="9144" marB="9144" anchor="ctr">
@@ -20847,6 +19796,11 @@
                     </a:solidFill>
                   </a:tcPr>
                 </a:tc>
+                <a:extLst>
+                  <a:ext uri="{0D108BD9-81ED-4DB2-BD59-A6C34878D82A}">
+                    <a16:rowId xmlns:a16="http://schemas.microsoft.com/office/drawing/2014/main" val="10010"/>
+                  </a:ext>
+                </a:extLst>
               </a:tr>
               <a:tr h="274320">
                 <a:tc>
@@ -20878,15 +19832,7 @@
                     <a:lstStyle/>
                     <a:p>
                       <a:pPr algn="ctr"/>
-                      <a:r>
-                        <a:rPr sz="900" b="0">
-                          <a:solidFill>
-                            <a:srgbClr val="1C1C1C"/>
-                          </a:solidFill>
-                          <a:latin typeface="Calibri"/>
-                        </a:rPr>
-                        <a:t/>
-                      </a:r>
+                      <a:endParaRPr/>
                     </a:p>
                   </a:txBody>
                   <a:tcPr marL="27432" marR="27432" marT="9144" marB="9144" anchor="ctr">
@@ -20901,15 +19847,7 @@
                     <a:lstStyle/>
                     <a:p>
                       <a:pPr algn="ctr"/>
-                      <a:r>
-                        <a:rPr sz="900" b="0">
-                          <a:solidFill>
-                            <a:srgbClr val="1C1C1C"/>
-                          </a:solidFill>
-                          <a:latin typeface="Calibri"/>
-                        </a:rPr>
-                        <a:t/>
-                      </a:r>
+                      <a:endParaRPr/>
                     </a:p>
                   </a:txBody>
                   <a:tcPr marL="27432" marR="27432" marT="9144" marB="9144" anchor="ctr">
@@ -20924,15 +19862,7 @@
                     <a:lstStyle/>
                     <a:p>
                       <a:pPr algn="ctr"/>
-                      <a:r>
-                        <a:rPr sz="900" b="0">
-                          <a:solidFill>
-                            <a:srgbClr val="1C1C1C"/>
-                          </a:solidFill>
-                          <a:latin typeface="Calibri"/>
-                        </a:rPr>
-                        <a:t/>
-                      </a:r>
+                      <a:endParaRPr/>
                     </a:p>
                   </a:txBody>
                   <a:tcPr marL="27432" marR="27432" marT="9144" marB="9144" anchor="ctr">
@@ -20947,15 +19877,7 @@
                     <a:lstStyle/>
                     <a:p>
                       <a:pPr algn="ctr"/>
-                      <a:r>
-                        <a:rPr sz="900" b="0">
-                          <a:solidFill>
-                            <a:srgbClr val="1C1C1C"/>
-                          </a:solidFill>
-                          <a:latin typeface="Calibri"/>
-                        </a:rPr>
-                        <a:t/>
-                      </a:r>
+                      <a:endParaRPr/>
                     </a:p>
                   </a:txBody>
                   <a:tcPr marL="27432" marR="27432" marT="9144" marB="9144" anchor="ctr">
@@ -20970,15 +19892,7 @@
                     <a:lstStyle/>
                     <a:p>
                       <a:pPr algn="ctr"/>
-                      <a:r>
-                        <a:rPr sz="900" b="0">
-                          <a:solidFill>
-                            <a:srgbClr val="1C1C1C"/>
-                          </a:solidFill>
-                          <a:latin typeface="Calibri"/>
-                        </a:rPr>
-                        <a:t/>
-                      </a:r>
+                      <a:endParaRPr/>
                     </a:p>
                   </a:txBody>
                   <a:tcPr marL="27432" marR="27432" marT="9144" marB="9144" anchor="ctr">
@@ -20993,15 +19907,7 @@
                     <a:lstStyle/>
                     <a:p>
                       <a:pPr algn="ctr"/>
-                      <a:r>
-                        <a:rPr sz="900" b="0">
-                          <a:solidFill>
-                            <a:srgbClr val="1C1C1C"/>
-                          </a:solidFill>
-                          <a:latin typeface="Calibri"/>
-                        </a:rPr>
-                        <a:t/>
-                      </a:r>
+                      <a:endParaRPr/>
                     </a:p>
                   </a:txBody>
                   <a:tcPr marL="27432" marR="27432" marT="9144" marB="9144" anchor="ctr">
@@ -21016,15 +19922,7 @@
                     <a:lstStyle/>
                     <a:p>
                       <a:pPr algn="ctr"/>
-                      <a:r>
-                        <a:rPr sz="900" b="0">
-                          <a:solidFill>
-                            <a:srgbClr val="1C1C1C"/>
-                          </a:solidFill>
-                          <a:latin typeface="Calibri"/>
-                        </a:rPr>
-                        <a:t/>
-                      </a:r>
+                      <a:endParaRPr/>
                     </a:p>
                   </a:txBody>
                   <a:tcPr marL="27432" marR="27432" marT="9144" marB="9144" anchor="ctr">
@@ -21039,15 +19937,7 @@
                     <a:lstStyle/>
                     <a:p>
                       <a:pPr algn="ctr"/>
-                      <a:r>
-                        <a:rPr sz="900" b="0">
-                          <a:solidFill>
-                            <a:srgbClr val="1C1C1C"/>
-                          </a:solidFill>
-                          <a:latin typeface="Calibri"/>
-                        </a:rPr>
-                        <a:t/>
-                      </a:r>
+                      <a:endParaRPr/>
                     </a:p>
                   </a:txBody>
                   <a:tcPr marL="27432" marR="27432" marT="9144" marB="9144" anchor="ctr">
@@ -21062,15 +19952,7 @@
                     <a:lstStyle/>
                     <a:p>
                       <a:pPr algn="ctr"/>
-                      <a:r>
-                        <a:rPr sz="900" b="0">
-                          <a:solidFill>
-                            <a:srgbClr val="1C1C1C"/>
-                          </a:solidFill>
-                          <a:latin typeface="Calibri"/>
-                        </a:rPr>
-                        <a:t/>
-                      </a:r>
+                      <a:endParaRPr/>
                     </a:p>
                   </a:txBody>
                   <a:tcPr marL="27432" marR="27432" marT="9144" marB="9144" anchor="ctr">
@@ -21085,15 +19967,7 @@
                     <a:lstStyle/>
                     <a:p>
                       <a:pPr algn="ctr"/>
-                      <a:r>
-                        <a:rPr sz="900" b="0">
-                          <a:solidFill>
-                            <a:srgbClr val="1C1C1C"/>
-                          </a:solidFill>
-                          <a:latin typeface="Calibri"/>
-                        </a:rPr>
-                        <a:t/>
-                      </a:r>
+                      <a:endParaRPr/>
                     </a:p>
                   </a:txBody>
                   <a:tcPr marL="27432" marR="27432" marT="9144" marB="9144" anchor="ctr">
@@ -21108,15 +19982,7 @@
                     <a:lstStyle/>
                     <a:p>
                       <a:pPr algn="ctr"/>
-                      <a:r>
-                        <a:rPr sz="900" b="0">
-                          <a:solidFill>
-                            <a:srgbClr val="1C1C1C"/>
-                          </a:solidFill>
-                          <a:latin typeface="Calibri"/>
-                        </a:rPr>
-                        <a:t/>
-                      </a:r>
+                      <a:endParaRPr/>
                     </a:p>
                   </a:txBody>
                   <a:tcPr marL="27432" marR="27432" marT="9144" marB="9144" anchor="ctr">
@@ -21131,15 +19997,7 @@
                     <a:lstStyle/>
                     <a:p>
                       <a:pPr algn="ctr"/>
-                      <a:r>
-                        <a:rPr sz="900" b="0">
-                          <a:solidFill>
-                            <a:srgbClr val="1C1C1C"/>
-                          </a:solidFill>
-                          <a:latin typeface="Calibri"/>
-                        </a:rPr>
-                        <a:t/>
-                      </a:r>
+                      <a:endParaRPr/>
                     </a:p>
                   </a:txBody>
                   <a:tcPr marL="27432" marR="27432" marT="9144" marB="9144" anchor="ctr">
@@ -21154,15 +20012,7 @@
                     <a:lstStyle/>
                     <a:p>
                       <a:pPr algn="ctr"/>
-                      <a:r>
-                        <a:rPr sz="900" b="0">
-                          <a:solidFill>
-                            <a:srgbClr val="1C1C1C"/>
-                          </a:solidFill>
-                          <a:latin typeface="Calibri"/>
-                        </a:rPr>
-                        <a:t/>
-                      </a:r>
+                      <a:endParaRPr/>
                     </a:p>
                   </a:txBody>
                   <a:tcPr marL="27432" marR="27432" marT="9144" marB="9144" anchor="ctr">
@@ -21177,15 +20027,7 @@
                     <a:lstStyle/>
                     <a:p>
                       <a:pPr algn="ctr"/>
-                      <a:r>
-                        <a:rPr sz="900" b="0">
-                          <a:solidFill>
-                            <a:srgbClr val="1C1C1C"/>
-                          </a:solidFill>
-                          <a:latin typeface="Calibri"/>
-                        </a:rPr>
-                        <a:t/>
-                      </a:r>
+                      <a:endParaRPr/>
                     </a:p>
                   </a:txBody>
                   <a:tcPr marL="27432" marR="27432" marT="9144" marB="9144" anchor="ctr">
@@ -21200,15 +20042,7 @@
                     <a:lstStyle/>
                     <a:p>
                       <a:pPr algn="ctr"/>
-                      <a:r>
-                        <a:rPr sz="900" b="0">
-                          <a:solidFill>
-                            <a:srgbClr val="1C1C1C"/>
-                          </a:solidFill>
-                          <a:latin typeface="Calibri"/>
-                        </a:rPr>
-                        <a:t/>
-                      </a:r>
+                      <a:endParaRPr/>
                     </a:p>
                   </a:txBody>
                   <a:tcPr marL="27432" marR="27432" marT="9144" marB="9144" anchor="ctr">
@@ -21223,15 +20057,7 @@
                     <a:lstStyle/>
                     <a:p>
                       <a:pPr algn="ctr"/>
-                      <a:r>
-                        <a:rPr sz="900" b="0">
-                          <a:solidFill>
-                            <a:srgbClr val="1C1C1C"/>
-                          </a:solidFill>
-                          <a:latin typeface="Calibri"/>
-                        </a:rPr>
-                        <a:t/>
-                      </a:r>
+                      <a:endParaRPr/>
                     </a:p>
                   </a:txBody>
                   <a:tcPr marL="27432" marR="27432" marT="9144" marB="9144" anchor="ctr">
@@ -21246,15 +20072,7 @@
                     <a:lstStyle/>
                     <a:p>
                       <a:pPr algn="ctr"/>
-                      <a:r>
-                        <a:rPr sz="900" b="0">
-                          <a:solidFill>
-                            <a:srgbClr val="1C1C1C"/>
-                          </a:solidFill>
-                          <a:latin typeface="Calibri"/>
-                        </a:rPr>
-                        <a:t/>
-                      </a:r>
+                      <a:endParaRPr/>
                     </a:p>
                   </a:txBody>
                   <a:tcPr marL="27432" marR="27432" marT="9144" marB="9144" anchor="ctr">
@@ -21269,15 +20087,7 @@
                     <a:lstStyle/>
                     <a:p>
                       <a:pPr algn="ctr"/>
-                      <a:r>
-                        <a:rPr sz="900" b="0">
-                          <a:solidFill>
-                            <a:srgbClr val="1C1C1C"/>
-                          </a:solidFill>
-                          <a:latin typeface="Calibri"/>
-                        </a:rPr>
-                        <a:t/>
-                      </a:r>
+                      <a:endParaRPr/>
                     </a:p>
                   </a:txBody>
                   <a:tcPr marL="27432" marR="27432" marT="9144" marB="9144" anchor="ctr">
@@ -21286,6 +20096,11 @@
                     </a:solidFill>
                   </a:tcPr>
                 </a:tc>
+                <a:extLst>
+                  <a:ext uri="{0D108BD9-81ED-4DB2-BD59-A6C34878D82A}">
+                    <a16:rowId xmlns:a16="http://schemas.microsoft.com/office/drawing/2014/main" val="10011"/>
+                  </a:ext>
+                </a:extLst>
               </a:tr>
               <a:tr h="274320">
                 <a:tc>
@@ -21317,15 +20132,7 @@
                     <a:lstStyle/>
                     <a:p>
                       <a:pPr algn="ctr"/>
-                      <a:r>
-                        <a:rPr sz="900" b="0">
-                          <a:solidFill>
-                            <a:srgbClr val="1C1C1C"/>
-                          </a:solidFill>
-                          <a:latin typeface="Calibri"/>
-                        </a:rPr>
-                        <a:t/>
-                      </a:r>
+                      <a:endParaRPr/>
                     </a:p>
                   </a:txBody>
                   <a:tcPr marL="27432" marR="27432" marT="9144" marB="9144" anchor="ctr">
@@ -21340,15 +20147,7 @@
                     <a:lstStyle/>
                     <a:p>
                       <a:pPr algn="ctr"/>
-                      <a:r>
-                        <a:rPr sz="900" b="0">
-                          <a:solidFill>
-                            <a:srgbClr val="1C1C1C"/>
-                          </a:solidFill>
-                          <a:latin typeface="Calibri"/>
-                        </a:rPr>
-                        <a:t/>
-                      </a:r>
+                      <a:endParaRPr/>
                     </a:p>
                   </a:txBody>
                   <a:tcPr marL="27432" marR="27432" marT="9144" marB="9144" anchor="ctr">
@@ -21363,15 +20162,7 @@
                     <a:lstStyle/>
                     <a:p>
                       <a:pPr algn="ctr"/>
-                      <a:r>
-                        <a:rPr sz="900" b="0">
-                          <a:solidFill>
-                            <a:srgbClr val="1C1C1C"/>
-                          </a:solidFill>
-                          <a:latin typeface="Calibri"/>
-                        </a:rPr>
-                        <a:t/>
-                      </a:r>
+                      <a:endParaRPr/>
                     </a:p>
                   </a:txBody>
                   <a:tcPr marL="27432" marR="27432" marT="9144" marB="9144" anchor="ctr">
@@ -21386,15 +20177,7 @@
                     <a:lstStyle/>
                     <a:p>
                       <a:pPr algn="ctr"/>
-                      <a:r>
-                        <a:rPr sz="900" b="0">
-                          <a:solidFill>
-                            <a:srgbClr val="1C1C1C"/>
-                          </a:solidFill>
-                          <a:latin typeface="Calibri"/>
-                        </a:rPr>
-                        <a:t/>
-                      </a:r>
+                      <a:endParaRPr/>
                     </a:p>
                   </a:txBody>
                   <a:tcPr marL="27432" marR="27432" marT="9144" marB="9144" anchor="ctr">
@@ -21409,15 +20192,7 @@
                     <a:lstStyle/>
                     <a:p>
                       <a:pPr algn="ctr"/>
-                      <a:r>
-                        <a:rPr sz="900" b="0">
-                          <a:solidFill>
-                            <a:srgbClr val="1C1C1C"/>
-                          </a:solidFill>
-                          <a:latin typeface="Calibri"/>
-                        </a:rPr>
-                        <a:t/>
-                      </a:r>
+                      <a:endParaRPr/>
                     </a:p>
                   </a:txBody>
                   <a:tcPr marL="27432" marR="27432" marT="9144" marB="9144" anchor="ctr">
@@ -21432,15 +20207,7 @@
                     <a:lstStyle/>
                     <a:p>
                       <a:pPr algn="ctr"/>
-                      <a:r>
-                        <a:rPr sz="900" b="0">
-                          <a:solidFill>
-                            <a:srgbClr val="1C1C1C"/>
-                          </a:solidFill>
-                          <a:latin typeface="Calibri"/>
-                        </a:rPr>
-                        <a:t/>
-                      </a:r>
+                      <a:endParaRPr/>
                     </a:p>
                   </a:txBody>
                   <a:tcPr marL="27432" marR="27432" marT="9144" marB="9144" anchor="ctr">
@@ -21455,15 +20222,7 @@
                     <a:lstStyle/>
                     <a:p>
                       <a:pPr algn="ctr"/>
-                      <a:r>
-                        <a:rPr sz="900" b="0">
-                          <a:solidFill>
-                            <a:srgbClr val="1C1C1C"/>
-                          </a:solidFill>
-                          <a:latin typeface="Calibri"/>
-                        </a:rPr>
-                        <a:t/>
-                      </a:r>
+                      <a:endParaRPr/>
                     </a:p>
                   </a:txBody>
                   <a:tcPr marL="27432" marR="27432" marT="9144" marB="9144" anchor="ctr">
@@ -21478,15 +20237,7 @@
                     <a:lstStyle/>
                     <a:p>
                       <a:pPr algn="ctr"/>
-                      <a:r>
-                        <a:rPr sz="900" b="0">
-                          <a:solidFill>
-                            <a:srgbClr val="1C1C1C"/>
-                          </a:solidFill>
-                          <a:latin typeface="Calibri"/>
-                        </a:rPr>
-                        <a:t/>
-                      </a:r>
+                      <a:endParaRPr/>
                     </a:p>
                   </a:txBody>
                   <a:tcPr marL="27432" marR="27432" marT="9144" marB="9144" anchor="ctr">
@@ -21501,15 +20252,7 @@
                     <a:lstStyle/>
                     <a:p>
                       <a:pPr algn="ctr"/>
-                      <a:r>
-                        <a:rPr sz="900" b="0">
-                          <a:solidFill>
-                            <a:srgbClr val="1C1C1C"/>
-                          </a:solidFill>
-                          <a:latin typeface="Calibri"/>
-                        </a:rPr>
-                        <a:t/>
-                      </a:r>
+                      <a:endParaRPr/>
                     </a:p>
                   </a:txBody>
                   <a:tcPr marL="27432" marR="27432" marT="9144" marB="9144" anchor="ctr">
@@ -21524,15 +20267,7 @@
                     <a:lstStyle/>
                     <a:p>
                       <a:pPr algn="ctr"/>
-                      <a:r>
-                        <a:rPr sz="900" b="0">
-                          <a:solidFill>
-                            <a:srgbClr val="1C1C1C"/>
-                          </a:solidFill>
-                          <a:latin typeface="Calibri"/>
-                        </a:rPr>
-                        <a:t/>
-                      </a:r>
+                      <a:endParaRPr/>
                     </a:p>
                   </a:txBody>
                   <a:tcPr marL="27432" marR="27432" marT="9144" marB="9144" anchor="ctr">
@@ -21547,15 +20282,7 @@
                     <a:lstStyle/>
                     <a:p>
                       <a:pPr algn="ctr"/>
-                      <a:r>
-                        <a:rPr sz="900" b="0">
-                          <a:solidFill>
-                            <a:srgbClr val="1C1C1C"/>
-                          </a:solidFill>
-                          <a:latin typeface="Calibri"/>
-                        </a:rPr>
-                        <a:t/>
-                      </a:r>
+                      <a:endParaRPr/>
                     </a:p>
                   </a:txBody>
                   <a:tcPr marL="27432" marR="27432" marT="9144" marB="9144" anchor="ctr">
@@ -21570,15 +20297,7 @@
                     <a:lstStyle/>
                     <a:p>
                       <a:pPr algn="ctr"/>
-                      <a:r>
-                        <a:rPr sz="900" b="0">
-                          <a:solidFill>
-                            <a:srgbClr val="1C1C1C"/>
-                          </a:solidFill>
-                          <a:latin typeface="Calibri"/>
-                        </a:rPr>
-                        <a:t/>
-                      </a:r>
+                      <a:endParaRPr/>
                     </a:p>
                   </a:txBody>
                   <a:tcPr marL="27432" marR="27432" marT="9144" marB="9144" anchor="ctr">
@@ -21593,15 +20312,7 @@
                     <a:lstStyle/>
                     <a:p>
                       <a:pPr algn="ctr"/>
-                      <a:r>
-                        <a:rPr sz="900" b="0">
-                          <a:solidFill>
-                            <a:srgbClr val="1C1C1C"/>
-                          </a:solidFill>
-                          <a:latin typeface="Calibri"/>
-                        </a:rPr>
-                        <a:t/>
-                      </a:r>
+                      <a:endParaRPr/>
                     </a:p>
                   </a:txBody>
                   <a:tcPr marL="27432" marR="27432" marT="9144" marB="9144" anchor="ctr">
@@ -21616,15 +20327,7 @@
                     <a:lstStyle/>
                     <a:p>
                       <a:pPr algn="ctr"/>
-                      <a:r>
-                        <a:rPr sz="900" b="0">
-                          <a:solidFill>
-                            <a:srgbClr val="1C1C1C"/>
-                          </a:solidFill>
-                          <a:latin typeface="Calibri"/>
-                        </a:rPr>
-                        <a:t/>
-                      </a:r>
+                      <a:endParaRPr/>
                     </a:p>
                   </a:txBody>
                   <a:tcPr marL="27432" marR="27432" marT="9144" marB="9144" anchor="ctr">
@@ -21639,15 +20342,7 @@
                     <a:lstStyle/>
                     <a:p>
                       <a:pPr algn="ctr"/>
-                      <a:r>
-                        <a:rPr sz="900" b="0">
-                          <a:solidFill>
-                            <a:srgbClr val="1C1C1C"/>
-                          </a:solidFill>
-                          <a:latin typeface="Calibri"/>
-                        </a:rPr>
-                        <a:t/>
-                      </a:r>
+                      <a:endParaRPr/>
                     </a:p>
                   </a:txBody>
                   <a:tcPr marL="27432" marR="27432" marT="9144" marB="9144" anchor="ctr">
@@ -21662,15 +20357,7 @@
                     <a:lstStyle/>
                     <a:p>
                       <a:pPr algn="ctr"/>
-                      <a:r>
-                        <a:rPr sz="900" b="0">
-                          <a:solidFill>
-                            <a:srgbClr val="1C1C1C"/>
-                          </a:solidFill>
-                          <a:latin typeface="Calibri"/>
-                        </a:rPr>
-                        <a:t/>
-                      </a:r>
+                      <a:endParaRPr/>
                     </a:p>
                   </a:txBody>
                   <a:tcPr marL="27432" marR="27432" marT="9144" marB="9144" anchor="ctr">
@@ -21685,15 +20372,7 @@
                     <a:lstStyle/>
                     <a:p>
                       <a:pPr algn="ctr"/>
-                      <a:r>
-                        <a:rPr sz="900" b="0">
-                          <a:solidFill>
-                            <a:srgbClr val="1C1C1C"/>
-                          </a:solidFill>
-                          <a:latin typeface="Calibri"/>
-                        </a:rPr>
-                        <a:t/>
-                      </a:r>
+                      <a:endParaRPr/>
                     </a:p>
                   </a:txBody>
                   <a:tcPr marL="27432" marR="27432" marT="9144" marB="9144" anchor="ctr">
@@ -21708,15 +20387,7 @@
                     <a:lstStyle/>
                     <a:p>
                       <a:pPr algn="ctr"/>
-                      <a:r>
-                        <a:rPr sz="900" b="0">
-                          <a:solidFill>
-                            <a:srgbClr val="1C1C1C"/>
-                          </a:solidFill>
-                          <a:latin typeface="Calibri"/>
-                        </a:rPr>
-                        <a:t/>
-                      </a:r>
+                      <a:endParaRPr/>
                     </a:p>
                   </a:txBody>
                   <a:tcPr marL="27432" marR="27432" marT="9144" marB="9144" anchor="ctr">
@@ -21725,6 +20396,11 @@
                     </a:solidFill>
                   </a:tcPr>
                 </a:tc>
+                <a:extLst>
+                  <a:ext uri="{0D108BD9-81ED-4DB2-BD59-A6C34878D82A}">
+                    <a16:rowId xmlns:a16="http://schemas.microsoft.com/office/drawing/2014/main" val="10012"/>
+                  </a:ext>
+                </a:extLst>
               </a:tr>
               <a:tr h="274320">
                 <a:tc>
@@ -21756,15 +20432,7 @@
                     <a:lstStyle/>
                     <a:p>
                       <a:pPr algn="ctr"/>
-                      <a:r>
-                        <a:rPr sz="800" b="1">
-                          <a:solidFill>
-                            <a:srgbClr val="FFFFFF"/>
-                          </a:solidFill>
-                          <a:latin typeface="Calibri"/>
-                        </a:rPr>
-                        <a:t/>
-                      </a:r>
+                      <a:endParaRPr/>
                     </a:p>
                   </a:txBody>
                   <a:tcPr marL="27432" marR="27432" marT="9144" marB="9144" anchor="ctr">
@@ -21779,15 +20447,7 @@
                     <a:lstStyle/>
                     <a:p>
                       <a:pPr algn="ctr"/>
-                      <a:r>
-                        <a:rPr sz="800" b="1">
-                          <a:solidFill>
-                            <a:srgbClr val="FFFFFF"/>
-                          </a:solidFill>
-                          <a:latin typeface="Calibri"/>
-                        </a:rPr>
-                        <a:t/>
-                      </a:r>
+                      <a:endParaRPr/>
                     </a:p>
                   </a:txBody>
                   <a:tcPr marL="27432" marR="27432" marT="9144" marB="9144" anchor="ctr">
@@ -21802,15 +20462,7 @@
                     <a:lstStyle/>
                     <a:p>
                       <a:pPr algn="ctr"/>
-                      <a:r>
-                        <a:rPr sz="800" b="1">
-                          <a:solidFill>
-                            <a:srgbClr val="FFFFFF"/>
-                          </a:solidFill>
-                          <a:latin typeface="Calibri"/>
-                        </a:rPr>
-                        <a:t/>
-                      </a:r>
+                      <a:endParaRPr/>
                     </a:p>
                   </a:txBody>
                   <a:tcPr marL="27432" marR="27432" marT="9144" marB="9144" anchor="ctr">
@@ -21848,15 +20500,7 @@
                     <a:lstStyle/>
                     <a:p>
                       <a:pPr algn="ctr"/>
-                      <a:r>
-                        <a:rPr sz="800" b="1">
-                          <a:solidFill>
-                            <a:srgbClr val="FFFFFF"/>
-                          </a:solidFill>
-                          <a:latin typeface="Calibri"/>
-                        </a:rPr>
-                        <a:t/>
-                      </a:r>
+                      <a:endParaRPr/>
                     </a:p>
                   </a:txBody>
                   <a:tcPr marL="27432" marR="27432" marT="9144" marB="9144" anchor="ctr">
@@ -21871,15 +20515,7 @@
                     <a:lstStyle/>
                     <a:p>
                       <a:pPr algn="ctr"/>
-                      <a:r>
-                        <a:rPr sz="800" b="1">
-                          <a:solidFill>
-                            <a:srgbClr val="FFFFFF"/>
-                          </a:solidFill>
-                          <a:latin typeface="Calibri"/>
-                        </a:rPr>
-                        <a:t/>
-                      </a:r>
+                      <a:endParaRPr/>
                     </a:p>
                   </a:txBody>
                   <a:tcPr marL="27432" marR="27432" marT="9144" marB="9144" anchor="ctr">
@@ -21894,15 +20530,7 @@
                     <a:lstStyle/>
                     <a:p>
                       <a:pPr algn="ctr"/>
-                      <a:r>
-                        <a:rPr sz="800" b="1">
-                          <a:solidFill>
-                            <a:srgbClr val="FFFFFF"/>
-                          </a:solidFill>
-                          <a:latin typeface="Calibri"/>
-                        </a:rPr>
-                        <a:t/>
-                      </a:r>
+                      <a:endParaRPr/>
                     </a:p>
                   </a:txBody>
                   <a:tcPr marL="27432" marR="27432" marT="9144" marB="9144" anchor="ctr">
@@ -21917,15 +20545,7 @@
                     <a:lstStyle/>
                     <a:p>
                       <a:pPr algn="ctr"/>
-                      <a:r>
-                        <a:rPr sz="800" b="1">
-                          <a:solidFill>
-                            <a:srgbClr val="FFFFFF"/>
-                          </a:solidFill>
-                          <a:latin typeface="Calibri"/>
-                        </a:rPr>
-                        <a:t/>
-                      </a:r>
+                      <a:endParaRPr/>
                     </a:p>
                   </a:txBody>
                   <a:tcPr marL="27432" marR="27432" marT="9144" marB="9144" anchor="ctr">
@@ -21986,15 +20606,7 @@
                     <a:lstStyle/>
                     <a:p>
                       <a:pPr algn="ctr"/>
-                      <a:r>
-                        <a:rPr sz="800" b="1">
-                          <a:solidFill>
-                            <a:srgbClr val="FFFFFF"/>
-                          </a:solidFill>
-                          <a:latin typeface="Calibri"/>
-                        </a:rPr>
-                        <a:t/>
-                      </a:r>
+                      <a:endParaRPr/>
                     </a:p>
                   </a:txBody>
                   <a:tcPr marL="27432" marR="27432" marT="9144" marB="9144" anchor="ctr">
@@ -22009,15 +20621,7 @@
                     <a:lstStyle/>
                     <a:p>
                       <a:pPr algn="ctr"/>
-                      <a:r>
-                        <a:rPr sz="800" b="1">
-                          <a:solidFill>
-                            <a:srgbClr val="FFFFFF"/>
-                          </a:solidFill>
-                          <a:latin typeface="Calibri"/>
-                        </a:rPr>
-                        <a:t/>
-                      </a:r>
+                      <a:endParaRPr/>
                     </a:p>
                   </a:txBody>
                   <a:tcPr marL="27432" marR="27432" marT="9144" marB="9144" anchor="ctr">
@@ -22032,15 +20636,7 @@
                     <a:lstStyle/>
                     <a:p>
                       <a:pPr algn="ctr"/>
-                      <a:r>
-                        <a:rPr sz="800" b="1">
-                          <a:solidFill>
-                            <a:srgbClr val="FFFFFF"/>
-                          </a:solidFill>
-                          <a:latin typeface="Calibri"/>
-                        </a:rPr>
-                        <a:t/>
-                      </a:r>
+                      <a:endParaRPr/>
                     </a:p>
                   </a:txBody>
                   <a:tcPr marL="27432" marR="27432" marT="9144" marB="9144" anchor="ctr">
@@ -22055,15 +20651,7 @@
                     <a:lstStyle/>
                     <a:p>
                       <a:pPr algn="ctr"/>
-                      <a:r>
-                        <a:rPr sz="800" b="1">
-                          <a:solidFill>
-                            <a:srgbClr val="FFFFFF"/>
-                          </a:solidFill>
-                          <a:latin typeface="Calibri"/>
-                        </a:rPr>
-                        <a:t/>
-                      </a:r>
+                      <a:endParaRPr/>
                     </a:p>
                   </a:txBody>
                   <a:tcPr marL="27432" marR="27432" marT="9144" marB="9144" anchor="ctr">
@@ -22101,15 +20689,7 @@
                     <a:lstStyle/>
                     <a:p>
                       <a:pPr algn="ctr"/>
-                      <a:r>
-                        <a:rPr sz="800" b="1">
-                          <a:solidFill>
-                            <a:srgbClr val="FFFFFF"/>
-                          </a:solidFill>
-                          <a:latin typeface="Calibri"/>
-                        </a:rPr>
-                        <a:t/>
-                      </a:r>
+                      <a:endParaRPr/>
                     </a:p>
                   </a:txBody>
                   <a:tcPr marL="27432" marR="27432" marT="9144" marB="9144" anchor="ctr">
@@ -22124,15 +20704,7 @@
                     <a:lstStyle/>
                     <a:p>
                       <a:pPr algn="ctr"/>
-                      <a:r>
-                        <a:rPr sz="800" b="1">
-                          <a:solidFill>
-                            <a:srgbClr val="FFFFFF"/>
-                          </a:solidFill>
-                          <a:latin typeface="Calibri"/>
-                        </a:rPr>
-                        <a:t/>
-                      </a:r>
+                      <a:endParaRPr/>
                     </a:p>
                   </a:txBody>
                   <a:tcPr marL="27432" marR="27432" marT="9144" marB="9144" anchor="ctr">
@@ -22164,6 +20736,11 @@
                     </a:solidFill>
                   </a:tcPr>
                 </a:tc>
+                <a:extLst>
+                  <a:ext uri="{0D108BD9-81ED-4DB2-BD59-A6C34878D82A}">
+                    <a16:rowId xmlns:a16="http://schemas.microsoft.com/office/drawing/2014/main" val="10013"/>
+                  </a:ext>
+                </a:extLst>
               </a:tr>
             </a:tbl>
           </a:graphicData>
@@ -22186,7 +20763,7 @@
           <a:noFill/>
         </p:spPr>
         <p:txBody>
-          <a:bodyPr wrap="square" anchor="t" lIns="73152" rIns="73152" tIns="36576" bIns="36576">
+          <a:bodyPr wrap="square" lIns="73152" tIns="36576" rIns="73152" bIns="36576" anchor="t">
             <a:spAutoFit/>
           </a:bodyPr>
           <a:lstStyle/>
@@ -22457,7 +21034,7 @@
           </a:fontRef>
         </p:style>
         <p:txBody>
-          <a:bodyPr rtlCol="0" anchor="ctr" wrap="square" tIns="54864" bIns="54864"/>
+          <a:bodyPr wrap="square" tIns="54864" bIns="54864" rtlCol="0" anchor="ctr"/>
           <a:lstStyle/>
           <a:p>
             <a:pPr algn="l">
@@ -22521,7 +21098,7 @@
           </a:fontRef>
         </p:style>
         <p:txBody>
-          <a:bodyPr rtlCol="0" anchor="ctr" wrap="square" tIns="54864" bIns="54864"/>
+          <a:bodyPr wrap="square" tIns="54864" bIns="54864" rtlCol="0" anchor="ctr"/>
           <a:lstStyle/>
           <a:p>
             <a:pPr algn="l">
@@ -22561,7 +21138,7 @@
           <a:noFill/>
         </p:spPr>
         <p:txBody>
-          <a:bodyPr wrap="square" anchor="t" lIns="73152" rIns="73152" tIns="36576" bIns="36576">
+          <a:bodyPr wrap="square" lIns="73152" tIns="36576" rIns="73152" bIns="36576" anchor="t">
             <a:spAutoFit/>
           </a:bodyPr>
           <a:lstStyle/>
@@ -22627,7 +21204,7 @@
           </a:fontRef>
         </p:style>
         <p:txBody>
-          <a:bodyPr rtlCol="0" anchor="t" wrap="square" tIns="54864" bIns="54864"/>
+          <a:bodyPr wrap="square" tIns="54864" bIns="54864" rtlCol="0" anchor="t"/>
           <a:lstStyle/>
           <a:p>
             <a:pPr algn="l">
@@ -22710,7 +21287,7 @@
           </a:fontRef>
         </p:style>
         <p:txBody>
-          <a:bodyPr rtlCol="0" anchor="t" wrap="square" tIns="54864" bIns="54864"/>
+          <a:bodyPr wrap="square" tIns="54864" bIns="54864" rtlCol="0" anchor="t"/>
           <a:lstStyle/>
           <a:p>
             <a:pPr algn="l">
@@ -22793,7 +21370,7 @@
           </a:fontRef>
         </p:style>
         <p:txBody>
-          <a:bodyPr rtlCol="0" anchor="t" wrap="square" tIns="54864" bIns="54864"/>
+          <a:bodyPr wrap="square" tIns="54864" bIns="54864" rtlCol="0" anchor="t"/>
           <a:lstStyle/>
           <a:p>
             <a:pPr algn="l">
@@ -22876,7 +21453,7 @@
           </a:fontRef>
         </p:style>
         <p:txBody>
-          <a:bodyPr rtlCol="0" anchor="t" wrap="square" tIns="54864" bIns="54864"/>
+          <a:bodyPr wrap="square" tIns="54864" bIns="54864" rtlCol="0" anchor="t"/>
           <a:lstStyle/>
           <a:p>
             <a:pPr algn="l">
@@ -22959,7 +21536,7 @@
           </a:fontRef>
         </p:style>
         <p:txBody>
-          <a:bodyPr rtlCol="0" anchor="t" wrap="square" tIns="54864" bIns="54864"/>
+          <a:bodyPr wrap="square" tIns="54864" bIns="54864" rtlCol="0" anchor="t"/>
           <a:lstStyle/>
           <a:p>
             <a:pPr algn="l">
@@ -23222,7 +21799,7 @@
           </a:fontRef>
         </p:style>
         <p:txBody>
-          <a:bodyPr rtlCol="0" anchor="ctr" wrap="square" tIns="54864" bIns="54864"/>
+          <a:bodyPr wrap="square" tIns="54864" bIns="54864" rtlCol="0" anchor="ctr"/>
           <a:lstStyle/>
           <a:p>
             <a:pPr algn="l">
@@ -23322,7 +21899,7 @@
           </a:fontRef>
         </p:style>
         <p:txBody>
-          <a:bodyPr rtlCol="0" anchor="t" wrap="square" tIns="54864" bIns="54864"/>
+          <a:bodyPr wrap="square" tIns="54864" bIns="54864" rtlCol="0" anchor="t"/>
           <a:lstStyle/>
           <a:p>
             <a:pPr algn="l">
@@ -23405,7 +21982,7 @@
           </a:fontRef>
         </p:style>
         <p:txBody>
-          <a:bodyPr rtlCol="0" anchor="t" wrap="square" tIns="54864" bIns="54864"/>
+          <a:bodyPr wrap="square" tIns="54864" bIns="54864" rtlCol="0" anchor="t"/>
           <a:lstStyle/>
           <a:p>
             <a:pPr algn="l">
@@ -23488,7 +22065,7 @@
           </a:fontRef>
         </p:style>
         <p:txBody>
-          <a:bodyPr rtlCol="0" anchor="t" wrap="square" tIns="54864" bIns="54864"/>
+          <a:bodyPr wrap="square" tIns="54864" bIns="54864" rtlCol="0" anchor="t"/>
           <a:lstStyle/>
           <a:p>
             <a:pPr algn="l">
@@ -23571,7 +22148,7 @@
           </a:fontRef>
         </p:style>
         <p:txBody>
-          <a:bodyPr rtlCol="0" anchor="t" wrap="square" tIns="54864" bIns="54864"/>
+          <a:bodyPr wrap="square" tIns="54864" bIns="54864" rtlCol="0" anchor="t"/>
           <a:lstStyle/>
           <a:p>
             <a:pPr algn="l">
@@ -23654,7 +22231,7 @@
           </a:fontRef>
         </p:style>
         <p:txBody>
-          <a:bodyPr rtlCol="0" anchor="t" wrap="square" tIns="54864" bIns="54864"/>
+          <a:bodyPr wrap="square" tIns="54864" bIns="54864" rtlCol="0" anchor="t"/>
           <a:lstStyle/>
           <a:p>
             <a:pPr algn="l">

--- a/Fase 1/Evidencias Grupales/Presentación Proyecto.pptx
+++ b/Fase 1/Evidencias Grupales/Presentación Proyecto.pptx
@@ -740,7 +740,7 @@
           <a:lstStyle/>
           <a:p>
             <a:r>
-              <a:t>0:30 · Edgar. Saludo a la comisión (gerencia de proyecto). Una frase: 'Guardián EPP convierte el video que la obra ya graba en eventos de incumplimiento de EPP con alerta, evidencia y analítica'. Reparto sugerido para que la participación sea equitativa (IE 13): Edgar láminas 1, 3 y 8 · Miguel láminas 4 y 5 · Liân láminas 6 y 7. Lámina 2: cada uno se presenta a sí mismo. Total 15 minutos.</a:t>
+              <a:t>0:30 · Edgar. Saludo a la comisión (gerencia de proyecto). Una frase: 'Guardián EPP convierte el video que la obra ya graba en eventos de incumplimiento de EPP con alerta, evidencia y analítica'. Reparto sugerido para que la participación sea equitativa (IE 13): Edgar láminas 1, 3 y 8 · Miguel láminas 4 y 5 · Lian láminas 6 y 7. Lámina 2: cada uno se presenta a sí mismo. Total 15 minutos.</a:t>
             </a:r>
           </a:p>
         </p:txBody>
@@ -837,7 +837,7 @@
           <a:lstStyle/>
           <a:p>
             <a:r>
-              <a:t>0:30 · Cada integrante dice su nombre, su rol y en una frase de qué responde. Edgar: visión, backend, datos e infraestructura. Miguel: bandeja, visor y reglas. Liân: analítica, reportes y administración. Roles cruzados: el etiquetado lo hacen los tres.</a:t>
+              <a:t>0:30 · Cada integrante dice su nombre, su rol y en una frase de qué responde. Edgar: visión, backend, datos e infraestructura. Miguel: bandeja, visor y reglas. Lian: analítica, reportes y administración. Roles cruzados: el etiquetado lo hacen los tres.</a:t>
             </a:r>
           </a:p>
         </p:txBody>
@@ -1225,7 +1225,7 @@
           <a:lstStyle/>
           <a:p>
             <a:r>
-              <a:t>2:30 · Liân. Contar el principio (integrar en S9) y luego pasar por las seis prácticas en una frase cada una. Ejemplo concreto del paralelismo: el diseño de la interfaz ya está aprobado y el contrato congelado, por eso el frontend empieza esta semana. Ejemplo de verificación: medimos los píxeles del casco y descubrimos que en un mismo encuadre hay zonas evaluables y zonas que no.</a:t>
+              <a:t>2:30 · Lian. Contar el principio (integrar en S9) y luego pasar por las seis prácticas en una frase cada una. Ejemplo concreto del paralelismo: el diseño de la interfaz ya está aprobado y el contrato congelado, por eso el frontend empieza esta semana. Ejemplo de verificación: medimos los píxeles del casco y descubrimos que en un mismo encuadre hay zonas evaluables y zonas que no.</a:t>
             </a:r>
           </a:p>
         </p:txBody>
@@ -1322,7 +1322,7 @@
           <a:lstStyle/>
           <a:p>
             <a:r>
-              <a:t>2:00 · Liân. Leer el cronograma por hitos, no por filas: H1 hoy; H2 en la S9 el recorrido completo funciona; H3 evaluación de avance en S10; H4 entrega v1.0.0 en S15; H5 defensa en S18. Señalar que el frontend corre en paralelo desde la S4 gracias al contrato congelado, y que el etiquetado (S5-S8) es la tarea que hacen los tres.</a:t>
+              <a:t>2:00 · Lian. Leer el cronograma por hitos, no por filas: H1 hoy; H2 en la S9 el recorrido completo funciona; H3 evaluación de avance en S10; H4 entrega v1.0.0 en S15; H5 defensa en S18. Señalar que el frontend corre en paralelo desde la S4 gracias al contrato congelado, y que el etiquetado (S5-S8) es la tarea que hacen los tres.</a:t>
             </a:r>
           </a:p>
         </p:txBody>
@@ -11936,7 +11936,7 @@
                 </a:solidFill>
                 <a:latin typeface="Calibri"/>
               </a:rPr>
-              <a:t>Edgar Tolentino  ·  Miguel Ortega  ·  Liân</a:t>
+              <a:t>Edgar Tolentino  ·  Miguel Ortega  ·  Lian Grandón</a:t>
             </a:r>
           </a:p>
           <a:p>
@@ -12651,7 +12651,7 @@
                   <a:cs typeface="Calibri"/>
                   <a:sym typeface="Calibri"/>
                 </a:rPr>
-                <a:t>Liân</a:t>
+                <a:t>Lian Grandón</a:t>
               </a:r>
               <a:endParaRPr sz="2600" b="0" i="0" u="none" strike="noStrike" cap="none">
                 <a:solidFill>

--- a/Fase 1/Evidencias Grupales/Presentación Proyecto.pptx
+++ b/Fase 1/Evidencias Grupales/Presentación Proyecto.pptx
@@ -249,8 +249,11 @@
     </a:lvl9pPr>
   </p:defaultTextStyle>
   <p:extLst>
+    <p:ext uri="{EFAFB233-063F-42B5-8137-9DF3F51BA10A}">
+      <p15:sldGuideLst xmlns:p15="http://schemas.microsoft.com/office/powerpoint/2012/main"/>
+    </p:ext>
     <p:ext uri="GoogleSlidesCustomDataVersion2">
-      <go:slidesCustomData xmlns:go="http://customooxmlschemas.google.com/" xmlns:ahyp="http://schemas.microsoft.com/office/drawing/2018/hyperlinkcolor" xmlns:p15="http://schemas.microsoft.com/office/powerpoint/2012/main" xmlns:p14="http://schemas.microsoft.com/office/powerpoint/2010/main" xmlns:com="http://schemas.openxmlformats.org/drawingml/2006/compatibility" xmlns:pvml="urn:schemas-microsoft-com:office:powerpoint" xmlns:v="urn:schemas-microsoft-com:vml" xmlns:o="urn:schemas-microsoft-com:office:office" xmlns:dgm="http://schemas.openxmlformats.org/drawingml/2006/diagram" xmlns:c="http://schemas.openxmlformats.org/drawingml/2006/chart" xmlns:mv="urn:schemas-microsoft-com:mac:vml" xmlns:mc="http://schemas.openxmlformats.org/markup-compatibility/2006" xmlns="" r:id="rId19" roundtripDataSignature="AMtx7mjJcngd7sXPErL8GQoYOiWWZ/u7uQ=="/>
+      <go:slidesCustomData xmlns="" xmlns:mc="http://schemas.openxmlformats.org/markup-compatibility/2006" xmlns:mv="urn:schemas-microsoft-com:mac:vml" xmlns:c="http://schemas.openxmlformats.org/drawingml/2006/chart" xmlns:dgm="http://schemas.openxmlformats.org/drawingml/2006/diagram" xmlns:o="urn:schemas-microsoft-com:office:office" xmlns:v="urn:schemas-microsoft-com:vml" xmlns:pvml="urn:schemas-microsoft-com:office:powerpoint" xmlns:com="http://schemas.openxmlformats.org/drawingml/2006/compatibility" xmlns:p14="http://schemas.microsoft.com/office/powerpoint/2010/main" xmlns:p15="http://schemas.microsoft.com/office/powerpoint/2012/main" xmlns:ahyp="http://schemas.microsoft.com/office/drawing/2018/hyperlinkcolor" xmlns:go="http://customooxmlschemas.google.com/" r:id="rId19" roundtripDataSignature="AMtx7mjJcngd7sXPErL8GQoYOiWWZ/u7uQ=="/>
     </p:ext>
   </p:extLst>
 </p:presentation>
@@ -1048,8 +1051,8 @@
         </p:nvSpPr>
         <p:spPr>
           <a:xfrm>
-            <a:off x="1143225" y="685800"/>
-            <a:ext cx="4572225" cy="3429000"/>
+            <a:off x="381000" y="685800"/>
+            <a:ext cx="6096000" cy="3429000"/>
           </a:xfrm>
           <a:custGeom>
             <a:avLst/>
@@ -11897,7 +11900,7 @@
           <a:noFill/>
         </p:spPr>
         <p:txBody>
-          <a:bodyPr wrap="square" anchor="t" lIns="73152" rIns="73152" tIns="36576" bIns="36576">
+          <a:bodyPr wrap="square" lIns="73152" tIns="36576" rIns="73152" bIns="36576" anchor="t">
             <a:spAutoFit/>
           </a:bodyPr>
           <a:lstStyle/>
@@ -13665,6 +13668,130 @@
           <a:chExt cx="0" cy="0"/>
         </a:xfrm>
       </p:grpSpPr>
+      <p:sp>
+        <p:nvSpPr>
+          <p:cNvPr id="5" name="Google Shape;124;p4">
+            <a:extLst>
+              <a:ext uri="{FF2B5EF4-FFF2-40B4-BE49-F238E27FC236}">
+                <a16:creationId xmlns:a16="http://schemas.microsoft.com/office/drawing/2014/main" id="{511A404B-790A-1C5C-2689-FFA73812F9C0}"/>
+              </a:ext>
+            </a:extLst>
+          </p:cNvPr>
+          <p:cNvSpPr/>
+          <p:nvPr/>
+        </p:nvSpPr>
+        <p:spPr>
+          <a:xfrm>
+            <a:off x="5994401" y="4732407"/>
+            <a:ext cx="5583082" cy="1575221"/>
+          </a:xfrm>
+          <a:prstGeom prst="roundRect">
+            <a:avLst>
+              <a:gd name="adj" fmla="val 16667"/>
+            </a:avLst>
+          </a:prstGeom>
+          <a:solidFill>
+            <a:schemeClr val="lt1"/>
+          </a:solidFill>
+          <a:ln w="12700" cap="flat" cmpd="sng">
+            <a:solidFill>
+              <a:schemeClr val="accent1"/>
+            </a:solidFill>
+            <a:prstDash val="solid"/>
+            <a:miter lim="8000"/>
+            <a:headEnd type="none" w="sm" len="sm"/>
+            <a:tailEnd type="none" w="sm" len="sm"/>
+          </a:ln>
+        </p:spPr>
+        <p:txBody>
+          <a:bodyPr spcFirstLastPara="1" wrap="square" lIns="91425" tIns="45700" rIns="91425" bIns="45700" anchor="ctr" anchorCtr="0">
+            <a:noAutofit/>
+          </a:bodyPr>
+          <a:lstStyle/>
+          <a:p>
+            <a:pPr marL="0" marR="0" lvl="0" indent="0" algn="just" rtl="0">
+              <a:spcBef>
+                <a:spcPts val="0"/>
+              </a:spcBef>
+              <a:spcAft>
+                <a:spcPts val="0"/>
+              </a:spcAft>
+              <a:buNone/>
+            </a:pPr>
+            <a:endParaRPr sz="1800" dirty="0">
+              <a:solidFill>
+                <a:schemeClr val="dk1"/>
+              </a:solidFill>
+              <a:latin typeface="Calibri"/>
+              <a:ea typeface="Calibri"/>
+              <a:cs typeface="Calibri"/>
+              <a:sym typeface="Calibri"/>
+            </a:endParaRPr>
+          </a:p>
+        </p:txBody>
+      </p:sp>
+      <p:sp>
+        <p:nvSpPr>
+          <p:cNvPr id="3" name="Google Shape;124;p4">
+            <a:extLst>
+              <a:ext uri="{FF2B5EF4-FFF2-40B4-BE49-F238E27FC236}">
+                <a16:creationId xmlns:a16="http://schemas.microsoft.com/office/drawing/2014/main" id="{0F40C7AB-8E0E-D587-66AC-A66F92081B36}"/>
+              </a:ext>
+            </a:extLst>
+          </p:cNvPr>
+          <p:cNvSpPr/>
+          <p:nvPr/>
+        </p:nvSpPr>
+        <p:spPr>
+          <a:xfrm>
+            <a:off x="614514" y="4732407"/>
+            <a:ext cx="5240145" cy="1575221"/>
+          </a:xfrm>
+          <a:prstGeom prst="roundRect">
+            <a:avLst>
+              <a:gd name="adj" fmla="val 16667"/>
+            </a:avLst>
+          </a:prstGeom>
+          <a:solidFill>
+            <a:schemeClr val="lt1"/>
+          </a:solidFill>
+          <a:ln w="12700" cap="flat" cmpd="sng">
+            <a:solidFill>
+              <a:schemeClr val="accent1"/>
+            </a:solidFill>
+            <a:prstDash val="solid"/>
+            <a:miter lim="8000"/>
+            <a:headEnd type="none" w="sm" len="sm"/>
+            <a:tailEnd type="none" w="sm" len="sm"/>
+          </a:ln>
+        </p:spPr>
+        <p:txBody>
+          <a:bodyPr spcFirstLastPara="1" wrap="square" lIns="91425" tIns="45700" rIns="91425" bIns="45700" anchor="ctr" anchorCtr="0">
+            <a:noAutofit/>
+          </a:bodyPr>
+          <a:lstStyle/>
+          <a:p>
+            <a:pPr marL="0" marR="0" lvl="0" indent="0" algn="just" rtl="0">
+              <a:spcBef>
+                <a:spcPts val="0"/>
+              </a:spcBef>
+              <a:spcAft>
+                <a:spcPts val="0"/>
+              </a:spcAft>
+              <a:buNone/>
+            </a:pPr>
+            <a:endParaRPr sz="1800" dirty="0">
+              <a:solidFill>
+                <a:schemeClr val="dk1"/>
+              </a:solidFill>
+              <a:latin typeface="Calibri"/>
+              <a:ea typeface="Calibri"/>
+              <a:cs typeface="Calibri"/>
+              <a:sym typeface="Calibri"/>
+            </a:endParaRPr>
+          </a:p>
+        </p:txBody>
+      </p:sp>
       <p:pic>
         <p:nvPicPr>
           <p:cNvPr id="119" name="Google Shape;119;p4" descr="EscuelaIT Duoc UC - Escuela de Informática y Telecomunicaciones Duoc UC - Duoc  UC | LinkedIn"/>
@@ -13929,7 +14056,7 @@
               <a:buNone/>
             </a:pPr>
             <a:r>
-              <a:rPr lang="es-CL" sz="1500">
+              <a:rPr lang="es-CL" sz="1500" dirty="0">
                 <a:solidFill>
                   <a:schemeClr val="dk1"/>
                 </a:solidFill>
@@ -13940,7 +14067,7 @@
               </a:rPr>
               <a:t>Desarrollar una plataforma web que detecte automáticamente, sobre video de una obra de construcción, el incumplimiento en el uso de elementos de protección personal, y que convierta cada detección en un evento gestionable, con alerta al responsable, evidencia asociada y analítica de tendencia, para anticipar condiciones inseguras en lugar de documentarlas después del accidente.</a:t>
             </a:r>
-            <a:endParaRPr sz="1800">
+            <a:endParaRPr sz="1800" dirty="0">
               <a:solidFill>
                 <a:schemeClr val="dk1"/>
               </a:solidFill>
@@ -13961,7 +14088,7 @@
         <p:spPr>
           <a:xfrm>
             <a:off x="614514" y="4732407"/>
-            <a:ext cx="5440680" cy="1575221"/>
+            <a:ext cx="5240145" cy="1575221"/>
           </a:xfrm>
           <a:prstGeom prst="roundRect">
             <a:avLst>
@@ -13995,7 +14122,7 @@
               <a:buNone/>
             </a:pPr>
             <a:r>
-              <a:rPr lang="es-CL" sz="1300">
+              <a:rPr lang="es-CL" sz="1300" dirty="0">
                 <a:solidFill>
                   <a:schemeClr val="dk1"/>
                 </a:solidFill>
@@ -14004,9 +14131,33 @@
                 <a:cs typeface="Calibri"/>
                 <a:sym typeface="Calibri"/>
               </a:rPr>
-              <a:t>1. Dataset propio: imágenes públicas para entrenar, video de obra para probar.</a:t>
+              <a:t>1. </a:t>
             </a:r>
-            <a:endParaRPr sz="1800">
+            <a:r>
+              <a:rPr lang="es-CL" sz="1300" dirty="0" err="1">
+                <a:solidFill>
+                  <a:schemeClr val="dk1"/>
+                </a:solidFill>
+                <a:latin typeface="Calibri"/>
+                <a:ea typeface="Calibri"/>
+                <a:cs typeface="Calibri"/>
+                <a:sym typeface="Calibri"/>
+              </a:rPr>
+              <a:t>Dataset</a:t>
+            </a:r>
+            <a:r>
+              <a:rPr lang="es-CL" sz="1300" dirty="0">
+                <a:solidFill>
+                  <a:schemeClr val="dk1"/>
+                </a:solidFill>
+                <a:latin typeface="Calibri"/>
+                <a:ea typeface="Calibri"/>
+                <a:cs typeface="Calibri"/>
+                <a:sym typeface="Calibri"/>
+              </a:rPr>
+              <a:t> propio: imágenes públicas para entrenar, video de obra para probar.</a:t>
+            </a:r>
+            <a:endParaRPr sz="1800" dirty="0">
               <a:solidFill>
                 <a:schemeClr val="dk1"/>
               </a:solidFill>
@@ -14026,13 +14177,121 @@
               </a:spcAft>
             </a:pPr>
             <a:r>
-              <a:rPr sz="1300" b="0" i="0">
+              <a:rPr sz="1300" b="0" i="0" dirty="0">
                 <a:solidFill>
                   <a:srgbClr val="1C1C1C"/>
                 </a:solidFill>
                 <a:latin typeface="Calibri"/>
               </a:rPr>
-              <a:t>2. Detector de casco y chaleco, evaluado por cuadro, evento y alerta.</a:t>
+              <a:t>2. Detector de casco y </a:t>
+            </a:r>
+            <a:r>
+              <a:rPr sz="1300" b="0" i="0" dirty="0" err="1">
+                <a:solidFill>
+                  <a:srgbClr val="1C1C1C"/>
+                </a:solidFill>
+                <a:latin typeface="Calibri"/>
+              </a:rPr>
+              <a:t>chaleco</a:t>
+            </a:r>
+            <a:r>
+              <a:rPr sz="1300" b="0" i="0" dirty="0">
+                <a:solidFill>
+                  <a:srgbClr val="1C1C1C"/>
+                </a:solidFill>
+                <a:latin typeface="Calibri"/>
+              </a:rPr>
+              <a:t>, </a:t>
+            </a:r>
+            <a:r>
+              <a:rPr sz="1300" b="0" i="0" dirty="0" err="1">
+                <a:solidFill>
+                  <a:srgbClr val="1C1C1C"/>
+                </a:solidFill>
+                <a:latin typeface="Calibri"/>
+              </a:rPr>
+              <a:t>evaluado</a:t>
+            </a:r>
+            <a:r>
+              <a:rPr sz="1300" b="0" i="0" dirty="0">
+                <a:solidFill>
+                  <a:srgbClr val="1C1C1C"/>
+                </a:solidFill>
+                <a:latin typeface="Calibri"/>
+              </a:rPr>
+              <a:t> </a:t>
+            </a:r>
+            <a:r>
+              <a:rPr sz="1300" b="0" i="0" dirty="0" err="1">
+                <a:solidFill>
+                  <a:srgbClr val="1C1C1C"/>
+                </a:solidFill>
+                <a:latin typeface="Calibri"/>
+              </a:rPr>
+              <a:t>por</a:t>
+            </a:r>
+            <a:r>
+              <a:rPr sz="1300" b="0" i="0" dirty="0">
+                <a:solidFill>
+                  <a:srgbClr val="1C1C1C"/>
+                </a:solidFill>
+                <a:latin typeface="Calibri"/>
+              </a:rPr>
+              <a:t> </a:t>
+            </a:r>
+            <a:r>
+              <a:rPr sz="1300" b="0" i="0" dirty="0" err="1">
+                <a:solidFill>
+                  <a:srgbClr val="1C1C1C"/>
+                </a:solidFill>
+                <a:latin typeface="Calibri"/>
+              </a:rPr>
+              <a:t>cuadro</a:t>
+            </a:r>
+            <a:r>
+              <a:rPr sz="1300" b="0" i="0" dirty="0">
+                <a:solidFill>
+                  <a:srgbClr val="1C1C1C"/>
+                </a:solidFill>
+                <a:latin typeface="Calibri"/>
+              </a:rPr>
+              <a:t>, </a:t>
+            </a:r>
+            <a:r>
+              <a:rPr sz="1300" b="0" i="0" dirty="0" err="1">
+                <a:solidFill>
+                  <a:srgbClr val="1C1C1C"/>
+                </a:solidFill>
+                <a:latin typeface="Calibri"/>
+              </a:rPr>
+              <a:t>evento</a:t>
+            </a:r>
+            <a:r>
+              <a:rPr sz="1300" b="0" i="0" dirty="0">
+                <a:solidFill>
+                  <a:srgbClr val="1C1C1C"/>
+                </a:solidFill>
+                <a:latin typeface="Calibri"/>
+              </a:rPr>
+              <a:t> y </a:t>
+            </a:r>
+            <a:r>
+              <a:rPr sz="1300" b="0" i="0" dirty="0" err="1">
+                <a:solidFill>
+                  <a:srgbClr val="1C1C1C"/>
+                </a:solidFill>
+                <a:latin typeface="Calibri"/>
+              </a:rPr>
+              <a:t>alerta</a:t>
+            </a:r>
+            <a:r>
+              <a:rPr sz="1300" b="0" i="0" dirty="0">
+                <a:solidFill>
+                  <a:srgbClr val="1C1C1C"/>
+                </a:solidFill>
+                <a:latin typeface="Calibri"/>
+              </a:rPr>
+              <a:t>.</a:t>
             </a:r>
           </a:p>
           <a:p>
@@ -14045,13 +14304,139 @@
               </a:spcAft>
             </a:pPr>
             <a:r>
-              <a:rPr sz="1300" b="0" i="0">
+              <a:rPr sz="1300" b="0" i="0" dirty="0">
                 <a:solidFill>
                   <a:srgbClr val="1C1C1C"/>
                 </a:solidFill>
                 <a:latin typeface="Calibri"/>
               </a:rPr>
-              <a:t>3. Detecciones convertidas en eventos con inicio, término, zona y evidencia.</a:t>
+              <a:t>3. </a:t>
+            </a:r>
+            <a:r>
+              <a:rPr sz="1300" b="0" i="0" dirty="0" err="1">
+                <a:solidFill>
+                  <a:srgbClr val="1C1C1C"/>
+                </a:solidFill>
+                <a:latin typeface="Calibri"/>
+              </a:rPr>
+              <a:t>Detecciones</a:t>
+            </a:r>
+            <a:r>
+              <a:rPr sz="1300" b="0" i="0" dirty="0">
+                <a:solidFill>
+                  <a:srgbClr val="1C1C1C"/>
+                </a:solidFill>
+                <a:latin typeface="Calibri"/>
+              </a:rPr>
+              <a:t> </a:t>
+            </a:r>
+            <a:r>
+              <a:rPr sz="1300" b="0" i="0" dirty="0" err="1">
+                <a:solidFill>
+                  <a:srgbClr val="1C1C1C"/>
+                </a:solidFill>
+                <a:latin typeface="Calibri"/>
+              </a:rPr>
+              <a:t>convertidas</a:t>
+            </a:r>
+            <a:r>
+              <a:rPr sz="1300" b="0" i="0" dirty="0">
+                <a:solidFill>
+                  <a:srgbClr val="1C1C1C"/>
+                </a:solidFill>
+                <a:latin typeface="Calibri"/>
+              </a:rPr>
+              <a:t> </a:t>
+            </a:r>
+            <a:r>
+              <a:rPr sz="1300" b="0" i="0" dirty="0" err="1">
+                <a:solidFill>
+                  <a:srgbClr val="1C1C1C"/>
+                </a:solidFill>
+                <a:latin typeface="Calibri"/>
+              </a:rPr>
+              <a:t>en</a:t>
+            </a:r>
+            <a:r>
+              <a:rPr sz="1300" b="0" i="0" dirty="0">
+                <a:solidFill>
+                  <a:srgbClr val="1C1C1C"/>
+                </a:solidFill>
+                <a:latin typeface="Calibri"/>
+              </a:rPr>
+              <a:t> </a:t>
+            </a:r>
+            <a:r>
+              <a:rPr sz="1300" b="0" i="0" dirty="0" err="1">
+                <a:solidFill>
+                  <a:srgbClr val="1C1C1C"/>
+                </a:solidFill>
+                <a:latin typeface="Calibri"/>
+              </a:rPr>
+              <a:t>eventos</a:t>
+            </a:r>
+            <a:r>
+              <a:rPr sz="1300" b="0" i="0" dirty="0">
+                <a:solidFill>
+                  <a:srgbClr val="1C1C1C"/>
+                </a:solidFill>
+                <a:latin typeface="Calibri"/>
+              </a:rPr>
+              <a:t> con </a:t>
+            </a:r>
+            <a:r>
+              <a:rPr sz="1300" b="0" i="0" dirty="0" err="1">
+                <a:solidFill>
+                  <a:srgbClr val="1C1C1C"/>
+                </a:solidFill>
+                <a:latin typeface="Calibri"/>
+              </a:rPr>
+              <a:t>inicio</a:t>
+            </a:r>
+            <a:r>
+              <a:rPr sz="1300" b="0" i="0" dirty="0">
+                <a:solidFill>
+                  <a:srgbClr val="1C1C1C"/>
+                </a:solidFill>
+                <a:latin typeface="Calibri"/>
+              </a:rPr>
+              <a:t>, </a:t>
+            </a:r>
+            <a:r>
+              <a:rPr sz="1300" b="0" i="0" dirty="0" err="1">
+                <a:solidFill>
+                  <a:srgbClr val="1C1C1C"/>
+                </a:solidFill>
+                <a:latin typeface="Calibri"/>
+              </a:rPr>
+              <a:t>término</a:t>
+            </a:r>
+            <a:r>
+              <a:rPr sz="1300" b="0" i="0" dirty="0">
+                <a:solidFill>
+                  <a:srgbClr val="1C1C1C"/>
+                </a:solidFill>
+                <a:latin typeface="Calibri"/>
+              </a:rPr>
+              <a:t>, zona y </a:t>
+            </a:r>
+            <a:r>
+              <a:rPr sz="1300" b="0" i="0" dirty="0" err="1">
+                <a:solidFill>
+                  <a:srgbClr val="1C1C1C"/>
+                </a:solidFill>
+                <a:latin typeface="Calibri"/>
+              </a:rPr>
+              <a:t>evidencia</a:t>
+            </a:r>
+            <a:r>
+              <a:rPr sz="1300" b="0" i="0" dirty="0">
+                <a:solidFill>
+                  <a:srgbClr val="1C1C1C"/>
+                </a:solidFill>
+                <a:latin typeface="Calibri"/>
+              </a:rPr>
+              <a:t>.</a:t>
             </a:r>
           </a:p>
           <a:p>
@@ -14064,13 +14449,121 @@
               </a:spcAft>
             </a:pPr>
             <a:r>
-              <a:rPr sz="1300" b="0" i="0">
+              <a:rPr sz="1300" b="0" i="0" dirty="0">
                 <a:solidFill>
                   <a:srgbClr val="1C1C1C"/>
                 </a:solidFill>
                 <a:latin typeface="Calibri"/>
               </a:rPr>
-              <a:t>4. Motor de reglas por zona, turno y severidad, sin tocar código.</a:t>
+              <a:t>4. Motor de </a:t>
+            </a:r>
+            <a:r>
+              <a:rPr sz="1300" b="0" i="0" dirty="0" err="1">
+                <a:solidFill>
+                  <a:srgbClr val="1C1C1C"/>
+                </a:solidFill>
+                <a:latin typeface="Calibri"/>
+              </a:rPr>
+              <a:t>reglas</a:t>
+            </a:r>
+            <a:r>
+              <a:rPr sz="1300" b="0" i="0" dirty="0">
+                <a:solidFill>
+                  <a:srgbClr val="1C1C1C"/>
+                </a:solidFill>
+                <a:latin typeface="Calibri"/>
+              </a:rPr>
+              <a:t> </a:t>
+            </a:r>
+            <a:r>
+              <a:rPr sz="1300" b="0" i="0" dirty="0" err="1">
+                <a:solidFill>
+                  <a:srgbClr val="1C1C1C"/>
+                </a:solidFill>
+                <a:latin typeface="Calibri"/>
+              </a:rPr>
+              <a:t>por</a:t>
+            </a:r>
+            <a:r>
+              <a:rPr sz="1300" b="0" i="0" dirty="0">
+                <a:solidFill>
+                  <a:srgbClr val="1C1C1C"/>
+                </a:solidFill>
+                <a:latin typeface="Calibri"/>
+              </a:rPr>
+              <a:t> zona, </a:t>
+            </a:r>
+            <a:r>
+              <a:rPr sz="1300" b="0" i="0" dirty="0" err="1">
+                <a:solidFill>
+                  <a:srgbClr val="1C1C1C"/>
+                </a:solidFill>
+                <a:latin typeface="Calibri"/>
+              </a:rPr>
+              <a:t>turno</a:t>
+            </a:r>
+            <a:r>
+              <a:rPr sz="1300" b="0" i="0" dirty="0">
+                <a:solidFill>
+                  <a:srgbClr val="1C1C1C"/>
+                </a:solidFill>
+                <a:latin typeface="Calibri"/>
+              </a:rPr>
+              <a:t> y </a:t>
+            </a:r>
+            <a:r>
+              <a:rPr sz="1300" b="0" i="0" dirty="0" err="1">
+                <a:solidFill>
+                  <a:srgbClr val="1C1C1C"/>
+                </a:solidFill>
+                <a:latin typeface="Calibri"/>
+              </a:rPr>
+              <a:t>severidad</a:t>
+            </a:r>
+            <a:r>
+              <a:rPr sz="1300" b="0" i="0" dirty="0">
+                <a:solidFill>
+                  <a:srgbClr val="1C1C1C"/>
+                </a:solidFill>
+                <a:latin typeface="Calibri"/>
+              </a:rPr>
+              <a:t>, sin </a:t>
+            </a:r>
+            <a:r>
+              <a:rPr sz="1300" b="0" i="0" dirty="0" err="1">
+                <a:solidFill>
+                  <a:srgbClr val="1C1C1C"/>
+                </a:solidFill>
+                <a:latin typeface="Calibri"/>
+              </a:rPr>
+              <a:t>tocar</a:t>
+            </a:r>
+            <a:r>
+              <a:rPr sz="1300" b="0" i="0" dirty="0">
+                <a:solidFill>
+                  <a:srgbClr val="1C1C1C"/>
+                </a:solidFill>
+                <a:latin typeface="Calibri"/>
+              </a:rPr>
+              <a:t> </a:t>
+            </a:r>
+            <a:r>
+              <a:rPr sz="1300" b="0" i="0" dirty="0" err="1">
+                <a:solidFill>
+                  <a:srgbClr val="1C1C1C"/>
+                </a:solidFill>
+                <a:latin typeface="Calibri"/>
+              </a:rPr>
+              <a:t>código</a:t>
+            </a:r>
+            <a:r>
+              <a:rPr sz="1300" b="0" i="0" dirty="0">
+                <a:solidFill>
+                  <a:srgbClr val="1C1C1C"/>
+                </a:solidFill>
+                <a:latin typeface="Calibri"/>
+              </a:rPr>
+              <a:t>.</a:t>
             </a:r>
           </a:p>
         </p:txBody>
@@ -14083,8 +14576,8 @@
         </p:nvSpPr>
         <p:spPr>
           <a:xfrm>
-            <a:off x="6263640" y="4732407"/>
-            <a:ext cx="5349240" cy="1575221"/>
+            <a:off x="6263640" y="5006030"/>
+            <a:ext cx="5349240" cy="1027974"/>
           </a:xfrm>
           <a:prstGeom prst="rect">
             <a:avLst/>
@@ -14092,7 +14585,7 @@
           <a:noFill/>
         </p:spPr>
         <p:txBody>
-          <a:bodyPr wrap="square" anchor="t" lIns="73152" rIns="73152" tIns="36576" bIns="36576">
+          <a:bodyPr wrap="square" lIns="73152" tIns="36576" rIns="73152" bIns="36576" anchor="t">
             <a:spAutoFit/>
           </a:bodyPr>
           <a:lstStyle/>
@@ -14106,13 +14599,139 @@
               </a:spcAft>
             </a:pPr>
             <a:r>
-              <a:rPr sz="1300" b="0" i="0">
+              <a:rPr sz="1300" b="0" i="0" dirty="0">
                 <a:solidFill>
                   <a:srgbClr val="1C1C1C"/>
                 </a:solidFill>
                 <a:latin typeface="Calibri"/>
               </a:rPr>
-              <a:t>5. Alertas con acuse de recibo y presupuesto de avisos por turno.</a:t>
+              <a:t>5. </a:t>
+            </a:r>
+            <a:r>
+              <a:rPr sz="1300" b="0" i="0" dirty="0" err="1">
+                <a:solidFill>
+                  <a:srgbClr val="1C1C1C"/>
+                </a:solidFill>
+                <a:latin typeface="Calibri"/>
+              </a:rPr>
+              <a:t>Alertas</a:t>
+            </a:r>
+            <a:r>
+              <a:rPr sz="1300" b="0" i="0" dirty="0">
+                <a:solidFill>
+                  <a:srgbClr val="1C1C1C"/>
+                </a:solidFill>
+                <a:latin typeface="Calibri"/>
+              </a:rPr>
+              <a:t> con </a:t>
+            </a:r>
+            <a:r>
+              <a:rPr sz="1300" b="0" i="0" dirty="0" err="1">
+                <a:solidFill>
+                  <a:srgbClr val="1C1C1C"/>
+                </a:solidFill>
+                <a:latin typeface="Calibri"/>
+              </a:rPr>
+              <a:t>acuse</a:t>
+            </a:r>
+            <a:r>
+              <a:rPr sz="1300" b="0" i="0" dirty="0">
+                <a:solidFill>
+                  <a:srgbClr val="1C1C1C"/>
+                </a:solidFill>
+                <a:latin typeface="Calibri"/>
+              </a:rPr>
+              <a:t> de </a:t>
+            </a:r>
+            <a:r>
+              <a:rPr sz="1300" b="0" i="0" dirty="0" err="1">
+                <a:solidFill>
+                  <a:srgbClr val="1C1C1C"/>
+                </a:solidFill>
+                <a:latin typeface="Calibri"/>
+              </a:rPr>
+              <a:t>recibo</a:t>
+            </a:r>
+            <a:r>
+              <a:rPr sz="1300" b="0" i="0" dirty="0">
+                <a:solidFill>
+                  <a:srgbClr val="1C1C1C"/>
+                </a:solidFill>
+                <a:latin typeface="Calibri"/>
+              </a:rPr>
+              <a:t> y </a:t>
+            </a:r>
+            <a:r>
+              <a:rPr sz="1300" b="0" i="0" dirty="0" err="1">
+                <a:solidFill>
+                  <a:srgbClr val="1C1C1C"/>
+                </a:solidFill>
+                <a:latin typeface="Calibri"/>
+              </a:rPr>
+              <a:t>presupuesto</a:t>
+            </a:r>
+            <a:r>
+              <a:rPr sz="1300" b="0" i="0" dirty="0">
+                <a:solidFill>
+                  <a:srgbClr val="1C1C1C"/>
+                </a:solidFill>
+                <a:latin typeface="Calibri"/>
+              </a:rPr>
+              <a:t> de </a:t>
+            </a:r>
+            <a:r>
+              <a:rPr sz="1300" b="0" i="0" dirty="0" err="1">
+                <a:solidFill>
+                  <a:srgbClr val="1C1C1C"/>
+                </a:solidFill>
+                <a:latin typeface="Calibri"/>
+              </a:rPr>
+              <a:t>avisos</a:t>
+            </a:r>
+            <a:r>
+              <a:rPr sz="1300" b="0" i="0" dirty="0">
+                <a:solidFill>
+                  <a:srgbClr val="1C1C1C"/>
+                </a:solidFill>
+                <a:latin typeface="Calibri"/>
+              </a:rPr>
+              <a:t> </a:t>
+            </a:r>
+            <a:r>
+              <a:rPr sz="1300" b="0" i="0" dirty="0" err="1">
+                <a:solidFill>
+                  <a:srgbClr val="1C1C1C"/>
+                </a:solidFill>
+                <a:latin typeface="Calibri"/>
+              </a:rPr>
+              <a:t>por</a:t>
+            </a:r>
+            <a:r>
+              <a:rPr sz="1300" b="0" i="0" dirty="0">
+                <a:solidFill>
+                  <a:srgbClr val="1C1C1C"/>
+                </a:solidFill>
+                <a:latin typeface="Calibri"/>
+              </a:rPr>
+              <a:t> </a:t>
+            </a:r>
+            <a:r>
+              <a:rPr sz="1300" b="0" i="0" dirty="0" err="1">
+                <a:solidFill>
+                  <a:srgbClr val="1C1C1C"/>
+                </a:solidFill>
+                <a:latin typeface="Calibri"/>
+              </a:rPr>
+              <a:t>turno</a:t>
+            </a:r>
+            <a:r>
+              <a:rPr sz="1300" b="0" i="0" dirty="0">
+                <a:solidFill>
+                  <a:srgbClr val="1C1C1C"/>
+                </a:solidFill>
+                <a:latin typeface="Calibri"/>
+              </a:rPr>
+              <a:t>.</a:t>
             </a:r>
           </a:p>
           <a:p>
@@ -14125,13 +14744,103 @@
               </a:spcAft>
             </a:pPr>
             <a:r>
-              <a:rPr sz="1300" b="0" i="0">
+              <a:rPr sz="1300" b="0" i="0" dirty="0">
                 <a:solidFill>
                   <a:srgbClr val="1C1C1C"/>
                 </a:solidFill>
                 <a:latin typeface="Calibri"/>
               </a:rPr>
-              <a:t>6. Web: bandeja, visor de evidencia, reglas y tablero de analítica.</a:t>
+              <a:t>6. Web: </a:t>
+            </a:r>
+            <a:r>
+              <a:rPr sz="1300" b="0" i="0" dirty="0" err="1">
+                <a:solidFill>
+                  <a:srgbClr val="1C1C1C"/>
+                </a:solidFill>
+                <a:latin typeface="Calibri"/>
+              </a:rPr>
+              <a:t>bandeja</a:t>
+            </a:r>
+            <a:r>
+              <a:rPr sz="1300" b="0" i="0" dirty="0">
+                <a:solidFill>
+                  <a:srgbClr val="1C1C1C"/>
+                </a:solidFill>
+                <a:latin typeface="Calibri"/>
+              </a:rPr>
+              <a:t>, visor de </a:t>
+            </a:r>
+            <a:r>
+              <a:rPr sz="1300" b="0" i="0" dirty="0" err="1">
+                <a:solidFill>
+                  <a:srgbClr val="1C1C1C"/>
+                </a:solidFill>
+                <a:latin typeface="Calibri"/>
+              </a:rPr>
+              <a:t>evidencia</a:t>
+            </a:r>
+            <a:r>
+              <a:rPr sz="1300" b="0" i="0" dirty="0">
+                <a:solidFill>
+                  <a:srgbClr val="1C1C1C"/>
+                </a:solidFill>
+                <a:latin typeface="Calibri"/>
+              </a:rPr>
+              <a:t>, </a:t>
+            </a:r>
+            <a:r>
+              <a:rPr sz="1300" b="0" i="0" dirty="0" err="1">
+                <a:solidFill>
+                  <a:srgbClr val="1C1C1C"/>
+                </a:solidFill>
+                <a:latin typeface="Calibri"/>
+              </a:rPr>
+              <a:t>reglas</a:t>
+            </a:r>
+            <a:r>
+              <a:rPr sz="1300" b="0" i="0" dirty="0">
+                <a:solidFill>
+                  <a:srgbClr val="1C1C1C"/>
+                </a:solidFill>
+                <a:latin typeface="Calibri"/>
+              </a:rPr>
+              <a:t> y </a:t>
+            </a:r>
+            <a:r>
+              <a:rPr sz="1300" b="0" i="0" dirty="0" err="1">
+                <a:solidFill>
+                  <a:srgbClr val="1C1C1C"/>
+                </a:solidFill>
+                <a:latin typeface="Calibri"/>
+              </a:rPr>
+              <a:t>tablero</a:t>
+            </a:r>
+            <a:r>
+              <a:rPr sz="1300" b="0" i="0" dirty="0">
+                <a:solidFill>
+                  <a:srgbClr val="1C1C1C"/>
+                </a:solidFill>
+                <a:latin typeface="Calibri"/>
+              </a:rPr>
+              <a:t> de </a:t>
+            </a:r>
+            <a:r>
+              <a:rPr sz="1300" b="0" i="0" dirty="0" err="1">
+                <a:solidFill>
+                  <a:srgbClr val="1C1C1C"/>
+                </a:solidFill>
+                <a:latin typeface="Calibri"/>
+              </a:rPr>
+              <a:t>analítica</a:t>
+            </a:r>
+            <a:r>
+              <a:rPr sz="1300" b="0" i="0" dirty="0">
+                <a:solidFill>
+                  <a:srgbClr val="1C1C1C"/>
+                </a:solidFill>
+                <a:latin typeface="Calibri"/>
+              </a:rPr>
+              <a:t>.</a:t>
             </a:r>
           </a:p>
           <a:p>
@@ -14144,13 +14853,121 @@
               </a:spcAft>
             </a:pPr>
             <a:r>
-              <a:rPr sz="1300" b="0" i="0">
+              <a:rPr sz="1300" b="0" i="0" dirty="0">
                 <a:solidFill>
                   <a:srgbClr val="1C1C1C"/>
                 </a:solidFill>
                 <a:latin typeface="Calibri"/>
               </a:rPr>
-              <a:t>7. Arquitectura lista para ingesta en vivo; el dominio es configuración.</a:t>
+              <a:t>7. </a:t>
+            </a:r>
+            <a:r>
+              <a:rPr sz="1300" b="0" i="0" dirty="0" err="1">
+                <a:solidFill>
+                  <a:srgbClr val="1C1C1C"/>
+                </a:solidFill>
+                <a:latin typeface="Calibri"/>
+              </a:rPr>
+              <a:t>Arquitectura</a:t>
+            </a:r>
+            <a:r>
+              <a:rPr sz="1300" b="0" i="0" dirty="0">
+                <a:solidFill>
+                  <a:srgbClr val="1C1C1C"/>
+                </a:solidFill>
+                <a:latin typeface="Calibri"/>
+              </a:rPr>
+              <a:t> </a:t>
+            </a:r>
+            <a:r>
+              <a:rPr sz="1300" b="0" i="0" dirty="0" err="1">
+                <a:solidFill>
+                  <a:srgbClr val="1C1C1C"/>
+                </a:solidFill>
+                <a:latin typeface="Calibri"/>
+              </a:rPr>
+              <a:t>lista</a:t>
+            </a:r>
+            <a:r>
+              <a:rPr sz="1300" b="0" i="0" dirty="0">
+                <a:solidFill>
+                  <a:srgbClr val="1C1C1C"/>
+                </a:solidFill>
+                <a:latin typeface="Calibri"/>
+              </a:rPr>
+              <a:t> para </a:t>
+            </a:r>
+            <a:r>
+              <a:rPr sz="1300" b="0" i="0" u="sng" dirty="0">
+                <a:solidFill>
+                  <a:srgbClr val="1C1C1C"/>
+                </a:solidFill>
+                <a:latin typeface="Calibri"/>
+              </a:rPr>
+              <a:t>ingesta</a:t>
+            </a:r>
+            <a:r>
+              <a:rPr sz="1300" b="0" i="0" dirty="0">
+                <a:solidFill>
+                  <a:srgbClr val="1C1C1C"/>
+                </a:solidFill>
+                <a:latin typeface="Calibri"/>
+              </a:rPr>
+              <a:t> </a:t>
+            </a:r>
+            <a:r>
+              <a:rPr sz="1300" b="0" i="0" dirty="0" err="1">
+                <a:solidFill>
+                  <a:srgbClr val="1C1C1C"/>
+                </a:solidFill>
+                <a:latin typeface="Calibri"/>
+              </a:rPr>
+              <a:t>en</a:t>
+            </a:r>
+            <a:r>
+              <a:rPr sz="1300" b="0" i="0" dirty="0">
+                <a:solidFill>
+                  <a:srgbClr val="1C1C1C"/>
+                </a:solidFill>
+                <a:latin typeface="Calibri"/>
+              </a:rPr>
+              <a:t> vivo; el </a:t>
+            </a:r>
+            <a:r>
+              <a:rPr sz="1300" b="0" i="0" dirty="0" err="1">
+                <a:solidFill>
+                  <a:srgbClr val="1C1C1C"/>
+                </a:solidFill>
+                <a:latin typeface="Calibri"/>
+              </a:rPr>
+              <a:t>dominio</a:t>
+            </a:r>
+            <a:r>
+              <a:rPr sz="1300" b="0" i="0" dirty="0">
+                <a:solidFill>
+                  <a:srgbClr val="1C1C1C"/>
+                </a:solidFill>
+                <a:latin typeface="Calibri"/>
+              </a:rPr>
+              <a:t> es </a:t>
+            </a:r>
+            <a:r>
+              <a:rPr sz="1300" b="0" i="0" dirty="0" err="1">
+                <a:solidFill>
+                  <a:srgbClr val="1C1C1C"/>
+                </a:solidFill>
+                <a:latin typeface="Calibri"/>
+              </a:rPr>
+              <a:t>configuración</a:t>
+            </a:r>
+            <a:r>
+              <a:rPr sz="1300" b="0" i="0" dirty="0">
+                <a:solidFill>
+                  <a:srgbClr val="1C1C1C"/>
+                </a:solidFill>
+                <a:latin typeface="Calibri"/>
+              </a:rPr>
+              <a:t>.</a:t>
             </a:r>
           </a:p>
           <a:p>
@@ -14163,13 +14980,67 @@
               </a:spcAft>
             </a:pPr>
             <a:r>
-              <a:rPr sz="1300" b="0" i="0">
+              <a:rPr sz="1300" b="0" i="0" dirty="0">
                 <a:solidFill>
                   <a:srgbClr val="1C1C1C"/>
                 </a:solidFill>
                 <a:latin typeface="Calibri"/>
               </a:rPr>
-              <a:t>8. Validación con plan de pruebas formal y video de referencia.</a:t>
+              <a:t>8. </a:t>
+            </a:r>
+            <a:r>
+              <a:rPr sz="1300" b="0" i="0" dirty="0" err="1">
+                <a:solidFill>
+                  <a:srgbClr val="1C1C1C"/>
+                </a:solidFill>
+                <a:latin typeface="Calibri"/>
+              </a:rPr>
+              <a:t>Validación</a:t>
+            </a:r>
+            <a:r>
+              <a:rPr sz="1300" b="0" i="0" dirty="0">
+                <a:solidFill>
+                  <a:srgbClr val="1C1C1C"/>
+                </a:solidFill>
+                <a:latin typeface="Calibri"/>
+              </a:rPr>
+              <a:t> con plan de </a:t>
+            </a:r>
+            <a:r>
+              <a:rPr sz="1300" b="0" i="0" dirty="0" err="1">
+                <a:solidFill>
+                  <a:srgbClr val="1C1C1C"/>
+                </a:solidFill>
+                <a:latin typeface="Calibri"/>
+              </a:rPr>
+              <a:t>pruebas</a:t>
+            </a:r>
+            <a:r>
+              <a:rPr sz="1300" b="0" i="0" dirty="0">
+                <a:solidFill>
+                  <a:srgbClr val="1C1C1C"/>
+                </a:solidFill>
+                <a:latin typeface="Calibri"/>
+              </a:rPr>
+              <a:t> formal y video de </a:t>
+            </a:r>
+            <a:r>
+              <a:rPr sz="1300" b="0" i="0" dirty="0" err="1">
+                <a:solidFill>
+                  <a:srgbClr val="1C1C1C"/>
+                </a:solidFill>
+                <a:latin typeface="Calibri"/>
+              </a:rPr>
+              <a:t>referencia</a:t>
+            </a:r>
+            <a:r>
+              <a:rPr sz="1300" b="0" i="0" dirty="0">
+                <a:solidFill>
+                  <a:srgbClr val="1C1C1C"/>
+                </a:solidFill>
+                <a:latin typeface="Calibri"/>
+              </a:rPr>
+              <a:t>.</a:t>
             </a:r>
           </a:p>
         </p:txBody>
@@ -14514,7 +15385,7 @@
           </a:fontRef>
         </p:style>
         <p:txBody>
-          <a:bodyPr rtlCol="0" anchor="t" wrap="square" tIns="54864" bIns="54864"/>
+          <a:bodyPr wrap="square" tIns="54864" bIns="54864" rtlCol="0" anchor="t"/>
           <a:lstStyle/>
           <a:p>
             <a:pPr algn="l">
@@ -14692,7 +15563,7 @@
           </a:fontRef>
         </p:style>
         <p:txBody>
-          <a:bodyPr rtlCol="0" anchor="t" wrap="square" tIns="54864" bIns="54864"/>
+          <a:bodyPr wrap="square" tIns="54864" bIns="54864" rtlCol="0" anchor="t"/>
           <a:lstStyle/>
           <a:p>
             <a:pPr algn="l">
@@ -15035,7 +15906,7 @@
           <a:noFill/>
         </p:spPr>
         <p:txBody>
-          <a:bodyPr wrap="square" anchor="t" lIns="73152" rIns="73152" tIns="36576" bIns="36576">
+          <a:bodyPr wrap="square" lIns="73152" tIns="36576" rIns="73152" bIns="36576" anchor="t">
             <a:spAutoFit/>
           </a:bodyPr>
           <a:lstStyle/>
@@ -15101,7 +15972,7 @@
           </a:fontRef>
         </p:style>
         <p:txBody>
-          <a:bodyPr rtlCol="0" anchor="t" wrap="square" tIns="54864" bIns="54864"/>
+          <a:bodyPr wrap="square" tIns="54864" bIns="54864" rtlCol="0" anchor="t"/>
           <a:lstStyle/>
           <a:p>
             <a:pPr algn="l">
@@ -15222,7 +16093,7 @@
           </a:fontRef>
         </p:style>
         <p:txBody>
-          <a:bodyPr rtlCol="0" anchor="t" wrap="square" tIns="54864" bIns="54864"/>
+          <a:bodyPr wrap="square" tIns="54864" bIns="54864" rtlCol="0" anchor="t"/>
           <a:lstStyle/>
           <a:p>
             <a:pPr algn="l">
@@ -15324,7 +16195,7 @@
           </a:fontRef>
         </p:style>
         <p:txBody>
-          <a:bodyPr rtlCol="0" anchor="t" wrap="square" tIns="54864" bIns="54864"/>
+          <a:bodyPr wrap="square" tIns="54864" bIns="54864" rtlCol="0" anchor="t"/>
           <a:lstStyle/>
           <a:p>
             <a:pPr algn="l">
@@ -15445,7 +16316,7 @@
           </a:fontRef>
         </p:style>
         <p:txBody>
-          <a:bodyPr rtlCol="0" anchor="t" wrap="square" tIns="54864" bIns="54864"/>
+          <a:bodyPr wrap="square" tIns="54864" bIns="54864" rtlCol="0" anchor="t"/>
           <a:lstStyle/>
           <a:p>
             <a:pPr algn="l">
@@ -15566,7 +16437,7 @@
           </a:fontRef>
         </p:style>
         <p:txBody>
-          <a:bodyPr rtlCol="0" anchor="t" wrap="square" tIns="54864" bIns="54864"/>
+          <a:bodyPr wrap="square" tIns="54864" bIns="54864" rtlCol="0" anchor="t"/>
           <a:lstStyle/>
           <a:p>
             <a:pPr algn="l">
@@ -15687,7 +16558,7 @@
           </a:fontRef>
         </p:style>
         <p:txBody>
-          <a:bodyPr rtlCol="0" anchor="t" wrap="square" tIns="54864" bIns="54864"/>
+          <a:bodyPr wrap="square" tIns="54864" bIns="54864" rtlCol="0" anchor="t"/>
           <a:lstStyle/>
           <a:p>
             <a:pPr algn="l">
@@ -15999,25 +16870,139 @@
                 <a:tableStyleId>{5C22544A-7EE6-4342-B048-85BDC9FD1C3A}</a:tableStyleId>
               </a:tblPr>
               <a:tblGrid>
-                <a:gridCol w="2834640"/>
-                <a:gridCol w="477520"/>
-                <a:gridCol w="477520"/>
-                <a:gridCol w="477520"/>
-                <a:gridCol w="477520"/>
-                <a:gridCol w="477520"/>
-                <a:gridCol w="477520"/>
-                <a:gridCol w="477520"/>
-                <a:gridCol w="477520"/>
-                <a:gridCol w="477520"/>
-                <a:gridCol w="477520"/>
-                <a:gridCol w="477520"/>
-                <a:gridCol w="477520"/>
-                <a:gridCol w="477520"/>
-                <a:gridCol w="477520"/>
-                <a:gridCol w="477520"/>
-                <a:gridCol w="477520"/>
-                <a:gridCol w="477520"/>
-                <a:gridCol w="477520"/>
+                <a:gridCol w="2834640">
+                  <a:extLst>
+                    <a:ext uri="{9D8B030D-6E8A-4147-A177-3AD203B41FA5}">
+                      <a16:colId xmlns:a16="http://schemas.microsoft.com/office/drawing/2014/main" val="20000"/>
+                    </a:ext>
+                  </a:extLst>
+                </a:gridCol>
+                <a:gridCol w="477520">
+                  <a:extLst>
+                    <a:ext uri="{9D8B030D-6E8A-4147-A177-3AD203B41FA5}">
+                      <a16:colId xmlns:a16="http://schemas.microsoft.com/office/drawing/2014/main" val="20001"/>
+                    </a:ext>
+                  </a:extLst>
+                </a:gridCol>
+                <a:gridCol w="477520">
+                  <a:extLst>
+                    <a:ext uri="{9D8B030D-6E8A-4147-A177-3AD203B41FA5}">
+                      <a16:colId xmlns:a16="http://schemas.microsoft.com/office/drawing/2014/main" val="20002"/>
+                    </a:ext>
+                  </a:extLst>
+                </a:gridCol>
+                <a:gridCol w="477520">
+                  <a:extLst>
+                    <a:ext uri="{9D8B030D-6E8A-4147-A177-3AD203B41FA5}">
+                      <a16:colId xmlns:a16="http://schemas.microsoft.com/office/drawing/2014/main" val="20003"/>
+                    </a:ext>
+                  </a:extLst>
+                </a:gridCol>
+                <a:gridCol w="477520">
+                  <a:extLst>
+                    <a:ext uri="{9D8B030D-6E8A-4147-A177-3AD203B41FA5}">
+                      <a16:colId xmlns:a16="http://schemas.microsoft.com/office/drawing/2014/main" val="20004"/>
+                    </a:ext>
+                  </a:extLst>
+                </a:gridCol>
+                <a:gridCol w="477520">
+                  <a:extLst>
+                    <a:ext uri="{9D8B030D-6E8A-4147-A177-3AD203B41FA5}">
+                      <a16:colId xmlns:a16="http://schemas.microsoft.com/office/drawing/2014/main" val="20005"/>
+                    </a:ext>
+                  </a:extLst>
+                </a:gridCol>
+                <a:gridCol w="477520">
+                  <a:extLst>
+                    <a:ext uri="{9D8B030D-6E8A-4147-A177-3AD203B41FA5}">
+                      <a16:colId xmlns:a16="http://schemas.microsoft.com/office/drawing/2014/main" val="20006"/>
+                    </a:ext>
+                  </a:extLst>
+                </a:gridCol>
+                <a:gridCol w="477520">
+                  <a:extLst>
+                    <a:ext uri="{9D8B030D-6E8A-4147-A177-3AD203B41FA5}">
+                      <a16:colId xmlns:a16="http://schemas.microsoft.com/office/drawing/2014/main" val="20007"/>
+                    </a:ext>
+                  </a:extLst>
+                </a:gridCol>
+                <a:gridCol w="477520">
+                  <a:extLst>
+                    <a:ext uri="{9D8B030D-6E8A-4147-A177-3AD203B41FA5}">
+                      <a16:colId xmlns:a16="http://schemas.microsoft.com/office/drawing/2014/main" val="20008"/>
+                    </a:ext>
+                  </a:extLst>
+                </a:gridCol>
+                <a:gridCol w="477520">
+                  <a:extLst>
+                    <a:ext uri="{9D8B030D-6E8A-4147-A177-3AD203B41FA5}">
+                      <a16:colId xmlns:a16="http://schemas.microsoft.com/office/drawing/2014/main" val="20009"/>
+                    </a:ext>
+                  </a:extLst>
+                </a:gridCol>
+                <a:gridCol w="477520">
+                  <a:extLst>
+                    <a:ext uri="{9D8B030D-6E8A-4147-A177-3AD203B41FA5}">
+                      <a16:colId xmlns:a16="http://schemas.microsoft.com/office/drawing/2014/main" val="20010"/>
+                    </a:ext>
+                  </a:extLst>
+                </a:gridCol>
+                <a:gridCol w="477520">
+                  <a:extLst>
+                    <a:ext uri="{9D8B030D-6E8A-4147-A177-3AD203B41FA5}">
+                      <a16:colId xmlns:a16="http://schemas.microsoft.com/office/drawing/2014/main" val="20011"/>
+                    </a:ext>
+                  </a:extLst>
+                </a:gridCol>
+                <a:gridCol w="477520">
+                  <a:extLst>
+                    <a:ext uri="{9D8B030D-6E8A-4147-A177-3AD203B41FA5}">
+                      <a16:colId xmlns:a16="http://schemas.microsoft.com/office/drawing/2014/main" val="20012"/>
+                    </a:ext>
+                  </a:extLst>
+                </a:gridCol>
+                <a:gridCol w="477520">
+                  <a:extLst>
+                    <a:ext uri="{9D8B030D-6E8A-4147-A177-3AD203B41FA5}">
+                      <a16:colId xmlns:a16="http://schemas.microsoft.com/office/drawing/2014/main" val="20013"/>
+                    </a:ext>
+                  </a:extLst>
+                </a:gridCol>
+                <a:gridCol w="477520">
+                  <a:extLst>
+                    <a:ext uri="{9D8B030D-6E8A-4147-A177-3AD203B41FA5}">
+                      <a16:colId xmlns:a16="http://schemas.microsoft.com/office/drawing/2014/main" val="20014"/>
+                    </a:ext>
+                  </a:extLst>
+                </a:gridCol>
+                <a:gridCol w="477520">
+                  <a:extLst>
+                    <a:ext uri="{9D8B030D-6E8A-4147-A177-3AD203B41FA5}">
+                      <a16:colId xmlns:a16="http://schemas.microsoft.com/office/drawing/2014/main" val="20015"/>
+                    </a:ext>
+                  </a:extLst>
+                </a:gridCol>
+                <a:gridCol w="477520">
+                  <a:extLst>
+                    <a:ext uri="{9D8B030D-6E8A-4147-A177-3AD203B41FA5}">
+                      <a16:colId xmlns:a16="http://schemas.microsoft.com/office/drawing/2014/main" val="20016"/>
+                    </a:ext>
+                  </a:extLst>
+                </a:gridCol>
+                <a:gridCol w="477520">
+                  <a:extLst>
+                    <a:ext uri="{9D8B030D-6E8A-4147-A177-3AD203B41FA5}">
+                      <a16:colId xmlns:a16="http://schemas.microsoft.com/office/drawing/2014/main" val="20017"/>
+                    </a:ext>
+                  </a:extLst>
+                </a:gridCol>
+                <a:gridCol w="477520">
+                  <a:extLst>
+                    <a:ext uri="{9D8B030D-6E8A-4147-A177-3AD203B41FA5}">
+                      <a16:colId xmlns:a16="http://schemas.microsoft.com/office/drawing/2014/main" val="20018"/>
+                    </a:ext>
+                  </a:extLst>
+                </a:gridCol>
               </a:tblGrid>
               <a:tr h="274320">
                 <a:tc>
@@ -16457,6 +17442,11 @@
                     </a:solidFill>
                   </a:tcPr>
                 </a:tc>
+                <a:extLst>
+                  <a:ext uri="{0D108BD9-81ED-4DB2-BD59-A6C34878D82A}">
+                    <a16:rowId xmlns:a16="http://schemas.microsoft.com/office/drawing/2014/main" val="10000"/>
+                  </a:ext>
+                </a:extLst>
               </a:tr>
               <a:tr h="274320">
                 <a:tc>
@@ -16488,15 +17478,7 @@
                     <a:lstStyle/>
                     <a:p>
                       <a:pPr algn="ctr"/>
-                      <a:r>
-                        <a:rPr sz="900" b="0">
-                          <a:solidFill>
-                            <a:srgbClr val="1C1C1C"/>
-                          </a:solidFill>
-                          <a:latin typeface="Calibri"/>
-                        </a:rPr>
-                        <a:t/>
-                      </a:r>
+                      <a:endParaRPr/>
                     </a:p>
                   </a:txBody>
                   <a:tcPr marL="27432" marR="27432" marT="9144" marB="9144" anchor="ctr">
@@ -16511,15 +17493,7 @@
                     <a:lstStyle/>
                     <a:p>
                       <a:pPr algn="ctr"/>
-                      <a:r>
-                        <a:rPr sz="900" b="0">
-                          <a:solidFill>
-                            <a:srgbClr val="1C1C1C"/>
-                          </a:solidFill>
-                          <a:latin typeface="Calibri"/>
-                        </a:rPr>
-                        <a:t/>
-                      </a:r>
+                      <a:endParaRPr/>
                     </a:p>
                   </a:txBody>
                   <a:tcPr marL="27432" marR="27432" marT="9144" marB="9144" anchor="ctr">
@@ -16534,15 +17508,7 @@
                     <a:lstStyle/>
                     <a:p>
                       <a:pPr algn="ctr"/>
-                      <a:r>
-                        <a:rPr sz="900" b="0">
-                          <a:solidFill>
-                            <a:srgbClr val="1C1C1C"/>
-                          </a:solidFill>
-                          <a:latin typeface="Calibri"/>
-                        </a:rPr>
-                        <a:t/>
-                      </a:r>
+                      <a:endParaRPr/>
                     </a:p>
                   </a:txBody>
                   <a:tcPr marL="27432" marR="27432" marT="9144" marB="9144" anchor="ctr">
@@ -16557,15 +17523,7 @@
                     <a:lstStyle/>
                     <a:p>
                       <a:pPr algn="ctr"/>
-                      <a:r>
-                        <a:rPr sz="900" b="0">
-                          <a:solidFill>
-                            <a:srgbClr val="1C1C1C"/>
-                          </a:solidFill>
-                          <a:latin typeface="Calibri"/>
-                        </a:rPr>
-                        <a:t/>
-                      </a:r>
+                      <a:endParaRPr/>
                     </a:p>
                   </a:txBody>
                   <a:tcPr marL="27432" marR="27432" marT="9144" marB="9144" anchor="ctr">
@@ -16580,15 +17538,7 @@
                     <a:lstStyle/>
                     <a:p>
                       <a:pPr algn="ctr"/>
-                      <a:r>
-                        <a:rPr sz="900" b="0">
-                          <a:solidFill>
-                            <a:srgbClr val="1C1C1C"/>
-                          </a:solidFill>
-                          <a:latin typeface="Calibri"/>
-                        </a:rPr>
-                        <a:t/>
-                      </a:r>
+                      <a:endParaRPr/>
                     </a:p>
                   </a:txBody>
                   <a:tcPr marL="27432" marR="27432" marT="9144" marB="9144" anchor="ctr">
@@ -16603,15 +17553,7 @@
                     <a:lstStyle/>
                     <a:p>
                       <a:pPr algn="ctr"/>
-                      <a:r>
-                        <a:rPr sz="900" b="0">
-                          <a:solidFill>
-                            <a:srgbClr val="1C1C1C"/>
-                          </a:solidFill>
-                          <a:latin typeface="Calibri"/>
-                        </a:rPr>
-                        <a:t/>
-                      </a:r>
+                      <a:endParaRPr/>
                     </a:p>
                   </a:txBody>
                   <a:tcPr marL="27432" marR="27432" marT="9144" marB="9144" anchor="ctr">
@@ -16626,15 +17568,7 @@
                     <a:lstStyle/>
                     <a:p>
                       <a:pPr algn="ctr"/>
-                      <a:r>
-                        <a:rPr sz="900" b="0">
-                          <a:solidFill>
-                            <a:srgbClr val="1C1C1C"/>
-                          </a:solidFill>
-                          <a:latin typeface="Calibri"/>
-                        </a:rPr>
-                        <a:t/>
-                      </a:r>
+                      <a:endParaRPr/>
                     </a:p>
                   </a:txBody>
                   <a:tcPr marL="27432" marR="27432" marT="9144" marB="9144" anchor="ctr">
@@ -16649,15 +17583,7 @@
                     <a:lstStyle/>
                     <a:p>
                       <a:pPr algn="ctr"/>
-                      <a:r>
-                        <a:rPr sz="900" b="0">
-                          <a:solidFill>
-                            <a:srgbClr val="1C1C1C"/>
-                          </a:solidFill>
-                          <a:latin typeface="Calibri"/>
-                        </a:rPr>
-                        <a:t/>
-                      </a:r>
+                      <a:endParaRPr/>
                     </a:p>
                   </a:txBody>
                   <a:tcPr marL="27432" marR="27432" marT="9144" marB="9144" anchor="ctr">
@@ -16672,15 +17598,7 @@
                     <a:lstStyle/>
                     <a:p>
                       <a:pPr algn="ctr"/>
-                      <a:r>
-                        <a:rPr sz="900" b="0">
-                          <a:solidFill>
-                            <a:srgbClr val="1C1C1C"/>
-                          </a:solidFill>
-                          <a:latin typeface="Calibri"/>
-                        </a:rPr>
-                        <a:t/>
-                      </a:r>
+                      <a:endParaRPr/>
                     </a:p>
                   </a:txBody>
                   <a:tcPr marL="27432" marR="27432" marT="9144" marB="9144" anchor="ctr">
@@ -16695,15 +17613,7 @@
                     <a:lstStyle/>
                     <a:p>
                       <a:pPr algn="ctr"/>
-                      <a:r>
-                        <a:rPr sz="900" b="0">
-                          <a:solidFill>
-                            <a:srgbClr val="1C1C1C"/>
-                          </a:solidFill>
-                          <a:latin typeface="Calibri"/>
-                        </a:rPr>
-                        <a:t/>
-                      </a:r>
+                      <a:endParaRPr/>
                     </a:p>
                   </a:txBody>
                   <a:tcPr marL="27432" marR="27432" marT="9144" marB="9144" anchor="ctr">
@@ -16718,15 +17628,7 @@
                     <a:lstStyle/>
                     <a:p>
                       <a:pPr algn="ctr"/>
-                      <a:r>
-                        <a:rPr sz="900" b="0">
-                          <a:solidFill>
-                            <a:srgbClr val="1C1C1C"/>
-                          </a:solidFill>
-                          <a:latin typeface="Calibri"/>
-                        </a:rPr>
-                        <a:t/>
-                      </a:r>
+                      <a:endParaRPr/>
                     </a:p>
                   </a:txBody>
                   <a:tcPr marL="27432" marR="27432" marT="9144" marB="9144" anchor="ctr">
@@ -16741,15 +17643,7 @@
                     <a:lstStyle/>
                     <a:p>
                       <a:pPr algn="ctr"/>
-                      <a:r>
-                        <a:rPr sz="900" b="0">
-                          <a:solidFill>
-                            <a:srgbClr val="1C1C1C"/>
-                          </a:solidFill>
-                          <a:latin typeface="Calibri"/>
-                        </a:rPr>
-                        <a:t/>
-                      </a:r>
+                      <a:endParaRPr/>
                     </a:p>
                   </a:txBody>
                   <a:tcPr marL="27432" marR="27432" marT="9144" marB="9144" anchor="ctr">
@@ -16764,15 +17658,7 @@
                     <a:lstStyle/>
                     <a:p>
                       <a:pPr algn="ctr"/>
-                      <a:r>
-                        <a:rPr sz="900" b="0">
-                          <a:solidFill>
-                            <a:srgbClr val="1C1C1C"/>
-                          </a:solidFill>
-                          <a:latin typeface="Calibri"/>
-                        </a:rPr>
-                        <a:t/>
-                      </a:r>
+                      <a:endParaRPr/>
                     </a:p>
                   </a:txBody>
                   <a:tcPr marL="27432" marR="27432" marT="9144" marB="9144" anchor="ctr">
@@ -16787,15 +17673,7 @@
                     <a:lstStyle/>
                     <a:p>
                       <a:pPr algn="ctr"/>
-                      <a:r>
-                        <a:rPr sz="900" b="0">
-                          <a:solidFill>
-                            <a:srgbClr val="1C1C1C"/>
-                          </a:solidFill>
-                          <a:latin typeface="Calibri"/>
-                        </a:rPr>
-                        <a:t/>
-                      </a:r>
+                      <a:endParaRPr/>
                     </a:p>
                   </a:txBody>
                   <a:tcPr marL="27432" marR="27432" marT="9144" marB="9144" anchor="ctr">
@@ -16810,15 +17688,7 @@
                     <a:lstStyle/>
                     <a:p>
                       <a:pPr algn="ctr"/>
-                      <a:r>
-                        <a:rPr sz="900" b="0">
-                          <a:solidFill>
-                            <a:srgbClr val="1C1C1C"/>
-                          </a:solidFill>
-                          <a:latin typeface="Calibri"/>
-                        </a:rPr>
-                        <a:t/>
-                      </a:r>
+                      <a:endParaRPr/>
                     </a:p>
                   </a:txBody>
                   <a:tcPr marL="27432" marR="27432" marT="9144" marB="9144" anchor="ctr">
@@ -16833,15 +17703,7 @@
                     <a:lstStyle/>
                     <a:p>
                       <a:pPr algn="ctr"/>
-                      <a:r>
-                        <a:rPr sz="900" b="0">
-                          <a:solidFill>
-                            <a:srgbClr val="1C1C1C"/>
-                          </a:solidFill>
-                          <a:latin typeface="Calibri"/>
-                        </a:rPr>
-                        <a:t/>
-                      </a:r>
+                      <a:endParaRPr/>
                     </a:p>
                   </a:txBody>
                   <a:tcPr marL="27432" marR="27432" marT="9144" marB="9144" anchor="ctr">
@@ -16856,15 +17718,7 @@
                     <a:lstStyle/>
                     <a:p>
                       <a:pPr algn="ctr"/>
-                      <a:r>
-                        <a:rPr sz="900" b="0">
-                          <a:solidFill>
-                            <a:srgbClr val="1C1C1C"/>
-                          </a:solidFill>
-                          <a:latin typeface="Calibri"/>
-                        </a:rPr>
-                        <a:t/>
-                      </a:r>
+                      <a:endParaRPr/>
                     </a:p>
                   </a:txBody>
                   <a:tcPr marL="27432" marR="27432" marT="9144" marB="9144" anchor="ctr">
@@ -16879,15 +17733,7 @@
                     <a:lstStyle/>
                     <a:p>
                       <a:pPr algn="ctr"/>
-                      <a:r>
-                        <a:rPr sz="900" b="0">
-                          <a:solidFill>
-                            <a:srgbClr val="1C1C1C"/>
-                          </a:solidFill>
-                          <a:latin typeface="Calibri"/>
-                        </a:rPr>
-                        <a:t/>
-                      </a:r>
+                      <a:endParaRPr/>
                     </a:p>
                   </a:txBody>
                   <a:tcPr marL="27432" marR="27432" marT="9144" marB="9144" anchor="ctr">
@@ -16896,6 +17742,11 @@
                     </a:solidFill>
                   </a:tcPr>
                 </a:tc>
+                <a:extLst>
+                  <a:ext uri="{0D108BD9-81ED-4DB2-BD59-A6C34878D82A}">
+                    <a16:rowId xmlns:a16="http://schemas.microsoft.com/office/drawing/2014/main" val="10001"/>
+                  </a:ext>
+                </a:extLst>
               </a:tr>
               <a:tr h="274320">
                 <a:tc>
@@ -16927,15 +17778,7 @@
                     <a:lstStyle/>
                     <a:p>
                       <a:pPr algn="ctr"/>
-                      <a:r>
-                        <a:rPr sz="900" b="0">
-                          <a:solidFill>
-                            <a:srgbClr val="1C1C1C"/>
-                          </a:solidFill>
-                          <a:latin typeface="Calibri"/>
-                        </a:rPr>
-                        <a:t/>
-                      </a:r>
+                      <a:endParaRPr/>
                     </a:p>
                   </a:txBody>
                   <a:tcPr marL="27432" marR="27432" marT="9144" marB="9144" anchor="ctr">
@@ -16950,15 +17793,7 @@
                     <a:lstStyle/>
                     <a:p>
                       <a:pPr algn="ctr"/>
-                      <a:r>
-                        <a:rPr sz="900" b="0">
-                          <a:solidFill>
-                            <a:srgbClr val="1C1C1C"/>
-                          </a:solidFill>
-                          <a:latin typeface="Calibri"/>
-                        </a:rPr>
-                        <a:t/>
-                      </a:r>
+                      <a:endParaRPr/>
                     </a:p>
                   </a:txBody>
                   <a:tcPr marL="27432" marR="27432" marT="9144" marB="9144" anchor="ctr">
@@ -16973,15 +17808,7 @@
                     <a:lstStyle/>
                     <a:p>
                       <a:pPr algn="ctr"/>
-                      <a:r>
-                        <a:rPr sz="900" b="0">
-                          <a:solidFill>
-                            <a:srgbClr val="1C1C1C"/>
-                          </a:solidFill>
-                          <a:latin typeface="Calibri"/>
-                        </a:rPr>
-                        <a:t/>
-                      </a:r>
+                      <a:endParaRPr/>
                     </a:p>
                   </a:txBody>
                   <a:tcPr marL="27432" marR="27432" marT="9144" marB="9144" anchor="ctr">
@@ -16996,15 +17823,7 @@
                     <a:lstStyle/>
                     <a:p>
                       <a:pPr algn="ctr"/>
-                      <a:r>
-                        <a:rPr sz="900" b="0">
-                          <a:solidFill>
-                            <a:srgbClr val="1C1C1C"/>
-                          </a:solidFill>
-                          <a:latin typeface="Calibri"/>
-                        </a:rPr>
-                        <a:t/>
-                      </a:r>
+                      <a:endParaRPr/>
                     </a:p>
                   </a:txBody>
                   <a:tcPr marL="27432" marR="27432" marT="9144" marB="9144" anchor="ctr">
@@ -17019,15 +17838,7 @@
                     <a:lstStyle/>
                     <a:p>
                       <a:pPr algn="ctr"/>
-                      <a:r>
-                        <a:rPr sz="900" b="0">
-                          <a:solidFill>
-                            <a:srgbClr val="1C1C1C"/>
-                          </a:solidFill>
-                          <a:latin typeface="Calibri"/>
-                        </a:rPr>
-                        <a:t/>
-                      </a:r>
+                      <a:endParaRPr/>
                     </a:p>
                   </a:txBody>
                   <a:tcPr marL="27432" marR="27432" marT="9144" marB="9144" anchor="ctr">
@@ -17042,15 +17853,7 @@
                     <a:lstStyle/>
                     <a:p>
                       <a:pPr algn="ctr"/>
-                      <a:r>
-                        <a:rPr sz="900" b="0">
-                          <a:solidFill>
-                            <a:srgbClr val="1C1C1C"/>
-                          </a:solidFill>
-                          <a:latin typeface="Calibri"/>
-                        </a:rPr>
-                        <a:t/>
-                      </a:r>
+                      <a:endParaRPr/>
                     </a:p>
                   </a:txBody>
                   <a:tcPr marL="27432" marR="27432" marT="9144" marB="9144" anchor="ctr">
@@ -17065,15 +17868,7 @@
                     <a:lstStyle/>
                     <a:p>
                       <a:pPr algn="ctr"/>
-                      <a:r>
-                        <a:rPr sz="900" b="0">
-                          <a:solidFill>
-                            <a:srgbClr val="1C1C1C"/>
-                          </a:solidFill>
-                          <a:latin typeface="Calibri"/>
-                        </a:rPr>
-                        <a:t/>
-                      </a:r>
+                      <a:endParaRPr/>
                     </a:p>
                   </a:txBody>
                   <a:tcPr marL="27432" marR="27432" marT="9144" marB="9144" anchor="ctr">
@@ -17088,15 +17883,7 @@
                     <a:lstStyle/>
                     <a:p>
                       <a:pPr algn="ctr"/>
-                      <a:r>
-                        <a:rPr sz="900" b="0">
-                          <a:solidFill>
-                            <a:srgbClr val="1C1C1C"/>
-                          </a:solidFill>
-                          <a:latin typeface="Calibri"/>
-                        </a:rPr>
-                        <a:t/>
-                      </a:r>
+                      <a:endParaRPr/>
                     </a:p>
                   </a:txBody>
                   <a:tcPr marL="27432" marR="27432" marT="9144" marB="9144" anchor="ctr">
@@ -17111,15 +17898,7 @@
                     <a:lstStyle/>
                     <a:p>
                       <a:pPr algn="ctr"/>
-                      <a:r>
-                        <a:rPr sz="900" b="0">
-                          <a:solidFill>
-                            <a:srgbClr val="1C1C1C"/>
-                          </a:solidFill>
-                          <a:latin typeface="Calibri"/>
-                        </a:rPr>
-                        <a:t/>
-                      </a:r>
+                      <a:endParaRPr/>
                     </a:p>
                   </a:txBody>
                   <a:tcPr marL="27432" marR="27432" marT="9144" marB="9144" anchor="ctr">
@@ -17134,15 +17913,7 @@
                     <a:lstStyle/>
                     <a:p>
                       <a:pPr algn="ctr"/>
-                      <a:r>
-                        <a:rPr sz="900" b="0">
-                          <a:solidFill>
-                            <a:srgbClr val="1C1C1C"/>
-                          </a:solidFill>
-                          <a:latin typeface="Calibri"/>
-                        </a:rPr>
-                        <a:t/>
-                      </a:r>
+                      <a:endParaRPr/>
                     </a:p>
                   </a:txBody>
                   <a:tcPr marL="27432" marR="27432" marT="9144" marB="9144" anchor="ctr">
@@ -17157,15 +17928,7 @@
                     <a:lstStyle/>
                     <a:p>
                       <a:pPr algn="ctr"/>
-                      <a:r>
-                        <a:rPr sz="900" b="0">
-                          <a:solidFill>
-                            <a:srgbClr val="1C1C1C"/>
-                          </a:solidFill>
-                          <a:latin typeface="Calibri"/>
-                        </a:rPr>
-                        <a:t/>
-                      </a:r>
+                      <a:endParaRPr/>
                     </a:p>
                   </a:txBody>
                   <a:tcPr marL="27432" marR="27432" marT="9144" marB="9144" anchor="ctr">
@@ -17180,15 +17943,7 @@
                     <a:lstStyle/>
                     <a:p>
                       <a:pPr algn="ctr"/>
-                      <a:r>
-                        <a:rPr sz="900" b="0">
-                          <a:solidFill>
-                            <a:srgbClr val="1C1C1C"/>
-                          </a:solidFill>
-                          <a:latin typeface="Calibri"/>
-                        </a:rPr>
-                        <a:t/>
-                      </a:r>
+                      <a:endParaRPr/>
                     </a:p>
                   </a:txBody>
                   <a:tcPr marL="27432" marR="27432" marT="9144" marB="9144" anchor="ctr">
@@ -17203,15 +17958,7 @@
                     <a:lstStyle/>
                     <a:p>
                       <a:pPr algn="ctr"/>
-                      <a:r>
-                        <a:rPr sz="900" b="0">
-                          <a:solidFill>
-                            <a:srgbClr val="1C1C1C"/>
-                          </a:solidFill>
-                          <a:latin typeface="Calibri"/>
-                        </a:rPr>
-                        <a:t/>
-                      </a:r>
+                      <a:endParaRPr/>
                     </a:p>
                   </a:txBody>
                   <a:tcPr marL="27432" marR="27432" marT="9144" marB="9144" anchor="ctr">
@@ -17226,15 +17973,7 @@
                     <a:lstStyle/>
                     <a:p>
                       <a:pPr algn="ctr"/>
-                      <a:r>
-                        <a:rPr sz="900" b="0">
-                          <a:solidFill>
-                            <a:srgbClr val="1C1C1C"/>
-                          </a:solidFill>
-                          <a:latin typeface="Calibri"/>
-                        </a:rPr>
-                        <a:t/>
-                      </a:r>
+                      <a:endParaRPr/>
                     </a:p>
                   </a:txBody>
                   <a:tcPr marL="27432" marR="27432" marT="9144" marB="9144" anchor="ctr">
@@ -17249,15 +17988,7 @@
                     <a:lstStyle/>
                     <a:p>
                       <a:pPr algn="ctr"/>
-                      <a:r>
-                        <a:rPr sz="900" b="0">
-                          <a:solidFill>
-                            <a:srgbClr val="1C1C1C"/>
-                          </a:solidFill>
-                          <a:latin typeface="Calibri"/>
-                        </a:rPr>
-                        <a:t/>
-                      </a:r>
+                      <a:endParaRPr/>
                     </a:p>
                   </a:txBody>
                   <a:tcPr marL="27432" marR="27432" marT="9144" marB="9144" anchor="ctr">
@@ -17272,15 +18003,7 @@
                     <a:lstStyle/>
                     <a:p>
                       <a:pPr algn="ctr"/>
-                      <a:r>
-                        <a:rPr sz="900" b="0">
-                          <a:solidFill>
-                            <a:srgbClr val="1C1C1C"/>
-                          </a:solidFill>
-                          <a:latin typeface="Calibri"/>
-                        </a:rPr>
-                        <a:t/>
-                      </a:r>
+                      <a:endParaRPr/>
                     </a:p>
                   </a:txBody>
                   <a:tcPr marL="27432" marR="27432" marT="9144" marB="9144" anchor="ctr">
@@ -17295,15 +18018,7 @@
                     <a:lstStyle/>
                     <a:p>
                       <a:pPr algn="ctr"/>
-                      <a:r>
-                        <a:rPr sz="900" b="0">
-                          <a:solidFill>
-                            <a:srgbClr val="1C1C1C"/>
-                          </a:solidFill>
-                          <a:latin typeface="Calibri"/>
-                        </a:rPr>
-                        <a:t/>
-                      </a:r>
+                      <a:endParaRPr/>
                     </a:p>
                   </a:txBody>
                   <a:tcPr marL="27432" marR="27432" marT="9144" marB="9144" anchor="ctr">
@@ -17318,15 +18033,7 @@
                     <a:lstStyle/>
                     <a:p>
                       <a:pPr algn="ctr"/>
-                      <a:r>
-                        <a:rPr sz="900" b="0">
-                          <a:solidFill>
-                            <a:srgbClr val="1C1C1C"/>
-                          </a:solidFill>
-                          <a:latin typeface="Calibri"/>
-                        </a:rPr>
-                        <a:t/>
-                      </a:r>
+                      <a:endParaRPr/>
                     </a:p>
                   </a:txBody>
                   <a:tcPr marL="27432" marR="27432" marT="9144" marB="9144" anchor="ctr">
@@ -17335,6 +18042,11 @@
                     </a:solidFill>
                   </a:tcPr>
                 </a:tc>
+                <a:extLst>
+                  <a:ext uri="{0D108BD9-81ED-4DB2-BD59-A6C34878D82A}">
+                    <a16:rowId xmlns:a16="http://schemas.microsoft.com/office/drawing/2014/main" val="10002"/>
+                  </a:ext>
+                </a:extLst>
               </a:tr>
               <a:tr h="274320">
                 <a:tc>
@@ -17366,15 +18078,7 @@
                     <a:lstStyle/>
                     <a:p>
                       <a:pPr algn="ctr"/>
-                      <a:r>
-                        <a:rPr sz="900" b="0">
-                          <a:solidFill>
-                            <a:srgbClr val="1C1C1C"/>
-                          </a:solidFill>
-                          <a:latin typeface="Calibri"/>
-                        </a:rPr>
-                        <a:t/>
-                      </a:r>
+                      <a:endParaRPr/>
                     </a:p>
                   </a:txBody>
                   <a:tcPr marL="27432" marR="27432" marT="9144" marB="9144" anchor="ctr">
@@ -17389,15 +18093,7 @@
                     <a:lstStyle/>
                     <a:p>
                       <a:pPr algn="ctr"/>
-                      <a:r>
-                        <a:rPr sz="900" b="0">
-                          <a:solidFill>
-                            <a:srgbClr val="1C1C1C"/>
-                          </a:solidFill>
-                          <a:latin typeface="Calibri"/>
-                        </a:rPr>
-                        <a:t/>
-                      </a:r>
+                      <a:endParaRPr/>
                     </a:p>
                   </a:txBody>
                   <a:tcPr marL="27432" marR="27432" marT="9144" marB="9144" anchor="ctr">
@@ -17412,15 +18108,7 @@
                     <a:lstStyle/>
                     <a:p>
                       <a:pPr algn="ctr"/>
-                      <a:r>
-                        <a:rPr sz="900" b="0">
-                          <a:solidFill>
-                            <a:srgbClr val="1C1C1C"/>
-                          </a:solidFill>
-                          <a:latin typeface="Calibri"/>
-                        </a:rPr>
-                        <a:t/>
-                      </a:r>
+                      <a:endParaRPr/>
                     </a:p>
                   </a:txBody>
                   <a:tcPr marL="27432" marR="27432" marT="9144" marB="9144" anchor="ctr">
@@ -17435,15 +18123,7 @@
                     <a:lstStyle/>
                     <a:p>
                       <a:pPr algn="ctr"/>
-                      <a:r>
-                        <a:rPr sz="900" b="0">
-                          <a:solidFill>
-                            <a:srgbClr val="1C1C1C"/>
-                          </a:solidFill>
-                          <a:latin typeface="Calibri"/>
-                        </a:rPr>
-                        <a:t/>
-                      </a:r>
+                      <a:endParaRPr/>
                     </a:p>
                   </a:txBody>
                   <a:tcPr marL="27432" marR="27432" marT="9144" marB="9144" anchor="ctr">
@@ -17458,15 +18138,7 @@
                     <a:lstStyle/>
                     <a:p>
                       <a:pPr algn="ctr"/>
-                      <a:r>
-                        <a:rPr sz="900" b="0">
-                          <a:solidFill>
-                            <a:srgbClr val="1C1C1C"/>
-                          </a:solidFill>
-                          <a:latin typeface="Calibri"/>
-                        </a:rPr>
-                        <a:t/>
-                      </a:r>
+                      <a:endParaRPr/>
                     </a:p>
                   </a:txBody>
                   <a:tcPr marL="27432" marR="27432" marT="9144" marB="9144" anchor="ctr">
@@ -17481,15 +18153,7 @@
                     <a:lstStyle/>
                     <a:p>
                       <a:pPr algn="ctr"/>
-                      <a:r>
-                        <a:rPr sz="900" b="0">
-                          <a:solidFill>
-                            <a:srgbClr val="1C1C1C"/>
-                          </a:solidFill>
-                          <a:latin typeface="Calibri"/>
-                        </a:rPr>
-                        <a:t/>
-                      </a:r>
+                      <a:endParaRPr/>
                     </a:p>
                   </a:txBody>
                   <a:tcPr marL="27432" marR="27432" marT="9144" marB="9144" anchor="ctr">
@@ -17504,15 +18168,7 @@
                     <a:lstStyle/>
                     <a:p>
                       <a:pPr algn="ctr"/>
-                      <a:r>
-                        <a:rPr sz="900" b="0">
-                          <a:solidFill>
-                            <a:srgbClr val="1C1C1C"/>
-                          </a:solidFill>
-                          <a:latin typeface="Calibri"/>
-                        </a:rPr>
-                        <a:t/>
-                      </a:r>
+                      <a:endParaRPr/>
                     </a:p>
                   </a:txBody>
                   <a:tcPr marL="27432" marR="27432" marT="9144" marB="9144" anchor="ctr">
@@ -17527,15 +18183,7 @@
                     <a:lstStyle/>
                     <a:p>
                       <a:pPr algn="ctr"/>
-                      <a:r>
-                        <a:rPr sz="900" b="0">
-                          <a:solidFill>
-                            <a:srgbClr val="1C1C1C"/>
-                          </a:solidFill>
-                          <a:latin typeface="Calibri"/>
-                        </a:rPr>
-                        <a:t/>
-                      </a:r>
+                      <a:endParaRPr/>
                     </a:p>
                   </a:txBody>
                   <a:tcPr marL="27432" marR="27432" marT="9144" marB="9144" anchor="ctr">
@@ -17550,15 +18198,7 @@
                     <a:lstStyle/>
                     <a:p>
                       <a:pPr algn="ctr"/>
-                      <a:r>
-                        <a:rPr sz="900" b="0">
-                          <a:solidFill>
-                            <a:srgbClr val="1C1C1C"/>
-                          </a:solidFill>
-                          <a:latin typeface="Calibri"/>
-                        </a:rPr>
-                        <a:t/>
-                      </a:r>
+                      <a:endParaRPr/>
                     </a:p>
                   </a:txBody>
                   <a:tcPr marL="27432" marR="27432" marT="9144" marB="9144" anchor="ctr">
@@ -17573,15 +18213,7 @@
                     <a:lstStyle/>
                     <a:p>
                       <a:pPr algn="ctr"/>
-                      <a:r>
-                        <a:rPr sz="900" b="0">
-                          <a:solidFill>
-                            <a:srgbClr val="1C1C1C"/>
-                          </a:solidFill>
-                          <a:latin typeface="Calibri"/>
-                        </a:rPr>
-                        <a:t/>
-                      </a:r>
+                      <a:endParaRPr/>
                     </a:p>
                   </a:txBody>
                   <a:tcPr marL="27432" marR="27432" marT="9144" marB="9144" anchor="ctr">
@@ -17596,15 +18228,7 @@
                     <a:lstStyle/>
                     <a:p>
                       <a:pPr algn="ctr"/>
-                      <a:r>
-                        <a:rPr sz="900" b="0">
-                          <a:solidFill>
-                            <a:srgbClr val="1C1C1C"/>
-                          </a:solidFill>
-                          <a:latin typeface="Calibri"/>
-                        </a:rPr>
-                        <a:t/>
-                      </a:r>
+                      <a:endParaRPr/>
                     </a:p>
                   </a:txBody>
                   <a:tcPr marL="27432" marR="27432" marT="9144" marB="9144" anchor="ctr">
@@ -17619,15 +18243,7 @@
                     <a:lstStyle/>
                     <a:p>
                       <a:pPr algn="ctr"/>
-                      <a:r>
-                        <a:rPr sz="900" b="0">
-                          <a:solidFill>
-                            <a:srgbClr val="1C1C1C"/>
-                          </a:solidFill>
-                          <a:latin typeface="Calibri"/>
-                        </a:rPr>
-                        <a:t/>
-                      </a:r>
+                      <a:endParaRPr/>
                     </a:p>
                   </a:txBody>
                   <a:tcPr marL="27432" marR="27432" marT="9144" marB="9144" anchor="ctr">
@@ -17642,15 +18258,7 @@
                     <a:lstStyle/>
                     <a:p>
                       <a:pPr algn="ctr"/>
-                      <a:r>
-                        <a:rPr sz="900" b="0">
-                          <a:solidFill>
-                            <a:srgbClr val="1C1C1C"/>
-                          </a:solidFill>
-                          <a:latin typeface="Calibri"/>
-                        </a:rPr>
-                        <a:t/>
-                      </a:r>
+                      <a:endParaRPr/>
                     </a:p>
                   </a:txBody>
                   <a:tcPr marL="27432" marR="27432" marT="9144" marB="9144" anchor="ctr">
@@ -17665,15 +18273,7 @@
                     <a:lstStyle/>
                     <a:p>
                       <a:pPr algn="ctr"/>
-                      <a:r>
-                        <a:rPr sz="900" b="0">
-                          <a:solidFill>
-                            <a:srgbClr val="1C1C1C"/>
-                          </a:solidFill>
-                          <a:latin typeface="Calibri"/>
-                        </a:rPr>
-                        <a:t/>
-                      </a:r>
+                      <a:endParaRPr/>
                     </a:p>
                   </a:txBody>
                   <a:tcPr marL="27432" marR="27432" marT="9144" marB="9144" anchor="ctr">
@@ -17688,15 +18288,7 @@
                     <a:lstStyle/>
                     <a:p>
                       <a:pPr algn="ctr"/>
-                      <a:r>
-                        <a:rPr sz="900" b="0">
-                          <a:solidFill>
-                            <a:srgbClr val="1C1C1C"/>
-                          </a:solidFill>
-                          <a:latin typeface="Calibri"/>
-                        </a:rPr>
-                        <a:t/>
-                      </a:r>
+                      <a:endParaRPr/>
                     </a:p>
                   </a:txBody>
                   <a:tcPr marL="27432" marR="27432" marT="9144" marB="9144" anchor="ctr">
@@ -17711,15 +18303,7 @@
                     <a:lstStyle/>
                     <a:p>
                       <a:pPr algn="ctr"/>
-                      <a:r>
-                        <a:rPr sz="900" b="0">
-                          <a:solidFill>
-                            <a:srgbClr val="1C1C1C"/>
-                          </a:solidFill>
-                          <a:latin typeface="Calibri"/>
-                        </a:rPr>
-                        <a:t/>
-                      </a:r>
+                      <a:endParaRPr/>
                     </a:p>
                   </a:txBody>
                   <a:tcPr marL="27432" marR="27432" marT="9144" marB="9144" anchor="ctr">
@@ -17734,15 +18318,7 @@
                     <a:lstStyle/>
                     <a:p>
                       <a:pPr algn="ctr"/>
-                      <a:r>
-                        <a:rPr sz="900" b="0">
-                          <a:solidFill>
-                            <a:srgbClr val="1C1C1C"/>
-                          </a:solidFill>
-                          <a:latin typeface="Calibri"/>
-                        </a:rPr>
-                        <a:t/>
-                      </a:r>
+                      <a:endParaRPr/>
                     </a:p>
                   </a:txBody>
                   <a:tcPr marL="27432" marR="27432" marT="9144" marB="9144" anchor="ctr">
@@ -17757,15 +18333,7 @@
                     <a:lstStyle/>
                     <a:p>
                       <a:pPr algn="ctr"/>
-                      <a:r>
-                        <a:rPr sz="900" b="0">
-                          <a:solidFill>
-                            <a:srgbClr val="1C1C1C"/>
-                          </a:solidFill>
-                          <a:latin typeface="Calibri"/>
-                        </a:rPr>
-                        <a:t/>
-                      </a:r>
+                      <a:endParaRPr/>
                     </a:p>
                   </a:txBody>
                   <a:tcPr marL="27432" marR="27432" marT="9144" marB="9144" anchor="ctr">
@@ -17774,6 +18342,11 @@
                     </a:solidFill>
                   </a:tcPr>
                 </a:tc>
+                <a:extLst>
+                  <a:ext uri="{0D108BD9-81ED-4DB2-BD59-A6C34878D82A}">
+                    <a16:rowId xmlns:a16="http://schemas.microsoft.com/office/drawing/2014/main" val="10003"/>
+                  </a:ext>
+                </a:extLst>
               </a:tr>
               <a:tr h="274320">
                 <a:tc>
@@ -17805,15 +18378,7 @@
                     <a:lstStyle/>
                     <a:p>
                       <a:pPr algn="ctr"/>
-                      <a:r>
-                        <a:rPr sz="900" b="0">
-                          <a:solidFill>
-                            <a:srgbClr val="1C1C1C"/>
-                          </a:solidFill>
-                          <a:latin typeface="Calibri"/>
-                        </a:rPr>
-                        <a:t/>
-                      </a:r>
+                      <a:endParaRPr/>
                     </a:p>
                   </a:txBody>
                   <a:tcPr marL="27432" marR="27432" marT="9144" marB="9144" anchor="ctr">
@@ -17828,15 +18393,7 @@
                     <a:lstStyle/>
                     <a:p>
                       <a:pPr algn="ctr"/>
-                      <a:r>
-                        <a:rPr sz="900" b="0">
-                          <a:solidFill>
-                            <a:srgbClr val="1C1C1C"/>
-                          </a:solidFill>
-                          <a:latin typeface="Calibri"/>
-                        </a:rPr>
-                        <a:t/>
-                      </a:r>
+                      <a:endParaRPr/>
                     </a:p>
                   </a:txBody>
                   <a:tcPr marL="27432" marR="27432" marT="9144" marB="9144" anchor="ctr">
@@ -17851,15 +18408,7 @@
                     <a:lstStyle/>
                     <a:p>
                       <a:pPr algn="ctr"/>
-                      <a:r>
-                        <a:rPr sz="900" b="0">
-                          <a:solidFill>
-                            <a:srgbClr val="1C1C1C"/>
-                          </a:solidFill>
-                          <a:latin typeface="Calibri"/>
-                        </a:rPr>
-                        <a:t/>
-                      </a:r>
+                      <a:endParaRPr/>
                     </a:p>
                   </a:txBody>
                   <a:tcPr marL="27432" marR="27432" marT="9144" marB="9144" anchor="ctr">
@@ -17874,15 +18423,7 @@
                     <a:lstStyle/>
                     <a:p>
                       <a:pPr algn="ctr"/>
-                      <a:r>
-                        <a:rPr sz="900" b="0">
-                          <a:solidFill>
-                            <a:srgbClr val="1C1C1C"/>
-                          </a:solidFill>
-                          <a:latin typeface="Calibri"/>
-                        </a:rPr>
-                        <a:t/>
-                      </a:r>
+                      <a:endParaRPr/>
                     </a:p>
                   </a:txBody>
                   <a:tcPr marL="27432" marR="27432" marT="9144" marB="9144" anchor="ctr">
@@ -17897,15 +18438,7 @@
                     <a:lstStyle/>
                     <a:p>
                       <a:pPr algn="ctr"/>
-                      <a:r>
-                        <a:rPr sz="900" b="0">
-                          <a:solidFill>
-                            <a:srgbClr val="1C1C1C"/>
-                          </a:solidFill>
-                          <a:latin typeface="Calibri"/>
-                        </a:rPr>
-                        <a:t/>
-                      </a:r>
+                      <a:endParaRPr/>
                     </a:p>
                   </a:txBody>
                   <a:tcPr marL="27432" marR="27432" marT="9144" marB="9144" anchor="ctr">
@@ -17920,15 +18453,7 @@
                     <a:lstStyle/>
                     <a:p>
                       <a:pPr algn="ctr"/>
-                      <a:r>
-                        <a:rPr sz="900" b="0">
-                          <a:solidFill>
-                            <a:srgbClr val="1C1C1C"/>
-                          </a:solidFill>
-                          <a:latin typeface="Calibri"/>
-                        </a:rPr>
-                        <a:t/>
-                      </a:r>
+                      <a:endParaRPr/>
                     </a:p>
                   </a:txBody>
                   <a:tcPr marL="27432" marR="27432" marT="9144" marB="9144" anchor="ctr">
@@ -17943,15 +18468,7 @@
                     <a:lstStyle/>
                     <a:p>
                       <a:pPr algn="ctr"/>
-                      <a:r>
-                        <a:rPr sz="900" b="0">
-                          <a:solidFill>
-                            <a:srgbClr val="1C1C1C"/>
-                          </a:solidFill>
-                          <a:latin typeface="Calibri"/>
-                        </a:rPr>
-                        <a:t/>
-                      </a:r>
+                      <a:endParaRPr/>
                     </a:p>
                   </a:txBody>
                   <a:tcPr marL="27432" marR="27432" marT="9144" marB="9144" anchor="ctr">
@@ -17966,15 +18483,7 @@
                     <a:lstStyle/>
                     <a:p>
                       <a:pPr algn="ctr"/>
-                      <a:r>
-                        <a:rPr sz="900" b="0">
-                          <a:solidFill>
-                            <a:srgbClr val="1C1C1C"/>
-                          </a:solidFill>
-                          <a:latin typeface="Calibri"/>
-                        </a:rPr>
-                        <a:t/>
-                      </a:r>
+                      <a:endParaRPr/>
                     </a:p>
                   </a:txBody>
                   <a:tcPr marL="27432" marR="27432" marT="9144" marB="9144" anchor="ctr">
@@ -17989,15 +18498,7 @@
                     <a:lstStyle/>
                     <a:p>
                       <a:pPr algn="ctr"/>
-                      <a:r>
-                        <a:rPr sz="900" b="0">
-                          <a:solidFill>
-                            <a:srgbClr val="1C1C1C"/>
-                          </a:solidFill>
-                          <a:latin typeface="Calibri"/>
-                        </a:rPr>
-                        <a:t/>
-                      </a:r>
+                      <a:endParaRPr/>
                     </a:p>
                   </a:txBody>
                   <a:tcPr marL="27432" marR="27432" marT="9144" marB="9144" anchor="ctr">
@@ -18012,15 +18513,7 @@
                     <a:lstStyle/>
                     <a:p>
                       <a:pPr algn="ctr"/>
-                      <a:r>
-                        <a:rPr sz="900" b="0">
-                          <a:solidFill>
-                            <a:srgbClr val="1C1C1C"/>
-                          </a:solidFill>
-                          <a:latin typeface="Calibri"/>
-                        </a:rPr>
-                        <a:t/>
-                      </a:r>
+                      <a:endParaRPr/>
                     </a:p>
                   </a:txBody>
                   <a:tcPr marL="27432" marR="27432" marT="9144" marB="9144" anchor="ctr">
@@ -18035,15 +18528,7 @@
                     <a:lstStyle/>
                     <a:p>
                       <a:pPr algn="ctr"/>
-                      <a:r>
-                        <a:rPr sz="900" b="0">
-                          <a:solidFill>
-                            <a:srgbClr val="1C1C1C"/>
-                          </a:solidFill>
-                          <a:latin typeface="Calibri"/>
-                        </a:rPr>
-                        <a:t/>
-                      </a:r>
+                      <a:endParaRPr/>
                     </a:p>
                   </a:txBody>
                   <a:tcPr marL="27432" marR="27432" marT="9144" marB="9144" anchor="ctr">
@@ -18058,15 +18543,7 @@
                     <a:lstStyle/>
                     <a:p>
                       <a:pPr algn="ctr"/>
-                      <a:r>
-                        <a:rPr sz="900" b="0">
-                          <a:solidFill>
-                            <a:srgbClr val="1C1C1C"/>
-                          </a:solidFill>
-                          <a:latin typeface="Calibri"/>
-                        </a:rPr>
-                        <a:t/>
-                      </a:r>
+                      <a:endParaRPr/>
                     </a:p>
                   </a:txBody>
                   <a:tcPr marL="27432" marR="27432" marT="9144" marB="9144" anchor="ctr">
@@ -18081,15 +18558,7 @@
                     <a:lstStyle/>
                     <a:p>
                       <a:pPr algn="ctr"/>
-                      <a:r>
-                        <a:rPr sz="900" b="0">
-                          <a:solidFill>
-                            <a:srgbClr val="1C1C1C"/>
-                          </a:solidFill>
-                          <a:latin typeface="Calibri"/>
-                        </a:rPr>
-                        <a:t/>
-                      </a:r>
+                      <a:endParaRPr/>
                     </a:p>
                   </a:txBody>
                   <a:tcPr marL="27432" marR="27432" marT="9144" marB="9144" anchor="ctr">
@@ -18104,15 +18573,7 @@
                     <a:lstStyle/>
                     <a:p>
                       <a:pPr algn="ctr"/>
-                      <a:r>
-                        <a:rPr sz="900" b="0">
-                          <a:solidFill>
-                            <a:srgbClr val="1C1C1C"/>
-                          </a:solidFill>
-                          <a:latin typeface="Calibri"/>
-                        </a:rPr>
-                        <a:t/>
-                      </a:r>
+                      <a:endParaRPr/>
                     </a:p>
                   </a:txBody>
                   <a:tcPr marL="27432" marR="27432" marT="9144" marB="9144" anchor="ctr">
@@ -18127,15 +18588,7 @@
                     <a:lstStyle/>
                     <a:p>
                       <a:pPr algn="ctr"/>
-                      <a:r>
-                        <a:rPr sz="900" b="0">
-                          <a:solidFill>
-                            <a:srgbClr val="1C1C1C"/>
-                          </a:solidFill>
-                          <a:latin typeface="Calibri"/>
-                        </a:rPr>
-                        <a:t/>
-                      </a:r>
+                      <a:endParaRPr/>
                     </a:p>
                   </a:txBody>
                   <a:tcPr marL="27432" marR="27432" marT="9144" marB="9144" anchor="ctr">
@@ -18150,15 +18603,7 @@
                     <a:lstStyle/>
                     <a:p>
                       <a:pPr algn="ctr"/>
-                      <a:r>
-                        <a:rPr sz="900" b="0">
-                          <a:solidFill>
-                            <a:srgbClr val="1C1C1C"/>
-                          </a:solidFill>
-                          <a:latin typeface="Calibri"/>
-                        </a:rPr>
-                        <a:t/>
-                      </a:r>
+                      <a:endParaRPr/>
                     </a:p>
                   </a:txBody>
                   <a:tcPr marL="27432" marR="27432" marT="9144" marB="9144" anchor="ctr">
@@ -18173,15 +18618,7 @@
                     <a:lstStyle/>
                     <a:p>
                       <a:pPr algn="ctr"/>
-                      <a:r>
-                        <a:rPr sz="900" b="0">
-                          <a:solidFill>
-                            <a:srgbClr val="1C1C1C"/>
-                          </a:solidFill>
-                          <a:latin typeface="Calibri"/>
-                        </a:rPr>
-                        <a:t/>
-                      </a:r>
+                      <a:endParaRPr/>
                     </a:p>
                   </a:txBody>
                   <a:tcPr marL="27432" marR="27432" marT="9144" marB="9144" anchor="ctr">
@@ -18196,15 +18633,7 @@
                     <a:lstStyle/>
                     <a:p>
                       <a:pPr algn="ctr"/>
-                      <a:r>
-                        <a:rPr sz="900" b="0">
-                          <a:solidFill>
-                            <a:srgbClr val="1C1C1C"/>
-                          </a:solidFill>
-                          <a:latin typeface="Calibri"/>
-                        </a:rPr>
-                        <a:t/>
-                      </a:r>
+                      <a:endParaRPr/>
                     </a:p>
                   </a:txBody>
                   <a:tcPr marL="27432" marR="27432" marT="9144" marB="9144" anchor="ctr">
@@ -18213,6 +18642,11 @@
                     </a:solidFill>
                   </a:tcPr>
                 </a:tc>
+                <a:extLst>
+                  <a:ext uri="{0D108BD9-81ED-4DB2-BD59-A6C34878D82A}">
+                    <a16:rowId xmlns:a16="http://schemas.microsoft.com/office/drawing/2014/main" val="10004"/>
+                  </a:ext>
+                </a:extLst>
               </a:tr>
               <a:tr h="274320">
                 <a:tc>
@@ -18244,15 +18678,7 @@
                     <a:lstStyle/>
                     <a:p>
                       <a:pPr algn="ctr"/>
-                      <a:r>
-                        <a:rPr sz="900" b="0">
-                          <a:solidFill>
-                            <a:srgbClr val="1C1C1C"/>
-                          </a:solidFill>
-                          <a:latin typeface="Calibri"/>
-                        </a:rPr>
-                        <a:t/>
-                      </a:r>
+                      <a:endParaRPr/>
                     </a:p>
                   </a:txBody>
                   <a:tcPr marL="27432" marR="27432" marT="9144" marB="9144" anchor="ctr">
@@ -18267,15 +18693,7 @@
                     <a:lstStyle/>
                     <a:p>
                       <a:pPr algn="ctr"/>
-                      <a:r>
-                        <a:rPr sz="900" b="0">
-                          <a:solidFill>
-                            <a:srgbClr val="1C1C1C"/>
-                          </a:solidFill>
-                          <a:latin typeface="Calibri"/>
-                        </a:rPr>
-                        <a:t/>
-                      </a:r>
+                      <a:endParaRPr/>
                     </a:p>
                   </a:txBody>
                   <a:tcPr marL="27432" marR="27432" marT="9144" marB="9144" anchor="ctr">
@@ -18290,15 +18708,7 @@
                     <a:lstStyle/>
                     <a:p>
                       <a:pPr algn="ctr"/>
-                      <a:r>
-                        <a:rPr sz="900" b="0">
-                          <a:solidFill>
-                            <a:srgbClr val="1C1C1C"/>
-                          </a:solidFill>
-                          <a:latin typeface="Calibri"/>
-                        </a:rPr>
-                        <a:t/>
-                      </a:r>
+                      <a:endParaRPr/>
                     </a:p>
                   </a:txBody>
                   <a:tcPr marL="27432" marR="27432" marT="9144" marB="9144" anchor="ctr">
@@ -18313,15 +18723,7 @@
                     <a:lstStyle/>
                     <a:p>
                       <a:pPr algn="ctr"/>
-                      <a:r>
-                        <a:rPr sz="900" b="0">
-                          <a:solidFill>
-                            <a:srgbClr val="1C1C1C"/>
-                          </a:solidFill>
-                          <a:latin typeface="Calibri"/>
-                        </a:rPr>
-                        <a:t/>
-                      </a:r>
+                      <a:endParaRPr/>
                     </a:p>
                   </a:txBody>
                   <a:tcPr marL="27432" marR="27432" marT="9144" marB="9144" anchor="ctr">
@@ -18336,15 +18738,7 @@
                     <a:lstStyle/>
                     <a:p>
                       <a:pPr algn="ctr"/>
-                      <a:r>
-                        <a:rPr sz="900" b="0">
-                          <a:solidFill>
-                            <a:srgbClr val="1C1C1C"/>
-                          </a:solidFill>
-                          <a:latin typeface="Calibri"/>
-                        </a:rPr>
-                        <a:t/>
-                      </a:r>
+                      <a:endParaRPr/>
                     </a:p>
                   </a:txBody>
                   <a:tcPr marL="27432" marR="27432" marT="9144" marB="9144" anchor="ctr">
@@ -18359,15 +18753,7 @@
                     <a:lstStyle/>
                     <a:p>
                       <a:pPr algn="ctr"/>
-                      <a:r>
-                        <a:rPr sz="900" b="0">
-                          <a:solidFill>
-                            <a:srgbClr val="1C1C1C"/>
-                          </a:solidFill>
-                          <a:latin typeface="Calibri"/>
-                        </a:rPr>
-                        <a:t/>
-                      </a:r>
+                      <a:endParaRPr/>
                     </a:p>
                   </a:txBody>
                   <a:tcPr marL="27432" marR="27432" marT="9144" marB="9144" anchor="ctr">
@@ -18382,15 +18768,7 @@
                     <a:lstStyle/>
                     <a:p>
                       <a:pPr algn="ctr"/>
-                      <a:r>
-                        <a:rPr sz="900" b="0">
-                          <a:solidFill>
-                            <a:srgbClr val="1C1C1C"/>
-                          </a:solidFill>
-                          <a:latin typeface="Calibri"/>
-                        </a:rPr>
-                        <a:t/>
-                      </a:r>
+                      <a:endParaRPr/>
                     </a:p>
                   </a:txBody>
                   <a:tcPr marL="27432" marR="27432" marT="9144" marB="9144" anchor="ctr">
@@ -18405,15 +18783,7 @@
                     <a:lstStyle/>
                     <a:p>
                       <a:pPr algn="ctr"/>
-                      <a:r>
-                        <a:rPr sz="900" b="0">
-                          <a:solidFill>
-                            <a:srgbClr val="1C1C1C"/>
-                          </a:solidFill>
-                          <a:latin typeface="Calibri"/>
-                        </a:rPr>
-                        <a:t/>
-                      </a:r>
+                      <a:endParaRPr/>
                     </a:p>
                   </a:txBody>
                   <a:tcPr marL="27432" marR="27432" marT="9144" marB="9144" anchor="ctr">
@@ -18428,15 +18798,7 @@
                     <a:lstStyle/>
                     <a:p>
                       <a:pPr algn="ctr"/>
-                      <a:r>
-                        <a:rPr sz="900" b="0">
-                          <a:solidFill>
-                            <a:srgbClr val="1C1C1C"/>
-                          </a:solidFill>
-                          <a:latin typeface="Calibri"/>
-                        </a:rPr>
-                        <a:t/>
-                      </a:r>
+                      <a:endParaRPr/>
                     </a:p>
                   </a:txBody>
                   <a:tcPr marL="27432" marR="27432" marT="9144" marB="9144" anchor="ctr">
@@ -18451,15 +18813,7 @@
                     <a:lstStyle/>
                     <a:p>
                       <a:pPr algn="ctr"/>
-                      <a:r>
-                        <a:rPr sz="900" b="0">
-                          <a:solidFill>
-                            <a:srgbClr val="1C1C1C"/>
-                          </a:solidFill>
-                          <a:latin typeface="Calibri"/>
-                        </a:rPr>
-                        <a:t/>
-                      </a:r>
+                      <a:endParaRPr/>
                     </a:p>
                   </a:txBody>
                   <a:tcPr marL="27432" marR="27432" marT="9144" marB="9144" anchor="ctr">
@@ -18474,15 +18828,7 @@
                     <a:lstStyle/>
                     <a:p>
                       <a:pPr algn="ctr"/>
-                      <a:r>
-                        <a:rPr sz="900" b="0">
-                          <a:solidFill>
-                            <a:srgbClr val="1C1C1C"/>
-                          </a:solidFill>
-                          <a:latin typeface="Calibri"/>
-                        </a:rPr>
-                        <a:t/>
-                      </a:r>
+                      <a:endParaRPr/>
                     </a:p>
                   </a:txBody>
                   <a:tcPr marL="27432" marR="27432" marT="9144" marB="9144" anchor="ctr">
@@ -18497,15 +18843,7 @@
                     <a:lstStyle/>
                     <a:p>
                       <a:pPr algn="ctr"/>
-                      <a:r>
-                        <a:rPr sz="900" b="0">
-                          <a:solidFill>
-                            <a:srgbClr val="1C1C1C"/>
-                          </a:solidFill>
-                          <a:latin typeface="Calibri"/>
-                        </a:rPr>
-                        <a:t/>
-                      </a:r>
+                      <a:endParaRPr/>
                     </a:p>
                   </a:txBody>
                   <a:tcPr marL="27432" marR="27432" marT="9144" marB="9144" anchor="ctr">
@@ -18520,15 +18858,7 @@
                     <a:lstStyle/>
                     <a:p>
                       <a:pPr algn="ctr"/>
-                      <a:r>
-                        <a:rPr sz="900" b="0">
-                          <a:solidFill>
-                            <a:srgbClr val="1C1C1C"/>
-                          </a:solidFill>
-                          <a:latin typeface="Calibri"/>
-                        </a:rPr>
-                        <a:t/>
-                      </a:r>
+                      <a:endParaRPr/>
                     </a:p>
                   </a:txBody>
                   <a:tcPr marL="27432" marR="27432" marT="9144" marB="9144" anchor="ctr">
@@ -18543,15 +18873,7 @@
                     <a:lstStyle/>
                     <a:p>
                       <a:pPr algn="ctr"/>
-                      <a:r>
-                        <a:rPr sz="900" b="0">
-                          <a:solidFill>
-                            <a:srgbClr val="1C1C1C"/>
-                          </a:solidFill>
-                          <a:latin typeface="Calibri"/>
-                        </a:rPr>
-                        <a:t/>
-                      </a:r>
+                      <a:endParaRPr/>
                     </a:p>
                   </a:txBody>
                   <a:tcPr marL="27432" marR="27432" marT="9144" marB="9144" anchor="ctr">
@@ -18566,15 +18888,7 @@
                     <a:lstStyle/>
                     <a:p>
                       <a:pPr algn="ctr"/>
-                      <a:r>
-                        <a:rPr sz="900" b="0">
-                          <a:solidFill>
-                            <a:srgbClr val="1C1C1C"/>
-                          </a:solidFill>
-                          <a:latin typeface="Calibri"/>
-                        </a:rPr>
-                        <a:t/>
-                      </a:r>
+                      <a:endParaRPr/>
                     </a:p>
                   </a:txBody>
                   <a:tcPr marL="27432" marR="27432" marT="9144" marB="9144" anchor="ctr">
@@ -18589,15 +18903,7 @@
                     <a:lstStyle/>
                     <a:p>
                       <a:pPr algn="ctr"/>
-                      <a:r>
-                        <a:rPr sz="900" b="0">
-                          <a:solidFill>
-                            <a:srgbClr val="1C1C1C"/>
-                          </a:solidFill>
-                          <a:latin typeface="Calibri"/>
-                        </a:rPr>
-                        <a:t/>
-                      </a:r>
+                      <a:endParaRPr/>
                     </a:p>
                   </a:txBody>
                   <a:tcPr marL="27432" marR="27432" marT="9144" marB="9144" anchor="ctr">
@@ -18612,15 +18918,7 @@
                     <a:lstStyle/>
                     <a:p>
                       <a:pPr algn="ctr"/>
-                      <a:r>
-                        <a:rPr sz="900" b="0">
-                          <a:solidFill>
-                            <a:srgbClr val="1C1C1C"/>
-                          </a:solidFill>
-                          <a:latin typeface="Calibri"/>
-                        </a:rPr>
-                        <a:t/>
-                      </a:r>
+                      <a:endParaRPr/>
                     </a:p>
                   </a:txBody>
                   <a:tcPr marL="27432" marR="27432" marT="9144" marB="9144" anchor="ctr">
@@ -18635,15 +18933,7 @@
                     <a:lstStyle/>
                     <a:p>
                       <a:pPr algn="ctr"/>
-                      <a:r>
-                        <a:rPr sz="900" b="0">
-                          <a:solidFill>
-                            <a:srgbClr val="1C1C1C"/>
-                          </a:solidFill>
-                          <a:latin typeface="Calibri"/>
-                        </a:rPr>
-                        <a:t/>
-                      </a:r>
+                      <a:endParaRPr/>
                     </a:p>
                   </a:txBody>
                   <a:tcPr marL="27432" marR="27432" marT="9144" marB="9144" anchor="ctr">
@@ -18652,6 +18942,11 @@
                     </a:solidFill>
                   </a:tcPr>
                 </a:tc>
+                <a:extLst>
+                  <a:ext uri="{0D108BD9-81ED-4DB2-BD59-A6C34878D82A}">
+                    <a16:rowId xmlns:a16="http://schemas.microsoft.com/office/drawing/2014/main" val="10005"/>
+                  </a:ext>
+                </a:extLst>
               </a:tr>
               <a:tr h="274320">
                 <a:tc>
@@ -18683,15 +18978,7 @@
                     <a:lstStyle/>
                     <a:p>
                       <a:pPr algn="ctr"/>
-                      <a:r>
-                        <a:rPr sz="900" b="0">
-                          <a:solidFill>
-                            <a:srgbClr val="1C1C1C"/>
-                          </a:solidFill>
-                          <a:latin typeface="Calibri"/>
-                        </a:rPr>
-                        <a:t/>
-                      </a:r>
+                      <a:endParaRPr/>
                     </a:p>
                   </a:txBody>
                   <a:tcPr marL="27432" marR="27432" marT="9144" marB="9144" anchor="ctr">
@@ -18706,15 +18993,7 @@
                     <a:lstStyle/>
                     <a:p>
                       <a:pPr algn="ctr"/>
-                      <a:r>
-                        <a:rPr sz="900" b="0">
-                          <a:solidFill>
-                            <a:srgbClr val="1C1C1C"/>
-                          </a:solidFill>
-                          <a:latin typeface="Calibri"/>
-                        </a:rPr>
-                        <a:t/>
-                      </a:r>
+                      <a:endParaRPr/>
                     </a:p>
                   </a:txBody>
                   <a:tcPr marL="27432" marR="27432" marT="9144" marB="9144" anchor="ctr">
@@ -18729,15 +19008,7 @@
                     <a:lstStyle/>
                     <a:p>
                       <a:pPr algn="ctr"/>
-                      <a:r>
-                        <a:rPr sz="900" b="0">
-                          <a:solidFill>
-                            <a:srgbClr val="1C1C1C"/>
-                          </a:solidFill>
-                          <a:latin typeface="Calibri"/>
-                        </a:rPr>
-                        <a:t/>
-                      </a:r>
+                      <a:endParaRPr/>
                     </a:p>
                   </a:txBody>
                   <a:tcPr marL="27432" marR="27432" marT="9144" marB="9144" anchor="ctr">
@@ -18752,15 +19023,7 @@
                     <a:lstStyle/>
                     <a:p>
                       <a:pPr algn="ctr"/>
-                      <a:r>
-                        <a:rPr sz="900" b="0">
-                          <a:solidFill>
-                            <a:srgbClr val="1C1C1C"/>
-                          </a:solidFill>
-                          <a:latin typeface="Calibri"/>
-                        </a:rPr>
-                        <a:t/>
-                      </a:r>
+                      <a:endParaRPr/>
                     </a:p>
                   </a:txBody>
                   <a:tcPr marL="27432" marR="27432" marT="9144" marB="9144" anchor="ctr">
@@ -18775,15 +19038,7 @@
                     <a:lstStyle/>
                     <a:p>
                       <a:pPr algn="ctr"/>
-                      <a:r>
-                        <a:rPr sz="900" b="0">
-                          <a:solidFill>
-                            <a:srgbClr val="1C1C1C"/>
-                          </a:solidFill>
-                          <a:latin typeface="Calibri"/>
-                        </a:rPr>
-                        <a:t/>
-                      </a:r>
+                      <a:endParaRPr/>
                     </a:p>
                   </a:txBody>
                   <a:tcPr marL="27432" marR="27432" marT="9144" marB="9144" anchor="ctr">
@@ -18798,15 +19053,7 @@
                     <a:lstStyle/>
                     <a:p>
                       <a:pPr algn="ctr"/>
-                      <a:r>
-                        <a:rPr sz="900" b="0">
-                          <a:solidFill>
-                            <a:srgbClr val="1C1C1C"/>
-                          </a:solidFill>
-                          <a:latin typeface="Calibri"/>
-                        </a:rPr>
-                        <a:t/>
-                      </a:r>
+                      <a:endParaRPr/>
                     </a:p>
                   </a:txBody>
                   <a:tcPr marL="27432" marR="27432" marT="9144" marB="9144" anchor="ctr">
@@ -18821,15 +19068,7 @@
                     <a:lstStyle/>
                     <a:p>
                       <a:pPr algn="ctr"/>
-                      <a:r>
-                        <a:rPr sz="900" b="0">
-                          <a:solidFill>
-                            <a:srgbClr val="1C1C1C"/>
-                          </a:solidFill>
-                          <a:latin typeface="Calibri"/>
-                        </a:rPr>
-                        <a:t/>
-                      </a:r>
+                      <a:endParaRPr/>
                     </a:p>
                   </a:txBody>
                   <a:tcPr marL="27432" marR="27432" marT="9144" marB="9144" anchor="ctr">
@@ -18844,15 +19083,7 @@
                     <a:lstStyle/>
                     <a:p>
                       <a:pPr algn="ctr"/>
-                      <a:r>
-                        <a:rPr sz="900" b="0">
-                          <a:solidFill>
-                            <a:srgbClr val="1C1C1C"/>
-                          </a:solidFill>
-                          <a:latin typeface="Calibri"/>
-                        </a:rPr>
-                        <a:t/>
-                      </a:r>
+                      <a:endParaRPr/>
                     </a:p>
                   </a:txBody>
                   <a:tcPr marL="27432" marR="27432" marT="9144" marB="9144" anchor="ctr">
@@ -18867,15 +19098,7 @@
                     <a:lstStyle/>
                     <a:p>
                       <a:pPr algn="ctr"/>
-                      <a:r>
-                        <a:rPr sz="900" b="0">
-                          <a:solidFill>
-                            <a:srgbClr val="1C1C1C"/>
-                          </a:solidFill>
-                          <a:latin typeface="Calibri"/>
-                        </a:rPr>
-                        <a:t/>
-                      </a:r>
+                      <a:endParaRPr/>
                     </a:p>
                   </a:txBody>
                   <a:tcPr marL="27432" marR="27432" marT="9144" marB="9144" anchor="ctr">
@@ -18890,15 +19113,7 @@
                     <a:lstStyle/>
                     <a:p>
                       <a:pPr algn="ctr"/>
-                      <a:r>
-                        <a:rPr sz="900" b="0">
-                          <a:solidFill>
-                            <a:srgbClr val="1C1C1C"/>
-                          </a:solidFill>
-                          <a:latin typeface="Calibri"/>
-                        </a:rPr>
-                        <a:t/>
-                      </a:r>
+                      <a:endParaRPr/>
                     </a:p>
                   </a:txBody>
                   <a:tcPr marL="27432" marR="27432" marT="9144" marB="9144" anchor="ctr">
@@ -18913,15 +19128,7 @@
                     <a:lstStyle/>
                     <a:p>
                       <a:pPr algn="ctr"/>
-                      <a:r>
-                        <a:rPr sz="900" b="0">
-                          <a:solidFill>
-                            <a:srgbClr val="1C1C1C"/>
-                          </a:solidFill>
-                          <a:latin typeface="Calibri"/>
-                        </a:rPr>
-                        <a:t/>
-                      </a:r>
+                      <a:endParaRPr/>
                     </a:p>
                   </a:txBody>
                   <a:tcPr marL="27432" marR="27432" marT="9144" marB="9144" anchor="ctr">
@@ -18936,15 +19143,7 @@
                     <a:lstStyle/>
                     <a:p>
                       <a:pPr algn="ctr"/>
-                      <a:r>
-                        <a:rPr sz="900" b="0">
-                          <a:solidFill>
-                            <a:srgbClr val="1C1C1C"/>
-                          </a:solidFill>
-                          <a:latin typeface="Calibri"/>
-                        </a:rPr>
-                        <a:t/>
-                      </a:r>
+                      <a:endParaRPr/>
                     </a:p>
                   </a:txBody>
                   <a:tcPr marL="27432" marR="27432" marT="9144" marB="9144" anchor="ctr">
@@ -18959,15 +19158,7 @@
                     <a:lstStyle/>
                     <a:p>
                       <a:pPr algn="ctr"/>
-                      <a:r>
-                        <a:rPr sz="900" b="0">
-                          <a:solidFill>
-                            <a:srgbClr val="1C1C1C"/>
-                          </a:solidFill>
-                          <a:latin typeface="Calibri"/>
-                        </a:rPr>
-                        <a:t/>
-                      </a:r>
+                      <a:endParaRPr/>
                     </a:p>
                   </a:txBody>
                   <a:tcPr marL="27432" marR="27432" marT="9144" marB="9144" anchor="ctr">
@@ -18982,15 +19173,7 @@
                     <a:lstStyle/>
                     <a:p>
                       <a:pPr algn="ctr"/>
-                      <a:r>
-                        <a:rPr sz="900" b="0">
-                          <a:solidFill>
-                            <a:srgbClr val="1C1C1C"/>
-                          </a:solidFill>
-                          <a:latin typeface="Calibri"/>
-                        </a:rPr>
-                        <a:t/>
-                      </a:r>
+                      <a:endParaRPr/>
                     </a:p>
                   </a:txBody>
                   <a:tcPr marL="27432" marR="27432" marT="9144" marB="9144" anchor="ctr">
@@ -19005,15 +19188,7 @@
                     <a:lstStyle/>
                     <a:p>
                       <a:pPr algn="ctr"/>
-                      <a:r>
-                        <a:rPr sz="900" b="0">
-                          <a:solidFill>
-                            <a:srgbClr val="1C1C1C"/>
-                          </a:solidFill>
-                          <a:latin typeface="Calibri"/>
-                        </a:rPr>
-                        <a:t/>
-                      </a:r>
+                      <a:endParaRPr/>
                     </a:p>
                   </a:txBody>
                   <a:tcPr marL="27432" marR="27432" marT="9144" marB="9144" anchor="ctr">
@@ -19028,15 +19203,7 @@
                     <a:lstStyle/>
                     <a:p>
                       <a:pPr algn="ctr"/>
-                      <a:r>
-                        <a:rPr sz="900" b="0">
-                          <a:solidFill>
-                            <a:srgbClr val="1C1C1C"/>
-                          </a:solidFill>
-                          <a:latin typeface="Calibri"/>
-                        </a:rPr>
-                        <a:t/>
-                      </a:r>
+                      <a:endParaRPr/>
                     </a:p>
                   </a:txBody>
                   <a:tcPr marL="27432" marR="27432" marT="9144" marB="9144" anchor="ctr">
@@ -19051,15 +19218,7 @@
                     <a:lstStyle/>
                     <a:p>
                       <a:pPr algn="ctr"/>
-                      <a:r>
-                        <a:rPr sz="900" b="0">
-                          <a:solidFill>
-                            <a:srgbClr val="1C1C1C"/>
-                          </a:solidFill>
-                          <a:latin typeface="Calibri"/>
-                        </a:rPr>
-                        <a:t/>
-                      </a:r>
+                      <a:endParaRPr/>
                     </a:p>
                   </a:txBody>
                   <a:tcPr marL="27432" marR="27432" marT="9144" marB="9144" anchor="ctr">
@@ -19074,15 +19233,7 @@
                     <a:lstStyle/>
                     <a:p>
                       <a:pPr algn="ctr"/>
-                      <a:r>
-                        <a:rPr sz="900" b="0">
-                          <a:solidFill>
-                            <a:srgbClr val="1C1C1C"/>
-                          </a:solidFill>
-                          <a:latin typeface="Calibri"/>
-                        </a:rPr>
-                        <a:t/>
-                      </a:r>
+                      <a:endParaRPr/>
                     </a:p>
                   </a:txBody>
                   <a:tcPr marL="27432" marR="27432" marT="9144" marB="9144" anchor="ctr">
@@ -19091,6 +19242,11 @@
                     </a:solidFill>
                   </a:tcPr>
                 </a:tc>
+                <a:extLst>
+                  <a:ext uri="{0D108BD9-81ED-4DB2-BD59-A6C34878D82A}">
+                    <a16:rowId xmlns:a16="http://schemas.microsoft.com/office/drawing/2014/main" val="10006"/>
+                  </a:ext>
+                </a:extLst>
               </a:tr>
               <a:tr h="274320">
                 <a:tc>
@@ -19122,15 +19278,7 @@
                     <a:lstStyle/>
                     <a:p>
                       <a:pPr algn="ctr"/>
-                      <a:r>
-                        <a:rPr sz="900" b="0">
-                          <a:solidFill>
-                            <a:srgbClr val="1C1C1C"/>
-                          </a:solidFill>
-                          <a:latin typeface="Calibri"/>
-                        </a:rPr>
-                        <a:t/>
-                      </a:r>
+                      <a:endParaRPr/>
                     </a:p>
                   </a:txBody>
                   <a:tcPr marL="27432" marR="27432" marT="9144" marB="9144" anchor="ctr">
@@ -19145,15 +19293,7 @@
                     <a:lstStyle/>
                     <a:p>
                       <a:pPr algn="ctr"/>
-                      <a:r>
-                        <a:rPr sz="900" b="0">
-                          <a:solidFill>
-                            <a:srgbClr val="1C1C1C"/>
-                          </a:solidFill>
-                          <a:latin typeface="Calibri"/>
-                        </a:rPr>
-                        <a:t/>
-                      </a:r>
+                      <a:endParaRPr/>
                     </a:p>
                   </a:txBody>
                   <a:tcPr marL="27432" marR="27432" marT="9144" marB="9144" anchor="ctr">
@@ -19168,15 +19308,7 @@
                     <a:lstStyle/>
                     <a:p>
                       <a:pPr algn="ctr"/>
-                      <a:r>
-                        <a:rPr sz="900" b="0">
-                          <a:solidFill>
-                            <a:srgbClr val="1C1C1C"/>
-                          </a:solidFill>
-                          <a:latin typeface="Calibri"/>
-                        </a:rPr>
-                        <a:t/>
-                      </a:r>
+                      <a:endParaRPr/>
                     </a:p>
                   </a:txBody>
                   <a:tcPr marL="27432" marR="27432" marT="9144" marB="9144" anchor="ctr">
@@ -19191,15 +19323,7 @@
                     <a:lstStyle/>
                     <a:p>
                       <a:pPr algn="ctr"/>
-                      <a:r>
-                        <a:rPr sz="900" b="0">
-                          <a:solidFill>
-                            <a:srgbClr val="1C1C1C"/>
-                          </a:solidFill>
-                          <a:latin typeface="Calibri"/>
-                        </a:rPr>
-                        <a:t/>
-                      </a:r>
+                      <a:endParaRPr/>
                     </a:p>
                   </a:txBody>
                   <a:tcPr marL="27432" marR="27432" marT="9144" marB="9144" anchor="ctr">
@@ -19214,15 +19338,7 @@
                     <a:lstStyle/>
                     <a:p>
                       <a:pPr algn="ctr"/>
-                      <a:r>
-                        <a:rPr sz="900" b="0">
-                          <a:solidFill>
-                            <a:srgbClr val="1C1C1C"/>
-                          </a:solidFill>
-                          <a:latin typeface="Calibri"/>
-                        </a:rPr>
-                        <a:t/>
-                      </a:r>
+                      <a:endParaRPr/>
                     </a:p>
                   </a:txBody>
                   <a:tcPr marL="27432" marR="27432" marT="9144" marB="9144" anchor="ctr">
@@ -19237,15 +19353,7 @@
                     <a:lstStyle/>
                     <a:p>
                       <a:pPr algn="ctr"/>
-                      <a:r>
-                        <a:rPr sz="900" b="0">
-                          <a:solidFill>
-                            <a:srgbClr val="1C1C1C"/>
-                          </a:solidFill>
-                          <a:latin typeface="Calibri"/>
-                        </a:rPr>
-                        <a:t/>
-                      </a:r>
+                      <a:endParaRPr/>
                     </a:p>
                   </a:txBody>
                   <a:tcPr marL="27432" marR="27432" marT="9144" marB="9144" anchor="ctr">
@@ -19260,15 +19368,7 @@
                     <a:lstStyle/>
                     <a:p>
                       <a:pPr algn="ctr"/>
-                      <a:r>
-                        <a:rPr sz="900" b="0">
-                          <a:solidFill>
-                            <a:srgbClr val="1C1C1C"/>
-                          </a:solidFill>
-                          <a:latin typeface="Calibri"/>
-                        </a:rPr>
-                        <a:t/>
-                      </a:r>
+                      <a:endParaRPr/>
                     </a:p>
                   </a:txBody>
                   <a:tcPr marL="27432" marR="27432" marT="9144" marB="9144" anchor="ctr">
@@ -19283,15 +19383,7 @@
                     <a:lstStyle/>
                     <a:p>
                       <a:pPr algn="ctr"/>
-                      <a:r>
-                        <a:rPr sz="900" b="0">
-                          <a:solidFill>
-                            <a:srgbClr val="1C1C1C"/>
-                          </a:solidFill>
-                          <a:latin typeface="Calibri"/>
-                        </a:rPr>
-                        <a:t/>
-                      </a:r>
+                      <a:endParaRPr/>
                     </a:p>
                   </a:txBody>
                   <a:tcPr marL="27432" marR="27432" marT="9144" marB="9144" anchor="ctr">
@@ -19306,15 +19398,7 @@
                     <a:lstStyle/>
                     <a:p>
                       <a:pPr algn="ctr"/>
-                      <a:r>
-                        <a:rPr sz="900" b="0">
-                          <a:solidFill>
-                            <a:srgbClr val="1C1C1C"/>
-                          </a:solidFill>
-                          <a:latin typeface="Calibri"/>
-                        </a:rPr>
-                        <a:t/>
-                      </a:r>
+                      <a:endParaRPr/>
                     </a:p>
                   </a:txBody>
                   <a:tcPr marL="27432" marR="27432" marT="9144" marB="9144" anchor="ctr">
@@ -19329,15 +19413,7 @@
                     <a:lstStyle/>
                     <a:p>
                       <a:pPr algn="ctr"/>
-                      <a:r>
-                        <a:rPr sz="900" b="0">
-                          <a:solidFill>
-                            <a:srgbClr val="1C1C1C"/>
-                          </a:solidFill>
-                          <a:latin typeface="Calibri"/>
-                        </a:rPr>
-                        <a:t/>
-                      </a:r>
+                      <a:endParaRPr/>
                     </a:p>
                   </a:txBody>
                   <a:tcPr marL="27432" marR="27432" marT="9144" marB="9144" anchor="ctr">
@@ -19352,15 +19428,7 @@
                     <a:lstStyle/>
                     <a:p>
                       <a:pPr algn="ctr"/>
-                      <a:r>
-                        <a:rPr sz="900" b="0">
-                          <a:solidFill>
-                            <a:srgbClr val="1C1C1C"/>
-                          </a:solidFill>
-                          <a:latin typeface="Calibri"/>
-                        </a:rPr>
-                        <a:t/>
-                      </a:r>
+                      <a:endParaRPr/>
                     </a:p>
                   </a:txBody>
                   <a:tcPr marL="27432" marR="27432" marT="9144" marB="9144" anchor="ctr">
@@ -19375,15 +19443,7 @@
                     <a:lstStyle/>
                     <a:p>
                       <a:pPr algn="ctr"/>
-                      <a:r>
-                        <a:rPr sz="900" b="0">
-                          <a:solidFill>
-                            <a:srgbClr val="1C1C1C"/>
-                          </a:solidFill>
-                          <a:latin typeface="Calibri"/>
-                        </a:rPr>
-                        <a:t/>
-                      </a:r>
+                      <a:endParaRPr/>
                     </a:p>
                   </a:txBody>
                   <a:tcPr marL="27432" marR="27432" marT="9144" marB="9144" anchor="ctr">
@@ -19398,15 +19458,7 @@
                     <a:lstStyle/>
                     <a:p>
                       <a:pPr algn="ctr"/>
-                      <a:r>
-                        <a:rPr sz="900" b="0">
-                          <a:solidFill>
-                            <a:srgbClr val="1C1C1C"/>
-                          </a:solidFill>
-                          <a:latin typeface="Calibri"/>
-                        </a:rPr>
-                        <a:t/>
-                      </a:r>
+                      <a:endParaRPr/>
                     </a:p>
                   </a:txBody>
                   <a:tcPr marL="27432" marR="27432" marT="9144" marB="9144" anchor="ctr">
@@ -19421,15 +19473,7 @@
                     <a:lstStyle/>
                     <a:p>
                       <a:pPr algn="ctr"/>
-                      <a:r>
-                        <a:rPr sz="900" b="0">
-                          <a:solidFill>
-                            <a:srgbClr val="1C1C1C"/>
-                          </a:solidFill>
-                          <a:latin typeface="Calibri"/>
-                        </a:rPr>
-                        <a:t/>
-                      </a:r>
+                      <a:endParaRPr/>
                     </a:p>
                   </a:txBody>
                   <a:tcPr marL="27432" marR="27432" marT="9144" marB="9144" anchor="ctr">
@@ -19444,15 +19488,7 @@
                     <a:lstStyle/>
                     <a:p>
                       <a:pPr algn="ctr"/>
-                      <a:r>
-                        <a:rPr sz="900" b="0">
-                          <a:solidFill>
-                            <a:srgbClr val="1C1C1C"/>
-                          </a:solidFill>
-                          <a:latin typeface="Calibri"/>
-                        </a:rPr>
-                        <a:t/>
-                      </a:r>
+                      <a:endParaRPr/>
                     </a:p>
                   </a:txBody>
                   <a:tcPr marL="27432" marR="27432" marT="9144" marB="9144" anchor="ctr">
@@ -19467,15 +19503,7 @@
                     <a:lstStyle/>
                     <a:p>
                       <a:pPr algn="ctr"/>
-                      <a:r>
-                        <a:rPr sz="900" b="0">
-                          <a:solidFill>
-                            <a:srgbClr val="1C1C1C"/>
-                          </a:solidFill>
-                          <a:latin typeface="Calibri"/>
-                        </a:rPr>
-                        <a:t/>
-                      </a:r>
+                      <a:endParaRPr/>
                     </a:p>
                   </a:txBody>
                   <a:tcPr marL="27432" marR="27432" marT="9144" marB="9144" anchor="ctr">
@@ -19490,15 +19518,7 @@
                     <a:lstStyle/>
                     <a:p>
                       <a:pPr algn="ctr"/>
-                      <a:r>
-                        <a:rPr sz="900" b="0">
-                          <a:solidFill>
-                            <a:srgbClr val="1C1C1C"/>
-                          </a:solidFill>
-                          <a:latin typeface="Calibri"/>
-                        </a:rPr>
-                        <a:t/>
-                      </a:r>
+                      <a:endParaRPr/>
                     </a:p>
                   </a:txBody>
                   <a:tcPr marL="27432" marR="27432" marT="9144" marB="9144" anchor="ctr">
@@ -19513,15 +19533,7 @@
                     <a:lstStyle/>
                     <a:p>
                       <a:pPr algn="ctr"/>
-                      <a:r>
-                        <a:rPr sz="900" b="0">
-                          <a:solidFill>
-                            <a:srgbClr val="1C1C1C"/>
-                          </a:solidFill>
-                          <a:latin typeface="Calibri"/>
-                        </a:rPr>
-                        <a:t/>
-                      </a:r>
+                      <a:endParaRPr/>
                     </a:p>
                   </a:txBody>
                   <a:tcPr marL="27432" marR="27432" marT="9144" marB="9144" anchor="ctr">
@@ -19530,6 +19542,11 @@
                     </a:solidFill>
                   </a:tcPr>
                 </a:tc>
+                <a:extLst>
+                  <a:ext uri="{0D108BD9-81ED-4DB2-BD59-A6C34878D82A}">
+                    <a16:rowId xmlns:a16="http://schemas.microsoft.com/office/drawing/2014/main" val="10007"/>
+                  </a:ext>
+                </a:extLst>
               </a:tr>
               <a:tr h="274320">
                 <a:tc>
@@ -19561,15 +19578,7 @@
                     <a:lstStyle/>
                     <a:p>
                       <a:pPr algn="ctr"/>
-                      <a:r>
-                        <a:rPr sz="900" b="0">
-                          <a:solidFill>
-                            <a:srgbClr val="1C1C1C"/>
-                          </a:solidFill>
-                          <a:latin typeface="Calibri"/>
-                        </a:rPr>
-                        <a:t/>
-                      </a:r>
+                      <a:endParaRPr/>
                     </a:p>
                   </a:txBody>
                   <a:tcPr marL="27432" marR="27432" marT="9144" marB="9144" anchor="ctr">
@@ -19584,15 +19593,7 @@
                     <a:lstStyle/>
                     <a:p>
                       <a:pPr algn="ctr"/>
-                      <a:r>
-                        <a:rPr sz="900" b="0">
-                          <a:solidFill>
-                            <a:srgbClr val="1C1C1C"/>
-                          </a:solidFill>
-                          <a:latin typeface="Calibri"/>
-                        </a:rPr>
-                        <a:t/>
-                      </a:r>
+                      <a:endParaRPr/>
                     </a:p>
                   </a:txBody>
                   <a:tcPr marL="27432" marR="27432" marT="9144" marB="9144" anchor="ctr">
@@ -19607,15 +19608,7 @@
                     <a:lstStyle/>
                     <a:p>
                       <a:pPr algn="ctr"/>
-                      <a:r>
-                        <a:rPr sz="900" b="0">
-                          <a:solidFill>
-                            <a:srgbClr val="1C1C1C"/>
-                          </a:solidFill>
-                          <a:latin typeface="Calibri"/>
-                        </a:rPr>
-                        <a:t/>
-                      </a:r>
+                      <a:endParaRPr/>
                     </a:p>
                   </a:txBody>
                   <a:tcPr marL="27432" marR="27432" marT="9144" marB="9144" anchor="ctr">
@@ -19630,15 +19623,7 @@
                     <a:lstStyle/>
                     <a:p>
                       <a:pPr algn="ctr"/>
-                      <a:r>
-                        <a:rPr sz="900" b="0">
-                          <a:solidFill>
-                            <a:srgbClr val="1C1C1C"/>
-                          </a:solidFill>
-                          <a:latin typeface="Calibri"/>
-                        </a:rPr>
-                        <a:t/>
-                      </a:r>
+                      <a:endParaRPr/>
                     </a:p>
                   </a:txBody>
                   <a:tcPr marL="27432" marR="27432" marT="9144" marB="9144" anchor="ctr">
@@ -19653,15 +19638,7 @@
                     <a:lstStyle/>
                     <a:p>
                       <a:pPr algn="ctr"/>
-                      <a:r>
-                        <a:rPr sz="900" b="0">
-                          <a:solidFill>
-                            <a:srgbClr val="1C1C1C"/>
-                          </a:solidFill>
-                          <a:latin typeface="Calibri"/>
-                        </a:rPr>
-                        <a:t/>
-                      </a:r>
+                      <a:endParaRPr/>
                     </a:p>
                   </a:txBody>
                   <a:tcPr marL="27432" marR="27432" marT="9144" marB="9144" anchor="ctr">
@@ -19676,15 +19653,7 @@
                     <a:lstStyle/>
                     <a:p>
                       <a:pPr algn="ctr"/>
-                      <a:r>
-                        <a:rPr sz="900" b="0">
-                          <a:solidFill>
-                            <a:srgbClr val="1C1C1C"/>
-                          </a:solidFill>
-                          <a:latin typeface="Calibri"/>
-                        </a:rPr>
-                        <a:t/>
-                      </a:r>
+                      <a:endParaRPr/>
                     </a:p>
                   </a:txBody>
                   <a:tcPr marL="27432" marR="27432" marT="9144" marB="9144" anchor="ctr">
@@ -19699,15 +19668,7 @@
                     <a:lstStyle/>
                     <a:p>
                       <a:pPr algn="ctr"/>
-                      <a:r>
-                        <a:rPr sz="900" b="0">
-                          <a:solidFill>
-                            <a:srgbClr val="1C1C1C"/>
-                          </a:solidFill>
-                          <a:latin typeface="Calibri"/>
-                        </a:rPr>
-                        <a:t/>
-                      </a:r>
+                      <a:endParaRPr/>
                     </a:p>
                   </a:txBody>
                   <a:tcPr marL="27432" marR="27432" marT="9144" marB="9144" anchor="ctr">
@@ -19722,15 +19683,7 @@
                     <a:lstStyle/>
                     <a:p>
                       <a:pPr algn="ctr"/>
-                      <a:r>
-                        <a:rPr sz="900" b="0">
-                          <a:solidFill>
-                            <a:srgbClr val="1C1C1C"/>
-                          </a:solidFill>
-                          <a:latin typeface="Calibri"/>
-                        </a:rPr>
-                        <a:t/>
-                      </a:r>
+                      <a:endParaRPr/>
                     </a:p>
                   </a:txBody>
                   <a:tcPr marL="27432" marR="27432" marT="9144" marB="9144" anchor="ctr">
@@ -19745,15 +19698,7 @@
                     <a:lstStyle/>
                     <a:p>
                       <a:pPr algn="ctr"/>
-                      <a:r>
-                        <a:rPr sz="900" b="0">
-                          <a:solidFill>
-                            <a:srgbClr val="1C1C1C"/>
-                          </a:solidFill>
-                          <a:latin typeface="Calibri"/>
-                        </a:rPr>
-                        <a:t/>
-                      </a:r>
+                      <a:endParaRPr/>
                     </a:p>
                   </a:txBody>
                   <a:tcPr marL="27432" marR="27432" marT="9144" marB="9144" anchor="ctr">
@@ -19768,15 +19713,7 @@
                     <a:lstStyle/>
                     <a:p>
                       <a:pPr algn="ctr"/>
-                      <a:r>
-                        <a:rPr sz="900" b="0">
-                          <a:solidFill>
-                            <a:srgbClr val="1C1C1C"/>
-                          </a:solidFill>
-                          <a:latin typeface="Calibri"/>
-                        </a:rPr>
-                        <a:t/>
-                      </a:r>
+                      <a:endParaRPr/>
                     </a:p>
                   </a:txBody>
                   <a:tcPr marL="27432" marR="27432" marT="9144" marB="9144" anchor="ctr">
@@ -19791,15 +19728,7 @@
                     <a:lstStyle/>
                     <a:p>
                       <a:pPr algn="ctr"/>
-                      <a:r>
-                        <a:rPr sz="900" b="0">
-                          <a:solidFill>
-                            <a:srgbClr val="1C1C1C"/>
-                          </a:solidFill>
-                          <a:latin typeface="Calibri"/>
-                        </a:rPr>
-                        <a:t/>
-                      </a:r>
+                      <a:endParaRPr/>
                     </a:p>
                   </a:txBody>
                   <a:tcPr marL="27432" marR="27432" marT="9144" marB="9144" anchor="ctr">
@@ -19814,15 +19743,7 @@
                     <a:lstStyle/>
                     <a:p>
                       <a:pPr algn="ctr"/>
-                      <a:r>
-                        <a:rPr sz="900" b="0">
-                          <a:solidFill>
-                            <a:srgbClr val="1C1C1C"/>
-                          </a:solidFill>
-                          <a:latin typeface="Calibri"/>
-                        </a:rPr>
-                        <a:t/>
-                      </a:r>
+                      <a:endParaRPr/>
                     </a:p>
                   </a:txBody>
                   <a:tcPr marL="27432" marR="27432" marT="9144" marB="9144" anchor="ctr">
@@ -19837,15 +19758,7 @@
                     <a:lstStyle/>
                     <a:p>
                       <a:pPr algn="ctr"/>
-                      <a:r>
-                        <a:rPr sz="900" b="0">
-                          <a:solidFill>
-                            <a:srgbClr val="1C1C1C"/>
-                          </a:solidFill>
-                          <a:latin typeface="Calibri"/>
-                        </a:rPr>
-                        <a:t/>
-                      </a:r>
+                      <a:endParaRPr/>
                     </a:p>
                   </a:txBody>
                   <a:tcPr marL="27432" marR="27432" marT="9144" marB="9144" anchor="ctr">
@@ -19860,15 +19773,7 @@
                     <a:lstStyle/>
                     <a:p>
                       <a:pPr algn="ctr"/>
-                      <a:r>
-                        <a:rPr sz="900" b="0">
-                          <a:solidFill>
-                            <a:srgbClr val="1C1C1C"/>
-                          </a:solidFill>
-                          <a:latin typeface="Calibri"/>
-                        </a:rPr>
-                        <a:t/>
-                      </a:r>
+                      <a:endParaRPr/>
                     </a:p>
                   </a:txBody>
                   <a:tcPr marL="27432" marR="27432" marT="9144" marB="9144" anchor="ctr">
@@ -19883,15 +19788,7 @@
                     <a:lstStyle/>
                     <a:p>
                       <a:pPr algn="ctr"/>
-                      <a:r>
-                        <a:rPr sz="900" b="0">
-                          <a:solidFill>
-                            <a:srgbClr val="1C1C1C"/>
-                          </a:solidFill>
-                          <a:latin typeface="Calibri"/>
-                        </a:rPr>
-                        <a:t/>
-                      </a:r>
+                      <a:endParaRPr/>
                     </a:p>
                   </a:txBody>
                   <a:tcPr marL="27432" marR="27432" marT="9144" marB="9144" anchor="ctr">
@@ -19906,15 +19803,7 @@
                     <a:lstStyle/>
                     <a:p>
                       <a:pPr algn="ctr"/>
-                      <a:r>
-                        <a:rPr sz="900" b="0">
-                          <a:solidFill>
-                            <a:srgbClr val="1C1C1C"/>
-                          </a:solidFill>
-                          <a:latin typeface="Calibri"/>
-                        </a:rPr>
-                        <a:t/>
-                      </a:r>
+                      <a:endParaRPr/>
                     </a:p>
                   </a:txBody>
                   <a:tcPr marL="27432" marR="27432" marT="9144" marB="9144" anchor="ctr">
@@ -19929,15 +19818,7 @@
                     <a:lstStyle/>
                     <a:p>
                       <a:pPr algn="ctr"/>
-                      <a:r>
-                        <a:rPr sz="900" b="0">
-                          <a:solidFill>
-                            <a:srgbClr val="1C1C1C"/>
-                          </a:solidFill>
-                          <a:latin typeface="Calibri"/>
-                        </a:rPr>
-                        <a:t/>
-                      </a:r>
+                      <a:endParaRPr/>
                     </a:p>
                   </a:txBody>
                   <a:tcPr marL="27432" marR="27432" marT="9144" marB="9144" anchor="ctr">
@@ -19952,15 +19833,7 @@
                     <a:lstStyle/>
                     <a:p>
                       <a:pPr algn="ctr"/>
-                      <a:r>
-                        <a:rPr sz="900" b="0">
-                          <a:solidFill>
-                            <a:srgbClr val="1C1C1C"/>
-                          </a:solidFill>
-                          <a:latin typeface="Calibri"/>
-                        </a:rPr>
-                        <a:t/>
-                      </a:r>
+                      <a:endParaRPr/>
                     </a:p>
                   </a:txBody>
                   <a:tcPr marL="27432" marR="27432" marT="9144" marB="9144" anchor="ctr">
@@ -19969,6 +19842,11 @@
                     </a:solidFill>
                   </a:tcPr>
                 </a:tc>
+                <a:extLst>
+                  <a:ext uri="{0D108BD9-81ED-4DB2-BD59-A6C34878D82A}">
+                    <a16:rowId xmlns:a16="http://schemas.microsoft.com/office/drawing/2014/main" val="10008"/>
+                  </a:ext>
+                </a:extLst>
               </a:tr>
               <a:tr h="274320">
                 <a:tc>
@@ -20000,15 +19878,7 @@
                     <a:lstStyle/>
                     <a:p>
                       <a:pPr algn="ctr"/>
-                      <a:r>
-                        <a:rPr sz="900" b="0">
-                          <a:solidFill>
-                            <a:srgbClr val="1C1C1C"/>
-                          </a:solidFill>
-                          <a:latin typeface="Calibri"/>
-                        </a:rPr>
-                        <a:t/>
-                      </a:r>
+                      <a:endParaRPr/>
                     </a:p>
                   </a:txBody>
                   <a:tcPr marL="27432" marR="27432" marT="9144" marB="9144" anchor="ctr">
@@ -20023,15 +19893,7 @@
                     <a:lstStyle/>
                     <a:p>
                       <a:pPr algn="ctr"/>
-                      <a:r>
-                        <a:rPr sz="900" b="0">
-                          <a:solidFill>
-                            <a:srgbClr val="1C1C1C"/>
-                          </a:solidFill>
-                          <a:latin typeface="Calibri"/>
-                        </a:rPr>
-                        <a:t/>
-                      </a:r>
+                      <a:endParaRPr/>
                     </a:p>
                   </a:txBody>
                   <a:tcPr marL="27432" marR="27432" marT="9144" marB="9144" anchor="ctr">
@@ -20046,15 +19908,7 @@
                     <a:lstStyle/>
                     <a:p>
                       <a:pPr algn="ctr"/>
-                      <a:r>
-                        <a:rPr sz="900" b="0">
-                          <a:solidFill>
-                            <a:srgbClr val="1C1C1C"/>
-                          </a:solidFill>
-                          <a:latin typeface="Calibri"/>
-                        </a:rPr>
-                        <a:t/>
-                      </a:r>
+                      <a:endParaRPr/>
                     </a:p>
                   </a:txBody>
                   <a:tcPr marL="27432" marR="27432" marT="9144" marB="9144" anchor="ctr">
@@ -20069,15 +19923,7 @@
                     <a:lstStyle/>
                     <a:p>
                       <a:pPr algn="ctr"/>
-                      <a:r>
-                        <a:rPr sz="900" b="0">
-                          <a:solidFill>
-                            <a:srgbClr val="1C1C1C"/>
-                          </a:solidFill>
-                          <a:latin typeface="Calibri"/>
-                        </a:rPr>
-                        <a:t/>
-                      </a:r>
+                      <a:endParaRPr/>
                     </a:p>
                   </a:txBody>
                   <a:tcPr marL="27432" marR="27432" marT="9144" marB="9144" anchor="ctr">
@@ -20092,15 +19938,7 @@
                     <a:lstStyle/>
                     <a:p>
                       <a:pPr algn="ctr"/>
-                      <a:r>
-                        <a:rPr sz="900" b="0">
-                          <a:solidFill>
-                            <a:srgbClr val="1C1C1C"/>
-                          </a:solidFill>
-                          <a:latin typeface="Calibri"/>
-                        </a:rPr>
-                        <a:t/>
-                      </a:r>
+                      <a:endParaRPr/>
                     </a:p>
                   </a:txBody>
                   <a:tcPr marL="27432" marR="27432" marT="9144" marB="9144" anchor="ctr">
@@ -20115,15 +19953,7 @@
                     <a:lstStyle/>
                     <a:p>
                       <a:pPr algn="ctr"/>
-                      <a:r>
-                        <a:rPr sz="900" b="0">
-                          <a:solidFill>
-                            <a:srgbClr val="1C1C1C"/>
-                          </a:solidFill>
-                          <a:latin typeface="Calibri"/>
-                        </a:rPr>
-                        <a:t/>
-                      </a:r>
+                      <a:endParaRPr/>
                     </a:p>
                   </a:txBody>
                   <a:tcPr marL="27432" marR="27432" marT="9144" marB="9144" anchor="ctr">
@@ -20138,15 +19968,7 @@
                     <a:lstStyle/>
                     <a:p>
                       <a:pPr algn="ctr"/>
-                      <a:r>
-                        <a:rPr sz="900" b="0">
-                          <a:solidFill>
-                            <a:srgbClr val="1C1C1C"/>
-                          </a:solidFill>
-                          <a:latin typeface="Calibri"/>
-                        </a:rPr>
-                        <a:t/>
-                      </a:r>
+                      <a:endParaRPr/>
                     </a:p>
                   </a:txBody>
                   <a:tcPr marL="27432" marR="27432" marT="9144" marB="9144" anchor="ctr">
@@ -20161,15 +19983,7 @@
                     <a:lstStyle/>
                     <a:p>
                       <a:pPr algn="ctr"/>
-                      <a:r>
-                        <a:rPr sz="900" b="0">
-                          <a:solidFill>
-                            <a:srgbClr val="1C1C1C"/>
-                          </a:solidFill>
-                          <a:latin typeface="Calibri"/>
-                        </a:rPr>
-                        <a:t/>
-                      </a:r>
+                      <a:endParaRPr/>
                     </a:p>
                   </a:txBody>
                   <a:tcPr marL="27432" marR="27432" marT="9144" marB="9144" anchor="ctr">
@@ -20184,15 +19998,7 @@
                     <a:lstStyle/>
                     <a:p>
                       <a:pPr algn="ctr"/>
-                      <a:r>
-                        <a:rPr sz="900" b="0">
-                          <a:solidFill>
-                            <a:srgbClr val="1C1C1C"/>
-                          </a:solidFill>
-                          <a:latin typeface="Calibri"/>
-                        </a:rPr>
-                        <a:t/>
-                      </a:r>
+                      <a:endParaRPr/>
                     </a:p>
                   </a:txBody>
                   <a:tcPr marL="27432" marR="27432" marT="9144" marB="9144" anchor="ctr">
@@ -20207,15 +20013,7 @@
                     <a:lstStyle/>
                     <a:p>
                       <a:pPr algn="ctr"/>
-                      <a:r>
-                        <a:rPr sz="900" b="0">
-                          <a:solidFill>
-                            <a:srgbClr val="1C1C1C"/>
-                          </a:solidFill>
-                          <a:latin typeface="Calibri"/>
-                        </a:rPr>
-                        <a:t/>
-                      </a:r>
+                      <a:endParaRPr/>
                     </a:p>
                   </a:txBody>
                   <a:tcPr marL="27432" marR="27432" marT="9144" marB="9144" anchor="ctr">
@@ -20230,15 +20028,7 @@
                     <a:lstStyle/>
                     <a:p>
                       <a:pPr algn="ctr"/>
-                      <a:r>
-                        <a:rPr sz="900" b="0">
-                          <a:solidFill>
-                            <a:srgbClr val="1C1C1C"/>
-                          </a:solidFill>
-                          <a:latin typeface="Calibri"/>
-                        </a:rPr>
-                        <a:t/>
-                      </a:r>
+                      <a:endParaRPr/>
                     </a:p>
                   </a:txBody>
                   <a:tcPr marL="27432" marR="27432" marT="9144" marB="9144" anchor="ctr">
@@ -20253,15 +20043,7 @@
                     <a:lstStyle/>
                     <a:p>
                       <a:pPr algn="ctr"/>
-                      <a:r>
-                        <a:rPr sz="900" b="0">
-                          <a:solidFill>
-                            <a:srgbClr val="1C1C1C"/>
-                          </a:solidFill>
-                          <a:latin typeface="Calibri"/>
-                        </a:rPr>
-                        <a:t/>
-                      </a:r>
+                      <a:endParaRPr/>
                     </a:p>
                   </a:txBody>
                   <a:tcPr marL="27432" marR="27432" marT="9144" marB="9144" anchor="ctr">
@@ -20276,15 +20058,7 @@
                     <a:lstStyle/>
                     <a:p>
                       <a:pPr algn="ctr"/>
-                      <a:r>
-                        <a:rPr sz="900" b="0">
-                          <a:solidFill>
-                            <a:srgbClr val="1C1C1C"/>
-                          </a:solidFill>
-                          <a:latin typeface="Calibri"/>
-                        </a:rPr>
-                        <a:t/>
-                      </a:r>
+                      <a:endParaRPr/>
                     </a:p>
                   </a:txBody>
                   <a:tcPr marL="27432" marR="27432" marT="9144" marB="9144" anchor="ctr">
@@ -20299,15 +20073,7 @@
                     <a:lstStyle/>
                     <a:p>
                       <a:pPr algn="ctr"/>
-                      <a:r>
-                        <a:rPr sz="900" b="0">
-                          <a:solidFill>
-                            <a:srgbClr val="1C1C1C"/>
-                          </a:solidFill>
-                          <a:latin typeface="Calibri"/>
-                        </a:rPr>
-                        <a:t/>
-                      </a:r>
+                      <a:endParaRPr/>
                     </a:p>
                   </a:txBody>
                   <a:tcPr marL="27432" marR="27432" marT="9144" marB="9144" anchor="ctr">
@@ -20322,15 +20088,7 @@
                     <a:lstStyle/>
                     <a:p>
                       <a:pPr algn="ctr"/>
-                      <a:r>
-                        <a:rPr sz="900" b="0">
-                          <a:solidFill>
-                            <a:srgbClr val="1C1C1C"/>
-                          </a:solidFill>
-                          <a:latin typeface="Calibri"/>
-                        </a:rPr>
-                        <a:t/>
-                      </a:r>
+                      <a:endParaRPr/>
                     </a:p>
                   </a:txBody>
                   <a:tcPr marL="27432" marR="27432" marT="9144" marB="9144" anchor="ctr">
@@ -20345,15 +20103,7 @@
                     <a:lstStyle/>
                     <a:p>
                       <a:pPr algn="ctr"/>
-                      <a:r>
-                        <a:rPr sz="900" b="0">
-                          <a:solidFill>
-                            <a:srgbClr val="1C1C1C"/>
-                          </a:solidFill>
-                          <a:latin typeface="Calibri"/>
-                        </a:rPr>
-                        <a:t/>
-                      </a:r>
+                      <a:endParaRPr/>
                     </a:p>
                   </a:txBody>
                   <a:tcPr marL="27432" marR="27432" marT="9144" marB="9144" anchor="ctr">
@@ -20368,15 +20118,7 @@
                     <a:lstStyle/>
                     <a:p>
                       <a:pPr algn="ctr"/>
-                      <a:r>
-                        <a:rPr sz="900" b="0">
-                          <a:solidFill>
-                            <a:srgbClr val="1C1C1C"/>
-                          </a:solidFill>
-                          <a:latin typeface="Calibri"/>
-                        </a:rPr>
-                        <a:t/>
-                      </a:r>
+                      <a:endParaRPr/>
                     </a:p>
                   </a:txBody>
                   <a:tcPr marL="27432" marR="27432" marT="9144" marB="9144" anchor="ctr">
@@ -20391,15 +20133,7 @@
                     <a:lstStyle/>
                     <a:p>
                       <a:pPr algn="ctr"/>
-                      <a:r>
-                        <a:rPr sz="900" b="0">
-                          <a:solidFill>
-                            <a:srgbClr val="1C1C1C"/>
-                          </a:solidFill>
-                          <a:latin typeface="Calibri"/>
-                        </a:rPr>
-                        <a:t/>
-                      </a:r>
+                      <a:endParaRPr/>
                     </a:p>
                   </a:txBody>
                   <a:tcPr marL="27432" marR="27432" marT="9144" marB="9144" anchor="ctr">
@@ -20408,6 +20142,11 @@
                     </a:solidFill>
                   </a:tcPr>
                 </a:tc>
+                <a:extLst>
+                  <a:ext uri="{0D108BD9-81ED-4DB2-BD59-A6C34878D82A}">
+                    <a16:rowId xmlns:a16="http://schemas.microsoft.com/office/drawing/2014/main" val="10009"/>
+                  </a:ext>
+                </a:extLst>
               </a:tr>
               <a:tr h="274320">
                 <a:tc>
@@ -20439,15 +20178,7 @@
                     <a:lstStyle/>
                     <a:p>
                       <a:pPr algn="ctr"/>
-                      <a:r>
-                        <a:rPr sz="900" b="0">
-                          <a:solidFill>
-                            <a:srgbClr val="1C1C1C"/>
-                          </a:solidFill>
-                          <a:latin typeface="Calibri"/>
-                        </a:rPr>
-                        <a:t/>
-                      </a:r>
+                      <a:endParaRPr/>
                     </a:p>
                   </a:txBody>
                   <a:tcPr marL="27432" marR="27432" marT="9144" marB="9144" anchor="ctr">
@@ -20462,15 +20193,7 @@
                     <a:lstStyle/>
                     <a:p>
                       <a:pPr algn="ctr"/>
-                      <a:r>
-                        <a:rPr sz="900" b="0">
-                          <a:solidFill>
-                            <a:srgbClr val="1C1C1C"/>
-                          </a:solidFill>
-                          <a:latin typeface="Calibri"/>
-                        </a:rPr>
-                        <a:t/>
-                      </a:r>
+                      <a:endParaRPr/>
                     </a:p>
                   </a:txBody>
                   <a:tcPr marL="27432" marR="27432" marT="9144" marB="9144" anchor="ctr">
@@ -20485,15 +20208,7 @@
                     <a:lstStyle/>
                     <a:p>
                       <a:pPr algn="ctr"/>
-                      <a:r>
-                        <a:rPr sz="900" b="0">
-                          <a:solidFill>
-                            <a:srgbClr val="1C1C1C"/>
-                          </a:solidFill>
-                          <a:latin typeface="Calibri"/>
-                        </a:rPr>
-                        <a:t/>
-                      </a:r>
+                      <a:endParaRPr/>
                     </a:p>
                   </a:txBody>
                   <a:tcPr marL="27432" marR="27432" marT="9144" marB="9144" anchor="ctr">
@@ -20508,15 +20223,7 @@
                     <a:lstStyle/>
                     <a:p>
                       <a:pPr algn="ctr"/>
-                      <a:r>
-                        <a:rPr sz="900" b="0">
-                          <a:solidFill>
-                            <a:srgbClr val="1C1C1C"/>
-                          </a:solidFill>
-                          <a:latin typeface="Calibri"/>
-                        </a:rPr>
-                        <a:t/>
-                      </a:r>
+                      <a:endParaRPr/>
                     </a:p>
                   </a:txBody>
                   <a:tcPr marL="27432" marR="27432" marT="9144" marB="9144" anchor="ctr">
@@ -20531,15 +20238,7 @@
                     <a:lstStyle/>
                     <a:p>
                       <a:pPr algn="ctr"/>
-                      <a:r>
-                        <a:rPr sz="900" b="0">
-                          <a:solidFill>
-                            <a:srgbClr val="1C1C1C"/>
-                          </a:solidFill>
-                          <a:latin typeface="Calibri"/>
-                        </a:rPr>
-                        <a:t/>
-                      </a:r>
+                      <a:endParaRPr/>
                     </a:p>
                   </a:txBody>
                   <a:tcPr marL="27432" marR="27432" marT="9144" marB="9144" anchor="ctr">
@@ -20554,15 +20253,7 @@
                     <a:lstStyle/>
                     <a:p>
                       <a:pPr algn="ctr"/>
-                      <a:r>
-                        <a:rPr sz="900" b="0">
-                          <a:solidFill>
-                            <a:srgbClr val="1C1C1C"/>
-                          </a:solidFill>
-                          <a:latin typeface="Calibri"/>
-                        </a:rPr>
-                        <a:t/>
-                      </a:r>
+                      <a:endParaRPr/>
                     </a:p>
                   </a:txBody>
                   <a:tcPr marL="27432" marR="27432" marT="9144" marB="9144" anchor="ctr">
@@ -20577,15 +20268,7 @@
                     <a:lstStyle/>
                     <a:p>
                       <a:pPr algn="ctr"/>
-                      <a:r>
-                        <a:rPr sz="900" b="0">
-                          <a:solidFill>
-                            <a:srgbClr val="1C1C1C"/>
-                          </a:solidFill>
-                          <a:latin typeface="Calibri"/>
-                        </a:rPr>
-                        <a:t/>
-                      </a:r>
+                      <a:endParaRPr/>
                     </a:p>
                   </a:txBody>
                   <a:tcPr marL="27432" marR="27432" marT="9144" marB="9144" anchor="ctr">
@@ -20600,15 +20283,7 @@
                     <a:lstStyle/>
                     <a:p>
                       <a:pPr algn="ctr"/>
-                      <a:r>
-                        <a:rPr sz="900" b="0">
-                          <a:solidFill>
-                            <a:srgbClr val="1C1C1C"/>
-                          </a:solidFill>
-                          <a:latin typeface="Calibri"/>
-                        </a:rPr>
-                        <a:t/>
-                      </a:r>
+                      <a:endParaRPr/>
                     </a:p>
                   </a:txBody>
                   <a:tcPr marL="27432" marR="27432" marT="9144" marB="9144" anchor="ctr">
@@ -20623,15 +20298,7 @@
                     <a:lstStyle/>
                     <a:p>
                       <a:pPr algn="ctr"/>
-                      <a:r>
-                        <a:rPr sz="900" b="0">
-                          <a:solidFill>
-                            <a:srgbClr val="1C1C1C"/>
-                          </a:solidFill>
-                          <a:latin typeface="Calibri"/>
-                        </a:rPr>
-                        <a:t/>
-                      </a:r>
+                      <a:endParaRPr/>
                     </a:p>
                   </a:txBody>
                   <a:tcPr marL="27432" marR="27432" marT="9144" marB="9144" anchor="ctr">
@@ -20646,15 +20313,7 @@
                     <a:lstStyle/>
                     <a:p>
                       <a:pPr algn="ctr"/>
-                      <a:r>
-                        <a:rPr sz="900" b="0">
-                          <a:solidFill>
-                            <a:srgbClr val="1C1C1C"/>
-                          </a:solidFill>
-                          <a:latin typeface="Calibri"/>
-                        </a:rPr>
-                        <a:t/>
-                      </a:r>
+                      <a:endParaRPr/>
                     </a:p>
                   </a:txBody>
                   <a:tcPr marL="27432" marR="27432" marT="9144" marB="9144" anchor="ctr">
@@ -20669,15 +20328,7 @@
                     <a:lstStyle/>
                     <a:p>
                       <a:pPr algn="ctr"/>
-                      <a:r>
-                        <a:rPr sz="900" b="0">
-                          <a:solidFill>
-                            <a:srgbClr val="1C1C1C"/>
-                          </a:solidFill>
-                          <a:latin typeface="Calibri"/>
-                        </a:rPr>
-                        <a:t/>
-                      </a:r>
+                      <a:endParaRPr/>
                     </a:p>
                   </a:txBody>
                   <a:tcPr marL="27432" marR="27432" marT="9144" marB="9144" anchor="ctr">
@@ -20692,15 +20343,7 @@
                     <a:lstStyle/>
                     <a:p>
                       <a:pPr algn="ctr"/>
-                      <a:r>
-                        <a:rPr sz="900" b="0">
-                          <a:solidFill>
-                            <a:srgbClr val="1C1C1C"/>
-                          </a:solidFill>
-                          <a:latin typeface="Calibri"/>
-                        </a:rPr>
-                        <a:t/>
-                      </a:r>
+                      <a:endParaRPr/>
                     </a:p>
                   </a:txBody>
                   <a:tcPr marL="27432" marR="27432" marT="9144" marB="9144" anchor="ctr">
@@ -20715,15 +20358,7 @@
                     <a:lstStyle/>
                     <a:p>
                       <a:pPr algn="ctr"/>
-                      <a:r>
-                        <a:rPr sz="900" b="0">
-                          <a:solidFill>
-                            <a:srgbClr val="1C1C1C"/>
-                          </a:solidFill>
-                          <a:latin typeface="Calibri"/>
-                        </a:rPr>
-                        <a:t/>
-                      </a:r>
+                      <a:endParaRPr/>
                     </a:p>
                   </a:txBody>
                   <a:tcPr marL="27432" marR="27432" marT="9144" marB="9144" anchor="ctr">
@@ -20738,15 +20373,7 @@
                     <a:lstStyle/>
                     <a:p>
                       <a:pPr algn="ctr"/>
-                      <a:r>
-                        <a:rPr sz="900" b="0">
-                          <a:solidFill>
-                            <a:srgbClr val="1C1C1C"/>
-                          </a:solidFill>
-                          <a:latin typeface="Calibri"/>
-                        </a:rPr>
-                        <a:t/>
-                      </a:r>
+                      <a:endParaRPr/>
                     </a:p>
                   </a:txBody>
                   <a:tcPr marL="27432" marR="27432" marT="9144" marB="9144" anchor="ctr">
@@ -20761,15 +20388,7 @@
                     <a:lstStyle/>
                     <a:p>
                       <a:pPr algn="ctr"/>
-                      <a:r>
-                        <a:rPr sz="900" b="0">
-                          <a:solidFill>
-                            <a:srgbClr val="1C1C1C"/>
-                          </a:solidFill>
-                          <a:latin typeface="Calibri"/>
-                        </a:rPr>
-                        <a:t/>
-                      </a:r>
+                      <a:endParaRPr/>
                     </a:p>
                   </a:txBody>
                   <a:tcPr marL="27432" marR="27432" marT="9144" marB="9144" anchor="ctr">
@@ -20784,15 +20403,7 @@
                     <a:lstStyle/>
                     <a:p>
                       <a:pPr algn="ctr"/>
-                      <a:r>
-                        <a:rPr sz="900" b="0">
-                          <a:solidFill>
-                            <a:srgbClr val="1C1C1C"/>
-                          </a:solidFill>
-                          <a:latin typeface="Calibri"/>
-                        </a:rPr>
-                        <a:t/>
-                      </a:r>
+                      <a:endParaRPr/>
                     </a:p>
                   </a:txBody>
                   <a:tcPr marL="27432" marR="27432" marT="9144" marB="9144" anchor="ctr">
@@ -20807,15 +20418,7 @@
                     <a:lstStyle/>
                     <a:p>
                       <a:pPr algn="ctr"/>
-                      <a:r>
-                        <a:rPr sz="900" b="0">
-                          <a:solidFill>
-                            <a:srgbClr val="1C1C1C"/>
-                          </a:solidFill>
-                          <a:latin typeface="Calibri"/>
-                        </a:rPr>
-                        <a:t/>
-                      </a:r>
+                      <a:endParaRPr/>
                     </a:p>
                   </a:txBody>
                   <a:tcPr marL="27432" marR="27432" marT="9144" marB="9144" anchor="ctr">
@@ -20830,15 +20433,7 @@
                     <a:lstStyle/>
                     <a:p>
                       <a:pPr algn="ctr"/>
-                      <a:r>
-                        <a:rPr sz="900" b="0">
-                          <a:solidFill>
-                            <a:srgbClr val="1C1C1C"/>
-                          </a:solidFill>
-                          <a:latin typeface="Calibri"/>
-                        </a:rPr>
-                        <a:t/>
-                      </a:r>
+                      <a:endParaRPr/>
                     </a:p>
                   </a:txBody>
                   <a:tcPr marL="27432" marR="27432" marT="9144" marB="9144" anchor="ctr">
@@ -20847,6 +20442,11 @@
                     </a:solidFill>
                   </a:tcPr>
                 </a:tc>
+                <a:extLst>
+                  <a:ext uri="{0D108BD9-81ED-4DB2-BD59-A6C34878D82A}">
+                    <a16:rowId xmlns:a16="http://schemas.microsoft.com/office/drawing/2014/main" val="10010"/>
+                  </a:ext>
+                </a:extLst>
               </a:tr>
               <a:tr h="274320">
                 <a:tc>
@@ -20878,15 +20478,7 @@
                     <a:lstStyle/>
                     <a:p>
                       <a:pPr algn="ctr"/>
-                      <a:r>
-                        <a:rPr sz="900" b="0">
-                          <a:solidFill>
-                            <a:srgbClr val="1C1C1C"/>
-                          </a:solidFill>
-                          <a:latin typeface="Calibri"/>
-                        </a:rPr>
-                        <a:t/>
-                      </a:r>
+                      <a:endParaRPr/>
                     </a:p>
                   </a:txBody>
                   <a:tcPr marL="27432" marR="27432" marT="9144" marB="9144" anchor="ctr">
@@ -20901,15 +20493,7 @@
                     <a:lstStyle/>
                     <a:p>
                       <a:pPr algn="ctr"/>
-                      <a:r>
-                        <a:rPr sz="900" b="0">
-                          <a:solidFill>
-                            <a:srgbClr val="1C1C1C"/>
-                          </a:solidFill>
-                          <a:latin typeface="Calibri"/>
-                        </a:rPr>
-                        <a:t/>
-                      </a:r>
+                      <a:endParaRPr/>
                     </a:p>
                   </a:txBody>
                   <a:tcPr marL="27432" marR="27432" marT="9144" marB="9144" anchor="ctr">
@@ -20924,15 +20508,7 @@
                     <a:lstStyle/>
                     <a:p>
                       <a:pPr algn="ctr"/>
-                      <a:r>
-                        <a:rPr sz="900" b="0">
-                          <a:solidFill>
-                            <a:srgbClr val="1C1C1C"/>
-                          </a:solidFill>
-                          <a:latin typeface="Calibri"/>
-                        </a:rPr>
-                        <a:t/>
-                      </a:r>
+                      <a:endParaRPr/>
                     </a:p>
                   </a:txBody>
                   <a:tcPr marL="27432" marR="27432" marT="9144" marB="9144" anchor="ctr">
@@ -20947,15 +20523,7 @@
                     <a:lstStyle/>
                     <a:p>
                       <a:pPr algn="ctr"/>
-                      <a:r>
-                        <a:rPr sz="900" b="0">
-                          <a:solidFill>
-                            <a:srgbClr val="1C1C1C"/>
-                          </a:solidFill>
-                          <a:latin typeface="Calibri"/>
-                        </a:rPr>
-                        <a:t/>
-                      </a:r>
+                      <a:endParaRPr/>
                     </a:p>
                   </a:txBody>
                   <a:tcPr marL="27432" marR="27432" marT="9144" marB="9144" anchor="ctr">
@@ -20970,15 +20538,7 @@
                     <a:lstStyle/>
                     <a:p>
                       <a:pPr algn="ctr"/>
-                      <a:r>
-                        <a:rPr sz="900" b="0">
-                          <a:solidFill>
-                            <a:srgbClr val="1C1C1C"/>
-                          </a:solidFill>
-                          <a:latin typeface="Calibri"/>
-                        </a:rPr>
-                        <a:t/>
-                      </a:r>
+                      <a:endParaRPr/>
                     </a:p>
                   </a:txBody>
                   <a:tcPr marL="27432" marR="27432" marT="9144" marB="9144" anchor="ctr">
@@ -20993,15 +20553,7 @@
                     <a:lstStyle/>
                     <a:p>
                       <a:pPr algn="ctr"/>
-                      <a:r>
-                        <a:rPr sz="900" b="0">
-                          <a:solidFill>
-                            <a:srgbClr val="1C1C1C"/>
-                          </a:solidFill>
-                          <a:latin typeface="Calibri"/>
-                        </a:rPr>
-                        <a:t/>
-                      </a:r>
+                      <a:endParaRPr/>
                     </a:p>
                   </a:txBody>
                   <a:tcPr marL="27432" marR="27432" marT="9144" marB="9144" anchor="ctr">
@@ -21016,15 +20568,7 @@
                     <a:lstStyle/>
                     <a:p>
                       <a:pPr algn="ctr"/>
-                      <a:r>
-                        <a:rPr sz="900" b="0">
-                          <a:solidFill>
-                            <a:srgbClr val="1C1C1C"/>
-                          </a:solidFill>
-                          <a:latin typeface="Calibri"/>
-                        </a:rPr>
-                        <a:t/>
-                      </a:r>
+                      <a:endParaRPr/>
                     </a:p>
                   </a:txBody>
                   <a:tcPr marL="27432" marR="27432" marT="9144" marB="9144" anchor="ctr">
@@ -21039,15 +20583,7 @@
                     <a:lstStyle/>
                     <a:p>
                       <a:pPr algn="ctr"/>
-                      <a:r>
-                        <a:rPr sz="900" b="0">
-                          <a:solidFill>
-                            <a:srgbClr val="1C1C1C"/>
-                          </a:solidFill>
-                          <a:latin typeface="Calibri"/>
-                        </a:rPr>
-                        <a:t/>
-                      </a:r>
+                      <a:endParaRPr/>
                     </a:p>
                   </a:txBody>
                   <a:tcPr marL="27432" marR="27432" marT="9144" marB="9144" anchor="ctr">
@@ -21062,15 +20598,7 @@
                     <a:lstStyle/>
                     <a:p>
                       <a:pPr algn="ctr"/>
-                      <a:r>
-                        <a:rPr sz="900" b="0">
-                          <a:solidFill>
-                            <a:srgbClr val="1C1C1C"/>
-                          </a:solidFill>
-                          <a:latin typeface="Calibri"/>
-                        </a:rPr>
-                        <a:t/>
-                      </a:r>
+                      <a:endParaRPr/>
                     </a:p>
                   </a:txBody>
                   <a:tcPr marL="27432" marR="27432" marT="9144" marB="9144" anchor="ctr">
@@ -21085,15 +20613,7 @@
                     <a:lstStyle/>
                     <a:p>
                       <a:pPr algn="ctr"/>
-                      <a:r>
-                        <a:rPr sz="900" b="0">
-                          <a:solidFill>
-                            <a:srgbClr val="1C1C1C"/>
-                          </a:solidFill>
-                          <a:latin typeface="Calibri"/>
-                        </a:rPr>
-                        <a:t/>
-                      </a:r>
+                      <a:endParaRPr/>
                     </a:p>
                   </a:txBody>
                   <a:tcPr marL="27432" marR="27432" marT="9144" marB="9144" anchor="ctr">
@@ -21108,15 +20628,7 @@
                     <a:lstStyle/>
                     <a:p>
                       <a:pPr algn="ctr"/>
-                      <a:r>
-                        <a:rPr sz="900" b="0">
-                          <a:solidFill>
-                            <a:srgbClr val="1C1C1C"/>
-                          </a:solidFill>
-                          <a:latin typeface="Calibri"/>
-                        </a:rPr>
-                        <a:t/>
-                      </a:r>
+                      <a:endParaRPr/>
                     </a:p>
                   </a:txBody>
                   <a:tcPr marL="27432" marR="27432" marT="9144" marB="9144" anchor="ctr">
@@ -21131,15 +20643,7 @@
                     <a:lstStyle/>
                     <a:p>
                       <a:pPr algn="ctr"/>
-                      <a:r>
-                        <a:rPr sz="900" b="0">
-                          <a:solidFill>
-                            <a:srgbClr val="1C1C1C"/>
-                          </a:solidFill>
-                          <a:latin typeface="Calibri"/>
-                        </a:rPr>
-                        <a:t/>
-                      </a:r>
+                      <a:endParaRPr/>
                     </a:p>
                   </a:txBody>
                   <a:tcPr marL="27432" marR="27432" marT="9144" marB="9144" anchor="ctr">
@@ -21154,15 +20658,7 @@
                     <a:lstStyle/>
                     <a:p>
                       <a:pPr algn="ctr"/>
-                      <a:r>
-                        <a:rPr sz="900" b="0">
-                          <a:solidFill>
-                            <a:srgbClr val="1C1C1C"/>
-                          </a:solidFill>
-                          <a:latin typeface="Calibri"/>
-                        </a:rPr>
-                        <a:t/>
-                      </a:r>
+                      <a:endParaRPr/>
                     </a:p>
                   </a:txBody>
                   <a:tcPr marL="27432" marR="27432" marT="9144" marB="9144" anchor="ctr">
@@ -21177,15 +20673,7 @@
                     <a:lstStyle/>
                     <a:p>
                       <a:pPr algn="ctr"/>
-                      <a:r>
-                        <a:rPr sz="900" b="0">
-                          <a:solidFill>
-                            <a:srgbClr val="1C1C1C"/>
-                          </a:solidFill>
-                          <a:latin typeface="Calibri"/>
-                        </a:rPr>
-                        <a:t/>
-                      </a:r>
+                      <a:endParaRPr/>
                     </a:p>
                   </a:txBody>
                   <a:tcPr marL="27432" marR="27432" marT="9144" marB="9144" anchor="ctr">
@@ -21200,15 +20688,7 @@
                     <a:lstStyle/>
                     <a:p>
                       <a:pPr algn="ctr"/>
-                      <a:r>
-                        <a:rPr sz="900" b="0">
-                          <a:solidFill>
-                            <a:srgbClr val="1C1C1C"/>
-                          </a:solidFill>
-                          <a:latin typeface="Calibri"/>
-                        </a:rPr>
-                        <a:t/>
-                      </a:r>
+                      <a:endParaRPr/>
                     </a:p>
                   </a:txBody>
                   <a:tcPr marL="27432" marR="27432" marT="9144" marB="9144" anchor="ctr">
@@ -21223,15 +20703,7 @@
                     <a:lstStyle/>
                     <a:p>
                       <a:pPr algn="ctr"/>
-                      <a:r>
-                        <a:rPr sz="900" b="0">
-                          <a:solidFill>
-                            <a:srgbClr val="1C1C1C"/>
-                          </a:solidFill>
-                          <a:latin typeface="Calibri"/>
-                        </a:rPr>
-                        <a:t/>
-                      </a:r>
+                      <a:endParaRPr/>
                     </a:p>
                   </a:txBody>
                   <a:tcPr marL="27432" marR="27432" marT="9144" marB="9144" anchor="ctr">
@@ -21246,15 +20718,7 @@
                     <a:lstStyle/>
                     <a:p>
                       <a:pPr algn="ctr"/>
-                      <a:r>
-                        <a:rPr sz="900" b="0">
-                          <a:solidFill>
-                            <a:srgbClr val="1C1C1C"/>
-                          </a:solidFill>
-                          <a:latin typeface="Calibri"/>
-                        </a:rPr>
-                        <a:t/>
-                      </a:r>
+                      <a:endParaRPr/>
                     </a:p>
                   </a:txBody>
                   <a:tcPr marL="27432" marR="27432" marT="9144" marB="9144" anchor="ctr">
@@ -21269,15 +20733,7 @@
                     <a:lstStyle/>
                     <a:p>
                       <a:pPr algn="ctr"/>
-                      <a:r>
-                        <a:rPr sz="900" b="0">
-                          <a:solidFill>
-                            <a:srgbClr val="1C1C1C"/>
-                          </a:solidFill>
-                          <a:latin typeface="Calibri"/>
-                        </a:rPr>
-                        <a:t/>
-                      </a:r>
+                      <a:endParaRPr/>
                     </a:p>
                   </a:txBody>
                   <a:tcPr marL="27432" marR="27432" marT="9144" marB="9144" anchor="ctr">
@@ -21286,6 +20742,11 @@
                     </a:solidFill>
                   </a:tcPr>
                 </a:tc>
+                <a:extLst>
+                  <a:ext uri="{0D108BD9-81ED-4DB2-BD59-A6C34878D82A}">
+                    <a16:rowId xmlns:a16="http://schemas.microsoft.com/office/drawing/2014/main" val="10011"/>
+                  </a:ext>
+                </a:extLst>
               </a:tr>
               <a:tr h="274320">
                 <a:tc>
@@ -21317,15 +20778,7 @@
                     <a:lstStyle/>
                     <a:p>
                       <a:pPr algn="ctr"/>
-                      <a:r>
-                        <a:rPr sz="900" b="0">
-                          <a:solidFill>
-                            <a:srgbClr val="1C1C1C"/>
-                          </a:solidFill>
-                          <a:latin typeface="Calibri"/>
-                        </a:rPr>
-                        <a:t/>
-                      </a:r>
+                      <a:endParaRPr/>
                     </a:p>
                   </a:txBody>
                   <a:tcPr marL="27432" marR="27432" marT="9144" marB="9144" anchor="ctr">
@@ -21340,15 +20793,7 @@
                     <a:lstStyle/>
                     <a:p>
                       <a:pPr algn="ctr"/>
-                      <a:r>
-                        <a:rPr sz="900" b="0">
-                          <a:solidFill>
-                            <a:srgbClr val="1C1C1C"/>
-                          </a:solidFill>
-                          <a:latin typeface="Calibri"/>
-                        </a:rPr>
-                        <a:t/>
-                      </a:r>
+                      <a:endParaRPr/>
                     </a:p>
                   </a:txBody>
                   <a:tcPr marL="27432" marR="27432" marT="9144" marB="9144" anchor="ctr">
@@ -21363,15 +20808,7 @@
                     <a:lstStyle/>
                     <a:p>
                       <a:pPr algn="ctr"/>
-                      <a:r>
-                        <a:rPr sz="900" b="0">
-                          <a:solidFill>
-                            <a:srgbClr val="1C1C1C"/>
-                          </a:solidFill>
-                          <a:latin typeface="Calibri"/>
-                        </a:rPr>
-                        <a:t/>
-                      </a:r>
+                      <a:endParaRPr/>
                     </a:p>
                   </a:txBody>
                   <a:tcPr marL="27432" marR="27432" marT="9144" marB="9144" anchor="ctr">
@@ -21386,15 +20823,7 @@
                     <a:lstStyle/>
                     <a:p>
                       <a:pPr algn="ctr"/>
-                      <a:r>
-                        <a:rPr sz="900" b="0">
-                          <a:solidFill>
-                            <a:srgbClr val="1C1C1C"/>
-                          </a:solidFill>
-                          <a:latin typeface="Calibri"/>
-                        </a:rPr>
-                        <a:t/>
-                      </a:r>
+                      <a:endParaRPr/>
                     </a:p>
                   </a:txBody>
                   <a:tcPr marL="27432" marR="27432" marT="9144" marB="9144" anchor="ctr">
@@ -21409,15 +20838,7 @@
                     <a:lstStyle/>
                     <a:p>
                       <a:pPr algn="ctr"/>
-                      <a:r>
-                        <a:rPr sz="900" b="0">
-                          <a:solidFill>
-                            <a:srgbClr val="1C1C1C"/>
-                          </a:solidFill>
-                          <a:latin typeface="Calibri"/>
-                        </a:rPr>
-                        <a:t/>
-                      </a:r>
+                      <a:endParaRPr/>
                     </a:p>
                   </a:txBody>
                   <a:tcPr marL="27432" marR="27432" marT="9144" marB="9144" anchor="ctr">
@@ -21432,15 +20853,7 @@
                     <a:lstStyle/>
                     <a:p>
                       <a:pPr algn="ctr"/>
-                      <a:r>
-                        <a:rPr sz="900" b="0">
-                          <a:solidFill>
-                            <a:srgbClr val="1C1C1C"/>
-                          </a:solidFill>
-                          <a:latin typeface="Calibri"/>
-                        </a:rPr>
-                        <a:t/>
-                      </a:r>
+                      <a:endParaRPr/>
                     </a:p>
                   </a:txBody>
                   <a:tcPr marL="27432" marR="27432" marT="9144" marB="9144" anchor="ctr">
@@ -21455,15 +20868,7 @@
                     <a:lstStyle/>
                     <a:p>
                       <a:pPr algn="ctr"/>
-                      <a:r>
-                        <a:rPr sz="900" b="0">
-                          <a:solidFill>
-                            <a:srgbClr val="1C1C1C"/>
-                          </a:solidFill>
-                          <a:latin typeface="Calibri"/>
-                        </a:rPr>
-                        <a:t/>
-                      </a:r>
+                      <a:endParaRPr/>
                     </a:p>
                   </a:txBody>
                   <a:tcPr marL="27432" marR="27432" marT="9144" marB="9144" anchor="ctr">
@@ -21478,15 +20883,7 @@
                     <a:lstStyle/>
                     <a:p>
                       <a:pPr algn="ctr"/>
-                      <a:r>
-                        <a:rPr sz="900" b="0">
-                          <a:solidFill>
-                            <a:srgbClr val="1C1C1C"/>
-                          </a:solidFill>
-                          <a:latin typeface="Calibri"/>
-                        </a:rPr>
-                        <a:t/>
-                      </a:r>
+                      <a:endParaRPr/>
                     </a:p>
                   </a:txBody>
                   <a:tcPr marL="27432" marR="27432" marT="9144" marB="9144" anchor="ctr">
@@ -21501,15 +20898,7 @@
                     <a:lstStyle/>
                     <a:p>
                       <a:pPr algn="ctr"/>
-                      <a:r>
-                        <a:rPr sz="900" b="0">
-                          <a:solidFill>
-                            <a:srgbClr val="1C1C1C"/>
-                          </a:solidFill>
-                          <a:latin typeface="Calibri"/>
-                        </a:rPr>
-                        <a:t/>
-                      </a:r>
+                      <a:endParaRPr/>
                     </a:p>
                   </a:txBody>
                   <a:tcPr marL="27432" marR="27432" marT="9144" marB="9144" anchor="ctr">
@@ -21524,15 +20913,7 @@
                     <a:lstStyle/>
                     <a:p>
                       <a:pPr algn="ctr"/>
-                      <a:r>
-                        <a:rPr sz="900" b="0">
-                          <a:solidFill>
-                            <a:srgbClr val="1C1C1C"/>
-                          </a:solidFill>
-                          <a:latin typeface="Calibri"/>
-                        </a:rPr>
-                        <a:t/>
-                      </a:r>
+                      <a:endParaRPr/>
                     </a:p>
                   </a:txBody>
                   <a:tcPr marL="27432" marR="27432" marT="9144" marB="9144" anchor="ctr">
@@ -21547,15 +20928,7 @@
                     <a:lstStyle/>
                     <a:p>
                       <a:pPr algn="ctr"/>
-                      <a:r>
-                        <a:rPr sz="900" b="0">
-                          <a:solidFill>
-                            <a:srgbClr val="1C1C1C"/>
-                          </a:solidFill>
-                          <a:latin typeface="Calibri"/>
-                        </a:rPr>
-                        <a:t/>
-                      </a:r>
+                      <a:endParaRPr/>
                     </a:p>
                   </a:txBody>
                   <a:tcPr marL="27432" marR="27432" marT="9144" marB="9144" anchor="ctr">
@@ -21570,15 +20943,7 @@
                     <a:lstStyle/>
                     <a:p>
                       <a:pPr algn="ctr"/>
-                      <a:r>
-                        <a:rPr sz="900" b="0">
-                          <a:solidFill>
-                            <a:srgbClr val="1C1C1C"/>
-                          </a:solidFill>
-                          <a:latin typeface="Calibri"/>
-                        </a:rPr>
-                        <a:t/>
-                      </a:r>
+                      <a:endParaRPr/>
                     </a:p>
                   </a:txBody>
                   <a:tcPr marL="27432" marR="27432" marT="9144" marB="9144" anchor="ctr">
@@ -21593,15 +20958,7 @@
                     <a:lstStyle/>
                     <a:p>
                       <a:pPr algn="ctr"/>
-                      <a:r>
-                        <a:rPr sz="900" b="0">
-                          <a:solidFill>
-                            <a:srgbClr val="1C1C1C"/>
-                          </a:solidFill>
-                          <a:latin typeface="Calibri"/>
-                        </a:rPr>
-                        <a:t/>
-                      </a:r>
+                      <a:endParaRPr/>
                     </a:p>
                   </a:txBody>
                   <a:tcPr marL="27432" marR="27432" marT="9144" marB="9144" anchor="ctr">
@@ -21616,15 +20973,7 @@
                     <a:lstStyle/>
                     <a:p>
                       <a:pPr algn="ctr"/>
-                      <a:r>
-                        <a:rPr sz="900" b="0">
-                          <a:solidFill>
-                            <a:srgbClr val="1C1C1C"/>
-                          </a:solidFill>
-                          <a:latin typeface="Calibri"/>
-                        </a:rPr>
-                        <a:t/>
-                      </a:r>
+                      <a:endParaRPr/>
                     </a:p>
                   </a:txBody>
                   <a:tcPr marL="27432" marR="27432" marT="9144" marB="9144" anchor="ctr">
@@ -21639,15 +20988,7 @@
                     <a:lstStyle/>
                     <a:p>
                       <a:pPr algn="ctr"/>
-                      <a:r>
-                        <a:rPr sz="900" b="0">
-                          <a:solidFill>
-                            <a:srgbClr val="1C1C1C"/>
-                          </a:solidFill>
-                          <a:latin typeface="Calibri"/>
-                        </a:rPr>
-                        <a:t/>
-                      </a:r>
+                      <a:endParaRPr/>
                     </a:p>
                   </a:txBody>
                   <a:tcPr marL="27432" marR="27432" marT="9144" marB="9144" anchor="ctr">
@@ -21662,15 +21003,7 @@
                     <a:lstStyle/>
                     <a:p>
                       <a:pPr algn="ctr"/>
-                      <a:r>
-                        <a:rPr sz="900" b="0">
-                          <a:solidFill>
-                            <a:srgbClr val="1C1C1C"/>
-                          </a:solidFill>
-                          <a:latin typeface="Calibri"/>
-                        </a:rPr>
-                        <a:t/>
-                      </a:r>
+                      <a:endParaRPr/>
                     </a:p>
                   </a:txBody>
                   <a:tcPr marL="27432" marR="27432" marT="9144" marB="9144" anchor="ctr">
@@ -21685,15 +21018,7 @@
                     <a:lstStyle/>
                     <a:p>
                       <a:pPr algn="ctr"/>
-                      <a:r>
-                        <a:rPr sz="900" b="0">
-                          <a:solidFill>
-                            <a:srgbClr val="1C1C1C"/>
-                          </a:solidFill>
-                          <a:latin typeface="Calibri"/>
-                        </a:rPr>
-                        <a:t/>
-                      </a:r>
+                      <a:endParaRPr/>
                     </a:p>
                   </a:txBody>
                   <a:tcPr marL="27432" marR="27432" marT="9144" marB="9144" anchor="ctr">
@@ -21708,15 +21033,7 @@
                     <a:lstStyle/>
                     <a:p>
                       <a:pPr algn="ctr"/>
-                      <a:r>
-                        <a:rPr sz="900" b="0">
-                          <a:solidFill>
-                            <a:srgbClr val="1C1C1C"/>
-                          </a:solidFill>
-                          <a:latin typeface="Calibri"/>
-                        </a:rPr>
-                        <a:t/>
-                      </a:r>
+                      <a:endParaRPr/>
                     </a:p>
                   </a:txBody>
                   <a:tcPr marL="27432" marR="27432" marT="9144" marB="9144" anchor="ctr">
@@ -21725,6 +21042,11 @@
                     </a:solidFill>
                   </a:tcPr>
                 </a:tc>
+                <a:extLst>
+                  <a:ext uri="{0D108BD9-81ED-4DB2-BD59-A6C34878D82A}">
+                    <a16:rowId xmlns:a16="http://schemas.microsoft.com/office/drawing/2014/main" val="10012"/>
+                  </a:ext>
+                </a:extLst>
               </a:tr>
               <a:tr h="274320">
                 <a:tc>
@@ -21756,15 +21078,7 @@
                     <a:lstStyle/>
                     <a:p>
                       <a:pPr algn="ctr"/>
-                      <a:r>
-                        <a:rPr sz="800" b="1">
-                          <a:solidFill>
-                            <a:srgbClr val="FFFFFF"/>
-                          </a:solidFill>
-                          <a:latin typeface="Calibri"/>
-                        </a:rPr>
-                        <a:t/>
-                      </a:r>
+                      <a:endParaRPr/>
                     </a:p>
                   </a:txBody>
                   <a:tcPr marL="27432" marR="27432" marT="9144" marB="9144" anchor="ctr">
@@ -21779,15 +21093,7 @@
                     <a:lstStyle/>
                     <a:p>
                       <a:pPr algn="ctr"/>
-                      <a:r>
-                        <a:rPr sz="800" b="1">
-                          <a:solidFill>
-                            <a:srgbClr val="FFFFFF"/>
-                          </a:solidFill>
-                          <a:latin typeface="Calibri"/>
-                        </a:rPr>
-                        <a:t/>
-                      </a:r>
+                      <a:endParaRPr/>
                     </a:p>
                   </a:txBody>
                   <a:tcPr marL="27432" marR="27432" marT="9144" marB="9144" anchor="ctr">
@@ -21802,15 +21108,7 @@
                     <a:lstStyle/>
                     <a:p>
                       <a:pPr algn="ctr"/>
-                      <a:r>
-                        <a:rPr sz="800" b="1">
-                          <a:solidFill>
-                            <a:srgbClr val="FFFFFF"/>
-                          </a:solidFill>
-                          <a:latin typeface="Calibri"/>
-                        </a:rPr>
-                        <a:t/>
-                      </a:r>
+                      <a:endParaRPr/>
                     </a:p>
                   </a:txBody>
                   <a:tcPr marL="27432" marR="27432" marT="9144" marB="9144" anchor="ctr">
@@ -21848,15 +21146,7 @@
                     <a:lstStyle/>
                     <a:p>
                       <a:pPr algn="ctr"/>
-                      <a:r>
-                        <a:rPr sz="800" b="1">
-                          <a:solidFill>
-                            <a:srgbClr val="FFFFFF"/>
-                          </a:solidFill>
-                          <a:latin typeface="Calibri"/>
-                        </a:rPr>
-                        <a:t/>
-                      </a:r>
+                      <a:endParaRPr/>
                     </a:p>
                   </a:txBody>
                   <a:tcPr marL="27432" marR="27432" marT="9144" marB="9144" anchor="ctr">
@@ -21871,15 +21161,7 @@
                     <a:lstStyle/>
                     <a:p>
                       <a:pPr algn="ctr"/>
-                      <a:r>
-                        <a:rPr sz="800" b="1">
-                          <a:solidFill>
-                            <a:srgbClr val="FFFFFF"/>
-                          </a:solidFill>
-                          <a:latin typeface="Calibri"/>
-                        </a:rPr>
-                        <a:t/>
-                      </a:r>
+                      <a:endParaRPr/>
                     </a:p>
                   </a:txBody>
                   <a:tcPr marL="27432" marR="27432" marT="9144" marB="9144" anchor="ctr">
@@ -21894,15 +21176,7 @@
                     <a:lstStyle/>
                     <a:p>
                       <a:pPr algn="ctr"/>
-                      <a:r>
-                        <a:rPr sz="800" b="1">
-                          <a:solidFill>
-                            <a:srgbClr val="FFFFFF"/>
-                          </a:solidFill>
-                          <a:latin typeface="Calibri"/>
-                        </a:rPr>
-                        <a:t/>
-                      </a:r>
+                      <a:endParaRPr/>
                     </a:p>
                   </a:txBody>
                   <a:tcPr marL="27432" marR="27432" marT="9144" marB="9144" anchor="ctr">
@@ -21917,15 +21191,7 @@
                     <a:lstStyle/>
                     <a:p>
                       <a:pPr algn="ctr"/>
-                      <a:r>
-                        <a:rPr sz="800" b="1">
-                          <a:solidFill>
-                            <a:srgbClr val="FFFFFF"/>
-                          </a:solidFill>
-                          <a:latin typeface="Calibri"/>
-                        </a:rPr>
-                        <a:t/>
-                      </a:r>
+                      <a:endParaRPr/>
                     </a:p>
                   </a:txBody>
                   <a:tcPr marL="27432" marR="27432" marT="9144" marB="9144" anchor="ctr">
@@ -21986,15 +21252,7 @@
                     <a:lstStyle/>
                     <a:p>
                       <a:pPr algn="ctr"/>
-                      <a:r>
-                        <a:rPr sz="800" b="1">
-                          <a:solidFill>
-                            <a:srgbClr val="FFFFFF"/>
-                          </a:solidFill>
-                          <a:latin typeface="Calibri"/>
-                        </a:rPr>
-                        <a:t/>
-                      </a:r>
+                      <a:endParaRPr/>
                     </a:p>
                   </a:txBody>
                   <a:tcPr marL="27432" marR="27432" marT="9144" marB="9144" anchor="ctr">
@@ -22009,15 +21267,7 @@
                     <a:lstStyle/>
                     <a:p>
                       <a:pPr algn="ctr"/>
-                      <a:r>
-                        <a:rPr sz="800" b="1">
-                          <a:solidFill>
-                            <a:srgbClr val="FFFFFF"/>
-                          </a:solidFill>
-                          <a:latin typeface="Calibri"/>
-                        </a:rPr>
-                        <a:t/>
-                      </a:r>
+                      <a:endParaRPr/>
                     </a:p>
                   </a:txBody>
                   <a:tcPr marL="27432" marR="27432" marT="9144" marB="9144" anchor="ctr">
@@ -22032,15 +21282,7 @@
                     <a:lstStyle/>
                     <a:p>
                       <a:pPr algn="ctr"/>
-                      <a:r>
-                        <a:rPr sz="800" b="1">
-                          <a:solidFill>
-                            <a:srgbClr val="FFFFFF"/>
-                          </a:solidFill>
-                          <a:latin typeface="Calibri"/>
-                        </a:rPr>
-                        <a:t/>
-                      </a:r>
+                      <a:endParaRPr/>
                     </a:p>
                   </a:txBody>
                   <a:tcPr marL="27432" marR="27432" marT="9144" marB="9144" anchor="ctr">
@@ -22055,15 +21297,7 @@
                     <a:lstStyle/>
                     <a:p>
                       <a:pPr algn="ctr"/>
-                      <a:r>
-                        <a:rPr sz="800" b="1">
-                          <a:solidFill>
-                            <a:srgbClr val="FFFFFF"/>
-                          </a:solidFill>
-                          <a:latin typeface="Calibri"/>
-                        </a:rPr>
-                        <a:t/>
-                      </a:r>
+                      <a:endParaRPr/>
                     </a:p>
                   </a:txBody>
                   <a:tcPr marL="27432" marR="27432" marT="9144" marB="9144" anchor="ctr">
@@ -22101,15 +21335,7 @@
                     <a:lstStyle/>
                     <a:p>
                       <a:pPr algn="ctr"/>
-                      <a:r>
-                        <a:rPr sz="800" b="1">
-                          <a:solidFill>
-                            <a:srgbClr val="FFFFFF"/>
-                          </a:solidFill>
-                          <a:latin typeface="Calibri"/>
-                        </a:rPr>
-                        <a:t/>
-                      </a:r>
+                      <a:endParaRPr/>
                     </a:p>
                   </a:txBody>
                   <a:tcPr marL="27432" marR="27432" marT="9144" marB="9144" anchor="ctr">
@@ -22124,15 +21350,7 @@
                     <a:lstStyle/>
                     <a:p>
                       <a:pPr algn="ctr"/>
-                      <a:r>
-                        <a:rPr sz="800" b="1">
-                          <a:solidFill>
-                            <a:srgbClr val="FFFFFF"/>
-                          </a:solidFill>
-                          <a:latin typeface="Calibri"/>
-                        </a:rPr>
-                        <a:t/>
-                      </a:r>
+                      <a:endParaRPr/>
                     </a:p>
                   </a:txBody>
                   <a:tcPr marL="27432" marR="27432" marT="9144" marB="9144" anchor="ctr">
@@ -22164,6 +21382,11 @@
                     </a:solidFill>
                   </a:tcPr>
                 </a:tc>
+                <a:extLst>
+                  <a:ext uri="{0D108BD9-81ED-4DB2-BD59-A6C34878D82A}">
+                    <a16:rowId xmlns:a16="http://schemas.microsoft.com/office/drawing/2014/main" val="10013"/>
+                  </a:ext>
+                </a:extLst>
               </a:tr>
             </a:tbl>
           </a:graphicData>
@@ -22186,7 +21409,7 @@
           <a:noFill/>
         </p:spPr>
         <p:txBody>
-          <a:bodyPr wrap="square" anchor="t" lIns="73152" rIns="73152" tIns="36576" bIns="36576">
+          <a:bodyPr wrap="square" lIns="73152" tIns="36576" rIns="73152" bIns="36576" anchor="t">
             <a:spAutoFit/>
           </a:bodyPr>
           <a:lstStyle/>
@@ -22457,7 +21680,7 @@
           </a:fontRef>
         </p:style>
         <p:txBody>
-          <a:bodyPr rtlCol="0" anchor="ctr" wrap="square" tIns="54864" bIns="54864"/>
+          <a:bodyPr wrap="square" tIns="54864" bIns="54864" rtlCol="0" anchor="ctr"/>
           <a:lstStyle/>
           <a:p>
             <a:pPr algn="l">
@@ -22521,7 +21744,7 @@
           </a:fontRef>
         </p:style>
         <p:txBody>
-          <a:bodyPr rtlCol="0" anchor="ctr" wrap="square" tIns="54864" bIns="54864"/>
+          <a:bodyPr wrap="square" tIns="54864" bIns="54864" rtlCol="0" anchor="ctr"/>
           <a:lstStyle/>
           <a:p>
             <a:pPr algn="l">
@@ -22561,7 +21784,7 @@
           <a:noFill/>
         </p:spPr>
         <p:txBody>
-          <a:bodyPr wrap="square" anchor="t" lIns="73152" rIns="73152" tIns="36576" bIns="36576">
+          <a:bodyPr wrap="square" lIns="73152" tIns="36576" rIns="73152" bIns="36576" anchor="t">
             <a:spAutoFit/>
           </a:bodyPr>
           <a:lstStyle/>
@@ -22627,7 +21850,7 @@
           </a:fontRef>
         </p:style>
         <p:txBody>
-          <a:bodyPr rtlCol="0" anchor="t" wrap="square" tIns="54864" bIns="54864"/>
+          <a:bodyPr wrap="square" tIns="54864" bIns="54864" rtlCol="0" anchor="t"/>
           <a:lstStyle/>
           <a:p>
             <a:pPr algn="l">
@@ -22710,7 +21933,7 @@
           </a:fontRef>
         </p:style>
         <p:txBody>
-          <a:bodyPr rtlCol="0" anchor="t" wrap="square" tIns="54864" bIns="54864"/>
+          <a:bodyPr wrap="square" tIns="54864" bIns="54864" rtlCol="0" anchor="t"/>
           <a:lstStyle/>
           <a:p>
             <a:pPr algn="l">
@@ -22793,7 +22016,7 @@
           </a:fontRef>
         </p:style>
         <p:txBody>
-          <a:bodyPr rtlCol="0" anchor="t" wrap="square" tIns="54864" bIns="54864"/>
+          <a:bodyPr wrap="square" tIns="54864" bIns="54864" rtlCol="0" anchor="t"/>
           <a:lstStyle/>
           <a:p>
             <a:pPr algn="l">
@@ -22876,7 +22099,7 @@
           </a:fontRef>
         </p:style>
         <p:txBody>
-          <a:bodyPr rtlCol="0" anchor="t" wrap="square" tIns="54864" bIns="54864"/>
+          <a:bodyPr wrap="square" tIns="54864" bIns="54864" rtlCol="0" anchor="t"/>
           <a:lstStyle/>
           <a:p>
             <a:pPr algn="l">
@@ -22959,7 +22182,7 @@
           </a:fontRef>
         </p:style>
         <p:txBody>
-          <a:bodyPr rtlCol="0" anchor="t" wrap="square" tIns="54864" bIns="54864"/>
+          <a:bodyPr wrap="square" tIns="54864" bIns="54864" rtlCol="0" anchor="t"/>
           <a:lstStyle/>
           <a:p>
             <a:pPr algn="l">
@@ -23222,7 +22445,7 @@
           </a:fontRef>
         </p:style>
         <p:txBody>
-          <a:bodyPr rtlCol="0" anchor="ctr" wrap="square" tIns="54864" bIns="54864"/>
+          <a:bodyPr wrap="square" tIns="54864" bIns="54864" rtlCol="0" anchor="ctr"/>
           <a:lstStyle/>
           <a:p>
             <a:pPr algn="l">
@@ -23322,7 +22545,7 @@
           </a:fontRef>
         </p:style>
         <p:txBody>
-          <a:bodyPr rtlCol="0" anchor="t" wrap="square" tIns="54864" bIns="54864"/>
+          <a:bodyPr wrap="square" tIns="54864" bIns="54864" rtlCol="0" anchor="t"/>
           <a:lstStyle/>
           <a:p>
             <a:pPr algn="l">
@@ -23405,7 +22628,7 @@
           </a:fontRef>
         </p:style>
         <p:txBody>
-          <a:bodyPr rtlCol="0" anchor="t" wrap="square" tIns="54864" bIns="54864"/>
+          <a:bodyPr wrap="square" tIns="54864" bIns="54864" rtlCol="0" anchor="t"/>
           <a:lstStyle/>
           <a:p>
             <a:pPr algn="l">
@@ -23488,7 +22711,7 @@
           </a:fontRef>
         </p:style>
         <p:txBody>
-          <a:bodyPr rtlCol="0" anchor="t" wrap="square" tIns="54864" bIns="54864"/>
+          <a:bodyPr wrap="square" tIns="54864" bIns="54864" rtlCol="0" anchor="t"/>
           <a:lstStyle/>
           <a:p>
             <a:pPr algn="l">
@@ -23571,7 +22794,7 @@
           </a:fontRef>
         </p:style>
         <p:txBody>
-          <a:bodyPr rtlCol="0" anchor="t" wrap="square" tIns="54864" bIns="54864"/>
+          <a:bodyPr wrap="square" tIns="54864" bIns="54864" rtlCol="0" anchor="t"/>
           <a:lstStyle/>
           <a:p>
             <a:pPr algn="l">
@@ -23654,7 +22877,7 @@
           </a:fontRef>
         </p:style>
         <p:txBody>
-          <a:bodyPr rtlCol="0" anchor="t" wrap="square" tIns="54864" bIns="54864"/>
+          <a:bodyPr wrap="square" tIns="54864" bIns="54864" rtlCol="0" anchor="t"/>
           <a:lstStyle/>
           <a:p>
             <a:pPr algn="l">

--- a/Fase 1/Evidencias Grupales/Presentación Proyecto.pptx
+++ b/Fase 1/Evidencias Grupales/Presentación Proyecto.pptx
@@ -1419,7 +1419,7 @@
           <a:lstStyle/>
           <a:p>
             <a:r>
-              <a:t>3:00 · Edgar. Recorrer el dibujo de arriba abajo: el video entra por un puerto y el reloj nace en la captura; la Etapa 1 muestrea, detecta, sigue y persiste las detecciones crudas; el motor de reglas decide en segundos y produce un hallazgo; el hallazgo alimenta la evidencia, la notificación, la API y la web. La Etapa 2 (modelo de lenguaje visual) solo describe, nunca crea ni suprime hallazgos: así el sistema es auditable. Cerrar con las tres decisiones que hacen que esto no sea un trabajo escolar: el dato es propio, el incumplimiento es un evento y la alerta cierra el ciclo con acuse de recibo.</a:t>
+              <a:t>3:00 · Edgar. Cuatro filas de arriba abajo y, en cada caja, la tecnología y una frase de lo que hace. (1) Entrada: el trabajador toma los .mp4 que la obra ya graba; OpenCV los muestrea a 5 cuadros por segundo y aplica las máscaras de privacidad; el reloj nace en la captura. (2) Visión: RF-DETR detecta persona, casco y chaleco, Apache-2.0, por eso no YOLO; ByteTrack sigue con identificadores efímeros; el modelo exportado a ONNX corre en CPU en cualquier portátil. (3) Decisión y datos: gepp-core convierte trayectorias en hallazgos con umbrales en segundos; PostgreSQL guarda detecciones crudas y reglas versionadas, y por eso se puede recalcular sin GPU; Redis desacopla. (4) Servicios e interfaz: FastAPI cumple el contrato congelado y no importa la visión; React construye bandeja, visor, reglas y tablero contra Prism hasta la S9; el canal de alerta cierra el ciclo con acuse y seis avisos por turno como máximo. La columna derecha es cómo se trabaja: uv, pruebas y tipado, CI que rechaza licencias AGPL, Docker Compose, Prism y CVAT. Cerrar con la línea de abajo: la Etapa 1 decide, la Etapa 2 describe; el evento, no el cuadro, es la unidad.</a:t>
             </a:r>
           </a:p>
         </p:txBody>
@@ -22384,7 +22384,7 @@
                 <a:cs typeface="Calibri"/>
                 <a:sym typeface="Calibri"/>
               </a:rPr>
-              <a:t>Dos etapas: la Etapa 1 decide, la Etapa 2 solo describe. El evento, no el cuadro, es la unidad del sistema.</a:t>
+              <a:t>Del video que la obra ya graba al hallazgo con evidencia. Cada pieza: la tecnología y lo que hace.</a:t>
             </a:r>
             <a:endParaRPr/>
           </a:p>
@@ -22424,8 +22424,8 @@
         </p:nvSpPr>
         <p:spPr>
           <a:xfrm>
-            <a:off x="365760" y="2423160"/>
-            <a:ext cx="4389120" cy="640080"/>
+            <a:off x="365760" y="2395728"/>
+            <a:ext cx="1554480" cy="841248"/>
           </a:xfrm>
           <a:prstGeom prst="roundRect">
             <a:avLst>
@@ -22433,7 +22433,7 @@
             </a:avLst>
           </a:prstGeom>
           <a:solidFill>
-            <a:srgbClr val="DDE5F0"/>
+            <a:srgbClr val="1F3864"/>
           </a:solidFill>
           <a:ln w="12700">
             <a:solidFill>
@@ -22465,17 +22465,36 @@
                 <a:spcPts val="0"/>
               </a:spcBef>
               <a:spcAft>
-                <a:spcPts val="200"/>
+                <a:spcPts val="300"/>
               </a:spcAft>
             </a:pPr>
             <a:r>
-              <a:rPr sz="1100" b="0" i="0">
+              <a:rPr sz="1100" b="1" i="0">
                 <a:solidFill>
-                  <a:srgbClr val="1C1C1C"/>
+                  <a:srgbClr val="FFFFFF"/>
                 </a:solidFill>
                 <a:latin typeface="Calibri"/>
               </a:rPr>
-              <a:t>FUENTE  ·  v1: carpeta vigilada  ·  v2: cámara RTSP  →  FrameSource (puerto)  ·  el reloj nace en la captura (capture_ts)</a:t>
+              <a:t>1 · ENTRADA</a:t>
+            </a:r>
+          </a:p>
+          <a:p>
+            <a:pPr algn="l">
+              <a:spcBef>
+                <a:spcPts val="0"/>
+              </a:spcBef>
+              <a:spcAft>
+                <a:spcPts val="200"/>
+              </a:spcAft>
+            </a:pPr>
+            <a:r>
+              <a:rPr sz="950" b="0" i="0">
+                <a:solidFill>
+                  <a:srgbClr val="FFFFFF"/>
+                </a:solidFill>
+                <a:latin typeface="Calibri"/>
+              </a:rPr>
+              <a:t>gepp-worker</a:t>
             </a:r>
           </a:p>
         </p:txBody>
@@ -22488,114 +22507,8 @@
         </p:nvSpPr>
         <p:spPr>
           <a:xfrm>
-            <a:off x="5029200" y="2423160"/>
-            <a:ext cx="6720840" cy="640080"/>
-          </a:xfrm>
-          <a:prstGeom prst="roundRect">
-            <a:avLst>
-              <a:gd name="adj" fmla="val 8000"/>
-            </a:avLst>
-          </a:prstGeom>
-          <a:solidFill>
-            <a:srgbClr val="FFFFFF"/>
-          </a:solidFill>
-          <a:ln w="12700">
-            <a:solidFill>
-              <a:srgbClr val="757070"/>
-            </a:solidFill>
-          </a:ln>
-          <a:effectLst/>
-        </p:spPr>
-        <p:style>
-          <a:lnRef idx="1">
-            <a:schemeClr val="accent1"/>
-          </a:lnRef>
-          <a:fillRef idx="3">
-            <a:schemeClr val="accent1"/>
-          </a:fillRef>
-          <a:effectRef idx="2">
-            <a:schemeClr val="accent1"/>
-          </a:effectRef>
-          <a:fontRef idx="minor">
-            <a:schemeClr val="lt1"/>
-          </a:fontRef>
-        </p:style>
-        <p:txBody>
-          <a:bodyPr rtlCol="0" anchor="ctr" wrap="square" tIns="54864" bIns="54864"/>
-          <a:lstStyle/>
-          <a:p>
-            <a:pPr algn="l">
-              <a:spcBef>
-                <a:spcPts val="0"/>
-              </a:spcBef>
-              <a:spcAft>
-                <a:spcPts val="200"/>
-              </a:spcAft>
-            </a:pPr>
-            <a:r>
-              <a:rPr sz="1000" b="0" i="0">
-                <a:solidFill>
-                  <a:srgbClr val="1C1C1C"/>
-                </a:solidFill>
-                <a:latin typeface="Calibri"/>
-              </a:rPr>
-              <a:t>Restricciones que ordenan el diseño: umbrales en segundos, nunca en cuadros  ·  5 fps  ·  reglas versionadas en la BD  ·  RF-DETR (Apache-2.0), sin licencias AGPL</a:t>
-            </a:r>
-          </a:p>
-        </p:txBody>
-      </p:sp>
-      <p:sp>
-        <p:nvSpPr>
-          <p:cNvPr id="160" name="TextBox 159"/>
-          <p:cNvSpPr txBox="1"/>
-          <p:nvPr/>
-        </p:nvSpPr>
-        <p:spPr>
-          <a:xfrm>
-            <a:off x="2697480" y="3127248"/>
-            <a:ext cx="7315200" cy="274320"/>
-          </a:xfrm>
-          <a:prstGeom prst="rect">
-            <a:avLst/>
-          </a:prstGeom>
-          <a:noFill/>
-        </p:spPr>
-        <p:txBody>
-          <a:bodyPr wrap="square" anchor="t" lIns="73152" rIns="73152" tIns="36576" bIns="36576">
-            <a:spAutoFit/>
-          </a:bodyPr>
-          <a:lstStyle/>
-          <a:p>
-            <a:pPr algn="l">
-              <a:spcBef>
-                <a:spcPts val="0"/>
-              </a:spcBef>
-              <a:spcAft>
-                <a:spcPts val="0"/>
-              </a:spcAft>
-            </a:pPr>
-            <a:r>
-              <a:rPr sz="1000" b="1" i="0">
-                <a:solidFill>
-                  <a:srgbClr val="1F3864"/>
-                </a:solidFill>
-                <a:latin typeface="Calibri"/>
-              </a:rPr>
-              <a:t>ETAPA 1  ·  barata, siempre encendida  ·  DECIDE</a:t>
-            </a:r>
-          </a:p>
-        </p:txBody>
-      </p:sp>
-      <p:sp>
-        <p:nvSpPr>
-          <p:cNvPr id="161" name="Rounded Rectangle 160"/>
-          <p:cNvSpPr/>
-          <p:nvPr/>
-        </p:nvSpPr>
-        <p:spPr>
-          <a:xfrm>
-            <a:off x="365760" y="3401568"/>
-            <a:ext cx="2057400" cy="868680"/>
+            <a:off x="2057400" y="2395728"/>
+            <a:ext cx="3831336" cy="841248"/>
           </a:xfrm>
           <a:prstGeom prst="roundRect">
             <a:avLst>
@@ -22645,7 +22558,7 @@
                 </a:solidFill>
                 <a:latin typeface="Calibri"/>
               </a:rPr>
-              <a:t>Muestreo 5 fps</a:t>
+              <a:t>Carpeta vigilada (v1) · RTSP (v2)</a:t>
             </a:r>
           </a:p>
           <a:p>
@@ -22664,21 +22577,21 @@
                 </a:solidFill>
                 <a:latin typeface="Calibri"/>
               </a:rPr>
-              <a:t>máscaras de privacidad antes de inferir</a:t>
+              <a:t>Toma los .mp4 que la obra ya graba; en v2, cámaras RTSP (MediaMTX las simula desde la S6). El reloj nace en la captura: capture_ts.</a:t>
             </a:r>
           </a:p>
         </p:txBody>
       </p:sp>
       <p:sp>
         <p:nvSpPr>
-          <p:cNvPr id="162" name="Rounded Rectangle 161"/>
+          <p:cNvPr id="160" name="Rounded Rectangle 159"/>
           <p:cNvSpPr/>
           <p:nvPr/>
         </p:nvSpPr>
         <p:spPr>
           <a:xfrm>
-            <a:off x="2697480" y="3401568"/>
-            <a:ext cx="2057400" cy="868680"/>
+            <a:off x="5998464" y="2395728"/>
+            <a:ext cx="3831336" cy="841248"/>
           </a:xfrm>
           <a:prstGeom prst="roundRect">
             <a:avLst>
@@ -22728,7 +22641,7 @@
                 </a:solidFill>
                 <a:latin typeface="Calibri"/>
               </a:rPr>
-              <a:t>Detector RF-DETR</a:t>
+              <a:t>OpenCV + FFmpeg</a:t>
             </a:r>
           </a:p>
           <a:p>
@@ -22747,11 +22660,130 @@
                 </a:solidFill>
                 <a:latin typeface="Calibri"/>
               </a:rPr>
-              <a:t>casco y chaleco · afinado con datos propios</a:t>
+              <a:t>Decodifica el video, lo muestrea a 5 fps y aplica las máscaras de privacidad antes de inferir. Difumina los rostros de la evidencia.</a:t>
             </a:r>
           </a:p>
         </p:txBody>
       </p:sp>
+      <p:sp>
+        <p:nvSpPr>
+          <p:cNvPr id="161" name="Rounded Rectangle 160"/>
+          <p:cNvSpPr/>
+          <p:nvPr/>
+        </p:nvSpPr>
+        <p:spPr>
+          <a:xfrm>
+            <a:off x="365760" y="3383280"/>
+            <a:ext cx="1554480" cy="841248"/>
+          </a:xfrm>
+          <a:prstGeom prst="roundRect">
+            <a:avLst>
+              <a:gd name="adj" fmla="val 8000"/>
+            </a:avLst>
+          </a:prstGeom>
+          <a:solidFill>
+            <a:srgbClr val="1F3864"/>
+          </a:solidFill>
+          <a:ln w="12700">
+            <a:solidFill>
+              <a:srgbClr val="1F3864"/>
+            </a:solidFill>
+          </a:ln>
+          <a:effectLst/>
+        </p:spPr>
+        <p:style>
+          <a:lnRef idx="1">
+            <a:schemeClr val="accent1"/>
+          </a:lnRef>
+          <a:fillRef idx="3">
+            <a:schemeClr val="accent1"/>
+          </a:fillRef>
+          <a:effectRef idx="2">
+            <a:schemeClr val="accent1"/>
+          </a:effectRef>
+          <a:fontRef idx="minor">
+            <a:schemeClr val="lt1"/>
+          </a:fontRef>
+        </p:style>
+        <p:txBody>
+          <a:bodyPr rtlCol="0" anchor="ctr" wrap="square" tIns="54864" bIns="54864"/>
+          <a:lstStyle/>
+          <a:p>
+            <a:pPr algn="l">
+              <a:spcBef>
+                <a:spcPts val="0"/>
+              </a:spcBef>
+              <a:spcAft>
+                <a:spcPts val="300"/>
+              </a:spcAft>
+            </a:pPr>
+            <a:r>
+              <a:rPr sz="1100" b="1" i="0">
+                <a:solidFill>
+                  <a:srgbClr val="FFFFFF"/>
+                </a:solidFill>
+                <a:latin typeface="Calibri"/>
+              </a:rPr>
+              <a:t>2 · VISIÓN</a:t>
+            </a:r>
+          </a:p>
+          <a:p>
+            <a:pPr algn="l">
+              <a:spcBef>
+                <a:spcPts val="0"/>
+              </a:spcBef>
+              <a:spcAft>
+                <a:spcPts val="200"/>
+              </a:spcAft>
+            </a:pPr>
+            <a:r>
+              <a:rPr sz="950" b="0" i="0">
+                <a:solidFill>
+                  <a:srgbClr val="FFFFFF"/>
+                </a:solidFill>
+                <a:latin typeface="Calibri"/>
+              </a:rPr>
+              <a:t>gepp-vision</a:t>
+            </a:r>
+          </a:p>
+        </p:txBody>
+      </p:sp>
+      <p:cxnSp>
+        <p:nvCxnSpPr>
+          <p:cNvPr id="162" name="Connector 161"/>
+          <p:cNvCxnSpPr/>
+          <p:nvPr/>
+        </p:nvCxnSpPr>
+        <p:spPr>
+          <a:xfrm>
+            <a:off x="1143000" y="3236976"/>
+            <a:ext cx="0" cy="146304"/>
+          </a:xfrm>
+          <a:prstGeom prst="line">
+            <a:avLst/>
+          </a:prstGeom>
+          <a:ln w="19050">
+            <a:solidFill>
+              <a:srgbClr val="1F3864"/>
+            </a:solidFill>
+            <a:tailEnd type="triangle" w="med" len="med"/>
+          </a:ln>
+        </p:spPr>
+        <p:style>
+          <a:lnRef idx="2">
+            <a:schemeClr val="accent1"/>
+          </a:lnRef>
+          <a:fillRef idx="0">
+            <a:schemeClr val="accent1"/>
+          </a:fillRef>
+          <a:effectRef idx="1">
+            <a:schemeClr val="accent1"/>
+          </a:effectRef>
+          <a:fontRef idx="minor">
+            <a:schemeClr val="tx1"/>
+          </a:fontRef>
+        </p:style>
+      </p:cxnSp>
       <p:sp>
         <p:nvSpPr>
           <p:cNvPr id="163" name="Rounded Rectangle 162"/>
@@ -22760,8 +22792,8 @@
         </p:nvSpPr>
         <p:spPr>
           <a:xfrm>
-            <a:off x="5029200" y="3401568"/>
-            <a:ext cx="2057400" cy="868680"/>
+            <a:off x="2057400" y="3383280"/>
+            <a:ext cx="2517648" cy="841248"/>
           </a:xfrm>
           <a:prstGeom prst="roundRect">
             <a:avLst>
@@ -22811,7 +22843,7 @@
                 </a:solidFill>
                 <a:latin typeface="Calibri"/>
               </a:rPr>
-              <a:t>Seguidor ByteTrack</a:t>
+              <a:t>RF-DETR (Apache-2.0)</a:t>
             </a:r>
           </a:p>
           <a:p>
@@ -22830,7 +22862,7 @@
                 </a:solidFill>
                 <a:latin typeface="Calibri"/>
               </a:rPr>
-              <a:t>track_id efímeros · sin reidentificación</a:t>
+              <a:t>Detector: encuentra personas, cascos y chalecos en cada cuadro. Se afina con imágenes propias.</a:t>
             </a:r>
           </a:p>
         </p:txBody>
@@ -22843,8 +22875,8 @@
         </p:nvSpPr>
         <p:spPr>
           <a:xfrm>
-            <a:off x="7360920" y="3401568"/>
-            <a:ext cx="2057400" cy="868680"/>
+            <a:off x="4684776" y="3383280"/>
+            <a:ext cx="2517648" cy="841248"/>
           </a:xfrm>
           <a:prstGeom prst="roundRect">
             <a:avLst>
@@ -22894,7 +22926,7 @@
                 </a:solidFill>
                 <a:latin typeface="Calibri"/>
               </a:rPr>
-              <a:t>Detecciones crudas</a:t>
+              <a:t>ByteTrack (roboflow/trackers)</a:t>
             </a:r>
           </a:p>
           <a:p>
@@ -22913,7 +22945,7 @@
                 </a:solidFill>
                 <a:latin typeface="Calibri"/>
               </a:rPr>
-              <a:t>persistidas por track → recalcular sin GPU</a:t>
+              <a:t>Seguidor: une detecciones en trayectorias con track_id efímero, sin reidentificar personas.</a:t>
             </a:r>
           </a:p>
         </p:txBody>
@@ -22926,8 +22958,8 @@
         </p:nvSpPr>
         <p:spPr>
           <a:xfrm>
-            <a:off x="9692640" y="3401568"/>
-            <a:ext cx="2057400" cy="868680"/>
+            <a:off x="7312152" y="3383280"/>
+            <a:ext cx="2517648" cy="841248"/>
           </a:xfrm>
           <a:prstGeom prst="roundRect">
             <a:avLst>
@@ -22977,7 +23009,7 @@
                 </a:solidFill>
                 <a:latin typeface="Calibri"/>
               </a:rPr>
-              <a:t>Motor de reglas</a:t>
+              <a:t>PyTorch → ONNX Runtime</a:t>
             </a:r>
           </a:p>
           <a:p>
@@ -22996,201 +23028,21 @@
                 </a:solidFill>
                 <a:latin typeface="Calibri"/>
               </a:rPr>
-              <a:t>zona · turno · severidad · segundos</a:t>
+              <a:t>Entrena en GPU (nube con datos públicos, local con los propios) y ejecuta en CPU en cualquier portátil.</a:t>
             </a:r>
           </a:p>
         </p:txBody>
       </p:sp>
-      <p:cxnSp>
-        <p:nvCxnSpPr>
-          <p:cNvPr id="166" name="Connector 165"/>
-          <p:cNvCxnSpPr/>
-          <p:nvPr/>
-        </p:nvCxnSpPr>
-        <p:spPr>
-          <a:xfrm>
-            <a:off x="2423160" y="3835908"/>
-            <a:ext cx="274320" cy="0"/>
-          </a:xfrm>
-          <a:prstGeom prst="line">
-            <a:avLst/>
-          </a:prstGeom>
-          <a:ln w="19050">
-            <a:solidFill>
-              <a:srgbClr val="1F3864"/>
-            </a:solidFill>
-            <a:tailEnd type="triangle" w="med" len="med"/>
-          </a:ln>
-        </p:spPr>
-        <p:style>
-          <a:lnRef idx="2">
-            <a:schemeClr val="accent1"/>
-          </a:lnRef>
-          <a:fillRef idx="0">
-            <a:schemeClr val="accent1"/>
-          </a:fillRef>
-          <a:effectRef idx="1">
-            <a:schemeClr val="accent1"/>
-          </a:effectRef>
-          <a:fontRef idx="minor">
-            <a:schemeClr val="tx1"/>
-          </a:fontRef>
-        </p:style>
-      </p:cxnSp>
-      <p:cxnSp>
-        <p:nvCxnSpPr>
-          <p:cNvPr id="167" name="Connector 166"/>
-          <p:cNvCxnSpPr/>
-          <p:nvPr/>
-        </p:nvCxnSpPr>
-        <p:spPr>
-          <a:xfrm>
-            <a:off x="4754880" y="3835908"/>
-            <a:ext cx="274320" cy="0"/>
-          </a:xfrm>
-          <a:prstGeom prst="line">
-            <a:avLst/>
-          </a:prstGeom>
-          <a:ln w="19050">
-            <a:solidFill>
-              <a:srgbClr val="1F3864"/>
-            </a:solidFill>
-            <a:tailEnd type="triangle" w="med" len="med"/>
-          </a:ln>
-        </p:spPr>
-        <p:style>
-          <a:lnRef idx="2">
-            <a:schemeClr val="accent1"/>
-          </a:lnRef>
-          <a:fillRef idx="0">
-            <a:schemeClr val="accent1"/>
-          </a:fillRef>
-          <a:effectRef idx="1">
-            <a:schemeClr val="accent1"/>
-          </a:effectRef>
-          <a:fontRef idx="minor">
-            <a:schemeClr val="tx1"/>
-          </a:fontRef>
-        </p:style>
-      </p:cxnSp>
-      <p:cxnSp>
-        <p:nvCxnSpPr>
-          <p:cNvPr id="168" name="Connector 167"/>
-          <p:cNvCxnSpPr/>
-          <p:nvPr/>
-        </p:nvCxnSpPr>
-        <p:spPr>
-          <a:xfrm>
-            <a:off x="7086600" y="3835908"/>
-            <a:ext cx="274320" cy="0"/>
-          </a:xfrm>
-          <a:prstGeom prst="line">
-            <a:avLst/>
-          </a:prstGeom>
-          <a:ln w="19050">
-            <a:solidFill>
-              <a:srgbClr val="1F3864"/>
-            </a:solidFill>
-            <a:tailEnd type="triangle" w="med" len="med"/>
-          </a:ln>
-        </p:spPr>
-        <p:style>
-          <a:lnRef idx="2">
-            <a:schemeClr val="accent1"/>
-          </a:lnRef>
-          <a:fillRef idx="0">
-            <a:schemeClr val="accent1"/>
-          </a:fillRef>
-          <a:effectRef idx="1">
-            <a:schemeClr val="accent1"/>
-          </a:effectRef>
-          <a:fontRef idx="minor">
-            <a:schemeClr val="tx1"/>
-          </a:fontRef>
-        </p:style>
-      </p:cxnSp>
-      <p:cxnSp>
-        <p:nvCxnSpPr>
-          <p:cNvPr id="169" name="Connector 168"/>
-          <p:cNvCxnSpPr/>
-          <p:nvPr/>
-        </p:nvCxnSpPr>
-        <p:spPr>
-          <a:xfrm>
-            <a:off x="9418320" y="3835908"/>
-            <a:ext cx="274320" cy="0"/>
-          </a:xfrm>
-          <a:prstGeom prst="line">
-            <a:avLst/>
-          </a:prstGeom>
-          <a:ln w="19050">
-            <a:solidFill>
-              <a:srgbClr val="1F3864"/>
-            </a:solidFill>
-            <a:tailEnd type="triangle" w="med" len="med"/>
-          </a:ln>
-        </p:spPr>
-        <p:style>
-          <a:lnRef idx="2">
-            <a:schemeClr val="accent1"/>
-          </a:lnRef>
-          <a:fillRef idx="0">
-            <a:schemeClr val="accent1"/>
-          </a:fillRef>
-          <a:effectRef idx="1">
-            <a:schemeClr val="accent1"/>
-          </a:effectRef>
-          <a:fontRef idx="minor">
-            <a:schemeClr val="tx1"/>
-          </a:fontRef>
-        </p:style>
-      </p:cxnSp>
-      <p:cxnSp>
-        <p:nvCxnSpPr>
-          <p:cNvPr id="170" name="Connector 169"/>
-          <p:cNvCxnSpPr/>
-          <p:nvPr/>
-        </p:nvCxnSpPr>
-        <p:spPr>
-          <a:xfrm>
-            <a:off x="1394460" y="3063239"/>
-            <a:ext cx="0" cy="338329"/>
-          </a:xfrm>
-          <a:prstGeom prst="line">
-            <a:avLst/>
-          </a:prstGeom>
-          <a:ln w="19050">
-            <a:solidFill>
-              <a:srgbClr val="1F3864"/>
-            </a:solidFill>
-            <a:tailEnd type="triangle" w="med" len="med"/>
-          </a:ln>
-        </p:spPr>
-        <p:style>
-          <a:lnRef idx="2">
-            <a:schemeClr val="accent1"/>
-          </a:lnRef>
-          <a:fillRef idx="0">
-            <a:schemeClr val="accent1"/>
-          </a:fillRef>
-          <a:effectRef idx="1">
-            <a:schemeClr val="accent1"/>
-          </a:effectRef>
-          <a:fontRef idx="minor">
-            <a:schemeClr val="tx1"/>
-          </a:fontRef>
-        </p:style>
-      </p:cxnSp>
       <p:sp>
         <p:nvSpPr>
-          <p:cNvPr id="171" name="Rounded Rectangle 170"/>
+          <p:cNvPr id="166" name="Rounded Rectangle 165"/>
           <p:cNvSpPr/>
           <p:nvPr/>
         </p:nvSpPr>
         <p:spPr>
           <a:xfrm>
-            <a:off x="365760" y="4709160"/>
-            <a:ext cx="11384280" cy="457200"/>
+            <a:off x="365760" y="4370832"/>
+            <a:ext cx="1554480" cy="841248"/>
           </a:xfrm>
           <a:prstGeom prst="roundRect">
             <a:avLst>
@@ -23230,31 +23082,50 @@
                 <a:spcPts val="0"/>
               </a:spcBef>
               <a:spcAft>
-                <a:spcPts val="200"/>
+                <a:spcPts val="300"/>
               </a:spcAft>
             </a:pPr>
             <a:r>
-              <a:rPr sz="1200" b="1" i="0">
+              <a:rPr sz="1100" b="1" i="0">
                 <a:solidFill>
                   <a:srgbClr val="FFFFFF"/>
                 </a:solidFill>
                 <a:latin typeface="Calibri"/>
               </a:rPr>
-              <a:t>HALLAZGO  ·  inicio  ·  término  ·  zona  ·  severidad  ·  evidencia        (un turno: 12 hallazgos, no 200.000 cuadros)</a:t>
+              <a:t>3 · DECISIÓN Y DATOS</a:t>
+            </a:r>
+          </a:p>
+          <a:p>
+            <a:pPr algn="l">
+              <a:spcBef>
+                <a:spcPts val="0"/>
+              </a:spcBef>
+              <a:spcAft>
+                <a:spcPts val="200"/>
+              </a:spcAft>
+            </a:pPr>
+            <a:r>
+              <a:rPr sz="950" b="0" i="0">
+                <a:solidFill>
+                  <a:srgbClr val="FFFFFF"/>
+                </a:solidFill>
+                <a:latin typeface="Calibri"/>
+              </a:rPr>
+              <a:t>gepp-core · PostgreSQL</a:t>
             </a:r>
           </a:p>
         </p:txBody>
       </p:sp>
       <p:cxnSp>
         <p:nvCxnSpPr>
-          <p:cNvPr id="172" name="Connector 171"/>
+          <p:cNvPr id="167" name="Connector 166"/>
           <p:cNvCxnSpPr/>
           <p:nvPr/>
         </p:nvCxnSpPr>
         <p:spPr>
           <a:xfrm>
-            <a:off x="10721340" y="4270248"/>
-            <a:ext cx="0" cy="438912"/>
+            <a:off x="1143000" y="4224528"/>
+            <a:ext cx="0" cy="146304"/>
           </a:xfrm>
           <a:prstGeom prst="line">
             <a:avLst/>
@@ -23283,14 +23154,14 @@
       </p:cxnSp>
       <p:sp>
         <p:nvSpPr>
-          <p:cNvPr id="173" name="Rounded Rectangle 172"/>
+          <p:cNvPr id="168" name="Rounded Rectangle 167"/>
           <p:cNvSpPr/>
           <p:nvPr/>
         </p:nvSpPr>
         <p:spPr>
           <a:xfrm>
-            <a:off x="365760" y="5486400"/>
-            <a:ext cx="2057400" cy="914400"/>
+            <a:off x="2057400" y="4370832"/>
+            <a:ext cx="2517648" cy="841248"/>
           </a:xfrm>
           <a:prstGeom prst="roundRect">
             <a:avLst>
@@ -23340,7 +23211,7 @@
                 </a:solidFill>
                 <a:latin typeface="Calibri"/>
               </a:rPr>
-              <a:t>Evidencia</a:t>
+              <a:t>gepp-core (Python puro)</a:t>
             </a:r>
           </a:p>
           <a:p>
@@ -23359,21 +23230,21 @@
                 </a:solidFill>
                 <a:latin typeface="Calibri"/>
               </a:rPr>
-              <a:t>recorte con rostro difuminado</a:t>
+              <a:t>Motor de reglas y agregador: de trayectorias a hallazgos con inicio, término, zona y severidad, en segundos.</a:t>
             </a:r>
           </a:p>
         </p:txBody>
       </p:sp>
       <p:sp>
         <p:nvSpPr>
-          <p:cNvPr id="174" name="Rounded Rectangle 173"/>
+          <p:cNvPr id="169" name="Rounded Rectangle 168"/>
           <p:cNvSpPr/>
           <p:nvPr/>
         </p:nvSpPr>
         <p:spPr>
           <a:xfrm>
-            <a:off x="2697480" y="5486400"/>
-            <a:ext cx="2057400" cy="914400"/>
+            <a:off x="4684776" y="4370832"/>
+            <a:ext cx="2517648" cy="841248"/>
           </a:xfrm>
           <a:prstGeom prst="roundRect">
             <a:avLst>
@@ -23423,7 +23294,7 @@
                 </a:solidFill>
                 <a:latin typeface="Calibri"/>
               </a:rPr>
-              <a:t>Notificación</a:t>
+              <a:t>PostgreSQL 17 + Alembic</a:t>
             </a:r>
           </a:p>
           <a:p>
@@ -23442,21 +23313,21 @@
                 </a:solidFill>
                 <a:latin typeface="Calibri"/>
               </a:rPr>
-              <a:t>cola de salida · acuse · supresión · ≤ 6 avisos por turno</a:t>
+              <a:t>Guarda detecciones crudas, hallazgos, reglas versionadas y acuses. Permite recalcular reglas sin GPU.</a:t>
             </a:r>
           </a:p>
         </p:txBody>
       </p:sp>
       <p:sp>
         <p:nvSpPr>
-          <p:cNvPr id="175" name="Rounded Rectangle 174"/>
+          <p:cNvPr id="170" name="Rounded Rectangle 169"/>
           <p:cNvSpPr/>
           <p:nvPr/>
         </p:nvSpPr>
         <p:spPr>
           <a:xfrm>
-            <a:off x="5029200" y="5486400"/>
-            <a:ext cx="2057400" cy="914400"/>
+            <a:off x="7312152" y="4370832"/>
+            <a:ext cx="2517648" cy="841248"/>
           </a:xfrm>
           <a:prstGeom prst="roundRect">
             <a:avLst>
@@ -23506,7 +23377,7 @@
                 </a:solidFill>
                 <a:latin typeface="Calibri"/>
               </a:rPr>
-              <a:t>Etapa 2 · VLM (extensión)</a:t>
+              <a:t>Redis 7</a:t>
             </a:r>
           </a:p>
           <a:p>
@@ -23525,21 +23396,140 @@
                 </a:solidFill>
                 <a:latin typeface="Calibri"/>
               </a:rPr>
-              <a:t>describe el hallazgo · NO decide</a:t>
+              <a:t>Cola de trabajos: desacopla la ingesta del procesamiento y del envío de avisos.</a:t>
             </a:r>
           </a:p>
         </p:txBody>
       </p:sp>
       <p:sp>
         <p:nvSpPr>
-          <p:cNvPr id="176" name="Rounded Rectangle 175"/>
+          <p:cNvPr id="171" name="Rounded Rectangle 170"/>
           <p:cNvSpPr/>
           <p:nvPr/>
         </p:nvSpPr>
         <p:spPr>
           <a:xfrm>
-            <a:off x="7360920" y="5486400"/>
-            <a:ext cx="2057400" cy="914400"/>
+            <a:off x="365760" y="5358384"/>
+            <a:ext cx="1554480" cy="841248"/>
+          </a:xfrm>
+          <a:prstGeom prst="roundRect">
+            <a:avLst>
+              <a:gd name="adj" fmla="val 8000"/>
+            </a:avLst>
+          </a:prstGeom>
+          <a:solidFill>
+            <a:srgbClr val="1F3864"/>
+          </a:solidFill>
+          <a:ln w="12700">
+            <a:solidFill>
+              <a:srgbClr val="1F3864"/>
+            </a:solidFill>
+          </a:ln>
+          <a:effectLst/>
+        </p:spPr>
+        <p:style>
+          <a:lnRef idx="1">
+            <a:schemeClr val="accent1"/>
+          </a:lnRef>
+          <a:fillRef idx="3">
+            <a:schemeClr val="accent1"/>
+          </a:fillRef>
+          <a:effectRef idx="2">
+            <a:schemeClr val="accent1"/>
+          </a:effectRef>
+          <a:fontRef idx="minor">
+            <a:schemeClr val="lt1"/>
+          </a:fontRef>
+        </p:style>
+        <p:txBody>
+          <a:bodyPr rtlCol="0" anchor="ctr" wrap="square" tIns="54864" bIns="54864"/>
+          <a:lstStyle/>
+          <a:p>
+            <a:pPr algn="l">
+              <a:spcBef>
+                <a:spcPts val="0"/>
+              </a:spcBef>
+              <a:spcAft>
+                <a:spcPts val="300"/>
+              </a:spcAft>
+            </a:pPr>
+            <a:r>
+              <a:rPr sz="1100" b="1" i="0">
+                <a:solidFill>
+                  <a:srgbClr val="FFFFFF"/>
+                </a:solidFill>
+                <a:latin typeface="Calibri"/>
+              </a:rPr>
+              <a:t>4 · SERVICIOS E INTERFAZ</a:t>
+            </a:r>
+          </a:p>
+          <a:p>
+            <a:pPr algn="l">
+              <a:spcBef>
+                <a:spcPts val="0"/>
+              </a:spcBef>
+              <a:spcAft>
+                <a:spcPts val="200"/>
+              </a:spcAft>
+            </a:pPr>
+            <a:r>
+              <a:rPr sz="950" b="0" i="0">
+                <a:solidFill>
+                  <a:srgbClr val="FFFFFF"/>
+                </a:solidFill>
+                <a:latin typeface="Calibri"/>
+              </a:rPr>
+              <a:t>gepp-api · apps/web</a:t>
+            </a:r>
+          </a:p>
+        </p:txBody>
+      </p:sp>
+      <p:cxnSp>
+        <p:nvCxnSpPr>
+          <p:cNvPr id="172" name="Connector 171"/>
+          <p:cNvCxnSpPr/>
+          <p:nvPr/>
+        </p:nvCxnSpPr>
+        <p:spPr>
+          <a:xfrm>
+            <a:off x="1143000" y="5212080"/>
+            <a:ext cx="0" cy="146304"/>
+          </a:xfrm>
+          <a:prstGeom prst="line">
+            <a:avLst/>
+          </a:prstGeom>
+          <a:ln w="19050">
+            <a:solidFill>
+              <a:srgbClr val="1F3864"/>
+            </a:solidFill>
+            <a:tailEnd type="triangle" w="med" len="med"/>
+          </a:ln>
+        </p:spPr>
+        <p:style>
+          <a:lnRef idx="2">
+            <a:schemeClr val="accent1"/>
+          </a:lnRef>
+          <a:fillRef idx="0">
+            <a:schemeClr val="accent1"/>
+          </a:fillRef>
+          <a:effectRef idx="1">
+            <a:schemeClr val="accent1"/>
+          </a:effectRef>
+          <a:fontRef idx="minor">
+            <a:schemeClr val="tx1"/>
+          </a:fontRef>
+        </p:style>
+      </p:cxnSp>
+      <p:sp>
+        <p:nvSpPr>
+          <p:cNvPr id="173" name="Rounded Rectangle 172"/>
+          <p:cNvSpPr/>
+          <p:nvPr/>
+        </p:nvSpPr>
+        <p:spPr>
+          <a:xfrm>
+            <a:off x="2057400" y="5358384"/>
+            <a:ext cx="2517648" cy="841248"/>
           </a:xfrm>
           <a:prstGeom prst="roundRect">
             <a:avLst>
@@ -23589,7 +23579,7 @@
                 </a:solidFill>
                 <a:latin typeface="Calibri"/>
               </a:rPr>
-              <a:t>API FastAPI</a:t>
+              <a:t>FastAPI + SQLAlchemy</a:t>
             </a:r>
           </a:p>
           <a:p>
@@ -23608,21 +23598,21 @@
                 </a:solidFill>
                 <a:latin typeface="Calibri"/>
               </a:rPr>
-              <a:t>PostgreSQL + Redis · contrato OpenAPI</a:t>
+              <a:t>API REST bajo el contrato OpenAPI congelado. No importa la visión: corre sin GPU.</a:t>
             </a:r>
           </a:p>
         </p:txBody>
       </p:sp>
       <p:sp>
         <p:nvSpPr>
-          <p:cNvPr id="177" name="Rounded Rectangle 176"/>
+          <p:cNvPr id="174" name="Rounded Rectangle 173"/>
           <p:cNvSpPr/>
           <p:nvPr/>
         </p:nvSpPr>
         <p:spPr>
           <a:xfrm>
-            <a:off x="9692640" y="5486400"/>
-            <a:ext cx="2057400" cy="914400"/>
+            <a:off x="4684776" y="5358384"/>
+            <a:ext cx="2517648" cy="841248"/>
           </a:xfrm>
           <a:prstGeom prst="roundRect">
             <a:avLst>
@@ -23672,7 +23662,7 @@
                 </a:solidFill>
                 <a:latin typeface="Calibri"/>
               </a:rPr>
-              <a:t>Web React</a:t>
+              <a:t>React + Vite + TypeScript</a:t>
             </a:r>
           </a:p>
           <a:p>
@@ -23691,191 +23681,368 @@
                 </a:solidFill>
                 <a:latin typeface="Calibri"/>
               </a:rPr>
-              <a:t>bandeja · visor · reglas · analítica</a:t>
+              <a:t>Bandeja de hallazgos, visor de evidencia, reglas y tablero. Hoy se desarrolla contra el mock de Prism.</a:t>
             </a:r>
           </a:p>
         </p:txBody>
       </p:sp>
-      <p:cxnSp>
-        <p:nvCxnSpPr>
-          <p:cNvPr id="178" name="Connector 177"/>
-          <p:cNvCxnSpPr/>
+      <p:sp>
+        <p:nvSpPr>
+          <p:cNvPr id="175" name="Rounded Rectangle 174"/>
+          <p:cNvSpPr/>
           <p:nvPr/>
-        </p:nvCxnSpPr>
+        </p:nvSpPr>
         <p:spPr>
           <a:xfrm>
-            <a:off x="1394460" y="5166360"/>
-            <a:ext cx="0" cy="320040"/>
+            <a:off x="7312152" y="5358384"/>
+            <a:ext cx="2517648" cy="841248"/>
           </a:xfrm>
-          <a:prstGeom prst="line">
-            <a:avLst/>
+          <a:prstGeom prst="roundRect">
+            <a:avLst>
+              <a:gd name="adj" fmla="val 8000"/>
+            </a:avLst>
           </a:prstGeom>
-          <a:ln w="19050">
+          <a:solidFill>
+            <a:srgbClr val="F2F2F2"/>
+          </a:solidFill>
+          <a:ln w="12700">
             <a:solidFill>
               <a:srgbClr val="1F3864"/>
             </a:solidFill>
-            <a:tailEnd type="triangle" w="med" len="med"/>
           </a:ln>
+          <a:effectLst/>
         </p:spPr>
         <p:style>
-          <a:lnRef idx="2">
+          <a:lnRef idx="1">
             <a:schemeClr val="accent1"/>
           </a:lnRef>
-          <a:fillRef idx="0">
+          <a:fillRef idx="3">
             <a:schemeClr val="accent1"/>
           </a:fillRef>
-          <a:effectRef idx="1">
+          <a:effectRef idx="2">
             <a:schemeClr val="accent1"/>
           </a:effectRef>
           <a:fontRef idx="minor">
-            <a:schemeClr val="tx1"/>
+            <a:schemeClr val="lt1"/>
           </a:fontRef>
         </p:style>
-      </p:cxnSp>
-      <p:cxnSp>
-        <p:nvCxnSpPr>
-          <p:cNvPr id="179" name="Connector 178"/>
-          <p:cNvCxnSpPr/>
+        <p:txBody>
+          <a:bodyPr rtlCol="0" anchor="t" wrap="square" tIns="54864" bIns="54864"/>
+          <a:lstStyle/>
+          <a:p>
+            <a:pPr algn="l">
+              <a:spcBef>
+                <a:spcPts val="0"/>
+              </a:spcBef>
+              <a:spcAft>
+                <a:spcPts val="300"/>
+              </a:spcAft>
+            </a:pPr>
+            <a:r>
+              <a:rPr sz="1200" b="1" i="0">
+                <a:solidFill>
+                  <a:srgbClr val="1F3864"/>
+                </a:solidFill>
+                <a:latin typeface="Calibri"/>
+              </a:rPr>
+              <a:t>Canal de alerta: Telegram o correo</a:t>
+            </a:r>
+          </a:p>
+          <a:p>
+            <a:pPr algn="l">
+              <a:spcBef>
+                <a:spcPts val="0"/>
+              </a:spcBef>
+              <a:spcAft>
+                <a:spcPts val="200"/>
+              </a:spcAft>
+            </a:pPr>
+            <a:r>
+              <a:rPr sz="1000" b="0" i="0">
+                <a:solidFill>
+                  <a:srgbClr val="1C1C1C"/>
+                </a:solidFill>
+                <a:latin typeface="Calibri"/>
+              </a:rPr>
+              <a:t>Patrón outbox con acuse de recibo y supresión: como máximo 6 avisos por turno de 12 h.</a:t>
+            </a:r>
+          </a:p>
+        </p:txBody>
+      </p:sp>
+      <p:sp>
+        <p:nvSpPr>
+          <p:cNvPr id="176" name="Rounded Rectangle 175"/>
+          <p:cNvSpPr/>
           <p:nvPr/>
-        </p:nvCxnSpPr>
+        </p:nvSpPr>
         <p:spPr>
           <a:xfrm>
-            <a:off x="3726180" y="5166360"/>
-            <a:ext cx="0" cy="320040"/>
+            <a:off x="10012680" y="2395728"/>
+            <a:ext cx="1783080" cy="3803904"/>
           </a:xfrm>
-          <a:prstGeom prst="line">
-            <a:avLst/>
+          <a:prstGeom prst="roundRect">
+            <a:avLst>
+              <a:gd name="adj" fmla="val 8000"/>
+            </a:avLst>
           </a:prstGeom>
-          <a:ln w="19050">
+          <a:solidFill>
+            <a:srgbClr val="DDE5F0"/>
+          </a:solidFill>
+          <a:ln w="12700">
             <a:solidFill>
               <a:srgbClr val="1F3864"/>
             </a:solidFill>
-            <a:tailEnd type="triangle" w="med" len="med"/>
           </a:ln>
+          <a:effectLst/>
         </p:spPr>
         <p:style>
-          <a:lnRef idx="2">
+          <a:lnRef idx="1">
             <a:schemeClr val="accent1"/>
           </a:lnRef>
-          <a:fillRef idx="0">
+          <a:fillRef idx="3">
             <a:schemeClr val="accent1"/>
           </a:fillRef>
-          <a:effectRef idx="1">
+          <a:effectRef idx="2">
             <a:schemeClr val="accent1"/>
           </a:effectRef>
           <a:fontRef idx="minor">
-            <a:schemeClr val="tx1"/>
+            <a:schemeClr val="lt1"/>
           </a:fontRef>
         </p:style>
-      </p:cxnSp>
-      <p:cxnSp>
-        <p:nvCxnSpPr>
-          <p:cNvPr id="180" name="Connector 179"/>
-          <p:cNvCxnSpPr/>
+        <p:txBody>
+          <a:bodyPr rtlCol="0" anchor="t" wrap="square" tIns="54864" bIns="54864"/>
+          <a:lstStyle/>
+          <a:p>
+            <a:pPr algn="l">
+              <a:spcBef>
+                <a:spcPts val="0"/>
+              </a:spcBef>
+              <a:spcAft>
+                <a:spcPts val="300"/>
+              </a:spcAft>
+            </a:pPr>
+            <a:r>
+              <a:rPr sz="1100" b="1" i="0">
+                <a:solidFill>
+                  <a:srgbClr val="1F3864"/>
+                </a:solidFill>
+                <a:latin typeface="Calibri"/>
+              </a:rPr>
+              <a:t>CÓMO SE CONSTRUYE</a:t>
+            </a:r>
+          </a:p>
+          <a:p>
+            <a:pPr>
+              <a:spcBef>
+                <a:spcPts val="0"/>
+              </a:spcBef>
+              <a:spcAft>
+                <a:spcPts val="300"/>
+              </a:spcAft>
+            </a:pPr>
+            <a:r>
+              <a:rPr sz="950" b="1">
+                <a:solidFill>
+                  <a:srgbClr val="1F3864"/>
+                </a:solidFill>
+                <a:latin typeface="Calibri"/>
+              </a:rPr>
+              <a:t>uv</a:t>
+            </a:r>
+            <a:r>
+              <a:rPr sz="950" b="0">
+                <a:solidFill>
+                  <a:srgbClr val="1C1C1C"/>
+                </a:solidFill>
+                <a:latin typeface="Calibri"/>
+              </a:rPr>
+              <a:t> · monorepo Python con un solo lockfile; instalación con o sin GPU</a:t>
+            </a:r>
+          </a:p>
+          <a:p>
+            <a:pPr>
+              <a:spcBef>
+                <a:spcPts val="0"/>
+              </a:spcBef>
+              <a:spcAft>
+                <a:spcPts val="300"/>
+              </a:spcAft>
+            </a:pPr>
+            <a:r>
+              <a:rPr sz="950" b="1">
+                <a:solidFill>
+                  <a:srgbClr val="1F3864"/>
+                </a:solidFill>
+                <a:latin typeface="Calibri"/>
+              </a:rPr>
+              <a:t>pytest · mypy · ruff</a:t>
+            </a:r>
+            <a:r>
+              <a:rPr sz="950" b="0">
+                <a:solidFill>
+                  <a:srgbClr val="1C1C1C"/>
+                </a:solidFill>
+                <a:latin typeface="Calibri"/>
+              </a:rPr>
+              <a:t> · pruebas, tipado estricto y estilo en cada empuje</a:t>
+            </a:r>
+          </a:p>
+          <a:p>
+            <a:pPr>
+              <a:spcBef>
+                <a:spcPts val="0"/>
+              </a:spcBef>
+              <a:spcAft>
+                <a:spcPts val="300"/>
+              </a:spcAft>
+            </a:pPr>
+            <a:r>
+              <a:rPr sz="950" b="1">
+                <a:solidFill>
+                  <a:srgbClr val="1F3864"/>
+                </a:solidFill>
+                <a:latin typeface="Calibri"/>
+              </a:rPr>
+              <a:t>GitHub Actions</a:t>
+            </a:r>
+            <a:r>
+              <a:rPr sz="950" b="0">
+                <a:solidFill>
+                  <a:srgbClr val="1C1C1C"/>
+                </a:solidFill>
+                <a:latin typeface="Calibri"/>
+              </a:rPr>
+              <a:t> · CI en dos versiones de Python; falla si entra una licencia AGPL</a:t>
+            </a:r>
+          </a:p>
+          <a:p>
+            <a:pPr>
+              <a:spcBef>
+                <a:spcPts val="0"/>
+              </a:spcBef>
+              <a:spcAft>
+                <a:spcPts val="300"/>
+              </a:spcAft>
+            </a:pPr>
+            <a:r>
+              <a:rPr sz="950" b="1">
+                <a:solidFill>
+                  <a:srgbClr val="1F3864"/>
+                </a:solidFill>
+                <a:latin typeface="Calibri"/>
+              </a:rPr>
+              <a:t>Docker Compose</a:t>
+            </a:r>
+            <a:r>
+              <a:rPr sz="950" b="0">
+                <a:solidFill>
+                  <a:srgbClr val="1C1C1C"/>
+                </a:solidFill>
+                <a:latin typeface="Calibri"/>
+              </a:rPr>
+              <a:t> · PostgreSQL, Redis y MediaMTX en un comando</a:t>
+            </a:r>
+          </a:p>
+          <a:p>
+            <a:pPr>
+              <a:spcBef>
+                <a:spcPts val="0"/>
+              </a:spcBef>
+              <a:spcAft>
+                <a:spcPts val="300"/>
+              </a:spcAft>
+            </a:pPr>
+            <a:r>
+              <a:rPr sz="950" b="1">
+                <a:solidFill>
+                  <a:srgbClr val="1F3864"/>
+                </a:solidFill>
+                <a:latin typeface="Calibri"/>
+              </a:rPr>
+              <a:t>Prism</a:t>
+            </a:r>
+            <a:r>
+              <a:rPr sz="950" b="0">
+                <a:solidFill>
+                  <a:srgbClr val="1C1C1C"/>
+                </a:solidFill>
+                <a:latin typeface="Calibri"/>
+              </a:rPr>
+              <a:t> · servidor simulado del contrato: el frontend no espera al backend</a:t>
+            </a:r>
+          </a:p>
+          <a:p>
+            <a:pPr>
+              <a:spcBef>
+                <a:spcPts val="0"/>
+              </a:spcBef>
+              <a:spcAft>
+                <a:spcPts val="300"/>
+              </a:spcAft>
+            </a:pPr>
+            <a:r>
+              <a:rPr sz="950" b="1">
+                <a:solidFill>
+                  <a:srgbClr val="1F3864"/>
+                </a:solidFill>
+                <a:latin typeface="Calibri"/>
+              </a:rPr>
+              <a:t>CVAT</a:t>
+            </a:r>
+            <a:r>
+              <a:rPr sz="950" b="0">
+                <a:solidFill>
+                  <a:srgbClr val="1C1C1C"/>
+                </a:solidFill>
+                <a:latin typeface="Calibri"/>
+              </a:rPr>
+              <a:t> · etiquetado autoalojado: ninguna imagen sale de la máquina</a:t>
+            </a:r>
+          </a:p>
+        </p:txBody>
+      </p:sp>
+      <p:sp>
+        <p:nvSpPr>
+          <p:cNvPr id="177" name="TextBox 176"/>
+          <p:cNvSpPr txBox="1"/>
           <p:nvPr/>
-        </p:nvCxnSpPr>
+        </p:nvSpPr>
         <p:spPr>
           <a:xfrm>
-            <a:off x="6057900" y="5166360"/>
-            <a:ext cx="0" cy="320040"/>
+            <a:off x="365760" y="6291072"/>
+            <a:ext cx="11430000" cy="365760"/>
           </a:xfrm>
-          <a:prstGeom prst="line">
+          <a:prstGeom prst="rect">
             <a:avLst/>
           </a:prstGeom>
-          <a:ln w="19050">
-            <a:solidFill>
-              <a:srgbClr val="1F3864"/>
-            </a:solidFill>
-            <a:tailEnd type="triangle" w="med" len="med"/>
-          </a:ln>
+          <a:noFill/>
         </p:spPr>
-        <p:style>
-          <a:lnRef idx="2">
-            <a:schemeClr val="accent1"/>
-          </a:lnRef>
-          <a:fillRef idx="0">
-            <a:schemeClr val="accent1"/>
-          </a:fillRef>
-          <a:effectRef idx="1">
-            <a:schemeClr val="accent1"/>
-          </a:effectRef>
-          <a:fontRef idx="minor">
-            <a:schemeClr val="tx1"/>
-          </a:fontRef>
-        </p:style>
-      </p:cxnSp>
-      <p:cxnSp>
-        <p:nvCxnSpPr>
-          <p:cNvPr id="181" name="Connector 180"/>
-          <p:cNvCxnSpPr/>
-          <p:nvPr/>
-        </p:nvCxnSpPr>
-        <p:spPr>
-          <a:xfrm>
-            <a:off x="8389620" y="5166360"/>
-            <a:ext cx="0" cy="320040"/>
-          </a:xfrm>
-          <a:prstGeom prst="line">
-            <a:avLst/>
-          </a:prstGeom>
-          <a:ln w="19050">
-            <a:solidFill>
-              <a:srgbClr val="1F3864"/>
-            </a:solidFill>
-            <a:tailEnd type="triangle" w="med" len="med"/>
-          </a:ln>
-        </p:spPr>
-        <p:style>
-          <a:lnRef idx="2">
-            <a:schemeClr val="accent1"/>
-          </a:lnRef>
-          <a:fillRef idx="0">
-            <a:schemeClr val="accent1"/>
-          </a:fillRef>
-          <a:effectRef idx="1">
-            <a:schemeClr val="accent1"/>
-          </a:effectRef>
-          <a:fontRef idx="minor">
-            <a:schemeClr val="tx1"/>
-          </a:fontRef>
-        </p:style>
-      </p:cxnSp>
-      <p:cxnSp>
-        <p:nvCxnSpPr>
-          <p:cNvPr id="182" name="Connector 181"/>
-          <p:cNvCxnSpPr/>
-          <p:nvPr/>
-        </p:nvCxnSpPr>
-        <p:spPr>
-          <a:xfrm>
-            <a:off x="9418320" y="5943600"/>
-            <a:ext cx="274320" cy="0"/>
-          </a:xfrm>
-          <a:prstGeom prst="line">
-            <a:avLst/>
-          </a:prstGeom>
-          <a:ln w="19050">
-            <a:solidFill>
-              <a:srgbClr val="1F3864"/>
-            </a:solidFill>
-            <a:tailEnd type="triangle" w="med" len="med"/>
-          </a:ln>
-        </p:spPr>
-        <p:style>
-          <a:lnRef idx="2">
-            <a:schemeClr val="accent1"/>
-          </a:lnRef>
-          <a:fillRef idx="0">
-            <a:schemeClr val="accent1"/>
-          </a:fillRef>
-          <a:effectRef idx="1">
-            <a:schemeClr val="accent1"/>
-          </a:effectRef>
-          <a:fontRef idx="minor">
-            <a:schemeClr val="tx1"/>
-          </a:fontRef>
-        </p:style>
-      </p:cxnSp>
+        <p:txBody>
+          <a:bodyPr wrap="square" anchor="t" lIns="73152" rIns="73152" tIns="36576" bIns="36576">
+            <a:spAutoFit/>
+          </a:bodyPr>
+          <a:lstStyle/>
+          <a:p>
+            <a:pPr algn="ctr">
+              <a:spcBef>
+                <a:spcPts val="0"/>
+              </a:spcBef>
+              <a:spcAft>
+                <a:spcPts val="0"/>
+              </a:spcAft>
+            </a:pPr>
+            <a:r>
+              <a:rPr sz="1100" b="1" i="0">
+                <a:solidFill>
+                  <a:srgbClr val="1F3864"/>
+                </a:solidFill>
+                <a:latin typeface="Calibri"/>
+              </a:rPr>
+              <a:t>La Etapa 1 (detector + reglas) decide; la Etapa 2 (Qwen3-VL, extensión) solo describe.   ·   El evento es la unidad: un turno son 12 hallazgos, no 200.000 cuadros.</a:t>
+            </a:r>
+          </a:p>
+        </p:txBody>
+      </p:sp>
     </p:spTree>
   </p:cSld>
   <p:clrMapOvr>

--- a/Fase 1/Evidencias Grupales/Presentación Proyecto.pptx
+++ b/Fase 1/Evidencias Grupales/Presentación Proyecto.pptx
@@ -1419,7 +1419,7 @@
           <a:lstStyle/>
           <a:p>
             <a:r>
-              <a:t>3:00 · Edgar. Cuatro filas de arriba abajo y, en cada caja, la tecnología y una frase de lo que hace. (1) Entrada: el trabajador toma los .mp4 que la obra ya graba; OpenCV los muestrea a 5 cuadros por segundo y aplica las máscaras de privacidad; el reloj nace en la captura. (2) Visión: RF-DETR detecta persona, casco y chaleco, Apache-2.0, por eso no YOLO; ByteTrack sigue con identificadores efímeros; el modelo exportado a ONNX corre en CPU en cualquier portátil. (3) Decisión y datos: gepp-core convierte trayectorias en hallazgos con umbrales en segundos; PostgreSQL guarda detecciones crudas y reglas versionadas, y por eso se puede recalcular sin GPU; Redis desacopla. (4) Servicios e interfaz: FastAPI cumple el contrato congelado y no importa la visión; React construye bandeja, visor, reglas y tablero contra Prism hasta la S9; el canal de alerta cierra el ciclo con acuse y seis avisos por turno como máximo. La columna derecha es cómo se trabaja: uv, pruebas y tipado, CI que rechaza licencias AGPL, Docker Compose, Prism y CVAT. Cerrar con la línea de abajo: la Etapa 1 decide, la Etapa 2 describe; el evento, no el cuadro, es la unidad.</a:t>
+              <a:t>3:00 · Edgar. Leer el flujo de izquierda a derecha, una columna por vez. (1) Entra el video: la obra deja sus grabaciones en una carpeta y el sistema las toma solo; OpenCV lee el video, se queda con 5 cuadros por segundo, tapa las zonas que no se deben analizar y difumina rostros antes de guardar; cada cuadro queda fechado con la hora real de la grabación. (2) Se detecta y se sigue: RF-DETR es el modelo que marca personas, cascos y chalecos, entrenado con nuestras imágenes; es de licencia libre y por eso no usamos YOLO, cuya licencia AGPL alcanza a los modelos entrenados y obligaría a liberar todo el sistema. ByteTrack sigue a cada persona de un cuadro al siguiente con un número temporal: nunca sabemos quién es. ONNX Runtime hace que el modelo, entrenado una vez con GPU, corra en cualquier computador. (3) Se decide y se guarda: el motor de reglas, código propio, convierte recorridos en hallazgos según las reglas de la obra, medidas en segundos; PostgreSQL guarda todo, incluidas las detecciones cuadro a cuadro, y por eso se puede cambiar una regla y recalcular sin reprocesar video; Redis es la fila de espera de los videos. (4) Se usa: FastAPI entrega los datos a la web bajo un contrato acordado antes de programar; React es la web que construyen Miguel y Lian; la alerta llega por Telegram o correo con acuse de recibo y un máximo de seis avisos por turno. Abajo, cómo se construye. Cerrar con la línea final: el detector y las reglas deciden, la descripción con IA solo describe, y la unidad es el evento. Si preguntan por las cámaras en vivo: RTSP es el protocolo de las cámaras IP; la versión 2 se conecta a cámaras en vez de leer archivos y se prueba desde la semana 6 simulando una cámara con un video grabado (MediaMTX).</a:t>
             </a:r>
           </a:p>
         </p:txBody>
@@ -22384,7 +22384,7 @@
                 <a:cs typeface="Calibri"/>
                 <a:sym typeface="Calibri"/>
               </a:rPr>
-              <a:t>Del video que la obra ya graba al hallazgo con evidencia. Cada pieza: la tecnología y lo que hace.</a:t>
+              <a:t>Cómo viaja el video hasta convertirse en un hallazgo con evidencia. En cada caja: una tecnología y lo que hace.</a:t>
             </a:r>
             <a:endParaRPr/>
           </a:p>
@@ -22424,8 +22424,8 @@
         </p:nvSpPr>
         <p:spPr>
           <a:xfrm>
-            <a:off x="365760" y="2395728"/>
-            <a:ext cx="1554480" cy="841248"/>
+            <a:off x="365760" y="2331720"/>
+            <a:ext cx="2624328" cy="512064"/>
           </a:xfrm>
           <a:prstGeom prst="roundRect">
             <a:avLst>
@@ -22469,13 +22469,13 @@
               </a:spcAft>
             </a:pPr>
             <a:r>
-              <a:rPr sz="1100" b="1" i="0">
+              <a:rPr sz="1200" b="1" i="0">
                 <a:solidFill>
                   <a:srgbClr val="FFFFFF"/>
                 </a:solidFill>
                 <a:latin typeface="Calibri"/>
               </a:rPr>
-              <a:t>1 · ENTRADA</a:t>
+              <a:t>1 · ENTRA EL VIDEO</a:t>
             </a:r>
           </a:p>
           <a:p>
@@ -22488,13 +22488,13 @@
               </a:spcAft>
             </a:pPr>
             <a:r>
-              <a:rPr sz="950" b="0" i="0">
+              <a:rPr sz="900" b="0" i="0">
                 <a:solidFill>
                   <a:srgbClr val="FFFFFF"/>
                 </a:solidFill>
                 <a:latin typeface="Calibri"/>
               </a:rPr>
-              <a:t>gepp-worker</a:t>
+              <a:t>código propio: gepp-worker</a:t>
             </a:r>
           </a:p>
         </p:txBody>
@@ -22507,8 +22507,8 @@
         </p:nvSpPr>
         <p:spPr>
           <a:xfrm>
-            <a:off x="2057400" y="2395728"/>
-            <a:ext cx="3831336" cy="841248"/>
+            <a:off x="365760" y="2916936"/>
+            <a:ext cx="2624328" cy="1339595"/>
           </a:xfrm>
           <a:prstGeom prst="roundRect">
             <a:avLst>
@@ -22552,13 +22552,13 @@
               </a:spcAft>
             </a:pPr>
             <a:r>
-              <a:rPr sz="1200" b="1" i="0">
+              <a:rPr sz="1150" b="1" i="0">
                 <a:solidFill>
                   <a:srgbClr val="1F3864"/>
                 </a:solidFill>
                 <a:latin typeface="Calibri"/>
               </a:rPr>
-              <a:t>Carpeta vigilada (v1) · RTSP (v2)</a:t>
+              <a:t>Carpeta vigilada</a:t>
             </a:r>
           </a:p>
           <a:p>
@@ -22571,13 +22571,13 @@
               </a:spcAft>
             </a:pPr>
             <a:r>
-              <a:rPr sz="1000" b="0" i="0">
+              <a:rPr sz="950" b="0" i="0">
                 <a:solidFill>
                   <a:srgbClr val="1C1C1C"/>
                 </a:solidFill>
                 <a:latin typeface="Calibri"/>
               </a:rPr>
-              <a:t>Toma los .mp4 que la obra ya graba; en v2, cámaras RTSP (MediaMTX las simula desde la S6). El reloj nace en la captura: capture_ts.</a:t>
+              <a:t>La obra deja sus grabaciones en una carpeta y el sistema las toma solo. Cada cuadro queda fechado con la hora real en que se grabó. Más adelante: cámaras en vivo, con el mismo diseño.</a:t>
             </a:r>
           </a:p>
         </p:txBody>
@@ -22590,8 +22590,8 @@
         </p:nvSpPr>
         <p:spPr>
           <a:xfrm>
-            <a:off x="5998464" y="2395728"/>
-            <a:ext cx="3831336" cy="841248"/>
+            <a:off x="365760" y="4329683"/>
+            <a:ext cx="2624328" cy="1339595"/>
           </a:xfrm>
           <a:prstGeom prst="roundRect">
             <a:avLst>
@@ -22635,13 +22635,13 @@
               </a:spcAft>
             </a:pPr>
             <a:r>
-              <a:rPr sz="1200" b="1" i="0">
+              <a:rPr sz="1150" b="1" i="0">
                 <a:solidFill>
                   <a:srgbClr val="1F3864"/>
                 </a:solidFill>
                 <a:latin typeface="Calibri"/>
               </a:rPr>
-              <a:t>OpenCV + FFmpeg</a:t>
+              <a:t>OpenCV</a:t>
             </a:r>
           </a:p>
           <a:p>
@@ -22654,13 +22654,13 @@
               </a:spcAft>
             </a:pPr>
             <a:r>
-              <a:rPr sz="1000" b="0" i="0">
+              <a:rPr sz="950" b="0" i="0">
                 <a:solidFill>
                   <a:srgbClr val="1C1C1C"/>
                 </a:solidFill>
                 <a:latin typeface="Calibri"/>
               </a:rPr>
-              <a:t>Decodifica el video, lo muestrea a 5 fps y aplica las máscaras de privacidad antes de inferir. Difumina los rostros de la evidencia.</a:t>
+              <a:t>Abre el video y se queda con 5 cuadros por segundo. Tapa las zonas que no se deben analizar y difumina los rostros antes de guardar cualquier imagen.</a:t>
             </a:r>
           </a:p>
         </p:txBody>
@@ -22673,8 +22673,8 @@
         </p:nvSpPr>
         <p:spPr>
           <a:xfrm>
-            <a:off x="365760" y="3383280"/>
-            <a:ext cx="1554480" cy="841248"/>
+            <a:off x="3300984" y="2331720"/>
+            <a:ext cx="2624328" cy="512064"/>
           </a:xfrm>
           <a:prstGeom prst="roundRect">
             <a:avLst>
@@ -22718,13 +22718,13 @@
               </a:spcAft>
             </a:pPr>
             <a:r>
-              <a:rPr sz="1100" b="1" i="0">
+              <a:rPr sz="1200" b="1" i="0">
                 <a:solidFill>
                   <a:srgbClr val="FFFFFF"/>
                 </a:solidFill>
                 <a:latin typeface="Calibri"/>
               </a:rPr>
-              <a:t>2 · VISIÓN</a:t>
+              <a:t>2 · SE DETECTA Y SE SIGUE</a:t>
             </a:r>
           </a:p>
           <a:p>
@@ -22737,53 +22737,61 @@
               </a:spcAft>
             </a:pPr>
             <a:r>
-              <a:rPr sz="950" b="0" i="0">
+              <a:rPr sz="900" b="0" i="0">
                 <a:solidFill>
                   <a:srgbClr val="FFFFFF"/>
                 </a:solidFill>
                 <a:latin typeface="Calibri"/>
               </a:rPr>
-              <a:t>gepp-vision</a:t>
+              <a:t>código propio: gepp-vision</a:t>
             </a:r>
           </a:p>
         </p:txBody>
       </p:sp>
-      <p:cxnSp>
-        <p:nvCxnSpPr>
-          <p:cNvPr id="162" name="Connector 161"/>
-          <p:cNvCxnSpPr/>
+      <p:sp>
+        <p:nvSpPr>
+          <p:cNvPr id="162" name="Right Arrow 161"/>
+          <p:cNvSpPr/>
           <p:nvPr/>
-        </p:nvCxnSpPr>
+        </p:nvSpPr>
         <p:spPr>
           <a:xfrm>
-            <a:off x="1143000" y="3236976"/>
-            <a:ext cx="0" cy="146304"/>
+            <a:off x="3017520" y="2432304"/>
+            <a:ext cx="256032" cy="310896"/>
           </a:xfrm>
-          <a:prstGeom prst="line">
+          <a:prstGeom prst="rightArrow">
             <a:avLst/>
           </a:prstGeom>
-          <a:ln w="19050">
-            <a:solidFill>
-              <a:srgbClr val="1F3864"/>
-            </a:solidFill>
-            <a:tailEnd type="triangle" w="med" len="med"/>
+          <a:solidFill>
+            <a:srgbClr val="1F3864"/>
+          </a:solidFill>
+          <a:ln>
+            <a:noFill/>
           </a:ln>
+          <a:effectLst/>
         </p:spPr>
         <p:style>
-          <a:lnRef idx="2">
+          <a:lnRef idx="1">
             <a:schemeClr val="accent1"/>
           </a:lnRef>
-          <a:fillRef idx="0">
+          <a:fillRef idx="3">
             <a:schemeClr val="accent1"/>
           </a:fillRef>
-          <a:effectRef idx="1">
+          <a:effectRef idx="2">
             <a:schemeClr val="accent1"/>
           </a:effectRef>
           <a:fontRef idx="minor">
-            <a:schemeClr val="tx1"/>
+            <a:schemeClr val="lt1"/>
           </a:fontRef>
         </p:style>
-      </p:cxnSp>
+        <p:txBody>
+          <a:bodyPr rtlCol="0" anchor="ctr"/>
+          <a:lstStyle/>
+          <a:p>
+            <a:pPr algn="ctr"/>
+          </a:p>
+        </p:txBody>
+      </p:sp>
       <p:sp>
         <p:nvSpPr>
           <p:cNvPr id="163" name="Rounded Rectangle 162"/>
@@ -22792,8 +22800,8 @@
         </p:nvSpPr>
         <p:spPr>
           <a:xfrm>
-            <a:off x="2057400" y="3383280"/>
-            <a:ext cx="2517648" cy="841248"/>
+            <a:off x="3300984" y="2916936"/>
+            <a:ext cx="2624328" cy="868679"/>
           </a:xfrm>
           <a:prstGeom prst="roundRect">
             <a:avLst>
@@ -22837,13 +22845,13 @@
               </a:spcAft>
             </a:pPr>
             <a:r>
-              <a:rPr sz="1200" b="1" i="0">
+              <a:rPr sz="1150" b="1" i="0">
                 <a:solidFill>
                   <a:srgbClr val="1F3864"/>
                 </a:solidFill>
                 <a:latin typeface="Calibri"/>
               </a:rPr>
-              <a:t>RF-DETR (Apache-2.0)</a:t>
+              <a:t>RF-DETR · el detector</a:t>
             </a:r>
           </a:p>
           <a:p>
@@ -22856,13 +22864,13 @@
               </a:spcAft>
             </a:pPr>
             <a:r>
-              <a:rPr sz="1000" b="0" i="0">
+              <a:rPr sz="950" b="0" i="0">
                 <a:solidFill>
                   <a:srgbClr val="1C1C1C"/>
                 </a:solidFill>
                 <a:latin typeface="Calibri"/>
               </a:rPr>
-              <a:t>Detector: encuentra personas, cascos y chalecos en cada cuadro. Se afina con imágenes propias.</a:t>
+              <a:t>Marca en cada cuadro dónde hay personas, cascos y chalecos. Se entrena con nuestras imágenes. Licencia libre, por eso no YOLO.</a:t>
             </a:r>
           </a:p>
         </p:txBody>
@@ -22875,8 +22883,8 @@
         </p:nvSpPr>
         <p:spPr>
           <a:xfrm>
-            <a:off x="4684776" y="3383280"/>
-            <a:ext cx="2517648" cy="841248"/>
+            <a:off x="3300984" y="3858768"/>
+            <a:ext cx="2624328" cy="868679"/>
           </a:xfrm>
           <a:prstGeom prst="roundRect">
             <a:avLst>
@@ -22920,13 +22928,13 @@
               </a:spcAft>
             </a:pPr>
             <a:r>
-              <a:rPr sz="1200" b="1" i="0">
+              <a:rPr sz="1150" b="1" i="0">
                 <a:solidFill>
                   <a:srgbClr val="1F3864"/>
                 </a:solidFill>
                 <a:latin typeface="Calibri"/>
               </a:rPr>
-              <a:t>ByteTrack (roboflow/trackers)</a:t>
+              <a:t>ByteTrack · el seguidor</a:t>
             </a:r>
           </a:p>
           <a:p>
@@ -22939,13 +22947,13 @@
               </a:spcAft>
             </a:pPr>
             <a:r>
-              <a:rPr sz="1000" b="0" i="0">
+              <a:rPr sz="950" b="0" i="0">
                 <a:solidFill>
                   <a:srgbClr val="1C1C1C"/>
                 </a:solidFill>
                 <a:latin typeface="Calibri"/>
               </a:rPr>
-              <a:t>Seguidor: une detecciones en trayectorias con track_id efímero, sin reidentificar personas.</a:t>
+              <a:t>Sigue a cada persona de un cuadro al siguiente y arma su recorrido. Le da un número temporal, nunca una identidad.</a:t>
             </a:r>
           </a:p>
         </p:txBody>
@@ -22958,8 +22966,8 @@
         </p:nvSpPr>
         <p:spPr>
           <a:xfrm>
-            <a:off x="7312152" y="3383280"/>
-            <a:ext cx="2517648" cy="841248"/>
+            <a:off x="3300984" y="4800600"/>
+            <a:ext cx="2624328" cy="868679"/>
           </a:xfrm>
           <a:prstGeom prst="roundRect">
             <a:avLst>
@@ -23003,13 +23011,13 @@
               </a:spcAft>
             </a:pPr>
             <a:r>
-              <a:rPr sz="1200" b="1" i="0">
+              <a:rPr sz="1150" b="1" i="0">
                 <a:solidFill>
                   <a:srgbClr val="1F3864"/>
                 </a:solidFill>
                 <a:latin typeface="Calibri"/>
               </a:rPr>
-              <a:t>PyTorch → ONNX Runtime</a:t>
+              <a:t>ONNX Runtime · la ejecución</a:t>
             </a:r>
           </a:p>
           <a:p>
@@ -23022,13 +23030,13 @@
               </a:spcAft>
             </a:pPr>
             <a:r>
-              <a:rPr sz="1000" b="0" i="0">
+              <a:rPr sz="950" b="0" i="0">
                 <a:solidFill>
                   <a:srgbClr val="1C1C1C"/>
                 </a:solidFill>
                 <a:latin typeface="Calibri"/>
               </a:rPr>
-              <a:t>Entrena en GPU (nube con datos públicos, local con los propios) y ejecuta en CPU en cualquier portátil.</a:t>
+              <a:t>El modelo se entrena una vez con tarjeta gráfica (GPU) y después corre en cualquier computador normal, sin GPU.</a:t>
             </a:r>
           </a:p>
         </p:txBody>
@@ -23041,8 +23049,8 @@
         </p:nvSpPr>
         <p:spPr>
           <a:xfrm>
-            <a:off x="365760" y="4370832"/>
-            <a:ext cx="1554480" cy="841248"/>
+            <a:off x="6236208" y="2331720"/>
+            <a:ext cx="2624328" cy="512064"/>
           </a:xfrm>
           <a:prstGeom prst="roundRect">
             <a:avLst>
@@ -23086,13 +23094,13 @@
               </a:spcAft>
             </a:pPr>
             <a:r>
-              <a:rPr sz="1100" b="1" i="0">
+              <a:rPr sz="1200" b="1" i="0">
                 <a:solidFill>
                   <a:srgbClr val="FFFFFF"/>
                 </a:solidFill>
                 <a:latin typeface="Calibri"/>
               </a:rPr>
-              <a:t>3 · DECISIÓN Y DATOS</a:t>
+              <a:t>3 · SE DECIDE Y SE GUARDA</a:t>
             </a:r>
           </a:p>
           <a:p>
@@ -23105,53 +23113,61 @@
               </a:spcAft>
             </a:pPr>
             <a:r>
-              <a:rPr sz="950" b="0" i="0">
+              <a:rPr sz="900" b="0" i="0">
                 <a:solidFill>
                   <a:srgbClr val="FFFFFF"/>
                 </a:solidFill>
                 <a:latin typeface="Calibri"/>
               </a:rPr>
-              <a:t>gepp-core · PostgreSQL</a:t>
+              <a:t>código propio: gepp-core</a:t>
             </a:r>
           </a:p>
         </p:txBody>
       </p:sp>
-      <p:cxnSp>
-        <p:nvCxnSpPr>
-          <p:cNvPr id="167" name="Connector 166"/>
-          <p:cNvCxnSpPr/>
+      <p:sp>
+        <p:nvSpPr>
+          <p:cNvPr id="167" name="Right Arrow 166"/>
+          <p:cNvSpPr/>
           <p:nvPr/>
-        </p:nvCxnSpPr>
+        </p:nvSpPr>
         <p:spPr>
           <a:xfrm>
-            <a:off x="1143000" y="4224528"/>
-            <a:ext cx="0" cy="146304"/>
+            <a:off x="5952744" y="2432304"/>
+            <a:ext cx="256032" cy="310896"/>
           </a:xfrm>
-          <a:prstGeom prst="line">
+          <a:prstGeom prst="rightArrow">
             <a:avLst/>
           </a:prstGeom>
-          <a:ln w="19050">
-            <a:solidFill>
-              <a:srgbClr val="1F3864"/>
-            </a:solidFill>
-            <a:tailEnd type="triangle" w="med" len="med"/>
+          <a:solidFill>
+            <a:srgbClr val="1F3864"/>
+          </a:solidFill>
+          <a:ln>
+            <a:noFill/>
           </a:ln>
+          <a:effectLst/>
         </p:spPr>
         <p:style>
-          <a:lnRef idx="2">
+          <a:lnRef idx="1">
             <a:schemeClr val="accent1"/>
           </a:lnRef>
-          <a:fillRef idx="0">
+          <a:fillRef idx="3">
             <a:schemeClr val="accent1"/>
           </a:fillRef>
-          <a:effectRef idx="1">
+          <a:effectRef idx="2">
             <a:schemeClr val="accent1"/>
           </a:effectRef>
           <a:fontRef idx="minor">
-            <a:schemeClr val="tx1"/>
+            <a:schemeClr val="lt1"/>
           </a:fontRef>
         </p:style>
-      </p:cxnSp>
+        <p:txBody>
+          <a:bodyPr rtlCol="0" anchor="ctr"/>
+          <a:lstStyle/>
+          <a:p>
+            <a:pPr algn="ctr"/>
+          </a:p>
+        </p:txBody>
+      </p:sp>
       <p:sp>
         <p:nvSpPr>
           <p:cNvPr id="168" name="Rounded Rectangle 167"/>
@@ -23160,8 +23176,8 @@
         </p:nvSpPr>
         <p:spPr>
           <a:xfrm>
-            <a:off x="2057400" y="4370832"/>
-            <a:ext cx="2517648" cy="841248"/>
+            <a:off x="6236208" y="2916936"/>
+            <a:ext cx="2624328" cy="868679"/>
           </a:xfrm>
           <a:prstGeom prst="roundRect">
             <a:avLst>
@@ -23205,13 +23221,13 @@
               </a:spcAft>
             </a:pPr>
             <a:r>
-              <a:rPr sz="1200" b="1" i="0">
+              <a:rPr sz="1150" b="1" i="0">
                 <a:solidFill>
                   <a:srgbClr val="1F3864"/>
                 </a:solidFill>
                 <a:latin typeface="Calibri"/>
               </a:rPr>
-              <a:t>gepp-core (Python puro)</a:t>
+              <a:t>Motor de reglas</a:t>
             </a:r>
           </a:p>
           <a:p>
@@ -23224,13 +23240,13 @@
               </a:spcAft>
             </a:pPr>
             <a:r>
-              <a:rPr sz="1000" b="0" i="0">
+              <a:rPr sz="950" b="0" i="0">
                 <a:solidFill>
                   <a:srgbClr val="1C1C1C"/>
                 </a:solidFill>
                 <a:latin typeface="Calibri"/>
               </a:rPr>
-              <a:t>Motor de reglas y agregador: de trayectorias a hallazgos con inicio, término, zona y severidad, en segundos.</a:t>
+              <a:t>Aplica las reglas de la obra: X segundos sin casco donde se exige crean un hallazgo con inicio, término, zona y severidad.</a:t>
             </a:r>
           </a:p>
         </p:txBody>
@@ -23243,8 +23259,8 @@
         </p:nvSpPr>
         <p:spPr>
           <a:xfrm>
-            <a:off x="4684776" y="4370832"/>
-            <a:ext cx="2517648" cy="841248"/>
+            <a:off x="6236208" y="3858768"/>
+            <a:ext cx="2624328" cy="868679"/>
           </a:xfrm>
           <a:prstGeom prst="roundRect">
             <a:avLst>
@@ -23288,13 +23304,13 @@
               </a:spcAft>
             </a:pPr>
             <a:r>
-              <a:rPr sz="1200" b="1" i="0">
+              <a:rPr sz="1150" b="1" i="0">
                 <a:solidFill>
                   <a:srgbClr val="1F3864"/>
                 </a:solidFill>
                 <a:latin typeface="Calibri"/>
               </a:rPr>
-              <a:t>PostgreSQL 17 + Alembic</a:t>
+              <a:t>PostgreSQL · la base de datos</a:t>
             </a:r>
           </a:p>
           <a:p>
@@ -23307,13 +23323,13 @@
               </a:spcAft>
             </a:pPr>
             <a:r>
-              <a:rPr sz="1000" b="0" i="0">
+              <a:rPr sz="950" b="0" i="0">
                 <a:solidFill>
                   <a:srgbClr val="1C1C1C"/>
                 </a:solidFill>
                 <a:latin typeface="Calibri"/>
               </a:rPr>
-              <a:t>Guarda detecciones crudas, hallazgos, reglas versionadas y acuses. Permite recalcular reglas sin GPU.</a:t>
+              <a:t>Guarda hallazgos, detecciones cuadro a cuadro, reglas con historial y acuses. Así se recalculan reglas sin reprocesar video.</a:t>
             </a:r>
           </a:p>
         </p:txBody>
@@ -23326,8 +23342,8 @@
         </p:nvSpPr>
         <p:spPr>
           <a:xfrm>
-            <a:off x="7312152" y="4370832"/>
-            <a:ext cx="2517648" cy="841248"/>
+            <a:off x="6236208" y="4800600"/>
+            <a:ext cx="2624328" cy="868679"/>
           </a:xfrm>
           <a:prstGeom prst="roundRect">
             <a:avLst>
@@ -23371,13 +23387,13 @@
               </a:spcAft>
             </a:pPr>
             <a:r>
-              <a:rPr sz="1200" b="1" i="0">
+              <a:rPr sz="1150" b="1" i="0">
                 <a:solidFill>
                   <a:srgbClr val="1F3864"/>
                 </a:solidFill>
                 <a:latin typeface="Calibri"/>
               </a:rPr>
-              <a:t>Redis 7</a:t>
+              <a:t>Redis · la fila de espera</a:t>
             </a:r>
           </a:p>
           <a:p>
@@ -23390,13 +23406,13 @@
               </a:spcAft>
             </a:pPr>
             <a:r>
-              <a:rPr sz="1000" b="0" i="0">
+              <a:rPr sz="950" b="0" i="0">
                 <a:solidFill>
                   <a:srgbClr val="1C1C1C"/>
                 </a:solidFill>
                 <a:latin typeface="Calibri"/>
               </a:rPr>
-              <a:t>Cola de trabajos: desacopla la ingesta del procesamiento y del envío de avisos.</a:t>
+              <a:t>Fila de espera en memoria: los videos que llegan esperan su turno y se procesan uno a uno, sin bloquear ni perder nada.</a:t>
             </a:r>
           </a:p>
         </p:txBody>
@@ -23409,8 +23425,8 @@
         </p:nvSpPr>
         <p:spPr>
           <a:xfrm>
-            <a:off x="365760" y="5358384"/>
-            <a:ext cx="1554480" cy="841248"/>
+            <a:off x="9171432" y="2331720"/>
+            <a:ext cx="2624328" cy="512064"/>
           </a:xfrm>
           <a:prstGeom prst="roundRect">
             <a:avLst>
@@ -23454,13 +23470,13 @@
               </a:spcAft>
             </a:pPr>
             <a:r>
-              <a:rPr sz="1100" b="1" i="0">
+              <a:rPr sz="1200" b="1" i="0">
                 <a:solidFill>
                   <a:srgbClr val="FFFFFF"/>
                 </a:solidFill>
                 <a:latin typeface="Calibri"/>
               </a:rPr>
-              <a:t>4 · SERVICIOS E INTERFAZ</a:t>
+              <a:t>4 · SE USA</a:t>
             </a:r>
           </a:p>
           <a:p>
@@ -23473,53 +23489,61 @@
               </a:spcAft>
             </a:pPr>
             <a:r>
-              <a:rPr sz="950" b="0" i="0">
+              <a:rPr sz="900" b="0" i="0">
                 <a:solidFill>
                   <a:srgbClr val="FFFFFF"/>
                 </a:solidFill>
                 <a:latin typeface="Calibri"/>
               </a:rPr>
-              <a:t>gepp-api · apps/web</a:t>
+              <a:t>código propio: gepp-api · web</a:t>
             </a:r>
           </a:p>
         </p:txBody>
       </p:sp>
-      <p:cxnSp>
-        <p:nvCxnSpPr>
-          <p:cNvPr id="172" name="Connector 171"/>
-          <p:cNvCxnSpPr/>
+      <p:sp>
+        <p:nvSpPr>
+          <p:cNvPr id="172" name="Right Arrow 171"/>
+          <p:cNvSpPr/>
           <p:nvPr/>
-        </p:nvCxnSpPr>
+        </p:nvSpPr>
         <p:spPr>
           <a:xfrm>
-            <a:off x="1143000" y="5212080"/>
-            <a:ext cx="0" cy="146304"/>
+            <a:off x="8887967" y="2432304"/>
+            <a:ext cx="256032" cy="310896"/>
           </a:xfrm>
-          <a:prstGeom prst="line">
+          <a:prstGeom prst="rightArrow">
             <a:avLst/>
           </a:prstGeom>
-          <a:ln w="19050">
-            <a:solidFill>
-              <a:srgbClr val="1F3864"/>
-            </a:solidFill>
-            <a:tailEnd type="triangle" w="med" len="med"/>
+          <a:solidFill>
+            <a:srgbClr val="1F3864"/>
+          </a:solidFill>
+          <a:ln>
+            <a:noFill/>
           </a:ln>
+          <a:effectLst/>
         </p:spPr>
         <p:style>
-          <a:lnRef idx="2">
+          <a:lnRef idx="1">
             <a:schemeClr val="accent1"/>
           </a:lnRef>
-          <a:fillRef idx="0">
+          <a:fillRef idx="3">
             <a:schemeClr val="accent1"/>
           </a:fillRef>
-          <a:effectRef idx="1">
+          <a:effectRef idx="2">
             <a:schemeClr val="accent1"/>
           </a:effectRef>
           <a:fontRef idx="minor">
-            <a:schemeClr val="tx1"/>
+            <a:schemeClr val="lt1"/>
           </a:fontRef>
         </p:style>
-      </p:cxnSp>
+        <p:txBody>
+          <a:bodyPr rtlCol="0" anchor="ctr"/>
+          <a:lstStyle/>
+          <a:p>
+            <a:pPr algn="ctr"/>
+          </a:p>
+        </p:txBody>
+      </p:sp>
       <p:sp>
         <p:nvSpPr>
           <p:cNvPr id="173" name="Rounded Rectangle 172"/>
@@ -23528,8 +23552,8 @@
         </p:nvSpPr>
         <p:spPr>
           <a:xfrm>
-            <a:off x="2057400" y="5358384"/>
-            <a:ext cx="2517648" cy="841248"/>
+            <a:off x="9171432" y="2916936"/>
+            <a:ext cx="2624328" cy="868679"/>
           </a:xfrm>
           <a:prstGeom prst="roundRect">
             <a:avLst>
@@ -23573,13 +23597,13 @@
               </a:spcAft>
             </a:pPr>
             <a:r>
-              <a:rPr sz="1200" b="1" i="0">
+              <a:rPr sz="1150" b="1" i="0">
                 <a:solidFill>
                   <a:srgbClr val="1F3864"/>
                 </a:solidFill>
                 <a:latin typeface="Calibri"/>
               </a:rPr>
-              <a:t>FastAPI + SQLAlchemy</a:t>
+              <a:t>FastAPI · la API</a:t>
             </a:r>
           </a:p>
           <a:p>
@@ -23592,13 +23616,13 @@
               </a:spcAft>
             </a:pPr>
             <a:r>
-              <a:rPr sz="1000" b="0" i="0">
+              <a:rPr sz="950" b="0" i="0">
                 <a:solidFill>
                   <a:srgbClr val="1C1C1C"/>
                 </a:solidFill>
                 <a:latin typeface="Calibri"/>
               </a:rPr>
-              <a:t>API REST bajo el contrato OpenAPI congelado. No importa la visión: corre sin GPU.</a:t>
+              <a:t>Servicio que entrega los datos a la web bajo un contrato fijo (OpenAPI) acordado antes de programar. Corre sin GPU.</a:t>
             </a:r>
           </a:p>
         </p:txBody>
@@ -23611,8 +23635,8 @@
         </p:nvSpPr>
         <p:spPr>
           <a:xfrm>
-            <a:off x="4684776" y="5358384"/>
-            <a:ext cx="2517648" cy="841248"/>
+            <a:off x="9171432" y="3858768"/>
+            <a:ext cx="2624328" cy="868679"/>
           </a:xfrm>
           <a:prstGeom prst="roundRect">
             <a:avLst>
@@ -23656,13 +23680,13 @@
               </a:spcAft>
             </a:pPr>
             <a:r>
-              <a:rPr sz="1200" b="1" i="0">
+              <a:rPr sz="1150" b="1" i="0">
                 <a:solidFill>
                   <a:srgbClr val="1F3864"/>
                 </a:solidFill>
                 <a:latin typeface="Calibri"/>
               </a:rPr>
-              <a:t>React + Vite + TypeScript</a:t>
+              <a:t>React · la web</a:t>
             </a:r>
           </a:p>
           <a:p>
@@ -23675,13 +23699,13 @@
               </a:spcAft>
             </a:pPr>
             <a:r>
-              <a:rPr sz="1000" b="0" i="0">
+              <a:rPr sz="950" b="0" i="0">
                 <a:solidFill>
                   <a:srgbClr val="1C1C1C"/>
                 </a:solidFill>
                 <a:latin typeface="Calibri"/>
               </a:rPr>
-              <a:t>Bandeja de hallazgos, visor de evidencia, reglas y tablero. Hoy se desarrolla contra el mock de Prism.</a:t>
+              <a:t>Bandeja de hallazgos, visor de evidencia, reglas y tablero. Miguel y Lian la construyen contra un servidor simulado (Prism).</a:t>
             </a:r>
           </a:p>
         </p:txBody>
@@ -23694,8 +23718,8 @@
         </p:nvSpPr>
         <p:spPr>
           <a:xfrm>
-            <a:off x="7312152" y="5358384"/>
-            <a:ext cx="2517648" cy="841248"/>
+            <a:off x="9171432" y="4800600"/>
+            <a:ext cx="2624328" cy="868679"/>
           </a:xfrm>
           <a:prstGeom prst="roundRect">
             <a:avLst>
@@ -23739,13 +23763,13 @@
               </a:spcAft>
             </a:pPr>
             <a:r>
-              <a:rPr sz="1200" b="1" i="0">
+              <a:rPr sz="1150" b="1" i="0">
                 <a:solidFill>
                   <a:srgbClr val="1F3864"/>
                 </a:solidFill>
                 <a:latin typeface="Calibri"/>
               </a:rPr>
-              <a:t>Canal de alerta: Telegram o correo</a:t>
+              <a:t>Telegram o correo · la alerta</a:t>
             </a:r>
           </a:p>
           <a:p>
@@ -23758,13 +23782,13 @@
               </a:spcAft>
             </a:pPr>
             <a:r>
-              <a:rPr sz="1000" b="0" i="0">
+              <a:rPr sz="950" b="0" i="0">
                 <a:solidFill>
                   <a:srgbClr val="1C1C1C"/>
                 </a:solidFill>
                 <a:latin typeface="Calibri"/>
               </a:rPr>
-              <a:t>Patrón outbox con acuse de recibo y supresión: como máximo 6 avisos por turno de 12 h.</a:t>
+              <a:t>Aviso al responsable con acuse de recibo. Máximo 6 avisos por turno para no saturar a nadie.</a:t>
             </a:r>
           </a:p>
         </p:txBody>
@@ -23777,8 +23801,8 @@
         </p:nvSpPr>
         <p:spPr>
           <a:xfrm>
-            <a:off x="10012680" y="2395728"/>
-            <a:ext cx="1783080" cy="3803904"/>
+            <a:off x="365760" y="5760719"/>
+            <a:ext cx="11430000" cy="603504"/>
           </a:xfrm>
           <a:prstGeom prst="roundRect">
             <a:avLst>
@@ -23813,12 +23837,38 @@
           <a:bodyPr rtlCol="0" anchor="t" wrap="square" tIns="54864" bIns="54864"/>
           <a:lstStyle/>
           <a:p>
+            <a:pPr algn="ctr"/>
+          </a:p>
+        </p:txBody>
+      </p:sp>
+      <p:sp>
+        <p:nvSpPr>
+          <p:cNvPr id="177" name="TextBox 176"/>
+          <p:cNvSpPr txBox="1"/>
+          <p:nvPr/>
+        </p:nvSpPr>
+        <p:spPr>
+          <a:xfrm>
+            <a:off x="411480" y="5760719"/>
+            <a:ext cx="1463040" cy="603504"/>
+          </a:xfrm>
+          <a:prstGeom prst="rect">
+            <a:avLst/>
+          </a:prstGeom>
+          <a:noFill/>
+        </p:spPr>
+        <p:txBody>
+          <a:bodyPr wrap="square" anchor="ctr" lIns="73152" rIns="73152" tIns="36576" bIns="36576">
+            <a:spAutoFit/>
+          </a:bodyPr>
+          <a:lstStyle/>
+          <a:p>
             <a:pPr algn="l">
               <a:spcBef>
                 <a:spcPts val="0"/>
               </a:spcBef>
               <a:spcAft>
-                <a:spcPts val="300"/>
+                <a:spcPts val="0"/>
               </a:spcAft>
             </a:pPr>
             <a:r>
@@ -23828,16 +23878,58 @@
                 </a:solidFill>
                 <a:latin typeface="Calibri"/>
               </a:rPr>
-              <a:t>CÓMO SE CONSTRUYE</a:t>
+              <a:t>CÓMO SE</a:t>
             </a:r>
           </a:p>
           <a:p>
+            <a:pPr algn="l">
+              <a:spcBef>
+                <a:spcPts val="0"/>
+              </a:spcBef>
+              <a:spcAft>
+                <a:spcPts val="0"/>
+              </a:spcAft>
+            </a:pPr>
+            <a:r>
+              <a:rPr sz="1100" b="1" i="0">
+                <a:solidFill>
+                  <a:srgbClr val="1F3864"/>
+                </a:solidFill>
+                <a:latin typeface="Calibri"/>
+              </a:rPr>
+              <a:t>CONSTRUYE</a:t>
+            </a:r>
+          </a:p>
+        </p:txBody>
+      </p:sp>
+      <p:sp>
+        <p:nvSpPr>
+          <p:cNvPr id="178" name="TextBox 177"/>
+          <p:cNvSpPr txBox="1"/>
+          <p:nvPr/>
+        </p:nvSpPr>
+        <p:spPr>
+          <a:xfrm>
+            <a:off x="1920240" y="5779007"/>
+            <a:ext cx="3291840" cy="566928"/>
+          </a:xfrm>
+          <a:prstGeom prst="rect">
+            <a:avLst/>
+          </a:prstGeom>
+          <a:noFill/>
+        </p:spPr>
+        <p:txBody>
+          <a:bodyPr wrap="square" anchor="ctr" lIns="73152" rIns="73152" tIns="36576" bIns="36576">
+            <a:spAutoFit/>
+          </a:bodyPr>
+          <a:lstStyle/>
+          <a:p>
             <a:pPr>
               <a:spcBef>
                 <a:spcPts val="0"/>
               </a:spcBef>
               <a:spcAft>
-                <a:spcPts val="300"/>
+                <a:spcPts val="200"/>
               </a:spcAft>
             </a:pPr>
             <a:r>
@@ -23856,7 +23948,7 @@
                 </a:solidFill>
                 <a:latin typeface="Calibri"/>
               </a:rPr>
-              <a:t> · monorepo Python con un solo lockfile; instalación con o sin GPU</a:t>
+              <a:t> · un solo entorno Python para todos los módulos</a:t>
             </a:r>
           </a:p>
           <a:p>
@@ -23865,7 +23957,7 @@
                 <a:spcPts val="0"/>
               </a:spcBef>
               <a:spcAft>
-                <a:spcPts val="300"/>
+                <a:spcPts val="200"/>
               </a:spcAft>
             </a:pPr>
             <a:r>
@@ -23884,16 +23976,39 @@
                 </a:solidFill>
                 <a:latin typeface="Calibri"/>
               </a:rPr>
-              <a:t> · pruebas, tipado estricto y estilo en cada empuje</a:t>
+              <a:t> · pruebas, tipos y estilo automáticos</a:t>
             </a:r>
           </a:p>
+        </p:txBody>
+      </p:sp>
+      <p:sp>
+        <p:nvSpPr>
+          <p:cNvPr id="179" name="TextBox 178"/>
+          <p:cNvSpPr txBox="1"/>
+          <p:nvPr/>
+        </p:nvSpPr>
+        <p:spPr>
+          <a:xfrm>
+            <a:off x="5212080" y="5779007"/>
+            <a:ext cx="3291840" cy="566928"/>
+          </a:xfrm>
+          <a:prstGeom prst="rect">
+            <a:avLst/>
+          </a:prstGeom>
+          <a:noFill/>
+        </p:spPr>
+        <p:txBody>
+          <a:bodyPr wrap="square" anchor="ctr" lIns="73152" rIns="73152" tIns="36576" bIns="36576">
+            <a:spAutoFit/>
+          </a:bodyPr>
+          <a:lstStyle/>
           <a:p>
             <a:pPr>
               <a:spcBef>
                 <a:spcPts val="0"/>
               </a:spcBef>
               <a:spcAft>
-                <a:spcPts val="300"/>
+                <a:spcPts val="200"/>
               </a:spcAft>
             </a:pPr>
             <a:r>
@@ -23912,7 +24027,7 @@
                 </a:solidFill>
                 <a:latin typeface="Calibri"/>
               </a:rPr>
-              <a:t> · CI en dos versiones de Python; falla si entra una licencia AGPL</a:t>
+              <a:t> · integración continua; bloquea licencias AGPL</a:t>
             </a:r>
           </a:p>
           <a:p>
@@ -23921,7 +24036,7 @@
                 <a:spcPts val="0"/>
               </a:spcBef>
               <a:spcAft>
-                <a:spcPts val="300"/>
+                <a:spcPts val="200"/>
               </a:spcAft>
             </a:pPr>
             <a:r>
@@ -23940,16 +24055,39 @@
                 </a:solidFill>
                 <a:latin typeface="Calibri"/>
               </a:rPr>
-              <a:t> · PostgreSQL, Redis y MediaMTX en un comando</a:t>
+              <a:t> · PostgreSQL y Redis con un comando</a:t>
             </a:r>
           </a:p>
+        </p:txBody>
+      </p:sp>
+      <p:sp>
+        <p:nvSpPr>
+          <p:cNvPr id="180" name="TextBox 179"/>
+          <p:cNvSpPr txBox="1"/>
+          <p:nvPr/>
+        </p:nvSpPr>
+        <p:spPr>
+          <a:xfrm>
+            <a:off x="8503920" y="5779007"/>
+            <a:ext cx="3291840" cy="566928"/>
+          </a:xfrm>
+          <a:prstGeom prst="rect">
+            <a:avLst/>
+          </a:prstGeom>
+          <a:noFill/>
+        </p:spPr>
+        <p:txBody>
+          <a:bodyPr wrap="square" anchor="ctr" lIns="73152" rIns="73152" tIns="36576" bIns="36576">
+            <a:spAutoFit/>
+          </a:bodyPr>
+          <a:lstStyle/>
           <a:p>
             <a:pPr>
               <a:spcBef>
                 <a:spcPts val="0"/>
               </a:spcBef>
               <a:spcAft>
-                <a:spcPts val="300"/>
+                <a:spcPts val="200"/>
               </a:spcAft>
             </a:pPr>
             <a:r>
@@ -23968,7 +24106,7 @@
                 </a:solidFill>
                 <a:latin typeface="Calibri"/>
               </a:rPr>
-              <a:t> · servidor simulado del contrato: el frontend no espera al backend</a:t>
+              <a:t> · servidor simulado: la web avanza sin backend</a:t>
             </a:r>
           </a:p>
           <a:p>
@@ -23977,7 +24115,7 @@
                 <a:spcPts val="0"/>
               </a:spcBef>
               <a:spcAft>
-                <a:spcPts val="300"/>
+                <a:spcPts val="200"/>
               </a:spcAft>
             </a:pPr>
             <a:r>
@@ -23996,21 +24134,21 @@
                 </a:solidFill>
                 <a:latin typeface="Calibri"/>
               </a:rPr>
-              <a:t> · etiquetado autoalojado: ninguna imagen sale de la máquina</a:t>
+              <a:t> · etiquetado de imágenes en nuestro computador</a:t>
             </a:r>
           </a:p>
         </p:txBody>
       </p:sp>
       <p:sp>
         <p:nvSpPr>
-          <p:cNvPr id="177" name="TextBox 176"/>
+          <p:cNvPr id="181" name="TextBox 180"/>
           <p:cNvSpPr txBox="1"/>
           <p:nvPr/>
         </p:nvSpPr>
         <p:spPr>
           <a:xfrm>
-            <a:off x="365760" y="6291072"/>
-            <a:ext cx="11430000" cy="365760"/>
+            <a:off x="365760" y="6409943"/>
+            <a:ext cx="11430000" cy="310896"/>
           </a:xfrm>
           <a:prstGeom prst="rect">
             <a:avLst/>
@@ -24032,13 +24170,13 @@
               </a:spcAft>
             </a:pPr>
             <a:r>
-              <a:rPr sz="1100" b="1" i="0">
+              <a:rPr sz="1050" b="1" i="0">
                 <a:solidFill>
                   <a:srgbClr val="1F3864"/>
                 </a:solidFill>
                 <a:latin typeface="Calibri"/>
               </a:rPr>
-              <a:t>La Etapa 1 (detector + reglas) decide; la Etapa 2 (Qwen3-VL, extensión) solo describe.   ·   El evento es la unidad: un turno son 12 hallazgos, no 200.000 cuadros.</a:t>
+              <a:t>El detector y las reglas deciden; la descripción con IA (extensión futura) solo describe.   ·   La unidad es el evento: un turno son 12 hallazgos, no 200.000 cuadros.</a:t>
             </a:r>
           </a:p>
         </p:txBody>

--- a/Fase 1/Evidencias Grupales/Presentación Proyecto.pptx
+++ b/Fase 1/Evidencias Grupales/Presentación Proyecto.pptx
@@ -1419,7 +1419,7 @@
           <a:lstStyle/>
           <a:p>
             <a:r>
-              <a:t>3:00 · Edgar. Leer el flujo de izquierda a derecha, una columna por vez. (1) Entra el video: la obra deja sus grabaciones en una carpeta y el sistema las toma solo; OpenCV lee el video, se queda con 5 cuadros por segundo, tapa las zonas que no se deben analizar y difumina rostros antes de guardar; cada cuadro queda fechado con la hora real de la grabación. (2) Se detecta y se sigue: RF-DETR es el modelo que marca personas, cascos y chalecos, entrenado con nuestras imágenes; es de licencia libre y por eso no usamos YOLO, cuya licencia AGPL alcanza a los modelos entrenados y obligaría a liberar todo el sistema. ByteTrack sigue a cada persona de un cuadro al siguiente con un número temporal: nunca sabemos quién es. ONNX Runtime hace que el modelo, entrenado una vez con GPU, corra en cualquier computador. (3) Se decide y se guarda: el motor de reglas, código propio, convierte recorridos en hallazgos según las reglas de la obra, medidas en segundos; PostgreSQL guarda todo, incluidas las detecciones cuadro a cuadro, y por eso se puede cambiar una regla y recalcular sin reprocesar video; Redis es la fila de espera de los videos. (4) Se usa: FastAPI entrega los datos a la web bajo un contrato acordado antes de programar; React es la web que construyen Miguel y Lian; la alerta llega por Telegram o correo con acuse de recibo y un máximo de seis avisos por turno. Abajo, cómo se construye. Cerrar con la línea final: el detector y las reglas deciden, la descripción con IA solo describe, y la unidad es el evento. Si preguntan por las cámaras en vivo: RTSP es el protocolo de las cámaras IP; la versión 2 se conecta a cámaras en vez de leer archivos y se prueba desde la semana 6 simulando una cámara con un video grabado (MediaMTX).</a:t>
+              <a:t>3:00 · Edgar. Empezar por la franja de arriba: son dos programas. A, el procesador de video, corre solo en el servidor, en segundo plano, cada vez que llega un video; B, la plataforma web, es lo que el usuario abre en el navegador. Se comunican solo por la base de datos: A escribe hallazgos, B los lee. Luego el flujo de izquierda a derecha. (1) Entra el video: la obra deja sus grabaciones en una carpeta y el sistema las toma solo; OpenCV lee el video, se queda con 5 cuadros por segundo, tapa las zonas que no se deben analizar y difumina rostros antes de guardar; cada cuadro queda fechado con la hora real de la grabación. (2) Se detecta y se sigue: RF-DETR es el modelo que marca personas, cascos y chalecos, entrenado con nuestras imágenes; es de licencia libre y por eso no usamos YOLO, cuya licencia AGPL obligaría a liberar todo el código. ByteTrack sigue a cada persona de un cuadro al siguiente con un número temporal: nunca sabemos quién es. ONNX Runtime es el motor que ejecuta el modelo ya entrenado, para que corra en cualquier computador sin tarjeta gráfica. (3) Se decide y se guarda: el motor de reglas, código propio, convierte recorridos en hallazgos según las reglas de la obra, medidas en segundos; PostgreSQL guarda todo, incluidas las detecciones cuadro a cuadro, y por eso se puede cambiar una regla y recalcular sin reprocesar video; Redis es una base de datos en memoria que usamos como fila de espera de los videos. (4) Se usa: FastAPI lee la base y entrega los datos a la web bajo un contrato acordado antes de programar; React es la web que construyen Miguel y Lian; la alerta llega sola al teléfono cuando se guarda un hallazgo grave, con acuse de recibo y un máximo de seis avisos por turno. Abajo, cómo se construye; la integración continua rechaza librerías AGPL. Cerrar con la última línea: el detector y las reglas deciden, la descripción con IA solo describe, y la unidad es el evento. Si preguntan por cámaras en vivo: RTSP es el protocolo de las cámaras IP; la versión 2 se conecta a cámaras en vez de leer archivos y se prueba desde la semana 6 simulando una cámara con un video grabado (MediaMTX).</a:t>
             </a:r>
           </a:p>
         </p:txBody>
@@ -22424,7 +22424,153 @@
         </p:nvSpPr>
         <p:spPr>
           <a:xfrm>
-            <a:off x="365760" y="2331720"/>
+            <a:off x="365760" y="2304288"/>
+            <a:ext cx="8494776" cy="274320"/>
+          </a:xfrm>
+          <a:prstGeom prst="roundRect">
+            <a:avLst>
+              <a:gd name="adj" fmla="val 8000"/>
+            </a:avLst>
+          </a:prstGeom>
+          <a:solidFill>
+            <a:srgbClr val="DDE5F0"/>
+          </a:solidFill>
+          <a:ln w="12700">
+            <a:solidFill>
+              <a:srgbClr val="1F3864"/>
+            </a:solidFill>
+          </a:ln>
+          <a:effectLst/>
+        </p:spPr>
+        <p:style>
+          <a:lnRef idx="1">
+            <a:schemeClr val="accent1"/>
+          </a:lnRef>
+          <a:fillRef idx="3">
+            <a:schemeClr val="accent1"/>
+          </a:fillRef>
+          <a:effectRef idx="2">
+            <a:schemeClr val="accent1"/>
+          </a:effectRef>
+          <a:fontRef idx="minor">
+            <a:schemeClr val="lt1"/>
+          </a:fontRef>
+        </p:style>
+        <p:txBody>
+          <a:bodyPr rtlCol="0" anchor="ctr" wrap="square" tIns="54864" bIns="54864"/>
+          <a:lstStyle/>
+          <a:p>
+            <a:pPr algn="l">
+              <a:spcBef>
+                <a:spcPts val="0"/>
+              </a:spcBef>
+              <a:spcAft>
+                <a:spcPts val="0"/>
+              </a:spcAft>
+            </a:pPr>
+            <a:r>
+              <a:rPr sz="950" b="1">
+                <a:solidFill>
+                  <a:srgbClr val="1F3864"/>
+                </a:solidFill>
+                <a:latin typeface="Calibri"/>
+              </a:rPr>
+              <a:t>A · PROCESADOR DE VIDEO</a:t>
+            </a:r>
+            <a:r>
+              <a:rPr sz="950" b="0">
+                <a:solidFill>
+                  <a:srgbClr val="1C1C1C"/>
+                </a:solidFill>
+                <a:latin typeface="Calibri"/>
+              </a:rPr>
+              <a:t>  ·  un programa que corre solo en el servidor cada vez que llega un video  ·  módulos propios: gepp-worker, gepp-vision, gepp-core</a:t>
+            </a:r>
+          </a:p>
+        </p:txBody>
+      </p:sp>
+      <p:sp>
+        <p:nvSpPr>
+          <p:cNvPr id="159" name="Rounded Rectangle 158"/>
+          <p:cNvSpPr/>
+          <p:nvPr/>
+        </p:nvSpPr>
+        <p:spPr>
+          <a:xfrm>
+            <a:off x="9171432" y="2304288"/>
+            <a:ext cx="2624328" cy="274320"/>
+          </a:xfrm>
+          <a:prstGeom prst="roundRect">
+            <a:avLst>
+              <a:gd name="adj" fmla="val 8000"/>
+            </a:avLst>
+          </a:prstGeom>
+          <a:solidFill>
+            <a:srgbClr val="DDE5F0"/>
+          </a:solidFill>
+          <a:ln w="12700">
+            <a:solidFill>
+              <a:srgbClr val="1F3864"/>
+            </a:solidFill>
+          </a:ln>
+          <a:effectLst/>
+        </p:spPr>
+        <p:style>
+          <a:lnRef idx="1">
+            <a:schemeClr val="accent1"/>
+          </a:lnRef>
+          <a:fillRef idx="3">
+            <a:schemeClr val="accent1"/>
+          </a:fillRef>
+          <a:effectRef idx="2">
+            <a:schemeClr val="accent1"/>
+          </a:effectRef>
+          <a:fontRef idx="minor">
+            <a:schemeClr val="lt1"/>
+          </a:fontRef>
+        </p:style>
+        <p:txBody>
+          <a:bodyPr rtlCol="0" anchor="ctr" wrap="square" tIns="54864" bIns="54864"/>
+          <a:lstStyle/>
+          <a:p>
+            <a:pPr algn="l">
+              <a:spcBef>
+                <a:spcPts val="0"/>
+              </a:spcBef>
+              <a:spcAft>
+                <a:spcPts val="0"/>
+              </a:spcAft>
+            </a:pPr>
+            <a:r>
+              <a:rPr sz="950" b="1">
+                <a:solidFill>
+                  <a:srgbClr val="1F3864"/>
+                </a:solidFill>
+                <a:latin typeface="Calibri"/>
+              </a:rPr>
+              <a:t>B · PLATAFORMA WEB</a:t>
+            </a:r>
+            <a:r>
+              <a:rPr sz="950" b="0">
+                <a:solidFill>
+                  <a:srgbClr val="1C1C1C"/>
+                </a:solidFill>
+                <a:latin typeface="Calibri"/>
+              </a:rPr>
+              <a:t>  ·  gepp-api y la web</a:t>
+            </a:r>
+          </a:p>
+        </p:txBody>
+      </p:sp>
+      <p:sp>
+        <p:nvSpPr>
+          <p:cNvPr id="160" name="Rounded Rectangle 159"/>
+          <p:cNvSpPr/>
+          <p:nvPr/>
+        </p:nvSpPr>
+        <p:spPr>
+          <a:xfrm>
+            <a:off x="365760" y="2633472"/>
             <a:ext cx="2624328" cy="512064"/>
           </a:xfrm>
           <a:prstGeom prst="roundRect">
@@ -22494,21 +22640,21 @@
                 </a:solidFill>
                 <a:latin typeface="Calibri"/>
               </a:rPr>
-              <a:t>código propio: gepp-worker</a:t>
+              <a:t>cuándo: cada vez que llega un video</a:t>
             </a:r>
           </a:p>
         </p:txBody>
       </p:sp>
       <p:sp>
         <p:nvSpPr>
-          <p:cNvPr id="159" name="Rounded Rectangle 158"/>
+          <p:cNvPr id="161" name="Rounded Rectangle 160"/>
           <p:cNvSpPr/>
           <p:nvPr/>
         </p:nvSpPr>
         <p:spPr>
           <a:xfrm>
-            <a:off x="365760" y="2916936"/>
-            <a:ext cx="2624328" cy="1339595"/>
+            <a:off x="365760" y="3218688"/>
+            <a:ext cx="2624328" cy="1243584"/>
           </a:xfrm>
           <a:prstGeom prst="roundRect">
             <a:avLst>
@@ -22584,14 +22730,14 @@
       </p:sp>
       <p:sp>
         <p:nvSpPr>
-          <p:cNvPr id="160" name="Rounded Rectangle 159"/>
+          <p:cNvPr id="162" name="Rounded Rectangle 161"/>
           <p:cNvSpPr/>
           <p:nvPr/>
         </p:nvSpPr>
         <p:spPr>
           <a:xfrm>
-            <a:off x="365760" y="4329683"/>
-            <a:ext cx="2624328" cy="1339595"/>
+            <a:off x="365760" y="4535424"/>
+            <a:ext cx="2624328" cy="1243584"/>
           </a:xfrm>
           <a:prstGeom prst="roundRect">
             <a:avLst>
@@ -22667,13 +22813,13 @@
       </p:sp>
       <p:sp>
         <p:nvSpPr>
-          <p:cNvPr id="161" name="Rounded Rectangle 160"/>
+          <p:cNvPr id="163" name="Rounded Rectangle 162"/>
           <p:cNvSpPr/>
           <p:nvPr/>
         </p:nvSpPr>
         <p:spPr>
           <a:xfrm>
-            <a:off x="3300984" y="2331720"/>
+            <a:off x="3300984" y="2633472"/>
             <a:ext cx="2624328" cy="512064"/>
           </a:xfrm>
           <a:prstGeom prst="roundRect">
@@ -22743,20 +22889,20 @@
                 </a:solidFill>
                 <a:latin typeface="Calibri"/>
               </a:rPr>
-              <a:t>código propio: gepp-vision</a:t>
+              <a:t>cuándo: enseguida, sin que nadie lo pida</a:t>
             </a:r>
           </a:p>
         </p:txBody>
       </p:sp>
       <p:sp>
         <p:nvSpPr>
-          <p:cNvPr id="162" name="Right Arrow 161"/>
+          <p:cNvPr id="164" name="Right Arrow 163"/>
           <p:cNvSpPr/>
           <p:nvPr/>
         </p:nvSpPr>
         <p:spPr>
           <a:xfrm>
-            <a:off x="3017520" y="2432304"/>
+            <a:off x="3017520" y="2734056"/>
             <a:ext cx="256032" cy="310896"/>
           </a:xfrm>
           <a:prstGeom prst="rightArrow">
@@ -22794,14 +22940,14 @@
       </p:sp>
       <p:sp>
         <p:nvSpPr>
-          <p:cNvPr id="163" name="Rounded Rectangle 162"/>
+          <p:cNvPr id="165" name="Rounded Rectangle 164"/>
           <p:cNvSpPr/>
           <p:nvPr/>
         </p:nvSpPr>
         <p:spPr>
           <a:xfrm>
-            <a:off x="3300984" y="2916936"/>
-            <a:ext cx="2624328" cy="868679"/>
+            <a:off x="3300984" y="3218688"/>
+            <a:ext cx="2624328" cy="804672"/>
           </a:xfrm>
           <a:prstGeom prst="roundRect">
             <a:avLst>
@@ -22877,14 +23023,14 @@
       </p:sp>
       <p:sp>
         <p:nvSpPr>
-          <p:cNvPr id="164" name="Rounded Rectangle 163"/>
+          <p:cNvPr id="166" name="Rounded Rectangle 165"/>
           <p:cNvSpPr/>
           <p:nvPr/>
         </p:nvSpPr>
         <p:spPr>
           <a:xfrm>
-            <a:off x="3300984" y="3858768"/>
-            <a:ext cx="2624328" cy="868679"/>
+            <a:off x="3300984" y="4096512"/>
+            <a:ext cx="2624328" cy="804672"/>
           </a:xfrm>
           <a:prstGeom prst="roundRect">
             <a:avLst>
@@ -22960,14 +23106,14 @@
       </p:sp>
       <p:sp>
         <p:nvSpPr>
-          <p:cNvPr id="165" name="Rounded Rectangle 164"/>
+          <p:cNvPr id="167" name="Rounded Rectangle 166"/>
           <p:cNvSpPr/>
           <p:nvPr/>
         </p:nvSpPr>
         <p:spPr>
           <a:xfrm>
-            <a:off x="3300984" y="4800600"/>
-            <a:ext cx="2624328" cy="868679"/>
+            <a:off x="3300984" y="4974336"/>
+            <a:ext cx="2624328" cy="804672"/>
           </a:xfrm>
           <a:prstGeom prst="roundRect">
             <a:avLst>
@@ -23036,20 +23182,20 @@
                 </a:solidFill>
                 <a:latin typeface="Calibri"/>
               </a:rPr>
-              <a:t>El modelo se entrena una vez con tarjeta gráfica (GPU) y después corre en cualquier computador normal, sin GPU.</a:t>
+              <a:t>Qué es: motor que ejecuta modelos ya entrenados. Para qué: que el modelo corra en cualquier computador, sin tarjeta gráfica.</a:t>
             </a:r>
           </a:p>
         </p:txBody>
       </p:sp>
       <p:sp>
         <p:nvSpPr>
-          <p:cNvPr id="166" name="Rounded Rectangle 165"/>
+          <p:cNvPr id="168" name="Rounded Rectangle 167"/>
           <p:cNvSpPr/>
           <p:nvPr/>
         </p:nvSpPr>
         <p:spPr>
           <a:xfrm>
-            <a:off x="6236208" y="2331720"/>
+            <a:off x="6236208" y="2633472"/>
             <a:ext cx="2624328" cy="512064"/>
           </a:xfrm>
           <a:prstGeom prst="roundRect">
@@ -23119,20 +23265,20 @@
                 </a:solidFill>
                 <a:latin typeface="Calibri"/>
               </a:rPr>
-              <a:t>código propio: gepp-core</a:t>
+              <a:t>cuándo: al terminar cada video</a:t>
             </a:r>
           </a:p>
         </p:txBody>
       </p:sp>
       <p:sp>
         <p:nvSpPr>
-          <p:cNvPr id="167" name="Right Arrow 166"/>
+          <p:cNvPr id="169" name="Right Arrow 168"/>
           <p:cNvSpPr/>
           <p:nvPr/>
         </p:nvSpPr>
         <p:spPr>
           <a:xfrm>
-            <a:off x="5952744" y="2432304"/>
+            <a:off x="5952744" y="2734056"/>
             <a:ext cx="256032" cy="310896"/>
           </a:xfrm>
           <a:prstGeom prst="rightArrow">
@@ -23170,14 +23316,14 @@
       </p:sp>
       <p:sp>
         <p:nvSpPr>
-          <p:cNvPr id="168" name="Rounded Rectangle 167"/>
+          <p:cNvPr id="170" name="Rounded Rectangle 169"/>
           <p:cNvSpPr/>
           <p:nvPr/>
         </p:nvSpPr>
         <p:spPr>
           <a:xfrm>
-            <a:off x="6236208" y="2916936"/>
-            <a:ext cx="2624328" cy="868679"/>
+            <a:off x="6236208" y="3218688"/>
+            <a:ext cx="2624328" cy="804672"/>
           </a:xfrm>
           <a:prstGeom prst="roundRect">
             <a:avLst>
@@ -23253,14 +23399,14 @@
       </p:sp>
       <p:sp>
         <p:nvSpPr>
-          <p:cNvPr id="169" name="Rounded Rectangle 168"/>
+          <p:cNvPr id="171" name="Rounded Rectangle 170"/>
           <p:cNvSpPr/>
           <p:nvPr/>
         </p:nvSpPr>
         <p:spPr>
           <a:xfrm>
-            <a:off x="6236208" y="3858768"/>
-            <a:ext cx="2624328" cy="868679"/>
+            <a:off x="6236208" y="4096512"/>
+            <a:ext cx="2624328" cy="804672"/>
           </a:xfrm>
           <a:prstGeom prst="roundRect">
             <a:avLst>
@@ -23329,21 +23475,21 @@
                 </a:solidFill>
                 <a:latin typeface="Calibri"/>
               </a:rPr>
-              <a:t>Guarda hallazgos, detecciones cuadro a cuadro, reglas con historial y acuses. Así se recalculan reglas sin reprocesar video.</a:t>
+              <a:t>Guarda hallazgos, detecciones cuadro a cuadro, reglas con historial y acuses. Es el punto de encuentro entre A y B.</a:t>
             </a:r>
           </a:p>
         </p:txBody>
       </p:sp>
       <p:sp>
         <p:nvSpPr>
-          <p:cNvPr id="170" name="Rounded Rectangle 169"/>
+          <p:cNvPr id="172" name="Rounded Rectangle 171"/>
           <p:cNvSpPr/>
           <p:nvPr/>
         </p:nvSpPr>
         <p:spPr>
           <a:xfrm>
-            <a:off x="6236208" y="4800600"/>
-            <a:ext cx="2624328" cy="868679"/>
+            <a:off x="6236208" y="4974336"/>
+            <a:ext cx="2624328" cy="804672"/>
           </a:xfrm>
           <a:prstGeom prst="roundRect">
             <a:avLst>
@@ -23412,20 +23558,20 @@
                 </a:solidFill>
                 <a:latin typeface="Calibri"/>
               </a:rPr>
-              <a:t>Fila de espera en memoria: los videos que llegan esperan su turno y se procesan uno a uno, sin bloquear ni perder nada.</a:t>
+              <a:t>Qué es: base de datos en memoria, muy rápida. Para qué: que los videos hagan fila y se procesen de a uno, sin perderse.</a:t>
             </a:r>
           </a:p>
         </p:txBody>
       </p:sp>
       <p:sp>
         <p:nvSpPr>
-          <p:cNvPr id="171" name="Rounded Rectangle 170"/>
+          <p:cNvPr id="173" name="Rounded Rectangle 172"/>
           <p:cNvSpPr/>
           <p:nvPr/>
         </p:nvSpPr>
         <p:spPr>
           <a:xfrm>
-            <a:off x="9171432" y="2331720"/>
+            <a:off x="9171432" y="2633472"/>
             <a:ext cx="2624328" cy="512064"/>
           </a:xfrm>
           <a:prstGeom prst="roundRect">
@@ -23495,20 +23641,20 @@
                 </a:solidFill>
                 <a:latin typeface="Calibri"/>
               </a:rPr>
-              <a:t>código propio: gepp-api · web</a:t>
+              <a:t>cuándo: cuando el usuario abre el navegador</a:t>
             </a:r>
           </a:p>
         </p:txBody>
       </p:sp>
       <p:sp>
         <p:nvSpPr>
-          <p:cNvPr id="172" name="Right Arrow 171"/>
+          <p:cNvPr id="174" name="Right Arrow 173"/>
           <p:cNvSpPr/>
           <p:nvPr/>
         </p:nvSpPr>
         <p:spPr>
           <a:xfrm>
-            <a:off x="8887967" y="2432304"/>
+            <a:off x="8887967" y="2734056"/>
             <a:ext cx="256032" cy="310896"/>
           </a:xfrm>
           <a:prstGeom prst="rightArrow">
@@ -23546,14 +23692,14 @@
       </p:sp>
       <p:sp>
         <p:nvSpPr>
-          <p:cNvPr id="173" name="Rounded Rectangle 172"/>
+          <p:cNvPr id="175" name="Rounded Rectangle 174"/>
           <p:cNvSpPr/>
           <p:nvPr/>
         </p:nvSpPr>
         <p:spPr>
           <a:xfrm>
-            <a:off x="9171432" y="2916936"/>
-            <a:ext cx="2624328" cy="868679"/>
+            <a:off x="9171432" y="3218688"/>
+            <a:ext cx="2624328" cy="804672"/>
           </a:xfrm>
           <a:prstGeom prst="roundRect">
             <a:avLst>
@@ -23622,21 +23768,21 @@
                 </a:solidFill>
                 <a:latin typeface="Calibri"/>
               </a:rPr>
-              <a:t>Servicio que entrega los datos a la web bajo un contrato fijo (OpenAPI) acordado antes de programar. Corre sin GPU.</a:t>
+              <a:t>Servicio que lee la base de datos y entrega la información a la web bajo un contrato fijo (OpenAPI). Corre sin GPU.</a:t>
             </a:r>
           </a:p>
         </p:txBody>
       </p:sp>
       <p:sp>
         <p:nvSpPr>
-          <p:cNvPr id="174" name="Rounded Rectangle 173"/>
+          <p:cNvPr id="176" name="Rounded Rectangle 175"/>
           <p:cNvSpPr/>
           <p:nvPr/>
         </p:nvSpPr>
         <p:spPr>
           <a:xfrm>
-            <a:off x="9171432" y="3858768"/>
-            <a:ext cx="2624328" cy="868679"/>
+            <a:off x="9171432" y="4096512"/>
+            <a:ext cx="2624328" cy="804672"/>
           </a:xfrm>
           <a:prstGeom prst="roundRect">
             <a:avLst>
@@ -23712,14 +23858,14 @@
       </p:sp>
       <p:sp>
         <p:nvSpPr>
-          <p:cNvPr id="175" name="Rounded Rectangle 174"/>
+          <p:cNvPr id="177" name="Rounded Rectangle 176"/>
           <p:cNvSpPr/>
           <p:nvPr/>
         </p:nvSpPr>
         <p:spPr>
           <a:xfrm>
-            <a:off x="9171432" y="4800600"/>
-            <a:ext cx="2624328" cy="868679"/>
+            <a:off x="9171432" y="4974336"/>
+            <a:ext cx="2624328" cy="804672"/>
           </a:xfrm>
           <a:prstGeom prst="roundRect">
             <a:avLst>
@@ -23788,21 +23934,21 @@
                 </a:solidFill>
                 <a:latin typeface="Calibri"/>
               </a:rPr>
-              <a:t>Aviso al responsable con acuse de recibo. Máximo 6 avisos por turno para no saturar a nadie.</a:t>
+              <a:t>Llega sola al teléfono cuando se guarda un hallazgo grave. Acuse de recibo y máximo 6 avisos por turno.</a:t>
             </a:r>
           </a:p>
         </p:txBody>
       </p:sp>
       <p:sp>
         <p:nvSpPr>
-          <p:cNvPr id="176" name="Rounded Rectangle 175"/>
+          <p:cNvPr id="178" name="Rounded Rectangle 177"/>
           <p:cNvSpPr/>
           <p:nvPr/>
         </p:nvSpPr>
         <p:spPr>
           <a:xfrm>
-            <a:off x="365760" y="5760719"/>
-            <a:ext cx="11430000" cy="603504"/>
+            <a:off x="365760" y="5852160"/>
+            <a:ext cx="11430000" cy="512064"/>
           </a:xfrm>
           <a:prstGeom prst="roundRect">
             <a:avLst>
@@ -23843,14 +23989,14 @@
       </p:sp>
       <p:sp>
         <p:nvSpPr>
-          <p:cNvPr id="177" name="TextBox 176"/>
+          <p:cNvPr id="179" name="TextBox 178"/>
           <p:cNvSpPr txBox="1"/>
           <p:nvPr/>
         </p:nvSpPr>
         <p:spPr>
           <a:xfrm>
-            <a:off x="411480" y="5760719"/>
-            <a:ext cx="1463040" cy="603504"/>
+            <a:off x="411480" y="5852160"/>
+            <a:ext cx="1463040" cy="512064"/>
           </a:xfrm>
           <a:prstGeom prst="rect">
             <a:avLst/>
@@ -23904,14 +24050,14 @@
       </p:sp>
       <p:sp>
         <p:nvSpPr>
-          <p:cNvPr id="178" name="TextBox 177"/>
+          <p:cNvPr id="180" name="TextBox 179"/>
           <p:cNvSpPr txBox="1"/>
           <p:nvPr/>
         </p:nvSpPr>
         <p:spPr>
           <a:xfrm>
-            <a:off x="1920240" y="5779007"/>
-            <a:ext cx="3291840" cy="566928"/>
+            <a:off x="1920240" y="5870448"/>
+            <a:ext cx="3291840" cy="475488"/>
           </a:xfrm>
           <a:prstGeom prst="rect">
             <a:avLst/>
@@ -23924,16 +24070,16 @@
           </a:bodyPr>
           <a:lstStyle/>
           <a:p>
-            <a:pPr>
-              <a:spcBef>
-                <a:spcPts val="0"/>
-              </a:spcBef>
-              <a:spcAft>
-                <a:spcPts val="200"/>
+            <a:pPr algn="l">
+              <a:spcBef>
+                <a:spcPts val="0"/>
+              </a:spcBef>
+              <a:spcAft>
+                <a:spcPts val="100"/>
               </a:spcAft>
             </a:pPr>
             <a:r>
-              <a:rPr sz="950" b="1">
+              <a:rPr sz="900" b="1">
                 <a:solidFill>
                   <a:srgbClr val="1F3864"/>
                 </a:solidFill>
@@ -23942,7 +24088,7 @@
               <a:t>uv</a:t>
             </a:r>
             <a:r>
-              <a:rPr sz="950" b="0">
+              <a:rPr sz="900" b="0">
                 <a:solidFill>
                   <a:srgbClr val="1C1C1C"/>
                 </a:solidFill>
@@ -23952,16 +24098,16 @@
             </a:r>
           </a:p>
           <a:p>
-            <a:pPr>
-              <a:spcBef>
-                <a:spcPts val="0"/>
-              </a:spcBef>
-              <a:spcAft>
-                <a:spcPts val="200"/>
+            <a:pPr algn="l">
+              <a:spcBef>
+                <a:spcPts val="0"/>
+              </a:spcBef>
+              <a:spcAft>
+                <a:spcPts val="100"/>
               </a:spcAft>
             </a:pPr>
             <a:r>
-              <a:rPr sz="950" b="1">
+              <a:rPr sz="900" b="1">
                 <a:solidFill>
                   <a:srgbClr val="1F3864"/>
                 </a:solidFill>
@@ -23970,7 +24116,7 @@
               <a:t>pytest · mypy · ruff</a:t>
             </a:r>
             <a:r>
-              <a:rPr sz="950" b="0">
+              <a:rPr sz="900" b="0">
                 <a:solidFill>
                   <a:srgbClr val="1C1C1C"/>
                 </a:solidFill>
@@ -23983,14 +24129,14 @@
       </p:sp>
       <p:sp>
         <p:nvSpPr>
-          <p:cNvPr id="179" name="TextBox 178"/>
+          <p:cNvPr id="181" name="TextBox 180"/>
           <p:cNvSpPr txBox="1"/>
           <p:nvPr/>
         </p:nvSpPr>
         <p:spPr>
           <a:xfrm>
-            <a:off x="5212080" y="5779007"/>
-            <a:ext cx="3291840" cy="566928"/>
+            <a:off x="5212080" y="5870448"/>
+            <a:ext cx="3291840" cy="475488"/>
           </a:xfrm>
           <a:prstGeom prst="rect">
             <a:avLst/>
@@ -24003,16 +24149,16 @@
           </a:bodyPr>
           <a:lstStyle/>
           <a:p>
-            <a:pPr>
-              <a:spcBef>
-                <a:spcPts val="0"/>
-              </a:spcBef>
-              <a:spcAft>
-                <a:spcPts val="200"/>
+            <a:pPr algn="l">
+              <a:spcBef>
+                <a:spcPts val="0"/>
+              </a:spcBef>
+              <a:spcAft>
+                <a:spcPts val="100"/>
               </a:spcAft>
             </a:pPr>
             <a:r>
-              <a:rPr sz="950" b="1">
+              <a:rPr sz="900" b="1">
                 <a:solidFill>
                   <a:srgbClr val="1F3864"/>
                 </a:solidFill>
@@ -24021,26 +24167,26 @@
               <a:t>GitHub Actions</a:t>
             </a:r>
             <a:r>
-              <a:rPr sz="950" b="0">
+              <a:rPr sz="900" b="0">
                 <a:solidFill>
                   <a:srgbClr val="1C1C1C"/>
                 </a:solidFill>
                 <a:latin typeface="Calibri"/>
               </a:rPr>
-              <a:t> · integración continua; bloquea licencias AGPL</a:t>
+              <a:t> · prueba cada cambio; rechaza librerías AGPL (como YOLO), que obligarían a liberar todo el código</a:t>
             </a:r>
           </a:p>
           <a:p>
-            <a:pPr>
-              <a:spcBef>
-                <a:spcPts val="0"/>
-              </a:spcBef>
-              <a:spcAft>
-                <a:spcPts val="200"/>
+            <a:pPr algn="l">
+              <a:spcBef>
+                <a:spcPts val="0"/>
+              </a:spcBef>
+              <a:spcAft>
+                <a:spcPts val="100"/>
               </a:spcAft>
             </a:pPr>
             <a:r>
-              <a:rPr sz="950" b="1">
+              <a:rPr sz="900" b="1">
                 <a:solidFill>
                   <a:srgbClr val="1F3864"/>
                 </a:solidFill>
@@ -24049,7 +24195,7 @@
               <a:t>Docker Compose</a:t>
             </a:r>
             <a:r>
-              <a:rPr sz="950" b="0">
+              <a:rPr sz="900" b="0">
                 <a:solidFill>
                   <a:srgbClr val="1C1C1C"/>
                 </a:solidFill>
@@ -24062,14 +24208,14 @@
       </p:sp>
       <p:sp>
         <p:nvSpPr>
-          <p:cNvPr id="180" name="TextBox 179"/>
+          <p:cNvPr id="182" name="TextBox 181"/>
           <p:cNvSpPr txBox="1"/>
           <p:nvPr/>
         </p:nvSpPr>
         <p:spPr>
           <a:xfrm>
-            <a:off x="8503920" y="5779007"/>
-            <a:ext cx="3291840" cy="566928"/>
+            <a:off x="8503920" y="5870448"/>
+            <a:ext cx="3291840" cy="475488"/>
           </a:xfrm>
           <a:prstGeom prst="rect">
             <a:avLst/>
@@ -24082,16 +24228,16 @@
           </a:bodyPr>
           <a:lstStyle/>
           <a:p>
-            <a:pPr>
-              <a:spcBef>
-                <a:spcPts val="0"/>
-              </a:spcBef>
-              <a:spcAft>
-                <a:spcPts val="200"/>
+            <a:pPr algn="l">
+              <a:spcBef>
+                <a:spcPts val="0"/>
+              </a:spcBef>
+              <a:spcAft>
+                <a:spcPts val="100"/>
               </a:spcAft>
             </a:pPr>
             <a:r>
-              <a:rPr sz="950" b="1">
+              <a:rPr sz="900" b="1">
                 <a:solidFill>
                   <a:srgbClr val="1F3864"/>
                 </a:solidFill>
@@ -24100,7 +24246,7 @@
               <a:t>Prism</a:t>
             </a:r>
             <a:r>
-              <a:rPr sz="950" b="0">
+              <a:rPr sz="900" b="0">
                 <a:solidFill>
                   <a:srgbClr val="1C1C1C"/>
                 </a:solidFill>
@@ -24110,16 +24256,16 @@
             </a:r>
           </a:p>
           <a:p>
-            <a:pPr>
-              <a:spcBef>
-                <a:spcPts val="0"/>
-              </a:spcBef>
-              <a:spcAft>
-                <a:spcPts val="200"/>
+            <a:pPr algn="l">
+              <a:spcBef>
+                <a:spcPts val="0"/>
+              </a:spcBef>
+              <a:spcAft>
+                <a:spcPts val="100"/>
               </a:spcAft>
             </a:pPr>
             <a:r>
-              <a:rPr sz="950" b="1">
+              <a:rPr sz="900" b="1">
                 <a:solidFill>
                   <a:srgbClr val="1F3864"/>
                 </a:solidFill>
@@ -24128,7 +24274,7 @@
               <a:t>CVAT</a:t>
             </a:r>
             <a:r>
-              <a:rPr sz="950" b="0">
+              <a:rPr sz="900" b="0">
                 <a:solidFill>
                   <a:srgbClr val="1C1C1C"/>
                 </a:solidFill>
@@ -24141,14 +24287,14 @@
       </p:sp>
       <p:sp>
         <p:nvSpPr>
-          <p:cNvPr id="181" name="TextBox 180"/>
+          <p:cNvPr id="183" name="TextBox 182"/>
           <p:cNvSpPr txBox="1"/>
           <p:nvPr/>
         </p:nvSpPr>
         <p:spPr>
           <a:xfrm>
-            <a:off x="365760" y="6409943"/>
-            <a:ext cx="11430000" cy="310896"/>
+            <a:off x="365760" y="6400800"/>
+            <a:ext cx="11430000" cy="457200"/>
           </a:xfrm>
           <a:prstGeom prst="rect">
             <a:avLst/>
@@ -24166,11 +24312,30 @@
                 <a:spcPts val="0"/>
               </a:spcBef>
               <a:spcAft>
-                <a:spcPts val="0"/>
+                <a:spcPts val="200"/>
               </a:spcAft>
             </a:pPr>
             <a:r>
-              <a:rPr sz="1050" b="1" i="0">
+              <a:rPr sz="1000" b="0" i="0">
+                <a:solidFill>
+                  <a:srgbClr val="1C1C1C"/>
+                </a:solidFill>
+                <a:latin typeface="Calibri"/>
+              </a:rPr>
+              <a:t>A y B son programas separados que solo se comunican por la base de datos: A escribe los hallazgos, B los lee y los muestra. A trabaja siempre, sin que nadie lo abra; B se usa cuando se necesita.</a:t>
+            </a:r>
+          </a:p>
+          <a:p>
+            <a:pPr algn="ctr">
+              <a:spcBef>
+                <a:spcPts val="0"/>
+              </a:spcBef>
+              <a:spcAft>
+                <a:spcPts val="0"/>
+              </a:spcAft>
+            </a:pPr>
+            <a:r>
+              <a:rPr sz="1000" b="1" i="0">
                 <a:solidFill>
                   <a:srgbClr val="1F3864"/>
                 </a:solidFill>

--- a/Fase 1/Evidencias Grupales/Presentación Proyecto.pptx
+++ b/Fase 1/Evidencias Grupales/Presentación Proyecto.pptx
@@ -1419,7 +1419,7 @@
           <a:lstStyle/>
           <a:p>
             <a:r>
-              <a:t>3:00 · Edgar. Recorrer el dibujo de arriba abajo: el video entra por un puerto y el reloj nace en la captura; la Etapa 1 muestrea, detecta, sigue y persiste las detecciones crudas; el motor de reglas decide en segundos y produce un hallazgo; el hallazgo alimenta la evidencia, la notificación, la API y la web. La Etapa 2 (modelo de lenguaje visual) solo describe, nunca crea ni suprime hallazgos: así el sistema es auditable. Cerrar con las tres decisiones que hacen que esto no sea un trabajo escolar: el dato es propio, el incumplimiento es un evento y la alerta cierra el ciclo con acuse de recibo.</a:t>
+              <a:t>3:00 · Edgar. Empezar por la franja de arriba: son dos programas. A, el procesador de video, corre solo en el servidor, en segundo plano, cada vez que llega un video; B, la plataforma web, es lo que el usuario abre en el navegador. Se comunican solo por la base de datos: A escribe hallazgos, B los lee. Luego el flujo de izquierda a derecha. (1) Entra el video: la obra deja sus grabaciones en una carpeta y el sistema las toma solo; OpenCV lee el video, se queda con 5 cuadros por segundo, tapa las zonas que no se deben analizar y difumina rostros antes de guardar; cada cuadro queda fechado con la hora real de la grabación. (2) Se detecta y se sigue: RF-DETR es el modelo que marca personas, cascos y chalecos, entrenado con nuestras imágenes; es de licencia libre y por eso no usamos YOLO, cuya licencia AGPL obligaría a liberar todo el código. ByteTrack sigue a cada persona de un cuadro al siguiente con un número temporal: nunca sabemos quién es. ONNX Runtime es el motor que ejecuta el modelo ya entrenado, para que corra en cualquier computador sin tarjeta gráfica. (3) Se decide y se guarda: el motor de reglas, código propio, convierte recorridos en hallazgos según las reglas de la obra, medidas en segundos; PostgreSQL guarda todo, incluidas las detecciones cuadro a cuadro, y por eso se puede cambiar una regla y recalcular sin reprocesar video; Redis es una base de datos en memoria que usamos como fila de espera de los videos. (4) Se usa: FastAPI lee la base y entrega los datos a la web bajo un contrato acordado antes de programar; React es la web que construyen Miguel y Lian; la alerta llega sola al teléfono cuando se guarda un hallazgo grave, con acuse de recibo y un máximo de seis avisos por turno. Abajo, cómo se construye; la integración continua rechaza librerías AGPL. Cerrar con la última línea: el detector y las reglas deciden, la descripción con IA solo describe, y la unidad es el evento. Si preguntan por cámaras en vivo: RTSP es el protocolo de las cámaras IP; la versión 2 se conecta a cámaras en vez de leer archivos y se prueba desde la semana 6 simulando una cámara con un video grabado (MediaMTX).</a:t>
             </a:r>
           </a:p>
         </p:txBody>
@@ -22384,7 +22384,7 @@
                 <a:cs typeface="Calibri"/>
                 <a:sym typeface="Calibri"/>
               </a:rPr>
-              <a:t>Dos etapas: la Etapa 1 decide, la Etapa 2 solo describe. El evento, no el cuadro, es la unidad del sistema.</a:t>
+              <a:t>Cómo viaja el video hasta convertirse en un hallazgo con evidencia. En cada caja: una tecnología y lo que hace.</a:t>
             </a:r>
             <a:endParaRPr/>
           </a:p>
@@ -22424,8 +22424,8 @@
         </p:nvSpPr>
         <p:spPr>
           <a:xfrm>
-            <a:off x="365760" y="2423160"/>
-            <a:ext cx="4389120" cy="640080"/>
+            <a:off x="365760" y="2304288"/>
+            <a:ext cx="8494776" cy="274320"/>
           </a:xfrm>
           <a:prstGeom prst="roundRect">
             <a:avLst>
@@ -22465,17 +22465,26 @@
                 <a:spcPts val="0"/>
               </a:spcBef>
               <a:spcAft>
-                <a:spcPts val="200"/>
+                <a:spcPts val="0"/>
               </a:spcAft>
             </a:pPr>
             <a:r>
-              <a:rPr sz="1100" b="0" i="0">
+              <a:rPr sz="950" b="1">
+                <a:solidFill>
+                  <a:srgbClr val="1F3864"/>
+                </a:solidFill>
+                <a:latin typeface="Calibri"/>
+              </a:rPr>
+              <a:t>A · PROCESADOR DE VIDEO</a:t>
+            </a:r>
+            <a:r>
+              <a:rPr sz="950" b="0">
                 <a:solidFill>
                   <a:srgbClr val="1C1C1C"/>
                 </a:solidFill>
                 <a:latin typeface="Calibri"/>
               </a:rPr>
-              <a:t>FUENTE  ·  v1: carpeta vigilada  ·  v2: cámara RTSP  →  FrameSource (puerto)  ·  el reloj nace en la captura (capture_ts)</a:t>
+              <a:t>  ·  un programa que corre solo en el servidor cada vez que llega un video  ·  módulos propios: gepp-worker, gepp-vision, gepp-core</a:t>
             </a:r>
           </a:p>
         </p:txBody>
@@ -22488,8 +22497,8 @@
         </p:nvSpPr>
         <p:spPr>
           <a:xfrm>
-            <a:off x="5029200" y="2423160"/>
-            <a:ext cx="6720840" cy="640080"/>
+            <a:off x="9171432" y="2304288"/>
+            <a:ext cx="2624328" cy="274320"/>
           </a:xfrm>
           <a:prstGeom prst="roundRect">
             <a:avLst>
@@ -22497,11 +22506,11 @@
             </a:avLst>
           </a:prstGeom>
           <a:solidFill>
-            <a:srgbClr val="FFFFFF"/>
+            <a:srgbClr val="DDE5F0"/>
           </a:solidFill>
           <a:ln w="12700">
             <a:solidFill>
-              <a:srgbClr val="757070"/>
+              <a:srgbClr val="1F3864"/>
             </a:solidFill>
           </a:ln>
           <a:effectLst/>
@@ -22529,41 +22538,72 @@
                 <a:spcPts val="0"/>
               </a:spcBef>
               <a:spcAft>
-                <a:spcPts val="200"/>
+                <a:spcPts val="0"/>
               </a:spcAft>
             </a:pPr>
             <a:r>
-              <a:rPr sz="1000" b="0" i="0">
+              <a:rPr sz="950" b="1">
+                <a:solidFill>
+                  <a:srgbClr val="1F3864"/>
+                </a:solidFill>
+                <a:latin typeface="Calibri"/>
+              </a:rPr>
+              <a:t>B · PLATAFORMA WEB</a:t>
+            </a:r>
+            <a:r>
+              <a:rPr sz="950" b="0">
                 <a:solidFill>
                   <a:srgbClr val="1C1C1C"/>
                 </a:solidFill>
                 <a:latin typeface="Calibri"/>
               </a:rPr>
-              <a:t>Restricciones que ordenan el diseño: umbrales en segundos, nunca en cuadros  ·  5 fps  ·  reglas versionadas en la BD  ·  RF-DETR (Apache-2.0), sin licencias AGPL</a:t>
+              <a:t>  ·  gepp-api y la web</a:t>
             </a:r>
           </a:p>
         </p:txBody>
       </p:sp>
       <p:sp>
         <p:nvSpPr>
-          <p:cNvPr id="160" name="TextBox 159"/>
-          <p:cNvSpPr txBox="1"/>
+          <p:cNvPr id="160" name="Rounded Rectangle 159"/>
+          <p:cNvSpPr/>
           <p:nvPr/>
         </p:nvSpPr>
         <p:spPr>
           <a:xfrm>
-            <a:off x="2697480" y="3127248"/>
-            <a:ext cx="7315200" cy="274320"/>
+            <a:off x="365760" y="2633472"/>
+            <a:ext cx="2624328" cy="512064"/>
           </a:xfrm>
-          <a:prstGeom prst="rect">
-            <a:avLst/>
+          <a:prstGeom prst="roundRect">
+            <a:avLst>
+              <a:gd name="adj" fmla="val 8000"/>
+            </a:avLst>
           </a:prstGeom>
-          <a:noFill/>
+          <a:solidFill>
+            <a:srgbClr val="1F3864"/>
+          </a:solidFill>
+          <a:ln w="12700">
+            <a:solidFill>
+              <a:srgbClr val="1F3864"/>
+            </a:solidFill>
+          </a:ln>
+          <a:effectLst/>
         </p:spPr>
+        <p:style>
+          <a:lnRef idx="1">
+            <a:schemeClr val="accent1"/>
+          </a:lnRef>
+          <a:fillRef idx="3">
+            <a:schemeClr val="accent1"/>
+          </a:fillRef>
+          <a:effectRef idx="2">
+            <a:schemeClr val="accent1"/>
+          </a:effectRef>
+          <a:fontRef idx="minor">
+            <a:schemeClr val="lt1"/>
+          </a:fontRef>
+        </p:style>
         <p:txBody>
-          <a:bodyPr wrap="square" anchor="t" lIns="73152" rIns="73152" tIns="36576" bIns="36576">
-            <a:spAutoFit/>
-          </a:bodyPr>
+          <a:bodyPr rtlCol="0" anchor="ctr" wrap="square" tIns="54864" bIns="54864"/>
           <a:lstStyle/>
           <a:p>
             <a:pPr algn="l">
@@ -22571,17 +22611,36 @@
                 <a:spcPts val="0"/>
               </a:spcBef>
               <a:spcAft>
-                <a:spcPts val="0"/>
+                <a:spcPts val="300"/>
               </a:spcAft>
             </a:pPr>
             <a:r>
-              <a:rPr sz="1000" b="1" i="0">
+              <a:rPr sz="1200" b="1" i="0">
                 <a:solidFill>
-                  <a:srgbClr val="1F3864"/>
+                  <a:srgbClr val="FFFFFF"/>
                 </a:solidFill>
                 <a:latin typeface="Calibri"/>
               </a:rPr>
-              <a:t>ETAPA 1  ·  barata, siempre encendida  ·  DECIDE</a:t>
+              <a:t>1 · ENTRA EL VIDEO</a:t>
+            </a:r>
+          </a:p>
+          <a:p>
+            <a:pPr algn="l">
+              <a:spcBef>
+                <a:spcPts val="0"/>
+              </a:spcBef>
+              <a:spcAft>
+                <a:spcPts val="200"/>
+              </a:spcAft>
+            </a:pPr>
+            <a:r>
+              <a:rPr sz="900" b="0" i="0">
+                <a:solidFill>
+                  <a:srgbClr val="FFFFFF"/>
+                </a:solidFill>
+                <a:latin typeface="Calibri"/>
+              </a:rPr>
+              <a:t>cuándo: cada vez que llega un video</a:t>
             </a:r>
           </a:p>
         </p:txBody>
@@ -22594,8 +22653,8 @@
         </p:nvSpPr>
         <p:spPr>
           <a:xfrm>
-            <a:off x="365760" y="3401568"/>
-            <a:ext cx="2057400" cy="868680"/>
+            <a:off x="365760" y="3218688"/>
+            <a:ext cx="2624328" cy="1243584"/>
           </a:xfrm>
           <a:prstGeom prst="roundRect">
             <a:avLst>
@@ -22639,13 +22698,13 @@
               </a:spcAft>
             </a:pPr>
             <a:r>
-              <a:rPr sz="1200" b="1" i="0">
+              <a:rPr sz="1150" b="1" i="0">
                 <a:solidFill>
                   <a:srgbClr val="1F3864"/>
                 </a:solidFill>
                 <a:latin typeface="Calibri"/>
               </a:rPr>
-              <a:t>Muestreo 5 fps</a:t>
+              <a:t>Carpeta vigilada</a:t>
             </a:r>
           </a:p>
           <a:p>
@@ -22658,13 +22717,13 @@
               </a:spcAft>
             </a:pPr>
             <a:r>
-              <a:rPr sz="1000" b="0" i="0">
+              <a:rPr sz="950" b="0" i="0">
                 <a:solidFill>
                   <a:srgbClr val="1C1C1C"/>
                 </a:solidFill>
                 <a:latin typeface="Calibri"/>
               </a:rPr>
-              <a:t>máscaras de privacidad antes de inferir</a:t>
+              <a:t>La obra deja sus grabaciones en una carpeta y el sistema las toma solo. Cada cuadro queda fechado con la hora real en que se grabó. Más adelante: cámaras en vivo, con el mismo diseño.</a:t>
             </a:r>
           </a:p>
         </p:txBody>
@@ -22677,8 +22736,8 @@
         </p:nvSpPr>
         <p:spPr>
           <a:xfrm>
-            <a:off x="2697480" y="3401568"/>
-            <a:ext cx="2057400" cy="868680"/>
+            <a:off x="365760" y="4535424"/>
+            <a:ext cx="2624328" cy="1243584"/>
           </a:xfrm>
           <a:prstGeom prst="roundRect">
             <a:avLst>
@@ -22722,13 +22781,13 @@
               </a:spcAft>
             </a:pPr>
             <a:r>
-              <a:rPr sz="1200" b="1" i="0">
+              <a:rPr sz="1150" b="1" i="0">
                 <a:solidFill>
                   <a:srgbClr val="1F3864"/>
                 </a:solidFill>
                 <a:latin typeface="Calibri"/>
               </a:rPr>
-              <a:t>Detector RF-DETR</a:t>
+              <a:t>OpenCV</a:t>
             </a:r>
           </a:p>
           <a:p>
@@ -22741,13 +22800,13 @@
               </a:spcAft>
             </a:pPr>
             <a:r>
-              <a:rPr sz="1000" b="0" i="0">
+              <a:rPr sz="950" b="0" i="0">
                 <a:solidFill>
                   <a:srgbClr val="1C1C1C"/>
                 </a:solidFill>
                 <a:latin typeface="Calibri"/>
               </a:rPr>
-              <a:t>casco y chaleco · afinado con datos propios</a:t>
+              <a:t>Abre el video y se queda con 5 cuadros por segundo. Tapa las zonas que no se deben analizar y difumina los rostros antes de guardar cualquier imagen.</a:t>
             </a:r>
           </a:p>
         </p:txBody>
@@ -22760,8 +22819,135 @@
         </p:nvSpPr>
         <p:spPr>
           <a:xfrm>
-            <a:off x="5029200" y="3401568"/>
-            <a:ext cx="2057400" cy="868680"/>
+            <a:off x="3300984" y="2633472"/>
+            <a:ext cx="2624328" cy="512064"/>
+          </a:xfrm>
+          <a:prstGeom prst="roundRect">
+            <a:avLst>
+              <a:gd name="adj" fmla="val 8000"/>
+            </a:avLst>
+          </a:prstGeom>
+          <a:solidFill>
+            <a:srgbClr val="1F3864"/>
+          </a:solidFill>
+          <a:ln w="12700">
+            <a:solidFill>
+              <a:srgbClr val="1F3864"/>
+            </a:solidFill>
+          </a:ln>
+          <a:effectLst/>
+        </p:spPr>
+        <p:style>
+          <a:lnRef idx="1">
+            <a:schemeClr val="accent1"/>
+          </a:lnRef>
+          <a:fillRef idx="3">
+            <a:schemeClr val="accent1"/>
+          </a:fillRef>
+          <a:effectRef idx="2">
+            <a:schemeClr val="accent1"/>
+          </a:effectRef>
+          <a:fontRef idx="minor">
+            <a:schemeClr val="lt1"/>
+          </a:fontRef>
+        </p:style>
+        <p:txBody>
+          <a:bodyPr rtlCol="0" anchor="ctr" wrap="square" tIns="54864" bIns="54864"/>
+          <a:lstStyle/>
+          <a:p>
+            <a:pPr algn="l">
+              <a:spcBef>
+                <a:spcPts val="0"/>
+              </a:spcBef>
+              <a:spcAft>
+                <a:spcPts val="300"/>
+              </a:spcAft>
+            </a:pPr>
+            <a:r>
+              <a:rPr sz="1200" b="1" i="0">
+                <a:solidFill>
+                  <a:srgbClr val="FFFFFF"/>
+                </a:solidFill>
+                <a:latin typeface="Calibri"/>
+              </a:rPr>
+              <a:t>2 · SE DETECTA Y SE SIGUE</a:t>
+            </a:r>
+          </a:p>
+          <a:p>
+            <a:pPr algn="l">
+              <a:spcBef>
+                <a:spcPts val="0"/>
+              </a:spcBef>
+              <a:spcAft>
+                <a:spcPts val="200"/>
+              </a:spcAft>
+            </a:pPr>
+            <a:r>
+              <a:rPr sz="900" b="0" i="0">
+                <a:solidFill>
+                  <a:srgbClr val="FFFFFF"/>
+                </a:solidFill>
+                <a:latin typeface="Calibri"/>
+              </a:rPr>
+              <a:t>cuándo: enseguida, sin que nadie lo pida</a:t>
+            </a:r>
+          </a:p>
+        </p:txBody>
+      </p:sp>
+      <p:sp>
+        <p:nvSpPr>
+          <p:cNvPr id="164" name="Right Arrow 163"/>
+          <p:cNvSpPr/>
+          <p:nvPr/>
+        </p:nvSpPr>
+        <p:spPr>
+          <a:xfrm>
+            <a:off x="3017520" y="2734056"/>
+            <a:ext cx="256032" cy="310896"/>
+          </a:xfrm>
+          <a:prstGeom prst="rightArrow">
+            <a:avLst/>
+          </a:prstGeom>
+          <a:solidFill>
+            <a:srgbClr val="1F3864"/>
+          </a:solidFill>
+          <a:ln>
+            <a:noFill/>
+          </a:ln>
+          <a:effectLst/>
+        </p:spPr>
+        <p:style>
+          <a:lnRef idx="1">
+            <a:schemeClr val="accent1"/>
+          </a:lnRef>
+          <a:fillRef idx="3">
+            <a:schemeClr val="accent1"/>
+          </a:fillRef>
+          <a:effectRef idx="2">
+            <a:schemeClr val="accent1"/>
+          </a:effectRef>
+          <a:fontRef idx="minor">
+            <a:schemeClr val="lt1"/>
+          </a:fontRef>
+        </p:style>
+        <p:txBody>
+          <a:bodyPr rtlCol="0" anchor="ctr"/>
+          <a:lstStyle/>
+          <a:p>
+            <a:pPr algn="ctr"/>
+          </a:p>
+        </p:txBody>
+      </p:sp>
+      <p:sp>
+        <p:nvSpPr>
+          <p:cNvPr id="165" name="Rounded Rectangle 164"/>
+          <p:cNvSpPr/>
+          <p:nvPr/>
+        </p:nvSpPr>
+        <p:spPr>
+          <a:xfrm>
+            <a:off x="3300984" y="3218688"/>
+            <a:ext cx="2624328" cy="804672"/>
           </a:xfrm>
           <a:prstGeom prst="roundRect">
             <a:avLst>
@@ -22805,13 +22991,13 @@
               </a:spcAft>
             </a:pPr>
             <a:r>
-              <a:rPr sz="1200" b="1" i="0">
+              <a:rPr sz="1150" b="1" i="0">
                 <a:solidFill>
                   <a:srgbClr val="1F3864"/>
                 </a:solidFill>
                 <a:latin typeface="Calibri"/>
               </a:rPr>
-              <a:t>Seguidor ByteTrack</a:t>
+              <a:t>RF-DETR · el detector</a:t>
             </a:r>
           </a:p>
           <a:p>
@@ -22824,27 +23010,27 @@
               </a:spcAft>
             </a:pPr>
             <a:r>
-              <a:rPr sz="1000" b="0" i="0">
+              <a:rPr sz="950" b="0" i="0">
                 <a:solidFill>
                   <a:srgbClr val="1C1C1C"/>
                 </a:solidFill>
                 <a:latin typeface="Calibri"/>
               </a:rPr>
-              <a:t>track_id efímeros · sin reidentificación</a:t>
+              <a:t>Marca en cada cuadro dónde hay personas, cascos y chalecos. Se entrena con nuestras imágenes. Licencia libre, por eso no YOLO.</a:t>
             </a:r>
           </a:p>
         </p:txBody>
       </p:sp>
       <p:sp>
         <p:nvSpPr>
-          <p:cNvPr id="164" name="Rounded Rectangle 163"/>
+          <p:cNvPr id="166" name="Rounded Rectangle 165"/>
           <p:cNvSpPr/>
           <p:nvPr/>
         </p:nvSpPr>
         <p:spPr>
           <a:xfrm>
-            <a:off x="7360920" y="3401568"/>
-            <a:ext cx="2057400" cy="868680"/>
+            <a:off x="3300984" y="4096512"/>
+            <a:ext cx="2624328" cy="804672"/>
           </a:xfrm>
           <a:prstGeom prst="roundRect">
             <a:avLst>
@@ -22888,13 +23074,13 @@
               </a:spcAft>
             </a:pPr>
             <a:r>
-              <a:rPr sz="1200" b="1" i="0">
+              <a:rPr sz="1150" b="1" i="0">
                 <a:solidFill>
                   <a:srgbClr val="1F3864"/>
                 </a:solidFill>
                 <a:latin typeface="Calibri"/>
               </a:rPr>
-              <a:t>Detecciones crudas</a:t>
+              <a:t>ByteTrack · el seguidor</a:t>
             </a:r>
           </a:p>
           <a:p>
@@ -22907,27 +23093,27 @@
               </a:spcAft>
             </a:pPr>
             <a:r>
-              <a:rPr sz="1000" b="0" i="0">
+              <a:rPr sz="950" b="0" i="0">
                 <a:solidFill>
                   <a:srgbClr val="1C1C1C"/>
                 </a:solidFill>
                 <a:latin typeface="Calibri"/>
               </a:rPr>
-              <a:t>persistidas por track → recalcular sin GPU</a:t>
+              <a:t>Sigue a cada persona de un cuadro al siguiente y arma su recorrido. Le da un número temporal, nunca una identidad.</a:t>
             </a:r>
           </a:p>
         </p:txBody>
       </p:sp>
       <p:sp>
         <p:nvSpPr>
-          <p:cNvPr id="165" name="Rounded Rectangle 164"/>
+          <p:cNvPr id="167" name="Rounded Rectangle 166"/>
           <p:cNvSpPr/>
           <p:nvPr/>
         </p:nvSpPr>
         <p:spPr>
           <a:xfrm>
-            <a:off x="9692640" y="3401568"/>
-            <a:ext cx="2057400" cy="868680"/>
+            <a:off x="3300984" y="4974336"/>
+            <a:ext cx="2624328" cy="804672"/>
           </a:xfrm>
           <a:prstGeom prst="roundRect">
             <a:avLst>
@@ -22971,13 +23157,13 @@
               </a:spcAft>
             </a:pPr>
             <a:r>
-              <a:rPr sz="1200" b="1" i="0">
+              <a:rPr sz="1150" b="1" i="0">
                 <a:solidFill>
                   <a:srgbClr val="1F3864"/>
                 </a:solidFill>
                 <a:latin typeface="Calibri"/>
               </a:rPr>
-              <a:t>Motor de reglas</a:t>
+              <a:t>ONNX Runtime · la ejecución</a:t>
             </a:r>
           </a:p>
           <a:p>
@@ -22990,207 +23176,27 @@
               </a:spcAft>
             </a:pPr>
             <a:r>
-              <a:rPr sz="1000" b="0" i="0">
+              <a:rPr sz="950" b="0" i="0">
                 <a:solidFill>
                   <a:srgbClr val="1C1C1C"/>
                 </a:solidFill>
                 <a:latin typeface="Calibri"/>
               </a:rPr>
-              <a:t>zona · turno · severidad · segundos</a:t>
+              <a:t>Qué es: motor que ejecuta modelos ya entrenados. Para qué: que el modelo corra en cualquier computador, sin tarjeta gráfica.</a:t>
             </a:r>
           </a:p>
         </p:txBody>
       </p:sp>
-      <p:cxnSp>
-        <p:nvCxnSpPr>
-          <p:cNvPr id="166" name="Connector 165"/>
-          <p:cNvCxnSpPr/>
-          <p:nvPr/>
-        </p:nvCxnSpPr>
-        <p:spPr>
-          <a:xfrm>
-            <a:off x="2423160" y="3835908"/>
-            <a:ext cx="274320" cy="0"/>
-          </a:xfrm>
-          <a:prstGeom prst="line">
-            <a:avLst/>
-          </a:prstGeom>
-          <a:ln w="19050">
-            <a:solidFill>
-              <a:srgbClr val="1F3864"/>
-            </a:solidFill>
-            <a:tailEnd type="triangle" w="med" len="med"/>
-          </a:ln>
-        </p:spPr>
-        <p:style>
-          <a:lnRef idx="2">
-            <a:schemeClr val="accent1"/>
-          </a:lnRef>
-          <a:fillRef idx="0">
-            <a:schemeClr val="accent1"/>
-          </a:fillRef>
-          <a:effectRef idx="1">
-            <a:schemeClr val="accent1"/>
-          </a:effectRef>
-          <a:fontRef idx="minor">
-            <a:schemeClr val="tx1"/>
-          </a:fontRef>
-        </p:style>
-      </p:cxnSp>
-      <p:cxnSp>
-        <p:nvCxnSpPr>
-          <p:cNvPr id="167" name="Connector 166"/>
-          <p:cNvCxnSpPr/>
-          <p:nvPr/>
-        </p:nvCxnSpPr>
-        <p:spPr>
-          <a:xfrm>
-            <a:off x="4754880" y="3835908"/>
-            <a:ext cx="274320" cy="0"/>
-          </a:xfrm>
-          <a:prstGeom prst="line">
-            <a:avLst/>
-          </a:prstGeom>
-          <a:ln w="19050">
-            <a:solidFill>
-              <a:srgbClr val="1F3864"/>
-            </a:solidFill>
-            <a:tailEnd type="triangle" w="med" len="med"/>
-          </a:ln>
-        </p:spPr>
-        <p:style>
-          <a:lnRef idx="2">
-            <a:schemeClr val="accent1"/>
-          </a:lnRef>
-          <a:fillRef idx="0">
-            <a:schemeClr val="accent1"/>
-          </a:fillRef>
-          <a:effectRef idx="1">
-            <a:schemeClr val="accent1"/>
-          </a:effectRef>
-          <a:fontRef idx="minor">
-            <a:schemeClr val="tx1"/>
-          </a:fontRef>
-        </p:style>
-      </p:cxnSp>
-      <p:cxnSp>
-        <p:nvCxnSpPr>
-          <p:cNvPr id="168" name="Connector 167"/>
-          <p:cNvCxnSpPr/>
-          <p:nvPr/>
-        </p:nvCxnSpPr>
-        <p:spPr>
-          <a:xfrm>
-            <a:off x="7086600" y="3835908"/>
-            <a:ext cx="274320" cy="0"/>
-          </a:xfrm>
-          <a:prstGeom prst="line">
-            <a:avLst/>
-          </a:prstGeom>
-          <a:ln w="19050">
-            <a:solidFill>
-              <a:srgbClr val="1F3864"/>
-            </a:solidFill>
-            <a:tailEnd type="triangle" w="med" len="med"/>
-          </a:ln>
-        </p:spPr>
-        <p:style>
-          <a:lnRef idx="2">
-            <a:schemeClr val="accent1"/>
-          </a:lnRef>
-          <a:fillRef idx="0">
-            <a:schemeClr val="accent1"/>
-          </a:fillRef>
-          <a:effectRef idx="1">
-            <a:schemeClr val="accent1"/>
-          </a:effectRef>
-          <a:fontRef idx="minor">
-            <a:schemeClr val="tx1"/>
-          </a:fontRef>
-        </p:style>
-      </p:cxnSp>
-      <p:cxnSp>
-        <p:nvCxnSpPr>
-          <p:cNvPr id="169" name="Connector 168"/>
-          <p:cNvCxnSpPr/>
-          <p:nvPr/>
-        </p:nvCxnSpPr>
-        <p:spPr>
-          <a:xfrm>
-            <a:off x="9418320" y="3835908"/>
-            <a:ext cx="274320" cy="0"/>
-          </a:xfrm>
-          <a:prstGeom prst="line">
-            <a:avLst/>
-          </a:prstGeom>
-          <a:ln w="19050">
-            <a:solidFill>
-              <a:srgbClr val="1F3864"/>
-            </a:solidFill>
-            <a:tailEnd type="triangle" w="med" len="med"/>
-          </a:ln>
-        </p:spPr>
-        <p:style>
-          <a:lnRef idx="2">
-            <a:schemeClr val="accent1"/>
-          </a:lnRef>
-          <a:fillRef idx="0">
-            <a:schemeClr val="accent1"/>
-          </a:fillRef>
-          <a:effectRef idx="1">
-            <a:schemeClr val="accent1"/>
-          </a:effectRef>
-          <a:fontRef idx="minor">
-            <a:schemeClr val="tx1"/>
-          </a:fontRef>
-        </p:style>
-      </p:cxnSp>
-      <p:cxnSp>
-        <p:nvCxnSpPr>
-          <p:cNvPr id="170" name="Connector 169"/>
-          <p:cNvCxnSpPr/>
-          <p:nvPr/>
-        </p:nvCxnSpPr>
-        <p:spPr>
-          <a:xfrm>
-            <a:off x="1394460" y="3063239"/>
-            <a:ext cx="0" cy="338329"/>
-          </a:xfrm>
-          <a:prstGeom prst="line">
-            <a:avLst/>
-          </a:prstGeom>
-          <a:ln w="19050">
-            <a:solidFill>
-              <a:srgbClr val="1F3864"/>
-            </a:solidFill>
-            <a:tailEnd type="triangle" w="med" len="med"/>
-          </a:ln>
-        </p:spPr>
-        <p:style>
-          <a:lnRef idx="2">
-            <a:schemeClr val="accent1"/>
-          </a:lnRef>
-          <a:fillRef idx="0">
-            <a:schemeClr val="accent1"/>
-          </a:fillRef>
-          <a:effectRef idx="1">
-            <a:schemeClr val="accent1"/>
-          </a:effectRef>
-          <a:fontRef idx="minor">
-            <a:schemeClr val="tx1"/>
-          </a:fontRef>
-        </p:style>
-      </p:cxnSp>
       <p:sp>
         <p:nvSpPr>
-          <p:cNvPr id="171" name="Rounded Rectangle 170"/>
+          <p:cNvPr id="168" name="Rounded Rectangle 167"/>
           <p:cNvSpPr/>
           <p:nvPr/>
         </p:nvSpPr>
         <p:spPr>
           <a:xfrm>
-            <a:off x="365760" y="4709160"/>
-            <a:ext cx="11384280" cy="457200"/>
+            <a:off x="6236208" y="2633472"/>
+            <a:ext cx="2624328" cy="512064"/>
           </a:xfrm>
           <a:prstGeom prst="roundRect">
             <a:avLst>
@@ -23230,7 +23236,7 @@
                 <a:spcPts val="0"/>
               </a:spcBef>
               <a:spcAft>
-                <a:spcPts val="200"/>
+                <a:spcPts val="300"/>
               </a:spcAft>
             </a:pPr>
             <a:r>
@@ -23240,57 +23246,84 @@
                 </a:solidFill>
                 <a:latin typeface="Calibri"/>
               </a:rPr>
-              <a:t>HALLAZGO  ·  inicio  ·  término  ·  zona  ·  severidad  ·  evidencia        (un turno: 12 hallazgos, no 200.000 cuadros)</a:t>
+              <a:t>3 · SE DECIDE Y SE GUARDA</a:t>
+            </a:r>
+          </a:p>
+          <a:p>
+            <a:pPr algn="l">
+              <a:spcBef>
+                <a:spcPts val="0"/>
+              </a:spcBef>
+              <a:spcAft>
+                <a:spcPts val="200"/>
+              </a:spcAft>
+            </a:pPr>
+            <a:r>
+              <a:rPr sz="900" b="0" i="0">
+                <a:solidFill>
+                  <a:srgbClr val="FFFFFF"/>
+                </a:solidFill>
+                <a:latin typeface="Calibri"/>
+              </a:rPr>
+              <a:t>cuándo: al terminar cada video</a:t>
             </a:r>
           </a:p>
         </p:txBody>
       </p:sp>
-      <p:cxnSp>
-        <p:nvCxnSpPr>
-          <p:cNvPr id="172" name="Connector 171"/>
-          <p:cNvCxnSpPr/>
-          <p:nvPr/>
-        </p:nvCxnSpPr>
-        <p:spPr>
-          <a:xfrm>
-            <a:off x="10721340" y="4270248"/>
-            <a:ext cx="0" cy="438912"/>
-          </a:xfrm>
-          <a:prstGeom prst="line">
-            <a:avLst/>
-          </a:prstGeom>
-          <a:ln w="19050">
-            <a:solidFill>
-              <a:srgbClr val="1F3864"/>
-            </a:solidFill>
-            <a:tailEnd type="triangle" w="med" len="med"/>
-          </a:ln>
-        </p:spPr>
-        <p:style>
-          <a:lnRef idx="2">
-            <a:schemeClr val="accent1"/>
-          </a:lnRef>
-          <a:fillRef idx="0">
-            <a:schemeClr val="accent1"/>
-          </a:fillRef>
-          <a:effectRef idx="1">
-            <a:schemeClr val="accent1"/>
-          </a:effectRef>
-          <a:fontRef idx="minor">
-            <a:schemeClr val="tx1"/>
-          </a:fontRef>
-        </p:style>
-      </p:cxnSp>
       <p:sp>
         <p:nvSpPr>
-          <p:cNvPr id="173" name="Rounded Rectangle 172"/>
+          <p:cNvPr id="169" name="Right Arrow 168"/>
           <p:cNvSpPr/>
           <p:nvPr/>
         </p:nvSpPr>
         <p:spPr>
           <a:xfrm>
-            <a:off x="365760" y="5486400"/>
-            <a:ext cx="2057400" cy="914400"/>
+            <a:off x="5952744" y="2734056"/>
+            <a:ext cx="256032" cy="310896"/>
+          </a:xfrm>
+          <a:prstGeom prst="rightArrow">
+            <a:avLst/>
+          </a:prstGeom>
+          <a:solidFill>
+            <a:srgbClr val="1F3864"/>
+          </a:solidFill>
+          <a:ln>
+            <a:noFill/>
+          </a:ln>
+          <a:effectLst/>
+        </p:spPr>
+        <p:style>
+          <a:lnRef idx="1">
+            <a:schemeClr val="accent1"/>
+          </a:lnRef>
+          <a:fillRef idx="3">
+            <a:schemeClr val="accent1"/>
+          </a:fillRef>
+          <a:effectRef idx="2">
+            <a:schemeClr val="accent1"/>
+          </a:effectRef>
+          <a:fontRef idx="minor">
+            <a:schemeClr val="lt1"/>
+          </a:fontRef>
+        </p:style>
+        <p:txBody>
+          <a:bodyPr rtlCol="0" anchor="ctr"/>
+          <a:lstStyle/>
+          <a:p>
+            <a:pPr algn="ctr"/>
+          </a:p>
+        </p:txBody>
+      </p:sp>
+      <p:sp>
+        <p:nvSpPr>
+          <p:cNvPr id="170" name="Rounded Rectangle 169"/>
+          <p:cNvSpPr/>
+          <p:nvPr/>
+        </p:nvSpPr>
+        <p:spPr>
+          <a:xfrm>
+            <a:off x="6236208" y="3218688"/>
+            <a:ext cx="2624328" cy="804672"/>
           </a:xfrm>
           <a:prstGeom prst="roundRect">
             <a:avLst>
@@ -23334,13 +23367,13 @@
               </a:spcAft>
             </a:pPr>
             <a:r>
-              <a:rPr sz="1200" b="1" i="0">
+              <a:rPr sz="1150" b="1" i="0">
                 <a:solidFill>
                   <a:srgbClr val="1F3864"/>
                 </a:solidFill>
                 <a:latin typeface="Calibri"/>
               </a:rPr>
-              <a:t>Evidencia</a:t>
+              <a:t>Motor de reglas</a:t>
             </a:r>
           </a:p>
           <a:p>
@@ -23353,27 +23386,27 @@
               </a:spcAft>
             </a:pPr>
             <a:r>
-              <a:rPr sz="1000" b="0" i="0">
+              <a:rPr sz="950" b="0" i="0">
                 <a:solidFill>
                   <a:srgbClr val="1C1C1C"/>
                 </a:solidFill>
                 <a:latin typeface="Calibri"/>
               </a:rPr>
-              <a:t>recorte con rostro difuminado</a:t>
+              <a:t>Aplica las reglas de la obra: X segundos sin casco donde se exige crean un hallazgo con inicio, término, zona y severidad.</a:t>
             </a:r>
           </a:p>
         </p:txBody>
       </p:sp>
       <p:sp>
         <p:nvSpPr>
-          <p:cNvPr id="174" name="Rounded Rectangle 173"/>
+          <p:cNvPr id="171" name="Rounded Rectangle 170"/>
           <p:cNvSpPr/>
           <p:nvPr/>
         </p:nvSpPr>
         <p:spPr>
           <a:xfrm>
-            <a:off x="2697480" y="5486400"/>
-            <a:ext cx="2057400" cy="914400"/>
+            <a:off x="6236208" y="4096512"/>
+            <a:ext cx="2624328" cy="804672"/>
           </a:xfrm>
           <a:prstGeom prst="roundRect">
             <a:avLst>
@@ -23417,13 +23450,13 @@
               </a:spcAft>
             </a:pPr>
             <a:r>
-              <a:rPr sz="1200" b="1" i="0">
+              <a:rPr sz="1150" b="1" i="0">
                 <a:solidFill>
                   <a:srgbClr val="1F3864"/>
                 </a:solidFill>
                 <a:latin typeface="Calibri"/>
               </a:rPr>
-              <a:t>Notificación</a:t>
+              <a:t>PostgreSQL · la base de datos</a:t>
             </a:r>
           </a:p>
           <a:p>
@@ -23436,27 +23469,27 @@
               </a:spcAft>
             </a:pPr>
             <a:r>
-              <a:rPr sz="1000" b="0" i="0">
+              <a:rPr sz="950" b="0" i="0">
                 <a:solidFill>
                   <a:srgbClr val="1C1C1C"/>
                 </a:solidFill>
                 <a:latin typeface="Calibri"/>
               </a:rPr>
-              <a:t>cola de salida · acuse · supresión · ≤ 6 avisos por turno</a:t>
+              <a:t>Guarda hallazgos, detecciones cuadro a cuadro, reglas con historial y acuses. Es el punto de encuentro entre A y B.</a:t>
             </a:r>
           </a:p>
         </p:txBody>
       </p:sp>
       <p:sp>
         <p:nvSpPr>
-          <p:cNvPr id="175" name="Rounded Rectangle 174"/>
+          <p:cNvPr id="172" name="Rounded Rectangle 171"/>
           <p:cNvSpPr/>
           <p:nvPr/>
         </p:nvSpPr>
         <p:spPr>
           <a:xfrm>
-            <a:off x="5029200" y="5486400"/>
-            <a:ext cx="2057400" cy="914400"/>
+            <a:off x="6236208" y="4974336"/>
+            <a:ext cx="2624328" cy="804672"/>
           </a:xfrm>
           <a:prstGeom prst="roundRect">
             <a:avLst>
@@ -23500,13 +23533,13 @@
               </a:spcAft>
             </a:pPr>
             <a:r>
-              <a:rPr sz="1200" b="1" i="0">
+              <a:rPr sz="1150" b="1" i="0">
                 <a:solidFill>
                   <a:srgbClr val="1F3864"/>
                 </a:solidFill>
                 <a:latin typeface="Calibri"/>
               </a:rPr>
-              <a:t>Etapa 2 · VLM (extensión)</a:t>
+              <a:t>Redis · la fila de espera</a:t>
             </a:r>
           </a:p>
           <a:p>
@@ -23519,27 +23552,154 @@
               </a:spcAft>
             </a:pPr>
             <a:r>
-              <a:rPr sz="1000" b="0" i="0">
+              <a:rPr sz="950" b="0" i="0">
                 <a:solidFill>
                   <a:srgbClr val="1C1C1C"/>
                 </a:solidFill>
                 <a:latin typeface="Calibri"/>
               </a:rPr>
-              <a:t>describe el hallazgo · NO decide</a:t>
+              <a:t>Qué es: base de datos en memoria, muy rápida. Para qué: que los videos hagan fila y se procesen de a uno, sin perderse.</a:t>
             </a:r>
           </a:p>
         </p:txBody>
       </p:sp>
       <p:sp>
         <p:nvSpPr>
-          <p:cNvPr id="176" name="Rounded Rectangle 175"/>
+          <p:cNvPr id="173" name="Rounded Rectangle 172"/>
           <p:cNvSpPr/>
           <p:nvPr/>
         </p:nvSpPr>
         <p:spPr>
           <a:xfrm>
-            <a:off x="7360920" y="5486400"/>
-            <a:ext cx="2057400" cy="914400"/>
+            <a:off x="9171432" y="2633472"/>
+            <a:ext cx="2624328" cy="512064"/>
+          </a:xfrm>
+          <a:prstGeom prst="roundRect">
+            <a:avLst>
+              <a:gd name="adj" fmla="val 8000"/>
+            </a:avLst>
+          </a:prstGeom>
+          <a:solidFill>
+            <a:srgbClr val="1F3864"/>
+          </a:solidFill>
+          <a:ln w="12700">
+            <a:solidFill>
+              <a:srgbClr val="1F3864"/>
+            </a:solidFill>
+          </a:ln>
+          <a:effectLst/>
+        </p:spPr>
+        <p:style>
+          <a:lnRef idx="1">
+            <a:schemeClr val="accent1"/>
+          </a:lnRef>
+          <a:fillRef idx="3">
+            <a:schemeClr val="accent1"/>
+          </a:fillRef>
+          <a:effectRef idx="2">
+            <a:schemeClr val="accent1"/>
+          </a:effectRef>
+          <a:fontRef idx="minor">
+            <a:schemeClr val="lt1"/>
+          </a:fontRef>
+        </p:style>
+        <p:txBody>
+          <a:bodyPr rtlCol="0" anchor="ctr" wrap="square" tIns="54864" bIns="54864"/>
+          <a:lstStyle/>
+          <a:p>
+            <a:pPr algn="l">
+              <a:spcBef>
+                <a:spcPts val="0"/>
+              </a:spcBef>
+              <a:spcAft>
+                <a:spcPts val="300"/>
+              </a:spcAft>
+            </a:pPr>
+            <a:r>
+              <a:rPr sz="1200" b="1" i="0">
+                <a:solidFill>
+                  <a:srgbClr val="FFFFFF"/>
+                </a:solidFill>
+                <a:latin typeface="Calibri"/>
+              </a:rPr>
+              <a:t>4 · SE USA</a:t>
+            </a:r>
+          </a:p>
+          <a:p>
+            <a:pPr algn="l">
+              <a:spcBef>
+                <a:spcPts val="0"/>
+              </a:spcBef>
+              <a:spcAft>
+                <a:spcPts val="200"/>
+              </a:spcAft>
+            </a:pPr>
+            <a:r>
+              <a:rPr sz="900" b="0" i="0">
+                <a:solidFill>
+                  <a:srgbClr val="FFFFFF"/>
+                </a:solidFill>
+                <a:latin typeface="Calibri"/>
+              </a:rPr>
+              <a:t>cuándo: cuando el usuario abre el navegador</a:t>
+            </a:r>
+          </a:p>
+        </p:txBody>
+      </p:sp>
+      <p:sp>
+        <p:nvSpPr>
+          <p:cNvPr id="174" name="Right Arrow 173"/>
+          <p:cNvSpPr/>
+          <p:nvPr/>
+        </p:nvSpPr>
+        <p:spPr>
+          <a:xfrm>
+            <a:off x="8887967" y="2734056"/>
+            <a:ext cx="256032" cy="310896"/>
+          </a:xfrm>
+          <a:prstGeom prst="rightArrow">
+            <a:avLst/>
+          </a:prstGeom>
+          <a:solidFill>
+            <a:srgbClr val="1F3864"/>
+          </a:solidFill>
+          <a:ln>
+            <a:noFill/>
+          </a:ln>
+          <a:effectLst/>
+        </p:spPr>
+        <p:style>
+          <a:lnRef idx="1">
+            <a:schemeClr val="accent1"/>
+          </a:lnRef>
+          <a:fillRef idx="3">
+            <a:schemeClr val="accent1"/>
+          </a:fillRef>
+          <a:effectRef idx="2">
+            <a:schemeClr val="accent1"/>
+          </a:effectRef>
+          <a:fontRef idx="minor">
+            <a:schemeClr val="lt1"/>
+          </a:fontRef>
+        </p:style>
+        <p:txBody>
+          <a:bodyPr rtlCol="0" anchor="ctr"/>
+          <a:lstStyle/>
+          <a:p>
+            <a:pPr algn="ctr"/>
+          </a:p>
+        </p:txBody>
+      </p:sp>
+      <p:sp>
+        <p:nvSpPr>
+          <p:cNvPr id="175" name="Rounded Rectangle 174"/>
+          <p:cNvSpPr/>
+          <p:nvPr/>
+        </p:nvSpPr>
+        <p:spPr>
+          <a:xfrm>
+            <a:off x="9171432" y="3218688"/>
+            <a:ext cx="2624328" cy="804672"/>
           </a:xfrm>
           <a:prstGeom prst="roundRect">
             <a:avLst>
@@ -23583,13 +23743,13 @@
               </a:spcAft>
             </a:pPr>
             <a:r>
-              <a:rPr sz="1200" b="1" i="0">
+              <a:rPr sz="1150" b="1" i="0">
                 <a:solidFill>
                   <a:srgbClr val="1F3864"/>
                 </a:solidFill>
                 <a:latin typeface="Calibri"/>
               </a:rPr>
-              <a:t>API FastAPI</a:t>
+              <a:t>FastAPI · la API</a:t>
             </a:r>
           </a:p>
           <a:p>
@@ -23602,27 +23762,27 @@
               </a:spcAft>
             </a:pPr>
             <a:r>
-              <a:rPr sz="1000" b="0" i="0">
+              <a:rPr sz="950" b="0" i="0">
                 <a:solidFill>
                   <a:srgbClr val="1C1C1C"/>
                 </a:solidFill>
                 <a:latin typeface="Calibri"/>
               </a:rPr>
-              <a:t>PostgreSQL + Redis · contrato OpenAPI</a:t>
+              <a:t>Servicio que lee la base de datos y entrega la información a la web bajo un contrato fijo (OpenAPI). Corre sin GPU.</a:t>
             </a:r>
           </a:p>
         </p:txBody>
       </p:sp>
       <p:sp>
         <p:nvSpPr>
-          <p:cNvPr id="177" name="Rounded Rectangle 176"/>
+          <p:cNvPr id="176" name="Rounded Rectangle 175"/>
           <p:cNvSpPr/>
           <p:nvPr/>
         </p:nvSpPr>
         <p:spPr>
           <a:xfrm>
-            <a:off x="9692640" y="5486400"/>
-            <a:ext cx="2057400" cy="914400"/>
+            <a:off x="9171432" y="4096512"/>
+            <a:ext cx="2624328" cy="804672"/>
           </a:xfrm>
           <a:prstGeom prst="roundRect">
             <a:avLst>
@@ -23666,17 +23826,488 @@
               </a:spcAft>
             </a:pPr>
             <a:r>
-              <a:rPr sz="1200" b="1" i="0">
+              <a:rPr sz="1150" b="1" i="0">
                 <a:solidFill>
                   <a:srgbClr val="1F3864"/>
                 </a:solidFill>
                 <a:latin typeface="Calibri"/>
               </a:rPr>
-              <a:t>Web React</a:t>
+              <a:t>React · la web</a:t>
             </a:r>
           </a:p>
           <a:p>
             <a:pPr algn="l">
+              <a:spcBef>
+                <a:spcPts val="0"/>
+              </a:spcBef>
+              <a:spcAft>
+                <a:spcPts val="200"/>
+              </a:spcAft>
+            </a:pPr>
+            <a:r>
+              <a:rPr sz="950" b="0" i="0">
+                <a:solidFill>
+                  <a:srgbClr val="1C1C1C"/>
+                </a:solidFill>
+                <a:latin typeface="Calibri"/>
+              </a:rPr>
+              <a:t>Bandeja de hallazgos, visor de evidencia, reglas y tablero. Miguel y Lian la construyen contra un servidor simulado (Prism).</a:t>
+            </a:r>
+          </a:p>
+        </p:txBody>
+      </p:sp>
+      <p:sp>
+        <p:nvSpPr>
+          <p:cNvPr id="177" name="Rounded Rectangle 176"/>
+          <p:cNvSpPr/>
+          <p:nvPr/>
+        </p:nvSpPr>
+        <p:spPr>
+          <a:xfrm>
+            <a:off x="9171432" y="4974336"/>
+            <a:ext cx="2624328" cy="804672"/>
+          </a:xfrm>
+          <a:prstGeom prst="roundRect">
+            <a:avLst>
+              <a:gd name="adj" fmla="val 8000"/>
+            </a:avLst>
+          </a:prstGeom>
+          <a:solidFill>
+            <a:srgbClr val="F2F2F2"/>
+          </a:solidFill>
+          <a:ln w="12700">
+            <a:solidFill>
+              <a:srgbClr val="1F3864"/>
+            </a:solidFill>
+          </a:ln>
+          <a:effectLst/>
+        </p:spPr>
+        <p:style>
+          <a:lnRef idx="1">
+            <a:schemeClr val="accent1"/>
+          </a:lnRef>
+          <a:fillRef idx="3">
+            <a:schemeClr val="accent1"/>
+          </a:fillRef>
+          <a:effectRef idx="2">
+            <a:schemeClr val="accent1"/>
+          </a:effectRef>
+          <a:fontRef idx="minor">
+            <a:schemeClr val="lt1"/>
+          </a:fontRef>
+        </p:style>
+        <p:txBody>
+          <a:bodyPr rtlCol="0" anchor="t" wrap="square" tIns="54864" bIns="54864"/>
+          <a:lstStyle/>
+          <a:p>
+            <a:pPr algn="l">
+              <a:spcBef>
+                <a:spcPts val="0"/>
+              </a:spcBef>
+              <a:spcAft>
+                <a:spcPts val="300"/>
+              </a:spcAft>
+            </a:pPr>
+            <a:r>
+              <a:rPr sz="1150" b="1" i="0">
+                <a:solidFill>
+                  <a:srgbClr val="1F3864"/>
+                </a:solidFill>
+                <a:latin typeface="Calibri"/>
+              </a:rPr>
+              <a:t>Telegram o correo · la alerta</a:t>
+            </a:r>
+          </a:p>
+          <a:p>
+            <a:pPr algn="l">
+              <a:spcBef>
+                <a:spcPts val="0"/>
+              </a:spcBef>
+              <a:spcAft>
+                <a:spcPts val="200"/>
+              </a:spcAft>
+            </a:pPr>
+            <a:r>
+              <a:rPr sz="950" b="0" i="0">
+                <a:solidFill>
+                  <a:srgbClr val="1C1C1C"/>
+                </a:solidFill>
+                <a:latin typeface="Calibri"/>
+              </a:rPr>
+              <a:t>Llega sola al teléfono cuando se guarda un hallazgo grave. Acuse de recibo y máximo 6 avisos por turno.</a:t>
+            </a:r>
+          </a:p>
+        </p:txBody>
+      </p:sp>
+      <p:sp>
+        <p:nvSpPr>
+          <p:cNvPr id="178" name="Rounded Rectangle 177"/>
+          <p:cNvSpPr/>
+          <p:nvPr/>
+        </p:nvSpPr>
+        <p:spPr>
+          <a:xfrm>
+            <a:off x="365760" y="5852160"/>
+            <a:ext cx="11430000" cy="512064"/>
+          </a:xfrm>
+          <a:prstGeom prst="roundRect">
+            <a:avLst>
+              <a:gd name="adj" fmla="val 8000"/>
+            </a:avLst>
+          </a:prstGeom>
+          <a:solidFill>
+            <a:srgbClr val="DDE5F0"/>
+          </a:solidFill>
+          <a:ln w="12700">
+            <a:solidFill>
+              <a:srgbClr val="1F3864"/>
+            </a:solidFill>
+          </a:ln>
+          <a:effectLst/>
+        </p:spPr>
+        <p:style>
+          <a:lnRef idx="1">
+            <a:schemeClr val="accent1"/>
+          </a:lnRef>
+          <a:fillRef idx="3">
+            <a:schemeClr val="accent1"/>
+          </a:fillRef>
+          <a:effectRef idx="2">
+            <a:schemeClr val="accent1"/>
+          </a:effectRef>
+          <a:fontRef idx="minor">
+            <a:schemeClr val="lt1"/>
+          </a:fontRef>
+        </p:style>
+        <p:txBody>
+          <a:bodyPr rtlCol="0" anchor="t" wrap="square" tIns="54864" bIns="54864"/>
+          <a:lstStyle/>
+          <a:p>
+            <a:pPr algn="ctr"/>
+          </a:p>
+        </p:txBody>
+      </p:sp>
+      <p:sp>
+        <p:nvSpPr>
+          <p:cNvPr id="179" name="TextBox 178"/>
+          <p:cNvSpPr txBox="1"/>
+          <p:nvPr/>
+        </p:nvSpPr>
+        <p:spPr>
+          <a:xfrm>
+            <a:off x="411480" y="5852160"/>
+            <a:ext cx="1463040" cy="512064"/>
+          </a:xfrm>
+          <a:prstGeom prst="rect">
+            <a:avLst/>
+          </a:prstGeom>
+          <a:noFill/>
+        </p:spPr>
+        <p:txBody>
+          <a:bodyPr wrap="square" anchor="ctr" lIns="73152" rIns="73152" tIns="36576" bIns="36576">
+            <a:spAutoFit/>
+          </a:bodyPr>
+          <a:lstStyle/>
+          <a:p>
+            <a:pPr algn="l">
+              <a:spcBef>
+                <a:spcPts val="0"/>
+              </a:spcBef>
+              <a:spcAft>
+                <a:spcPts val="0"/>
+              </a:spcAft>
+            </a:pPr>
+            <a:r>
+              <a:rPr sz="1100" b="1" i="0">
+                <a:solidFill>
+                  <a:srgbClr val="1F3864"/>
+                </a:solidFill>
+                <a:latin typeface="Calibri"/>
+              </a:rPr>
+              <a:t>CÓMO SE</a:t>
+            </a:r>
+          </a:p>
+          <a:p>
+            <a:pPr algn="l">
+              <a:spcBef>
+                <a:spcPts val="0"/>
+              </a:spcBef>
+              <a:spcAft>
+                <a:spcPts val="0"/>
+              </a:spcAft>
+            </a:pPr>
+            <a:r>
+              <a:rPr sz="1100" b="1" i="0">
+                <a:solidFill>
+                  <a:srgbClr val="1F3864"/>
+                </a:solidFill>
+                <a:latin typeface="Calibri"/>
+              </a:rPr>
+              <a:t>CONSTRUYE</a:t>
+            </a:r>
+          </a:p>
+        </p:txBody>
+      </p:sp>
+      <p:sp>
+        <p:nvSpPr>
+          <p:cNvPr id="180" name="TextBox 179"/>
+          <p:cNvSpPr txBox="1"/>
+          <p:nvPr/>
+        </p:nvSpPr>
+        <p:spPr>
+          <a:xfrm>
+            <a:off x="1920240" y="5870448"/>
+            <a:ext cx="3291840" cy="475488"/>
+          </a:xfrm>
+          <a:prstGeom prst="rect">
+            <a:avLst/>
+          </a:prstGeom>
+          <a:noFill/>
+        </p:spPr>
+        <p:txBody>
+          <a:bodyPr wrap="square" anchor="ctr" lIns="73152" rIns="73152" tIns="36576" bIns="36576">
+            <a:spAutoFit/>
+          </a:bodyPr>
+          <a:lstStyle/>
+          <a:p>
+            <a:pPr algn="l">
+              <a:spcBef>
+                <a:spcPts val="0"/>
+              </a:spcBef>
+              <a:spcAft>
+                <a:spcPts val="100"/>
+              </a:spcAft>
+            </a:pPr>
+            <a:r>
+              <a:rPr sz="900" b="1">
+                <a:solidFill>
+                  <a:srgbClr val="1F3864"/>
+                </a:solidFill>
+                <a:latin typeface="Calibri"/>
+              </a:rPr>
+              <a:t>uv</a:t>
+            </a:r>
+            <a:r>
+              <a:rPr sz="900" b="0">
+                <a:solidFill>
+                  <a:srgbClr val="1C1C1C"/>
+                </a:solidFill>
+                <a:latin typeface="Calibri"/>
+              </a:rPr>
+              <a:t> · un solo entorno Python para todos los módulos</a:t>
+            </a:r>
+          </a:p>
+          <a:p>
+            <a:pPr algn="l">
+              <a:spcBef>
+                <a:spcPts val="0"/>
+              </a:spcBef>
+              <a:spcAft>
+                <a:spcPts val="100"/>
+              </a:spcAft>
+            </a:pPr>
+            <a:r>
+              <a:rPr sz="900" b="1">
+                <a:solidFill>
+                  <a:srgbClr val="1F3864"/>
+                </a:solidFill>
+                <a:latin typeface="Calibri"/>
+              </a:rPr>
+              <a:t>pytest · mypy · ruff</a:t>
+            </a:r>
+            <a:r>
+              <a:rPr sz="900" b="0">
+                <a:solidFill>
+                  <a:srgbClr val="1C1C1C"/>
+                </a:solidFill>
+                <a:latin typeface="Calibri"/>
+              </a:rPr>
+              <a:t> · pruebas, tipos y estilo automáticos</a:t>
+            </a:r>
+          </a:p>
+        </p:txBody>
+      </p:sp>
+      <p:sp>
+        <p:nvSpPr>
+          <p:cNvPr id="181" name="TextBox 180"/>
+          <p:cNvSpPr txBox="1"/>
+          <p:nvPr/>
+        </p:nvSpPr>
+        <p:spPr>
+          <a:xfrm>
+            <a:off x="5212080" y="5870448"/>
+            <a:ext cx="3291840" cy="475488"/>
+          </a:xfrm>
+          <a:prstGeom prst="rect">
+            <a:avLst/>
+          </a:prstGeom>
+          <a:noFill/>
+        </p:spPr>
+        <p:txBody>
+          <a:bodyPr wrap="square" anchor="ctr" lIns="73152" rIns="73152" tIns="36576" bIns="36576">
+            <a:spAutoFit/>
+          </a:bodyPr>
+          <a:lstStyle/>
+          <a:p>
+            <a:pPr algn="l">
+              <a:spcBef>
+                <a:spcPts val="0"/>
+              </a:spcBef>
+              <a:spcAft>
+                <a:spcPts val="100"/>
+              </a:spcAft>
+            </a:pPr>
+            <a:r>
+              <a:rPr sz="900" b="1">
+                <a:solidFill>
+                  <a:srgbClr val="1F3864"/>
+                </a:solidFill>
+                <a:latin typeface="Calibri"/>
+              </a:rPr>
+              <a:t>GitHub Actions</a:t>
+            </a:r>
+            <a:r>
+              <a:rPr sz="900" b="0">
+                <a:solidFill>
+                  <a:srgbClr val="1C1C1C"/>
+                </a:solidFill>
+                <a:latin typeface="Calibri"/>
+              </a:rPr>
+              <a:t> · prueba cada cambio; rechaza librerías AGPL (como YOLO), que obligarían a liberar todo el código</a:t>
+            </a:r>
+          </a:p>
+          <a:p>
+            <a:pPr algn="l">
+              <a:spcBef>
+                <a:spcPts val="0"/>
+              </a:spcBef>
+              <a:spcAft>
+                <a:spcPts val="100"/>
+              </a:spcAft>
+            </a:pPr>
+            <a:r>
+              <a:rPr sz="900" b="1">
+                <a:solidFill>
+                  <a:srgbClr val="1F3864"/>
+                </a:solidFill>
+                <a:latin typeface="Calibri"/>
+              </a:rPr>
+              <a:t>Docker Compose</a:t>
+            </a:r>
+            <a:r>
+              <a:rPr sz="900" b="0">
+                <a:solidFill>
+                  <a:srgbClr val="1C1C1C"/>
+                </a:solidFill>
+                <a:latin typeface="Calibri"/>
+              </a:rPr>
+              <a:t> · PostgreSQL y Redis con un comando</a:t>
+            </a:r>
+          </a:p>
+        </p:txBody>
+      </p:sp>
+      <p:sp>
+        <p:nvSpPr>
+          <p:cNvPr id="182" name="TextBox 181"/>
+          <p:cNvSpPr txBox="1"/>
+          <p:nvPr/>
+        </p:nvSpPr>
+        <p:spPr>
+          <a:xfrm>
+            <a:off x="8503920" y="5870448"/>
+            <a:ext cx="3291840" cy="475488"/>
+          </a:xfrm>
+          <a:prstGeom prst="rect">
+            <a:avLst/>
+          </a:prstGeom>
+          <a:noFill/>
+        </p:spPr>
+        <p:txBody>
+          <a:bodyPr wrap="square" anchor="ctr" lIns="73152" rIns="73152" tIns="36576" bIns="36576">
+            <a:spAutoFit/>
+          </a:bodyPr>
+          <a:lstStyle/>
+          <a:p>
+            <a:pPr algn="l">
+              <a:spcBef>
+                <a:spcPts val="0"/>
+              </a:spcBef>
+              <a:spcAft>
+                <a:spcPts val="100"/>
+              </a:spcAft>
+            </a:pPr>
+            <a:r>
+              <a:rPr sz="900" b="1">
+                <a:solidFill>
+                  <a:srgbClr val="1F3864"/>
+                </a:solidFill>
+                <a:latin typeface="Calibri"/>
+              </a:rPr>
+              <a:t>Prism</a:t>
+            </a:r>
+            <a:r>
+              <a:rPr sz="900" b="0">
+                <a:solidFill>
+                  <a:srgbClr val="1C1C1C"/>
+                </a:solidFill>
+                <a:latin typeface="Calibri"/>
+              </a:rPr>
+              <a:t> · servidor simulado: la web avanza sin backend</a:t>
+            </a:r>
+          </a:p>
+          <a:p>
+            <a:pPr algn="l">
+              <a:spcBef>
+                <a:spcPts val="0"/>
+              </a:spcBef>
+              <a:spcAft>
+                <a:spcPts val="100"/>
+              </a:spcAft>
+            </a:pPr>
+            <a:r>
+              <a:rPr sz="900" b="1">
+                <a:solidFill>
+                  <a:srgbClr val="1F3864"/>
+                </a:solidFill>
+                <a:latin typeface="Calibri"/>
+              </a:rPr>
+              <a:t>CVAT</a:t>
+            </a:r>
+            <a:r>
+              <a:rPr sz="900" b="0">
+                <a:solidFill>
+                  <a:srgbClr val="1C1C1C"/>
+                </a:solidFill>
+                <a:latin typeface="Calibri"/>
+              </a:rPr>
+              <a:t> · etiquetado de imágenes en nuestro computador</a:t>
+            </a:r>
+          </a:p>
+        </p:txBody>
+      </p:sp>
+      <p:sp>
+        <p:nvSpPr>
+          <p:cNvPr id="183" name="TextBox 182"/>
+          <p:cNvSpPr txBox="1"/>
+          <p:nvPr/>
+        </p:nvSpPr>
+        <p:spPr>
+          <a:xfrm>
+            <a:off x="365760" y="6400800"/>
+            <a:ext cx="11430000" cy="457200"/>
+          </a:xfrm>
+          <a:prstGeom prst="rect">
+            <a:avLst/>
+          </a:prstGeom>
+          <a:noFill/>
+        </p:spPr>
+        <p:txBody>
+          <a:bodyPr wrap="square" anchor="t" lIns="73152" rIns="73152" tIns="36576" bIns="36576">
+            <a:spAutoFit/>
+          </a:bodyPr>
+          <a:lstStyle/>
+          <a:p>
+            <a:pPr algn="ctr">
               <a:spcBef>
                 <a:spcPts val="0"/>
               </a:spcBef>
@@ -23691,191 +24322,30 @@
                 </a:solidFill>
                 <a:latin typeface="Calibri"/>
               </a:rPr>
-              <a:t>bandeja · visor · reglas · analítica</a:t>
+              <a:t>A y B son programas separados que solo se comunican por la base de datos: A escribe los hallazgos, B los lee y los muestra. A trabaja siempre, sin que nadie lo abra; B se usa cuando se necesita.</a:t>
+            </a:r>
+          </a:p>
+          <a:p>
+            <a:pPr algn="ctr">
+              <a:spcBef>
+                <a:spcPts val="0"/>
+              </a:spcBef>
+              <a:spcAft>
+                <a:spcPts val="0"/>
+              </a:spcAft>
+            </a:pPr>
+            <a:r>
+              <a:rPr sz="1000" b="1" i="0">
+                <a:solidFill>
+                  <a:srgbClr val="1F3864"/>
+                </a:solidFill>
+                <a:latin typeface="Calibri"/>
+              </a:rPr>
+              <a:t>El detector y las reglas deciden; la descripción con IA (extensión futura) solo describe.   ·   La unidad es el evento: un turno son 12 hallazgos, no 200.000 cuadros.</a:t>
             </a:r>
           </a:p>
         </p:txBody>
       </p:sp>
-      <p:cxnSp>
-        <p:nvCxnSpPr>
-          <p:cNvPr id="178" name="Connector 177"/>
-          <p:cNvCxnSpPr/>
-          <p:nvPr/>
-        </p:nvCxnSpPr>
-        <p:spPr>
-          <a:xfrm>
-            <a:off x="1394460" y="5166360"/>
-            <a:ext cx="0" cy="320040"/>
-          </a:xfrm>
-          <a:prstGeom prst="line">
-            <a:avLst/>
-          </a:prstGeom>
-          <a:ln w="19050">
-            <a:solidFill>
-              <a:srgbClr val="1F3864"/>
-            </a:solidFill>
-            <a:tailEnd type="triangle" w="med" len="med"/>
-          </a:ln>
-        </p:spPr>
-        <p:style>
-          <a:lnRef idx="2">
-            <a:schemeClr val="accent1"/>
-          </a:lnRef>
-          <a:fillRef idx="0">
-            <a:schemeClr val="accent1"/>
-          </a:fillRef>
-          <a:effectRef idx="1">
-            <a:schemeClr val="accent1"/>
-          </a:effectRef>
-          <a:fontRef idx="minor">
-            <a:schemeClr val="tx1"/>
-          </a:fontRef>
-        </p:style>
-      </p:cxnSp>
-      <p:cxnSp>
-        <p:nvCxnSpPr>
-          <p:cNvPr id="179" name="Connector 178"/>
-          <p:cNvCxnSpPr/>
-          <p:nvPr/>
-        </p:nvCxnSpPr>
-        <p:spPr>
-          <a:xfrm>
-            <a:off x="3726180" y="5166360"/>
-            <a:ext cx="0" cy="320040"/>
-          </a:xfrm>
-          <a:prstGeom prst="line">
-            <a:avLst/>
-          </a:prstGeom>
-          <a:ln w="19050">
-            <a:solidFill>
-              <a:srgbClr val="1F3864"/>
-            </a:solidFill>
-            <a:tailEnd type="triangle" w="med" len="med"/>
-          </a:ln>
-        </p:spPr>
-        <p:style>
-          <a:lnRef idx="2">
-            <a:schemeClr val="accent1"/>
-          </a:lnRef>
-          <a:fillRef idx="0">
-            <a:schemeClr val="accent1"/>
-          </a:fillRef>
-          <a:effectRef idx="1">
-            <a:schemeClr val="accent1"/>
-          </a:effectRef>
-          <a:fontRef idx="minor">
-            <a:schemeClr val="tx1"/>
-          </a:fontRef>
-        </p:style>
-      </p:cxnSp>
-      <p:cxnSp>
-        <p:nvCxnSpPr>
-          <p:cNvPr id="180" name="Connector 179"/>
-          <p:cNvCxnSpPr/>
-          <p:nvPr/>
-        </p:nvCxnSpPr>
-        <p:spPr>
-          <a:xfrm>
-            <a:off x="6057900" y="5166360"/>
-            <a:ext cx="0" cy="320040"/>
-          </a:xfrm>
-          <a:prstGeom prst="line">
-            <a:avLst/>
-          </a:prstGeom>
-          <a:ln w="19050">
-            <a:solidFill>
-              <a:srgbClr val="1F3864"/>
-            </a:solidFill>
-            <a:tailEnd type="triangle" w="med" len="med"/>
-          </a:ln>
-        </p:spPr>
-        <p:style>
-          <a:lnRef idx="2">
-            <a:schemeClr val="accent1"/>
-          </a:lnRef>
-          <a:fillRef idx="0">
-            <a:schemeClr val="accent1"/>
-          </a:fillRef>
-          <a:effectRef idx="1">
-            <a:schemeClr val="accent1"/>
-          </a:effectRef>
-          <a:fontRef idx="minor">
-            <a:schemeClr val="tx1"/>
-          </a:fontRef>
-        </p:style>
-      </p:cxnSp>
-      <p:cxnSp>
-        <p:nvCxnSpPr>
-          <p:cNvPr id="181" name="Connector 180"/>
-          <p:cNvCxnSpPr/>
-          <p:nvPr/>
-        </p:nvCxnSpPr>
-        <p:spPr>
-          <a:xfrm>
-            <a:off x="8389620" y="5166360"/>
-            <a:ext cx="0" cy="320040"/>
-          </a:xfrm>
-          <a:prstGeom prst="line">
-            <a:avLst/>
-          </a:prstGeom>
-          <a:ln w="19050">
-            <a:solidFill>
-              <a:srgbClr val="1F3864"/>
-            </a:solidFill>
-            <a:tailEnd type="triangle" w="med" len="med"/>
-          </a:ln>
-        </p:spPr>
-        <p:style>
-          <a:lnRef idx="2">
-            <a:schemeClr val="accent1"/>
-          </a:lnRef>
-          <a:fillRef idx="0">
-            <a:schemeClr val="accent1"/>
-          </a:fillRef>
-          <a:effectRef idx="1">
-            <a:schemeClr val="accent1"/>
-          </a:effectRef>
-          <a:fontRef idx="minor">
-            <a:schemeClr val="tx1"/>
-          </a:fontRef>
-        </p:style>
-      </p:cxnSp>
-      <p:cxnSp>
-        <p:nvCxnSpPr>
-          <p:cNvPr id="182" name="Connector 181"/>
-          <p:cNvCxnSpPr/>
-          <p:nvPr/>
-        </p:nvCxnSpPr>
-        <p:spPr>
-          <a:xfrm>
-            <a:off x="9418320" y="5943600"/>
-            <a:ext cx="274320" cy="0"/>
-          </a:xfrm>
-          <a:prstGeom prst="line">
-            <a:avLst/>
-          </a:prstGeom>
-          <a:ln w="19050">
-            <a:solidFill>
-              <a:srgbClr val="1F3864"/>
-            </a:solidFill>
-            <a:tailEnd type="triangle" w="med" len="med"/>
-          </a:ln>
-        </p:spPr>
-        <p:style>
-          <a:lnRef idx="2">
-            <a:schemeClr val="accent1"/>
-          </a:lnRef>
-          <a:fillRef idx="0">
-            <a:schemeClr val="accent1"/>
-          </a:fillRef>
-          <a:effectRef idx="1">
-            <a:schemeClr val="accent1"/>
-          </a:effectRef>
-          <a:fontRef idx="minor">
-            <a:schemeClr val="tx1"/>
-          </a:fontRef>
-        </p:style>
-      </p:cxnSp>
     </p:spTree>
   </p:cSld>
   <p:clrMapOvr>

--- a/Fase 1/Evidencias Grupales/Presentación Proyecto.pptx
+++ b/Fase 1/Evidencias Grupales/Presentación Proyecto.pptx
@@ -1031,7 +1031,7 @@
           <a:lstStyle/>
           <a:p>
             <a:r>
-              <a:t>2:00 · Miguel. Leer el objetivo general una vez, despacio. Los específicos se agrupan en tres bloques: datos y modelo (1-2), del cuadro al evento (3-5) y plataforma y validación (6-8). Subrayar el 4: las reglas las cambia el usuario, no el programador.</a:t>
+              <a:t>2:00 · Miguel. Leer el objetivo general una vez, despacio. Después la frase que ordena la lámina: los seis objetivos específicos son las etapas para llegar a él, y cada uno toma como insumo el resultado del anterior. Primero los datos; con esos datos se entrena y evalúa el detector; con las detecciones se arman los eventos; sobre los eventos deciden el modelo de datos y las reglas; con los hallazgos se construyen la web y la alerta; y el sexto valida el conjunto. Subrayar el 4: las reglas las cambia el usuario, no el programador.</a:t>
             </a:r>
           </a:p>
         </p:txBody>
@@ -13960,8 +13960,8 @@
         </p:nvSpPr>
         <p:spPr>
           <a:xfrm>
-            <a:off x="614514" y="4732407"/>
-            <a:ext cx="5440680" cy="1575221"/>
+            <a:off x="614514" y="4956048"/>
+            <a:ext cx="5239512" cy="1645920"/>
           </a:xfrm>
           <a:prstGeom prst="roundRect">
             <a:avLst>
@@ -13972,7 +13972,9 @@
             <a:schemeClr val="lt1"/>
           </a:solidFill>
           <a:ln w="12700" cap="flat" cmpd="sng">
-            <a:noFill/>
+            <a:solidFill>
+              <a:schemeClr val="accent1"/>
+            </a:solidFill>
             <a:prstDash val="solid"/>
             <a:miter lim="8000"/>
             <a:headEnd type="none" w="sm" len="sm"/>
@@ -13980,7 +13982,7 @@
           </a:ln>
         </p:spPr>
         <p:txBody>
-          <a:bodyPr spcFirstLastPara="1" wrap="square" lIns="91425" tIns="45700" rIns="91425" bIns="45700" anchor="ctr" anchorCtr="0">
+          <a:bodyPr spcFirstLastPara="1" wrap="square" lIns="109728" tIns="73152" rIns="109728" bIns="73152" anchor="ctr" anchorCtr="0">
             <a:noAutofit/>
           </a:bodyPr>
           <a:lstStyle/>
@@ -13990,12 +13992,12 @@
                 <a:spcPts val="0"/>
               </a:spcBef>
               <a:spcAft>
-                <a:spcPts val="0"/>
+                <a:spcPts val="600"/>
               </a:spcAft>
               <a:buNone/>
             </a:pPr>
             <a:r>
-              <a:rPr lang="es-CL" sz="1300">
+              <a:rPr lang="es-CL" sz="1200">
                 <a:solidFill>
                   <a:schemeClr val="dk1"/>
                 </a:solidFill>
@@ -14004,7 +14006,7 @@
                 <a:cs typeface="Calibri"/>
                 <a:sym typeface="Calibri"/>
               </a:rPr>
-              <a:t>1. Dataset propio: imágenes públicas para entrenar, video de obra para probar.</a:t>
+              <a:t>1. Construir el conjunto de datos: imágenes públicas para entrenar y video propio de obra para probar.</a:t>
             </a:r>
             <a:endParaRPr sz="1800">
               <a:solidFill>
@@ -14022,17 +14024,17 @@
                 <a:spcPts val="0"/>
               </a:spcBef>
               <a:spcAft>
-                <a:spcPts val="400"/>
+                <a:spcPts val="600"/>
               </a:spcAft>
             </a:pPr>
             <a:r>
-              <a:rPr sz="1300" b="0" i="0">
+              <a:rPr sz="1200" b="0" i="0">
                 <a:solidFill>
                   <a:srgbClr val="1C1C1C"/>
                 </a:solidFill>
                 <a:latin typeface="Calibri"/>
               </a:rPr>
-              <a:t>2. Detector de casco y chaleco, evaluado por cuadro, evento y alerta.</a:t>
+              <a:t>2. Entrenar el detector de casco y chaleco sobre ese conjunto y evaluarlo por cuadro, por evento y por alerta.</a:t>
             </a:r>
           </a:p>
           <a:p>
@@ -14041,18 +14043,86 @@
                 <a:spcPts val="0"/>
               </a:spcBef>
               <a:spcAft>
-                <a:spcPts val="400"/>
+                <a:spcPts val="600"/>
               </a:spcAft>
             </a:pPr>
             <a:r>
-              <a:rPr sz="1300" b="0" i="0">
+              <a:rPr sz="1200" b="0" i="0">
                 <a:solidFill>
                   <a:srgbClr val="1C1C1C"/>
                 </a:solidFill>
                 <a:latin typeface="Calibri"/>
               </a:rPr>
-              <a:t>3. Detecciones convertidas en eventos con inicio, término, zona y evidencia.</a:t>
+              <a:t>3. Transformar esas detecciones en eventos: seguir a cada persona y agrupar en un hallazgo con inicio, término, zona y evidencia.</a:t>
             </a:r>
+          </a:p>
+        </p:txBody>
+      </p:sp>
+      <p:sp>
+        <p:nvSpPr>
+          <p:cNvPr id="900" name="Objetivos específicos derecha"/>
+          <p:cNvSpPr/>
+          <p:nvPr/>
+        </p:nvSpPr>
+        <p:spPr>
+          <a:xfrm>
+            <a:off x="6291072" y="4956048"/>
+            <a:ext cx="5239512" cy="1645920"/>
+          </a:xfrm>
+          <a:prstGeom prst="roundRect">
+            <a:avLst>
+              <a:gd name="adj" fmla="val 16667"/>
+            </a:avLst>
+          </a:prstGeom>
+          <a:solidFill>
+            <a:schemeClr val="lt1"/>
+          </a:solidFill>
+          <a:ln w="12700" cap="flat" cmpd="sng">
+            <a:solidFill>
+              <a:schemeClr val="accent1"/>
+            </a:solidFill>
+            <a:prstDash val="solid"/>
+            <a:miter lim="8000"/>
+            <a:headEnd type="none" w="sm" len="sm"/>
+            <a:tailEnd type="none" w="sm" len="sm"/>
+          </a:ln>
+        </p:spPr>
+        <p:txBody>
+          <a:bodyPr spcFirstLastPara="1" wrap="square" lIns="109728" tIns="73152" rIns="109728" bIns="73152" anchor="ctr" anchorCtr="0">
+            <a:noAutofit/>
+          </a:bodyPr>
+          <a:lstStyle/>
+          <a:p>
+            <a:pPr marL="0" marR="0" lvl="0" indent="0" algn="l" rtl="0">
+              <a:spcBef>
+                <a:spcPts val="0"/>
+              </a:spcBef>
+              <a:spcAft>
+                <a:spcPts val="600"/>
+              </a:spcAft>
+              <a:buNone/>
+            </a:pPr>
+            <a:r>
+              <a:rPr lang="es-CL" sz="1200">
+                <a:solidFill>
+                  <a:schemeClr val="dk1"/>
+                </a:solidFill>
+                <a:latin typeface="Calibri"/>
+                <a:ea typeface="Calibri"/>
+                <a:cs typeface="Calibri"/>
+                <a:sym typeface="Calibri"/>
+              </a:rPr>
+              <a:t>4. Implementar el modelo de datos y el motor de reglas que deciden, sobre esos eventos, cuándo hay incumplimiento.</a:t>
+            </a:r>
+            <a:endParaRPr sz="1800">
+              <a:solidFill>
+                <a:schemeClr val="dk1"/>
+              </a:solidFill>
+              <a:latin typeface="Calibri"/>
+              <a:ea typeface="Calibri"/>
+              <a:cs typeface="Calibri"/>
+              <a:sym typeface="Calibri"/>
+            </a:endParaRPr>
           </a:p>
           <a:p>
             <a:pPr algn="l">
@@ -14060,17 +14130,36 @@
                 <a:spcPts val="0"/>
               </a:spcBef>
               <a:spcAft>
-                <a:spcPts val="400"/>
+                <a:spcPts val="600"/>
               </a:spcAft>
             </a:pPr>
             <a:r>
-              <a:rPr sz="1300" b="0" i="0">
+              <a:rPr sz="1200" b="0" i="0">
                 <a:solidFill>
                   <a:srgbClr val="1C1C1C"/>
                 </a:solidFill>
                 <a:latin typeface="Calibri"/>
               </a:rPr>
-              <a:t>4. Motor de reglas por zona, turno y severidad, sin tocar código.</a:t>
+              <a:t>5. Desarrollar la web y el canal de alerta que ponen esos hallazgos frente al responsable, con acuse de recibo.</a:t>
+            </a:r>
+          </a:p>
+          <a:p>
+            <a:pPr algn="l">
+              <a:spcBef>
+                <a:spcPts val="0"/>
+              </a:spcBef>
+              <a:spcAft>
+                <a:spcPts val="600"/>
+              </a:spcAft>
+            </a:pPr>
+            <a:r>
+              <a:rPr sz="1200" b="0" i="0">
+                <a:solidFill>
+                  <a:srgbClr val="1C1C1C"/>
+                </a:solidFill>
+                <a:latin typeface="Calibri"/>
+              </a:rPr>
+              <a:t>6. Validar el sistema completo con un plan de pruebas formal sobre video de referencia, sin identificar a nadie.</a:t>
             </a:r>
           </a:p>
         </p:txBody>
@@ -14083,8 +14172,8 @@
         </p:nvSpPr>
         <p:spPr>
           <a:xfrm>
-            <a:off x="6263640" y="4732407"/>
-            <a:ext cx="5349240" cy="1575221"/>
+            <a:off x="658368" y="4626864"/>
+            <a:ext cx="10881360" cy="292608"/>
           </a:xfrm>
           <a:prstGeom prst="rect">
             <a:avLst/>
@@ -14102,74 +14191,17 @@
                 <a:spcPts val="0"/>
               </a:spcBef>
               <a:spcAft>
-                <a:spcPts val="400"/>
+                <a:spcPts val="0"/>
               </a:spcAft>
             </a:pPr>
             <a:r>
-              <a:rPr sz="1300" b="0" i="0">
+              <a:rPr sz="1200" b="0" i="0">
                 <a:solidFill>
-                  <a:srgbClr val="1C1C1C"/>
+                  <a:srgbClr val="757070"/>
                 </a:solidFill>
                 <a:latin typeface="Calibri"/>
               </a:rPr>
-              <a:t>5. Alertas con acuse de recibo y presupuesto de avisos por turno.</a:t>
-            </a:r>
-          </a:p>
-          <a:p>
-            <a:pPr algn="l">
-              <a:spcBef>
-                <a:spcPts val="0"/>
-              </a:spcBef>
-              <a:spcAft>
-                <a:spcPts val="400"/>
-              </a:spcAft>
-            </a:pPr>
-            <a:r>
-              <a:rPr sz="1300" b="0" i="0">
-                <a:solidFill>
-                  <a:srgbClr val="1C1C1C"/>
-                </a:solidFill>
-                <a:latin typeface="Calibri"/>
-              </a:rPr>
-              <a:t>6. Web: bandeja, visor de evidencia, reglas y tablero de analítica.</a:t>
-            </a:r>
-          </a:p>
-          <a:p>
-            <a:pPr algn="l">
-              <a:spcBef>
-                <a:spcPts val="0"/>
-              </a:spcBef>
-              <a:spcAft>
-                <a:spcPts val="400"/>
-              </a:spcAft>
-            </a:pPr>
-            <a:r>
-              <a:rPr sz="1300" b="0" i="0">
-                <a:solidFill>
-                  <a:srgbClr val="1C1C1C"/>
-                </a:solidFill>
-                <a:latin typeface="Calibri"/>
-              </a:rPr>
-              <a:t>7. Arquitectura lista para ingesta en vivo; el dominio es configuración.</a:t>
-            </a:r>
-          </a:p>
-          <a:p>
-            <a:pPr algn="l">
-              <a:spcBef>
-                <a:spcPts val="0"/>
-              </a:spcBef>
-              <a:spcAft>
-                <a:spcPts val="400"/>
-              </a:spcAft>
-            </a:pPr>
-            <a:r>
-              <a:rPr sz="1300" b="0" i="0">
-                <a:solidFill>
-                  <a:srgbClr val="1C1C1C"/>
-                </a:solidFill>
-                <a:latin typeface="Calibri"/>
-              </a:rPr>
-              <a:t>8. Validación con plan de pruebas formal y video de referencia.</a:t>
+              <a:t>Cada uno es una etapa que toma como insumo el resultado del anterior; los seis juntos equivalen al objetivo general.</a:t>
             </a:r>
           </a:p>
         </p:txBody>
